--- a/PPT/Laser.pptx
+++ b/PPT/Laser.pptx
@@ -5,7 +5,9 @@
     <p:sldMasterId id="2147483648" r:id="rId1"/>
   </p:sldMasterIdLst>
   <p:sldIdLst>
-    <p:sldId id="256" r:id="rId2"/>
+    <p:sldId id="257" r:id="rId2"/>
+    <p:sldId id="256" r:id="rId3"/>
+    <p:sldId id="258" r:id="rId4"/>
   </p:sldIdLst>
   <p:sldSz cx="12192000" cy="6858000"/>
   <p:notesSz cx="6858000" cy="9144000"/>
@@ -104,6 +106,11 @@
       </a:defRPr>
     </a:lvl9pPr>
   </p:defaultTextStyle>
+  <p:extLst>
+    <p:ext uri="{EFAFB233-063F-42B5-8137-9DF3F51BA10A}">
+      <p15:sldGuideLst xmlns:p15="http://schemas.microsoft.com/office/powerpoint/2012/main"/>
+    </p:ext>
+  </p:extLst>
 </p:presentation>
 </file>
 
@@ -254,7 +261,7 @@
           <a:p>
             <a:fld id="{A308533E-0AE3-4C05-B5B1-6E310A0229D7}" type="datetimeFigureOut">
               <a:rPr lang="zh-CN" altLang="en-US" smtClean="0"/>
-              <a:t>2025-09-19</a:t>
+              <a:t>2025-12-06</a:t>
             </a:fld>
             <a:endParaRPr lang="zh-CN" altLang="en-US"/>
           </a:p>
@@ -452,7 +459,7 @@
           <a:p>
             <a:fld id="{A308533E-0AE3-4C05-B5B1-6E310A0229D7}" type="datetimeFigureOut">
               <a:rPr lang="zh-CN" altLang="en-US" smtClean="0"/>
-              <a:t>2025-09-19</a:t>
+              <a:t>2025-12-06</a:t>
             </a:fld>
             <a:endParaRPr lang="zh-CN" altLang="en-US"/>
           </a:p>
@@ -660,7 +667,7 @@
           <a:p>
             <a:fld id="{A308533E-0AE3-4C05-B5B1-6E310A0229D7}" type="datetimeFigureOut">
               <a:rPr lang="zh-CN" altLang="en-US" smtClean="0"/>
-              <a:t>2025-09-19</a:t>
+              <a:t>2025-12-06</a:t>
             </a:fld>
             <a:endParaRPr lang="zh-CN" altLang="en-US"/>
           </a:p>
@@ -858,7 +865,7 @@
           <a:p>
             <a:fld id="{A308533E-0AE3-4C05-B5B1-6E310A0229D7}" type="datetimeFigureOut">
               <a:rPr lang="zh-CN" altLang="en-US" smtClean="0"/>
-              <a:t>2025-09-19</a:t>
+              <a:t>2025-12-06</a:t>
             </a:fld>
             <a:endParaRPr lang="zh-CN" altLang="en-US"/>
           </a:p>
@@ -1133,7 +1140,7 @@
           <a:p>
             <a:fld id="{A308533E-0AE3-4C05-B5B1-6E310A0229D7}" type="datetimeFigureOut">
               <a:rPr lang="zh-CN" altLang="en-US" smtClean="0"/>
-              <a:t>2025-09-19</a:t>
+              <a:t>2025-12-06</a:t>
             </a:fld>
             <a:endParaRPr lang="zh-CN" altLang="en-US"/>
           </a:p>
@@ -1398,7 +1405,7 @@
           <a:p>
             <a:fld id="{A308533E-0AE3-4C05-B5B1-6E310A0229D7}" type="datetimeFigureOut">
               <a:rPr lang="zh-CN" altLang="en-US" smtClean="0"/>
-              <a:t>2025-09-19</a:t>
+              <a:t>2025-12-06</a:t>
             </a:fld>
             <a:endParaRPr lang="zh-CN" altLang="en-US"/>
           </a:p>
@@ -1810,7 +1817,7 @@
           <a:p>
             <a:fld id="{A308533E-0AE3-4C05-B5B1-6E310A0229D7}" type="datetimeFigureOut">
               <a:rPr lang="zh-CN" altLang="en-US" smtClean="0"/>
-              <a:t>2025-09-19</a:t>
+              <a:t>2025-12-06</a:t>
             </a:fld>
             <a:endParaRPr lang="zh-CN" altLang="en-US"/>
           </a:p>
@@ -1951,7 +1958,7 @@
           <a:p>
             <a:fld id="{A308533E-0AE3-4C05-B5B1-6E310A0229D7}" type="datetimeFigureOut">
               <a:rPr lang="zh-CN" altLang="en-US" smtClean="0"/>
-              <a:t>2025-09-19</a:t>
+              <a:t>2025-12-06</a:t>
             </a:fld>
             <a:endParaRPr lang="zh-CN" altLang="en-US"/>
           </a:p>
@@ -2064,7 +2071,7 @@
           <a:p>
             <a:fld id="{A308533E-0AE3-4C05-B5B1-6E310A0229D7}" type="datetimeFigureOut">
               <a:rPr lang="zh-CN" altLang="en-US" smtClean="0"/>
-              <a:t>2025-09-19</a:t>
+              <a:t>2025-12-06</a:t>
             </a:fld>
             <a:endParaRPr lang="zh-CN" altLang="en-US"/>
           </a:p>
@@ -2375,7 +2382,7 @@
           <a:p>
             <a:fld id="{A308533E-0AE3-4C05-B5B1-6E310A0229D7}" type="datetimeFigureOut">
               <a:rPr lang="zh-CN" altLang="en-US" smtClean="0"/>
-              <a:t>2025-09-19</a:t>
+              <a:t>2025-12-06</a:t>
             </a:fld>
             <a:endParaRPr lang="zh-CN" altLang="en-US"/>
           </a:p>
@@ -2663,7 +2670,7 @@
           <a:p>
             <a:fld id="{A308533E-0AE3-4C05-B5B1-6E310A0229D7}" type="datetimeFigureOut">
               <a:rPr lang="zh-CN" altLang="en-US" smtClean="0"/>
-              <a:t>2025-09-19</a:t>
+              <a:t>2025-12-06</a:t>
             </a:fld>
             <a:endParaRPr lang="zh-CN" altLang="en-US"/>
           </a:p>
@@ -2904,7 +2911,7 @@
           <a:p>
             <a:fld id="{A308533E-0AE3-4C05-B5B1-6E310A0229D7}" type="datetimeFigureOut">
               <a:rPr lang="zh-CN" altLang="en-US" smtClean="0"/>
-              <a:t>2025-09-19</a:t>
+              <a:t>2025-12-06</a:t>
             </a:fld>
             <a:endParaRPr lang="zh-CN" altLang="en-US"/>
           </a:p>
@@ -3323,10 +3330,10 @@
       </p:grpSpPr>
       <p:grpSp>
         <p:nvGrpSpPr>
-          <p:cNvPr id="65" name="组合 64">
+          <p:cNvPr id="2" name="组合 1">
             <a:extLst>
               <a:ext uri="{FF2B5EF4-FFF2-40B4-BE49-F238E27FC236}">
-                <a16:creationId xmlns:a16="http://schemas.microsoft.com/office/drawing/2014/main" id="{574BA431-B3DD-F363-A08A-60F320664AAC}"/>
+                <a16:creationId xmlns:a16="http://schemas.microsoft.com/office/drawing/2014/main" id="{61B4B201-6948-2431-BFEF-5B75FB506764}"/>
               </a:ext>
             </a:extLst>
           </p:cNvPr>
@@ -3335,18 +3342,18 @@
         </p:nvGrpSpPr>
         <p:grpSpPr>
           <a:xfrm>
-            <a:off x="495300" y="50791"/>
-            <a:ext cx="5245100" cy="2333923"/>
-            <a:chOff x="1714500" y="1212841"/>
-            <a:chExt cx="5245100" cy="2333923"/>
+            <a:off x="2282931" y="1761293"/>
+            <a:ext cx="5760000" cy="3379808"/>
+            <a:chOff x="2282931" y="1761293"/>
+            <a:chExt cx="5760000" cy="3379808"/>
           </a:xfrm>
         </p:grpSpPr>
         <p:sp>
           <p:nvSpPr>
-            <p:cNvPr id="8" name="任意多边形: 形状 7">
+            <p:cNvPr id="5" name="立方体 4">
               <a:extLst>
                 <a:ext uri="{FF2B5EF4-FFF2-40B4-BE49-F238E27FC236}">
-                  <a16:creationId xmlns:a16="http://schemas.microsoft.com/office/drawing/2014/main" id="{B6464A32-0655-CF5E-3AD1-134EED44EC6E}"/>
+                  <a16:creationId xmlns:a16="http://schemas.microsoft.com/office/drawing/2014/main" id="{63983A07-8607-920E-D920-6ECFBA93795C}"/>
                 </a:ext>
               </a:extLst>
             </p:cNvPr>
@@ -3355,85 +3362,76 @@
           </p:nvSpPr>
           <p:spPr>
             <a:xfrm>
-              <a:off x="2168236" y="1600200"/>
-              <a:ext cx="647294" cy="1946564"/>
+              <a:off x="4622931" y="1761293"/>
+              <a:ext cx="1080000" cy="2880000"/>
             </a:xfrm>
-            <a:custGeom>
+            <a:prstGeom prst="cube">
+              <a:avLst>
+                <a:gd name="adj" fmla="val 66501"/>
+              </a:avLst>
+            </a:prstGeom>
+            <a:pattFill prst="ltUpDiag">
+              <a:fgClr>
+                <a:schemeClr val="tx1"/>
+              </a:fgClr>
+              <a:bgClr>
+                <a:schemeClr val="bg1"/>
+              </a:bgClr>
+            </a:pattFill>
+            <a:ln>
+              <a:solidFill>
+                <a:schemeClr val="tx1"/>
+              </a:solidFill>
+              <a:prstDash val="dash"/>
+            </a:ln>
+          </p:spPr>
+          <p:style>
+            <a:lnRef idx="2">
+              <a:schemeClr val="accent1">
+                <a:shade val="15000"/>
+              </a:schemeClr>
+            </a:lnRef>
+            <a:fillRef idx="1">
+              <a:schemeClr val="accent1"/>
+            </a:fillRef>
+            <a:effectRef idx="0">
+              <a:schemeClr val="accent1"/>
+            </a:effectRef>
+            <a:fontRef idx="minor">
+              <a:schemeClr val="lt1"/>
+            </a:fontRef>
+          </p:style>
+          <p:txBody>
+            <a:bodyPr rtlCol="0" anchor="ctr"/>
+            <a:lstStyle/>
+            <a:p>
+              <a:pPr algn="ctr"/>
+              <a:endParaRPr lang="zh-CN" altLang="en-US"/>
+            </a:p>
+          </p:txBody>
+        </p:sp>
+        <p:sp>
+          <p:nvSpPr>
+            <p:cNvPr id="4" name="立方体 3">
+              <a:extLst>
+                <a:ext uri="{FF2B5EF4-FFF2-40B4-BE49-F238E27FC236}">
+                  <a16:creationId xmlns:a16="http://schemas.microsoft.com/office/drawing/2014/main" id="{1FEFAD61-A650-A625-FA8D-2DDADA56EB9D}"/>
+                </a:ext>
+              </a:extLst>
+            </p:cNvPr>
+            <p:cNvSpPr/>
+            <p:nvPr/>
+          </p:nvSpPr>
+          <p:spPr>
+            <a:xfrm>
+              <a:off x="2282931" y="1761293"/>
+              <a:ext cx="5760000" cy="2880000"/>
+            </a:xfrm>
+            <a:prstGeom prst="cube">
               <a:avLst/>
-              <a:gdLst>
-                <a:gd name="connsiteX0" fmla="*/ 0 w 647294"/>
-                <a:gd name="connsiteY0" fmla="*/ 0 h 1946564"/>
-                <a:gd name="connsiteX1" fmla="*/ 647294 w 647294"/>
-                <a:gd name="connsiteY1" fmla="*/ 0 h 1946564"/>
-                <a:gd name="connsiteX2" fmla="*/ 577250 w 647294"/>
-                <a:gd name="connsiteY2" fmla="*/ 115295 h 1946564"/>
-                <a:gd name="connsiteX3" fmla="*/ 360000 w 647294"/>
-                <a:gd name="connsiteY3" fmla="*/ 973282 h 1946564"/>
-                <a:gd name="connsiteX4" fmla="*/ 577250 w 647294"/>
-                <a:gd name="connsiteY4" fmla="*/ 1831269 h 1946564"/>
-                <a:gd name="connsiteX5" fmla="*/ 647294 w 647294"/>
-                <a:gd name="connsiteY5" fmla="*/ 1946564 h 1946564"/>
-                <a:gd name="connsiteX6" fmla="*/ 0 w 647294"/>
-                <a:gd name="connsiteY6" fmla="*/ 1946564 h 1946564"/>
-              </a:gdLst>
-              <a:ahLst/>
-              <a:cxnLst>
-                <a:cxn ang="0">
-                  <a:pos x="connsiteX0" y="connsiteY0"/>
-                </a:cxn>
-                <a:cxn ang="0">
-                  <a:pos x="connsiteX1" y="connsiteY1"/>
-                </a:cxn>
-                <a:cxn ang="0">
-                  <a:pos x="connsiteX2" y="connsiteY2"/>
-                </a:cxn>
-                <a:cxn ang="0">
-                  <a:pos x="connsiteX3" y="connsiteY3"/>
-                </a:cxn>
-                <a:cxn ang="0">
-                  <a:pos x="connsiteX4" y="connsiteY4"/>
-                </a:cxn>
-                <a:cxn ang="0">
-                  <a:pos x="connsiteX5" y="connsiteY5"/>
-                </a:cxn>
-                <a:cxn ang="0">
-                  <a:pos x="connsiteX6" y="connsiteY6"/>
-                </a:cxn>
-              </a:cxnLst>
-              <a:rect l="l" t="t" r="r" b="b"/>
-              <a:pathLst>
-                <a:path w="647294" h="1946564">
-                  <a:moveTo>
-                    <a:pt x="0" y="0"/>
-                  </a:moveTo>
-                  <a:lnTo>
-                    <a:pt x="647294" y="0"/>
-                  </a:lnTo>
-                  <a:lnTo>
-                    <a:pt x="577250" y="115295"/>
-                  </a:lnTo>
-                  <a:cubicBezTo>
-                    <a:pt x="438700" y="370343"/>
-                    <a:pt x="360000" y="662622"/>
-                    <a:pt x="360000" y="973282"/>
-                  </a:cubicBezTo>
-                  <a:cubicBezTo>
-                    <a:pt x="360000" y="1283942"/>
-                    <a:pt x="438700" y="1576221"/>
-                    <a:pt x="577250" y="1831269"/>
-                  </a:cubicBezTo>
-                  <a:lnTo>
-                    <a:pt x="647294" y="1946564"/>
-                  </a:lnTo>
-                  <a:lnTo>
-                    <a:pt x="0" y="1946564"/>
-                  </a:lnTo>
-                  <a:close/>
-                </a:path>
-              </a:pathLst>
-            </a:custGeom>
+            </a:prstGeom>
             <a:noFill/>
-            <a:ln w="25400">
+            <a:ln>
               <a:solidFill>
                 <a:schemeClr val="tx1"/>
               </a:solidFill>
@@ -3456,9 +3454,7 @@
             </a:fontRef>
           </p:style>
           <p:txBody>
-            <a:bodyPr wrap="square" rtlCol="0" anchor="ctr">
-              <a:noAutofit/>
-            </a:bodyPr>
+            <a:bodyPr rtlCol="0" anchor="ctr"/>
             <a:lstStyle/>
             <a:p>
               <a:pPr algn="ctr"/>
@@ -3466,228 +3462,14 @@
             </a:p>
           </p:txBody>
         </p:sp>
-        <p:sp>
-          <p:nvSpPr>
-            <p:cNvPr id="9" name="任意多边形: 形状 8">
-              <a:extLst>
-                <a:ext uri="{FF2B5EF4-FFF2-40B4-BE49-F238E27FC236}">
-                  <a16:creationId xmlns:a16="http://schemas.microsoft.com/office/drawing/2014/main" id="{FB80A6CD-B5B6-9C2F-21D2-511A0E92E6C9}"/>
-                </a:ext>
-              </a:extLst>
-            </p:cNvPr>
-            <p:cNvSpPr/>
-            <p:nvPr/>
-          </p:nvSpPr>
-          <p:spPr>
-            <a:xfrm rot="10800000">
-              <a:off x="5772353" y="1600200"/>
-              <a:ext cx="647294" cy="1946564"/>
-            </a:xfrm>
-            <a:custGeom>
-              <a:avLst/>
-              <a:gdLst>
-                <a:gd name="connsiteX0" fmla="*/ 0 w 647294"/>
-                <a:gd name="connsiteY0" fmla="*/ 0 h 1946564"/>
-                <a:gd name="connsiteX1" fmla="*/ 647294 w 647294"/>
-                <a:gd name="connsiteY1" fmla="*/ 0 h 1946564"/>
-                <a:gd name="connsiteX2" fmla="*/ 577250 w 647294"/>
-                <a:gd name="connsiteY2" fmla="*/ 115295 h 1946564"/>
-                <a:gd name="connsiteX3" fmla="*/ 360000 w 647294"/>
-                <a:gd name="connsiteY3" fmla="*/ 973282 h 1946564"/>
-                <a:gd name="connsiteX4" fmla="*/ 577250 w 647294"/>
-                <a:gd name="connsiteY4" fmla="*/ 1831269 h 1946564"/>
-                <a:gd name="connsiteX5" fmla="*/ 647294 w 647294"/>
-                <a:gd name="connsiteY5" fmla="*/ 1946564 h 1946564"/>
-                <a:gd name="connsiteX6" fmla="*/ 0 w 647294"/>
-                <a:gd name="connsiteY6" fmla="*/ 1946564 h 1946564"/>
-              </a:gdLst>
-              <a:ahLst/>
-              <a:cxnLst>
-                <a:cxn ang="0">
-                  <a:pos x="connsiteX0" y="connsiteY0"/>
-                </a:cxn>
-                <a:cxn ang="0">
-                  <a:pos x="connsiteX1" y="connsiteY1"/>
-                </a:cxn>
-                <a:cxn ang="0">
-                  <a:pos x="connsiteX2" y="connsiteY2"/>
-                </a:cxn>
-                <a:cxn ang="0">
-                  <a:pos x="connsiteX3" y="connsiteY3"/>
-                </a:cxn>
-                <a:cxn ang="0">
-                  <a:pos x="connsiteX4" y="connsiteY4"/>
-                </a:cxn>
-                <a:cxn ang="0">
-                  <a:pos x="connsiteX5" y="connsiteY5"/>
-                </a:cxn>
-                <a:cxn ang="0">
-                  <a:pos x="connsiteX6" y="connsiteY6"/>
-                </a:cxn>
-              </a:cxnLst>
-              <a:rect l="l" t="t" r="r" b="b"/>
-              <a:pathLst>
-                <a:path w="647294" h="1946564">
-                  <a:moveTo>
-                    <a:pt x="0" y="0"/>
-                  </a:moveTo>
-                  <a:lnTo>
-                    <a:pt x="647294" y="0"/>
-                  </a:lnTo>
-                  <a:lnTo>
-                    <a:pt x="577250" y="115295"/>
-                  </a:lnTo>
-                  <a:cubicBezTo>
-                    <a:pt x="438700" y="370343"/>
-                    <a:pt x="360000" y="662622"/>
-                    <a:pt x="360000" y="973282"/>
-                  </a:cubicBezTo>
-                  <a:cubicBezTo>
-                    <a:pt x="360000" y="1283942"/>
-                    <a:pt x="438700" y="1576221"/>
-                    <a:pt x="577250" y="1831269"/>
-                  </a:cubicBezTo>
-                  <a:lnTo>
-                    <a:pt x="647294" y="1946564"/>
-                  </a:lnTo>
-                  <a:lnTo>
-                    <a:pt x="0" y="1946564"/>
-                  </a:lnTo>
-                  <a:close/>
-                </a:path>
-              </a:pathLst>
-            </a:custGeom>
-            <a:noFill/>
-            <a:ln w="25400">
-              <a:solidFill>
-                <a:schemeClr val="tx1"/>
-              </a:solidFill>
-            </a:ln>
-          </p:spPr>
-          <p:style>
-            <a:lnRef idx="2">
-              <a:schemeClr val="accent1">
-                <a:shade val="15000"/>
-              </a:schemeClr>
-            </a:lnRef>
-            <a:fillRef idx="1">
-              <a:schemeClr val="accent1"/>
-            </a:fillRef>
-            <a:effectRef idx="0">
-              <a:schemeClr val="accent1"/>
-            </a:effectRef>
-            <a:fontRef idx="minor">
-              <a:schemeClr val="lt1"/>
-            </a:fontRef>
-          </p:style>
-          <p:txBody>
-            <a:bodyPr wrap="square" rtlCol="0" anchor="ctr">
-              <a:noAutofit/>
-            </a:bodyPr>
-            <a:lstStyle/>
-            <a:p>
-              <a:pPr algn="ctr"/>
-              <a:endParaRPr lang="zh-CN" altLang="en-US"/>
-            </a:p>
-          </p:txBody>
-        </p:sp>
-        <p:cxnSp>
-          <p:nvCxnSpPr>
-            <p:cNvPr id="13" name="直接连接符 12">
-              <a:extLst>
-                <a:ext uri="{FF2B5EF4-FFF2-40B4-BE49-F238E27FC236}">
-                  <a16:creationId xmlns:a16="http://schemas.microsoft.com/office/drawing/2014/main" id="{643F3726-52A2-CF2A-BA2C-86B3FD10A0CF}"/>
-                </a:ext>
-              </a:extLst>
-            </p:cNvPr>
-            <p:cNvCxnSpPr>
-              <a:cxnSpLocks/>
-            </p:cNvCxnSpPr>
-            <p:nvPr/>
-          </p:nvCxnSpPr>
-          <p:spPr>
-            <a:xfrm>
-              <a:off x="1714500" y="2573482"/>
-              <a:ext cx="5245100" cy="0"/>
-            </a:xfrm>
-            <a:prstGeom prst="line">
-              <a:avLst/>
-            </a:prstGeom>
-            <a:ln w="12700">
-              <a:solidFill>
-                <a:schemeClr val="tx1"/>
-              </a:solidFill>
-              <a:prstDash val="lgDashDot"/>
-            </a:ln>
-          </p:spPr>
-          <p:style>
-            <a:lnRef idx="1">
-              <a:schemeClr val="accent1"/>
-            </a:lnRef>
-            <a:fillRef idx="0">
-              <a:schemeClr val="accent1"/>
-            </a:fillRef>
-            <a:effectRef idx="0">
-              <a:schemeClr val="accent1"/>
-            </a:effectRef>
-            <a:fontRef idx="minor">
-              <a:schemeClr val="tx1"/>
-            </a:fontRef>
-          </p:style>
-        </p:cxnSp>
-        <p:cxnSp>
-          <p:nvCxnSpPr>
-            <p:cNvPr id="18" name="直接箭头连接符 17">
-              <a:extLst>
-                <a:ext uri="{FF2B5EF4-FFF2-40B4-BE49-F238E27FC236}">
-                  <a16:creationId xmlns:a16="http://schemas.microsoft.com/office/drawing/2014/main" id="{2ABF5480-DF89-3FE4-7E8D-C4E0F2B3E58D}"/>
-                </a:ext>
-              </a:extLst>
-            </p:cNvPr>
-            <p:cNvCxnSpPr>
-              <a:cxnSpLocks/>
-              <a:endCxn id="9" idx="4"/>
-            </p:cNvCxnSpPr>
-            <p:nvPr/>
-          </p:nvCxnSpPr>
-          <p:spPr>
-            <a:xfrm flipV="1">
-              <a:off x="2595033" y="1715495"/>
-              <a:ext cx="3247364" cy="358838"/>
-            </a:xfrm>
-            <a:prstGeom prst="straightConnector1">
-              <a:avLst/>
-            </a:prstGeom>
-            <a:ln w="12700">
-              <a:solidFill>
-                <a:schemeClr val="tx1"/>
-              </a:solidFill>
-              <a:tailEnd type="stealth"/>
-            </a:ln>
-          </p:spPr>
-          <p:style>
-            <a:lnRef idx="1">
-              <a:schemeClr val="accent1"/>
-            </a:lnRef>
-            <a:fillRef idx="0">
-              <a:schemeClr val="accent1"/>
-            </a:fillRef>
-            <a:effectRef idx="0">
-              <a:schemeClr val="accent1"/>
-            </a:effectRef>
-            <a:fontRef idx="minor">
-              <a:schemeClr val="tx1"/>
-            </a:fontRef>
-          </p:style>
-        </p:cxnSp>
-        <mc:AlternateContent xmlns:mc="http://schemas.openxmlformats.org/markup-compatibility/2006">
-          <mc:Choice xmlns:a14="http://schemas.microsoft.com/office/drawing/2010/main" Requires="a14">
+        <mc:AlternateContent xmlns:mc="http://schemas.openxmlformats.org/markup-compatibility/2006" xmlns:a14="http://schemas.microsoft.com/office/drawing/2010/main">
+          <mc:Choice Requires="a14">
             <p:sp>
               <p:nvSpPr>
-                <p:cNvPr id="20" name="文本框 19">
+                <p:cNvPr id="6" name="文本框 5">
                   <a:extLst>
                     <a:ext uri="{FF2B5EF4-FFF2-40B4-BE49-F238E27FC236}">
-                      <a16:creationId xmlns:a16="http://schemas.microsoft.com/office/drawing/2014/main" id="{243057D0-9D77-3D54-71DF-9E313E1177A8}"/>
+                      <a16:creationId xmlns:a16="http://schemas.microsoft.com/office/drawing/2014/main" id="{41A21536-9561-62B8-4295-35DAB5E319C2}"/>
                     </a:ext>
                   </a:extLst>
                 </p:cNvPr>
@@ -3696,8 +3478,8 @@
               </p:nvSpPr>
               <p:spPr>
                 <a:xfrm>
-                  <a:off x="2692533" y="1737700"/>
-                  <a:ext cx="581120" cy="215444"/>
+                  <a:off x="3728225" y="3182778"/>
+                  <a:ext cx="378309" cy="492443"/>
                 </a:xfrm>
                 <a:prstGeom prst="rect">
                   <a:avLst/>
@@ -3710,6 +3492,7 @@
                 </a:bodyPr>
                 <a:lstStyle/>
                 <a:p>
+                  <a:pPr/>
                   <a14:m>
                     <m:oMathPara xmlns:m="http://schemas.openxmlformats.org/officeDocument/2006/math">
                       <m:oMathParaPr>
@@ -3717,88 +3500,26 @@
                       </m:oMathParaPr>
                       <m:oMath xmlns:m="http://schemas.openxmlformats.org/officeDocument/2006/math">
                         <m:r>
-                          <a:rPr lang="en-US" altLang="zh-CN" sz="1400" b="0" i="1" smtClean="0">
+                          <a:rPr lang="en-US" altLang="zh-CN" sz="3200" b="0" i="1" smtClean="0">
                             <a:latin typeface="Cambria Math" panose="02040503050406030204" pitchFamily="18" charset="0"/>
                           </a:rPr>
-                          <m:t>(</m:t>
-                        </m:r>
-                        <m:sSub>
-                          <m:sSubPr>
-                            <m:ctrlPr>
-                              <a:rPr lang="en-US" altLang="zh-CN" sz="1400" b="0" i="1" smtClean="0">
-                                <a:latin typeface="Cambria Math" panose="02040503050406030204" pitchFamily="18" charset="0"/>
-                              </a:rPr>
-                            </m:ctrlPr>
-                          </m:sSubPr>
-                          <m:e>
-                            <m:r>
-                              <a:rPr lang="en-US" altLang="zh-CN" sz="1400" b="0" i="1" smtClean="0">
-                                <a:latin typeface="Cambria Math" panose="02040503050406030204" pitchFamily="18" charset="0"/>
-                              </a:rPr>
-                              <m:t>𝑟</m:t>
-                            </m:r>
-                          </m:e>
-                          <m:sub>
-                            <m:r>
-                              <a:rPr lang="en-US" altLang="zh-CN" sz="1400" b="0" i="1" smtClean="0">
-                                <a:latin typeface="Cambria Math" panose="02040503050406030204" pitchFamily="18" charset="0"/>
-                              </a:rPr>
-                              <m:t>1</m:t>
-                            </m:r>
-                          </m:sub>
-                        </m:sSub>
-                        <m:r>
-                          <a:rPr lang="en-US" altLang="zh-CN" sz="1400" b="0" i="1" smtClean="0">
-                            <a:latin typeface="Cambria Math" panose="02040503050406030204" pitchFamily="18" charset="0"/>
-                          </a:rPr>
-                          <m:t>,</m:t>
-                        </m:r>
-                        <m:sSub>
-                          <m:sSubPr>
-                            <m:ctrlPr>
-                              <a:rPr lang="en-US" altLang="zh-CN" sz="1400" b="0" i="1" smtClean="0">
-                                <a:latin typeface="Cambria Math" panose="02040503050406030204" pitchFamily="18" charset="0"/>
-                              </a:rPr>
-                            </m:ctrlPr>
-                          </m:sSubPr>
-                          <m:e>
-                            <m:r>
-                              <a:rPr lang="en-US" altLang="zh-CN" sz="1400" b="0" i="1" smtClean="0">
-                                <a:latin typeface="Cambria Math" panose="02040503050406030204" pitchFamily="18" charset="0"/>
-                              </a:rPr>
-                              <m:t>𝜃</m:t>
-                            </m:r>
-                          </m:e>
-                          <m:sub>
-                            <m:r>
-                              <a:rPr lang="en-US" altLang="zh-CN" sz="1400" b="0" i="1" smtClean="0">
-                                <a:latin typeface="Cambria Math" panose="02040503050406030204" pitchFamily="18" charset="0"/>
-                              </a:rPr>
-                              <m:t>1</m:t>
-                            </m:r>
-                          </m:sub>
-                        </m:sSub>
-                        <m:r>
-                          <a:rPr lang="en-US" altLang="zh-CN" sz="1400" b="0" i="1" smtClean="0">
-                            <a:latin typeface="Cambria Math" panose="02040503050406030204" pitchFamily="18" charset="0"/>
-                          </a:rPr>
-                          <m:t>)</m:t>
+                          <m:t>𝐹</m:t>
                         </m:r>
                       </m:oMath>
                     </m:oMathPara>
                   </a14:m>
-                  <a:endParaRPr lang="zh-CN" altLang="en-US" sz="1400" dirty="0"/>
+                  <a:endParaRPr lang="en-US" altLang="zh-CN" sz="3200" b="0" dirty="0"/>
                 </a:p>
               </p:txBody>
             </p:sp>
           </mc:Choice>
-          <mc:Fallback>
+          <mc:Fallback xmlns="">
             <p:sp>
               <p:nvSpPr>
-                <p:cNvPr id="20" name="文本框 19">
+                <p:cNvPr id="6" name="文本框 5">
                   <a:extLst>
                     <a:ext uri="{FF2B5EF4-FFF2-40B4-BE49-F238E27FC236}">
-                      <a16:creationId xmlns:a16="http://schemas.microsoft.com/office/drawing/2014/main" id="{243057D0-9D77-3D54-71DF-9E313E1177A8}"/>
+                      <a16:creationId xmlns:a16="http://schemas.microsoft.com/office/drawing/2014/main" id="{41A21536-9561-62B8-4295-35DAB5E319C2}"/>
                     </a:ext>
                   </a:extLst>
                 </p:cNvPr>
@@ -3809,8 +3530,8 @@
               </p:nvSpPr>
               <p:spPr>
                 <a:xfrm>
-                  <a:off x="2692533" y="1737700"/>
-                  <a:ext cx="581120" cy="215444"/>
+                  <a:off x="3728225" y="3182778"/>
+                  <a:ext cx="378309" cy="492443"/>
                 </a:xfrm>
                 <a:prstGeom prst="rect">
                   <a:avLst/>
@@ -3818,7 +3539,211 @@
                 <a:blipFill>
                   <a:blip r:embed="rId2"/>
                   <a:stretch>
-                    <a:fillRect l="-10526" r="-9474" b="-30556"/>
+                    <a:fillRect/>
+                  </a:stretch>
+                </a:blipFill>
+              </p:spPr>
+              <p:txBody>
+                <a:bodyPr/>
+                <a:lstStyle/>
+                <a:p>
+                  <a:r>
+                    <a:rPr lang="zh-CN" altLang="en-US">
+                      <a:noFill/>
+                    </a:rPr>
+                    <a:t> </a:t>
+                  </a:r>
+                </a:p>
+              </p:txBody>
+            </p:sp>
+          </mc:Fallback>
+        </mc:AlternateContent>
+        <mc:AlternateContent xmlns:mc="http://schemas.openxmlformats.org/markup-compatibility/2006" xmlns:a14="http://schemas.microsoft.com/office/drawing/2010/main">
+          <mc:Choice Requires="a14">
+            <p:sp>
+              <p:nvSpPr>
+                <p:cNvPr id="7" name="文本框 6">
+                  <a:extLst>
+                    <a:ext uri="{FF2B5EF4-FFF2-40B4-BE49-F238E27FC236}">
+                      <a16:creationId xmlns:a16="http://schemas.microsoft.com/office/drawing/2014/main" id="{2F4A0D05-B48F-54AC-20B4-0AE1E5EC3213}"/>
+                    </a:ext>
+                  </a:extLst>
+                </p:cNvPr>
+                <p:cNvSpPr txBox="1"/>
+                <p:nvPr/>
+              </p:nvSpPr>
+              <p:spPr>
+                <a:xfrm>
+                  <a:off x="5803980" y="3182778"/>
+                  <a:ext cx="1370182" cy="492443"/>
+                </a:xfrm>
+                <a:prstGeom prst="rect">
+                  <a:avLst/>
+                </a:prstGeom>
+                <a:noFill/>
+              </p:spPr>
+              <p:txBody>
+                <a:bodyPr wrap="none" lIns="0" tIns="0" rIns="0" bIns="0" rtlCol="0">
+                  <a:spAutoFit/>
+                </a:bodyPr>
+                <a:lstStyle/>
+                <a:p>
+                  <a:pPr/>
+                  <a14:m>
+                    <m:oMathPara xmlns:m="http://schemas.openxmlformats.org/officeDocument/2006/math">
+                      <m:oMathParaPr>
+                        <m:jc m:val="centerGroup"/>
+                      </m:oMathParaPr>
+                      <m:oMath xmlns:m="http://schemas.openxmlformats.org/officeDocument/2006/math">
+                        <m:r>
+                          <a:rPr lang="en-US" altLang="zh-CN" sz="3200" b="0" i="1" smtClean="0">
+                            <a:latin typeface="Cambria Math" panose="02040503050406030204" pitchFamily="18" charset="0"/>
+                          </a:rPr>
+                          <m:t>𝐹</m:t>
+                        </m:r>
+                        <m:r>
+                          <a:rPr lang="en-US" altLang="zh-CN" sz="3200" b="0" i="1" smtClean="0">
+                            <a:latin typeface="Cambria Math" panose="02040503050406030204" pitchFamily="18" charset="0"/>
+                          </a:rPr>
+                          <m:t>+</m:t>
+                        </m:r>
+                        <m:r>
+                          <a:rPr lang="en-US" altLang="zh-CN" sz="3200" b="0" i="1" smtClean="0">
+                            <a:latin typeface="Cambria Math" panose="02040503050406030204" pitchFamily="18" charset="0"/>
+                          </a:rPr>
+                          <m:t>𝑑𝐹</m:t>
+                        </m:r>
+                      </m:oMath>
+                    </m:oMathPara>
+                  </a14:m>
+                  <a:endParaRPr lang="en-US" altLang="zh-CN" sz="3200" b="0" dirty="0"/>
+                </a:p>
+              </p:txBody>
+            </p:sp>
+          </mc:Choice>
+          <mc:Fallback xmlns="">
+            <p:sp>
+              <p:nvSpPr>
+                <p:cNvPr id="7" name="文本框 6">
+                  <a:extLst>
+                    <a:ext uri="{FF2B5EF4-FFF2-40B4-BE49-F238E27FC236}">
+                      <a16:creationId xmlns:a16="http://schemas.microsoft.com/office/drawing/2014/main" id="{2F4A0D05-B48F-54AC-20B4-0AE1E5EC3213}"/>
+                    </a:ext>
+                  </a:extLst>
+                </p:cNvPr>
+                <p:cNvSpPr txBox="1">
+                  <a:spLocks noRot="1" noChangeAspect="1" noMove="1" noResize="1" noEditPoints="1" noAdjustHandles="1" noChangeArrowheads="1" noChangeShapeType="1" noTextEdit="1"/>
+                </p:cNvSpPr>
+                <p:nvPr/>
+              </p:nvSpPr>
+              <p:spPr>
+                <a:xfrm>
+                  <a:off x="5803980" y="3182778"/>
+                  <a:ext cx="1370182" cy="492443"/>
+                </a:xfrm>
+                <a:prstGeom prst="rect">
+                  <a:avLst/>
+                </a:prstGeom>
+                <a:blipFill>
+                  <a:blip r:embed="rId3"/>
+                  <a:stretch>
+                    <a:fillRect/>
+                  </a:stretch>
+                </a:blipFill>
+              </p:spPr>
+              <p:txBody>
+                <a:bodyPr/>
+                <a:lstStyle/>
+                <a:p>
+                  <a:r>
+                    <a:rPr lang="zh-CN" altLang="en-US">
+                      <a:noFill/>
+                    </a:rPr>
+                    <a:t> </a:t>
+                  </a:r>
+                </a:p>
+              </p:txBody>
+            </p:sp>
+          </mc:Fallback>
+        </mc:AlternateContent>
+        <mc:AlternateContent xmlns:mc="http://schemas.openxmlformats.org/markup-compatibility/2006" xmlns:a14="http://schemas.microsoft.com/office/drawing/2010/main">
+          <mc:Choice Requires="a14">
+            <p:sp>
+              <p:nvSpPr>
+                <p:cNvPr id="8" name="文本框 7">
+                  <a:extLst>
+                    <a:ext uri="{FF2B5EF4-FFF2-40B4-BE49-F238E27FC236}">
+                      <a16:creationId xmlns:a16="http://schemas.microsoft.com/office/drawing/2014/main" id="{0386CAC1-4191-E0F8-E20A-6E994FC06FE3}"/>
+                    </a:ext>
+                  </a:extLst>
+                </p:cNvPr>
+                <p:cNvSpPr txBox="1"/>
+                <p:nvPr/>
+              </p:nvSpPr>
+              <p:spPr>
+                <a:xfrm>
+                  <a:off x="5185992" y="2539725"/>
+                  <a:ext cx="338234" cy="492443"/>
+                </a:xfrm>
+                <a:prstGeom prst="rect">
+                  <a:avLst/>
+                </a:prstGeom>
+                <a:noFill/>
+              </p:spPr>
+              <p:txBody>
+                <a:bodyPr wrap="none" lIns="0" tIns="0" rIns="0" bIns="0" rtlCol="0">
+                  <a:spAutoFit/>
+                </a:bodyPr>
+                <a:lstStyle/>
+                <a:p>
+                  <a:pPr/>
+                  <a14:m>
+                    <m:oMathPara xmlns:m="http://schemas.openxmlformats.org/officeDocument/2006/math">
+                      <m:oMathParaPr>
+                        <m:jc m:val="centerGroup"/>
+                      </m:oMathParaPr>
+                      <m:oMath xmlns:m="http://schemas.openxmlformats.org/officeDocument/2006/math">
+                        <m:r>
+                          <a:rPr lang="en-US" altLang="zh-CN" sz="3200" b="0" i="1" smtClean="0">
+                            <a:latin typeface="Cambria Math" panose="02040503050406030204" pitchFamily="18" charset="0"/>
+                          </a:rPr>
+                          <m:t>𝑆</m:t>
+                        </m:r>
+                      </m:oMath>
+                    </m:oMathPara>
+                  </a14:m>
+                  <a:endParaRPr lang="en-US" altLang="zh-CN" sz="3200" b="0" dirty="0"/>
+                </a:p>
+              </p:txBody>
+            </p:sp>
+          </mc:Choice>
+          <mc:Fallback xmlns="">
+            <p:sp>
+              <p:nvSpPr>
+                <p:cNvPr id="8" name="文本框 7">
+                  <a:extLst>
+                    <a:ext uri="{FF2B5EF4-FFF2-40B4-BE49-F238E27FC236}">
+                      <a16:creationId xmlns:a16="http://schemas.microsoft.com/office/drawing/2014/main" id="{0386CAC1-4191-E0F8-E20A-6E994FC06FE3}"/>
+                    </a:ext>
+                  </a:extLst>
+                </p:cNvPr>
+                <p:cNvSpPr txBox="1">
+                  <a:spLocks noRot="1" noChangeAspect="1" noMove="1" noResize="1" noEditPoints="1" noAdjustHandles="1" noChangeArrowheads="1" noChangeShapeType="1" noTextEdit="1"/>
+                </p:cNvSpPr>
+                <p:nvPr/>
+              </p:nvSpPr>
+              <p:spPr>
+                <a:xfrm>
+                  <a:off x="5185992" y="2539725"/>
+                  <a:ext cx="338234" cy="492443"/>
+                </a:xfrm>
+                <a:prstGeom prst="rect">
+                  <a:avLst/>
+                </a:prstGeom>
+                <a:blipFill>
+                  <a:blip r:embed="rId4"/>
+                  <a:stretch>
+                    <a:fillRect/>
                   </a:stretch>
                 </a:blipFill>
               </p:spPr>
@@ -3839,10 +3764,10 @@
         </mc:AlternateContent>
         <p:cxnSp>
           <p:nvCxnSpPr>
-            <p:cNvPr id="22" name="直接连接符 21">
+            <p:cNvPr id="11" name="直接连接符 10">
               <a:extLst>
                 <a:ext uri="{FF2B5EF4-FFF2-40B4-BE49-F238E27FC236}">
-                  <a16:creationId xmlns:a16="http://schemas.microsoft.com/office/drawing/2014/main" id="{2F085D2E-F6EE-C753-11C2-605ED2F5F0C3}"/>
+                  <a16:creationId xmlns:a16="http://schemas.microsoft.com/office/drawing/2014/main" id="{16E11B05-9922-C733-83FE-A504AC393D5F}"/>
                 </a:ext>
               </a:extLst>
             </p:cNvPr>
@@ -3851,13 +3776,13 @@
           </p:nvCxnSpPr>
           <p:spPr>
             <a:xfrm>
-              <a:off x="2595033" y="2074333"/>
-              <a:ext cx="1962790" cy="0"/>
+              <a:off x="4622931" y="4684252"/>
+              <a:ext cx="0" cy="180000"/>
             </a:xfrm>
             <a:prstGeom prst="line">
               <a:avLst/>
             </a:prstGeom>
-            <a:ln w="12700">
+            <a:ln w="25400">
               <a:solidFill>
                 <a:schemeClr val="tx1"/>
               </a:solidFill>
@@ -3878,215 +3803,12 @@
             </a:fontRef>
           </p:style>
         </p:cxnSp>
-        <p:sp>
-          <p:nvSpPr>
-            <p:cNvPr id="23" name="弧形 22">
+        <p:cxnSp>
+          <p:nvCxnSpPr>
+            <p:cNvPr id="12" name="直接连接符 11">
               <a:extLst>
                 <a:ext uri="{FF2B5EF4-FFF2-40B4-BE49-F238E27FC236}">
-                  <a16:creationId xmlns:a16="http://schemas.microsoft.com/office/drawing/2014/main" id="{58B4B86B-D6FF-F8DA-E6C1-614C0AEF5526}"/>
-                </a:ext>
-              </a:extLst>
-            </p:cNvPr>
-            <p:cNvSpPr/>
-            <p:nvPr/>
-          </p:nvSpPr>
-          <p:spPr>
-            <a:xfrm>
-              <a:off x="3358484" y="1737700"/>
-              <a:ext cx="509587" cy="509587"/>
-            </a:xfrm>
-            <a:prstGeom prst="arc">
-              <a:avLst>
-                <a:gd name="adj1" fmla="val 20808270"/>
-                <a:gd name="adj2" fmla="val 1144584"/>
-              </a:avLst>
-            </a:prstGeom>
-            <a:ln>
-              <a:solidFill>
-                <a:schemeClr val="tx1"/>
-              </a:solidFill>
-            </a:ln>
-          </p:spPr>
-          <p:style>
-            <a:lnRef idx="1">
-              <a:schemeClr val="accent1"/>
-            </a:lnRef>
-            <a:fillRef idx="0">
-              <a:schemeClr val="accent1"/>
-            </a:fillRef>
-            <a:effectRef idx="0">
-              <a:schemeClr val="accent1"/>
-            </a:effectRef>
-            <a:fontRef idx="minor">
-              <a:schemeClr val="tx1"/>
-            </a:fontRef>
-          </p:style>
-          <p:txBody>
-            <a:bodyPr rtlCol="0" anchor="ctr"/>
-            <a:lstStyle/>
-            <a:p>
-              <a:pPr algn="ctr"/>
-              <a:endParaRPr lang="zh-CN" altLang="en-US"/>
-            </a:p>
-          </p:txBody>
-        </p:sp>
-        <mc:AlternateContent xmlns:mc="http://schemas.openxmlformats.org/markup-compatibility/2006">
-          <mc:Choice xmlns:a14="http://schemas.microsoft.com/office/drawing/2010/main" Requires="a14">
-            <p:sp>
-              <p:nvSpPr>
-                <p:cNvPr id="24" name="文本框 23">
-                  <a:extLst>
-                    <a:ext uri="{FF2B5EF4-FFF2-40B4-BE49-F238E27FC236}">
-                      <a16:creationId xmlns:a16="http://schemas.microsoft.com/office/drawing/2014/main" id="{4455EBD5-8EC3-3ED4-AEC6-0C076CAA2207}"/>
-                    </a:ext>
-                  </a:extLst>
-                </p:cNvPr>
-                <p:cNvSpPr txBox="1"/>
-                <p:nvPr/>
-              </p:nvSpPr>
-              <p:spPr>
-                <a:xfrm>
-                  <a:off x="4082280" y="1901380"/>
-                  <a:ext cx="393056" cy="153888"/>
-                </a:xfrm>
-                <a:prstGeom prst="rect">
-                  <a:avLst/>
-                </a:prstGeom>
-                <a:noFill/>
-              </p:spPr>
-              <p:txBody>
-                <a:bodyPr wrap="none" lIns="0" tIns="0" rIns="0" bIns="0" rtlCol="0">
-                  <a:spAutoFit/>
-                </a:bodyPr>
-                <a:lstStyle/>
-                <a:p>
-                  <a14:m>
-                    <m:oMathPara xmlns:m="http://schemas.openxmlformats.org/officeDocument/2006/math">
-                      <m:oMathParaPr>
-                        <m:jc m:val="centerGroup"/>
-                      </m:oMathParaPr>
-                      <m:oMath xmlns:m="http://schemas.openxmlformats.org/officeDocument/2006/math">
-                        <m:sSub>
-                          <m:sSubPr>
-                            <m:ctrlPr>
-                              <a:rPr lang="en-US" altLang="zh-CN" sz="1000" b="0" i="1" smtClean="0">
-                                <a:latin typeface="Cambria Math" panose="02040503050406030204" pitchFamily="18" charset="0"/>
-                              </a:rPr>
-                            </m:ctrlPr>
-                          </m:sSubPr>
-                          <m:e>
-                            <m:r>
-                              <a:rPr lang="en-US" altLang="zh-CN" sz="1000" b="0" i="1" smtClean="0">
-                                <a:latin typeface="Cambria Math" panose="02040503050406030204" pitchFamily="18" charset="0"/>
-                              </a:rPr>
-                              <m:t>𝜃</m:t>
-                            </m:r>
-                          </m:e>
-                          <m:sub>
-                            <m:r>
-                              <a:rPr lang="en-US" altLang="zh-CN" sz="1000" b="0" i="1" smtClean="0">
-                                <a:latin typeface="Cambria Math" panose="02040503050406030204" pitchFamily="18" charset="0"/>
-                              </a:rPr>
-                              <m:t>1</m:t>
-                            </m:r>
-                          </m:sub>
-                        </m:sSub>
-                        <m:sSub>
-                          <m:sSubPr>
-                            <m:ctrlPr>
-                              <a:rPr lang="en-US" altLang="zh-CN" sz="1000" b="0" i="1" smtClean="0">
-                                <a:latin typeface="Cambria Math" panose="02040503050406030204" pitchFamily="18" charset="0"/>
-                              </a:rPr>
-                            </m:ctrlPr>
-                          </m:sSubPr>
-                          <m:e>
-                            <m:r>
-                              <a:rPr lang="en-US" altLang="zh-CN" sz="1000" b="0" i="1" smtClean="0">
-                                <a:latin typeface="Cambria Math" panose="02040503050406030204" pitchFamily="18" charset="0"/>
-                              </a:rPr>
-                              <m:t>(</m:t>
-                            </m:r>
-                            <m:r>
-                              <a:rPr lang="en-US" altLang="zh-CN" sz="1000" b="0" i="1" smtClean="0">
-                                <a:latin typeface="Cambria Math" panose="02040503050406030204" pitchFamily="18" charset="0"/>
-                              </a:rPr>
-                              <m:t>𝜃</m:t>
-                            </m:r>
-                          </m:e>
-                          <m:sub>
-                            <m:r>
-                              <a:rPr lang="en-US" altLang="zh-CN" sz="1000" b="0" i="1" smtClean="0">
-                                <a:latin typeface="Cambria Math" panose="02040503050406030204" pitchFamily="18" charset="0"/>
-                              </a:rPr>
-                              <m:t>2</m:t>
-                            </m:r>
-                          </m:sub>
-                        </m:sSub>
-                        <m:r>
-                          <a:rPr lang="en-US" altLang="zh-CN" sz="1000" b="0" i="1" smtClean="0">
-                            <a:latin typeface="Cambria Math" panose="02040503050406030204" pitchFamily="18" charset="0"/>
-                          </a:rPr>
-                          <m:t>)</m:t>
-                        </m:r>
-                      </m:oMath>
-                    </m:oMathPara>
-                  </a14:m>
-                  <a:endParaRPr lang="en-US" altLang="zh-CN" sz="1000" b="0" dirty="0"/>
-                </a:p>
-              </p:txBody>
-            </p:sp>
-          </mc:Choice>
-          <mc:Fallback>
-            <p:sp>
-              <p:nvSpPr>
-                <p:cNvPr id="24" name="文本框 23">
-                  <a:extLst>
-                    <a:ext uri="{FF2B5EF4-FFF2-40B4-BE49-F238E27FC236}">
-                      <a16:creationId xmlns:a16="http://schemas.microsoft.com/office/drawing/2014/main" id="{4455EBD5-8EC3-3ED4-AEC6-0C076CAA2207}"/>
-                    </a:ext>
-                  </a:extLst>
-                </p:cNvPr>
-                <p:cNvSpPr txBox="1">
-                  <a:spLocks noRot="1" noChangeAspect="1" noMove="1" noResize="1" noEditPoints="1" noAdjustHandles="1" noChangeArrowheads="1" noChangeShapeType="1" noTextEdit="1"/>
-                </p:cNvSpPr>
-                <p:nvPr/>
-              </p:nvSpPr>
-              <p:spPr>
-                <a:xfrm>
-                  <a:off x="4082280" y="1901380"/>
-                  <a:ext cx="393056" cy="153888"/>
-                </a:xfrm>
-                <a:prstGeom prst="rect">
-                  <a:avLst/>
-                </a:prstGeom>
-                <a:blipFill>
-                  <a:blip r:embed="rId3"/>
-                  <a:stretch>
-                    <a:fillRect l="-7813" r="-12500" b="-38462"/>
-                  </a:stretch>
-                </a:blipFill>
-              </p:spPr>
-              <p:txBody>
-                <a:bodyPr/>
-                <a:lstStyle/>
-                <a:p>
-                  <a:r>
-                    <a:rPr lang="zh-CN" altLang="en-US">
-                      <a:noFill/>
-                    </a:rPr>
-                    <a:t> </a:t>
-                  </a:r>
-                </a:p>
-              </p:txBody>
-            </p:sp>
-          </mc:Fallback>
-        </mc:AlternateContent>
-        <p:cxnSp>
-          <p:nvCxnSpPr>
-            <p:cNvPr id="29" name="直接连接符 28">
-              <a:extLst>
-                <a:ext uri="{FF2B5EF4-FFF2-40B4-BE49-F238E27FC236}">
-                  <a16:creationId xmlns:a16="http://schemas.microsoft.com/office/drawing/2014/main" id="{C3CC0435-CE25-7A15-A7C6-A14A6C7F2BCF}"/>
+                  <a16:creationId xmlns:a16="http://schemas.microsoft.com/office/drawing/2014/main" id="{3E528A44-8054-E3A2-AA02-FE901DBDC3E3}"/>
                 </a:ext>
               </a:extLst>
             </p:cNvPr>
@@ -4097,1287 +3819,13 @@
           </p:nvCxnSpPr>
           <p:spPr>
             <a:xfrm>
-              <a:off x="2779513" y="2074333"/>
-              <a:ext cx="0" cy="499149"/>
+              <a:off x="4988056" y="4684252"/>
+              <a:ext cx="0" cy="180000"/>
             </a:xfrm>
             <a:prstGeom prst="line">
               <a:avLst/>
             </a:prstGeom>
-            <a:ln w="12700">
-              <a:solidFill>
-                <a:schemeClr val="tx1"/>
-              </a:solidFill>
-              <a:headEnd type="stealth"/>
-              <a:tailEnd type="stealth"/>
-            </a:ln>
-          </p:spPr>
-          <p:style>
-            <a:lnRef idx="1">
-              <a:schemeClr val="accent1"/>
-            </a:lnRef>
-            <a:fillRef idx="0">
-              <a:schemeClr val="accent1"/>
-            </a:fillRef>
-            <a:effectRef idx="0">
-              <a:schemeClr val="accent1"/>
-            </a:effectRef>
-            <a:fontRef idx="minor">
-              <a:schemeClr val="tx1"/>
-            </a:fontRef>
-          </p:style>
-        </p:cxnSp>
-        <mc:AlternateContent xmlns:mc="http://schemas.openxmlformats.org/markup-compatibility/2006">
-          <mc:Choice xmlns:a14="http://schemas.microsoft.com/office/drawing/2010/main" Requires="a14">
-            <p:sp>
-              <p:nvSpPr>
-                <p:cNvPr id="31" name="文本框 30">
-                  <a:extLst>
-                    <a:ext uri="{FF2B5EF4-FFF2-40B4-BE49-F238E27FC236}">
-                      <a16:creationId xmlns:a16="http://schemas.microsoft.com/office/drawing/2014/main" id="{8B5DF6DE-13DA-3795-D083-AD1793FBC351}"/>
-                    </a:ext>
-                  </a:extLst>
-                </p:cNvPr>
-                <p:cNvSpPr txBox="1"/>
-                <p:nvPr/>
-              </p:nvSpPr>
-              <p:spPr>
-                <a:xfrm>
-                  <a:off x="2815530" y="2230236"/>
-                  <a:ext cx="138948" cy="153888"/>
-                </a:xfrm>
-                <a:prstGeom prst="rect">
-                  <a:avLst/>
-                </a:prstGeom>
-                <a:noFill/>
-              </p:spPr>
-              <p:txBody>
-                <a:bodyPr wrap="none" lIns="0" tIns="0" rIns="0" bIns="0" rtlCol="0">
-                  <a:spAutoFit/>
-                </a:bodyPr>
-                <a:lstStyle/>
-                <a:p>
-                  <a14:m>
-                    <m:oMathPara xmlns:m="http://schemas.openxmlformats.org/officeDocument/2006/math">
-                      <m:oMathParaPr>
-                        <m:jc m:val="centerGroup"/>
-                      </m:oMathParaPr>
-                      <m:oMath xmlns:m="http://schemas.openxmlformats.org/officeDocument/2006/math">
-                        <m:sSub>
-                          <m:sSubPr>
-                            <m:ctrlPr>
-                              <a:rPr lang="en-US" altLang="zh-CN" sz="1000" b="0" i="1" smtClean="0">
-                                <a:latin typeface="Cambria Math" panose="02040503050406030204" pitchFamily="18" charset="0"/>
-                              </a:rPr>
-                            </m:ctrlPr>
-                          </m:sSubPr>
-                          <m:e>
-                            <m:r>
-                              <a:rPr lang="en-US" altLang="zh-CN" sz="1000" b="0" i="1" smtClean="0">
-                                <a:latin typeface="Cambria Math" panose="02040503050406030204" pitchFamily="18" charset="0"/>
-                              </a:rPr>
-                              <m:t>𝑟</m:t>
-                            </m:r>
-                          </m:e>
-                          <m:sub>
-                            <m:r>
-                              <a:rPr lang="en-US" altLang="zh-CN" sz="1000" b="0" i="1" smtClean="0">
-                                <a:latin typeface="Cambria Math" panose="02040503050406030204" pitchFamily="18" charset="0"/>
-                              </a:rPr>
-                              <m:t>1</m:t>
-                            </m:r>
-                          </m:sub>
-                        </m:sSub>
-                      </m:oMath>
-                    </m:oMathPara>
-                  </a14:m>
-                  <a:endParaRPr lang="en-US" altLang="zh-CN" sz="1000" b="0" dirty="0"/>
-                </a:p>
-              </p:txBody>
-            </p:sp>
-          </mc:Choice>
-          <mc:Fallback>
-            <p:sp>
-              <p:nvSpPr>
-                <p:cNvPr id="31" name="文本框 30">
-                  <a:extLst>
-                    <a:ext uri="{FF2B5EF4-FFF2-40B4-BE49-F238E27FC236}">
-                      <a16:creationId xmlns:a16="http://schemas.microsoft.com/office/drawing/2014/main" id="{8B5DF6DE-13DA-3795-D083-AD1793FBC351}"/>
-                    </a:ext>
-                  </a:extLst>
-                </p:cNvPr>
-                <p:cNvSpPr txBox="1">
-                  <a:spLocks noRot="1" noChangeAspect="1" noMove="1" noResize="1" noEditPoints="1" noAdjustHandles="1" noChangeArrowheads="1" noChangeShapeType="1" noTextEdit="1"/>
-                </p:cNvSpPr>
-                <p:nvPr/>
-              </p:nvSpPr>
-              <p:spPr>
-                <a:xfrm>
-                  <a:off x="2815530" y="2230236"/>
-                  <a:ext cx="138948" cy="153888"/>
-                </a:xfrm>
-                <a:prstGeom prst="rect">
-                  <a:avLst/>
-                </a:prstGeom>
-                <a:blipFill>
-                  <a:blip r:embed="rId4"/>
-                  <a:stretch>
-                    <a:fillRect l="-13043" r="-8696" b="-16000"/>
-                  </a:stretch>
-                </a:blipFill>
-              </p:spPr>
-              <p:txBody>
-                <a:bodyPr/>
-                <a:lstStyle/>
-                <a:p>
-                  <a:r>
-                    <a:rPr lang="zh-CN" altLang="en-US">
-                      <a:noFill/>
-                    </a:rPr>
-                    <a:t> </a:t>
-                  </a:r>
-                </a:p>
-              </p:txBody>
-            </p:sp>
-          </mc:Fallback>
-        </mc:AlternateContent>
-        <mc:AlternateContent xmlns:mc="http://schemas.openxmlformats.org/markup-compatibility/2006">
-          <mc:Choice xmlns:a14="http://schemas.microsoft.com/office/drawing/2010/main" Requires="a14">
-            <p:sp>
-              <p:nvSpPr>
-                <p:cNvPr id="32" name="文本框 31">
-                  <a:extLst>
-                    <a:ext uri="{FF2B5EF4-FFF2-40B4-BE49-F238E27FC236}">
-                      <a16:creationId xmlns:a16="http://schemas.microsoft.com/office/drawing/2014/main" id="{1426AD22-8632-4D24-AD15-4A7D2B15D2B6}"/>
-                    </a:ext>
-                  </a:extLst>
-                </p:cNvPr>
-                <p:cNvSpPr txBox="1"/>
-                <p:nvPr/>
-              </p:nvSpPr>
-              <p:spPr>
-                <a:xfrm>
-                  <a:off x="5127565" y="1500050"/>
-                  <a:ext cx="547958" cy="215444"/>
-                </a:xfrm>
-                <a:prstGeom prst="rect">
-                  <a:avLst/>
-                </a:prstGeom>
-                <a:noFill/>
-              </p:spPr>
-              <p:txBody>
-                <a:bodyPr wrap="square" lIns="0" tIns="0" rIns="0" bIns="0" rtlCol="0">
-                  <a:spAutoFit/>
-                </a:bodyPr>
-                <a:lstStyle/>
-                <a:p>
-                  <a14:m>
-                    <m:oMathPara xmlns:m="http://schemas.openxmlformats.org/officeDocument/2006/math">
-                      <m:oMathParaPr>
-                        <m:jc m:val="centerGroup"/>
-                      </m:oMathParaPr>
-                      <m:oMath xmlns:m="http://schemas.openxmlformats.org/officeDocument/2006/math">
-                        <m:r>
-                          <a:rPr lang="en-US" altLang="zh-CN" sz="1400" b="0" i="1" smtClean="0">
-                            <a:latin typeface="Cambria Math" panose="02040503050406030204" pitchFamily="18" charset="0"/>
-                          </a:rPr>
-                          <m:t>(</m:t>
-                        </m:r>
-                        <m:sSub>
-                          <m:sSubPr>
-                            <m:ctrlPr>
-                              <a:rPr lang="en-US" altLang="zh-CN" sz="1400" b="0" i="1" smtClean="0">
-                                <a:latin typeface="Cambria Math" panose="02040503050406030204" pitchFamily="18" charset="0"/>
-                              </a:rPr>
-                            </m:ctrlPr>
-                          </m:sSubPr>
-                          <m:e>
-                            <m:r>
-                              <a:rPr lang="en-US" altLang="zh-CN" sz="1400" b="0" i="1" smtClean="0">
-                                <a:latin typeface="Cambria Math" panose="02040503050406030204" pitchFamily="18" charset="0"/>
-                              </a:rPr>
-                              <m:t>𝑟</m:t>
-                            </m:r>
-                          </m:e>
-                          <m:sub>
-                            <m:r>
-                              <a:rPr lang="en-US" altLang="zh-CN" sz="1400" b="0" i="1" smtClean="0">
-                                <a:latin typeface="Cambria Math" panose="02040503050406030204" pitchFamily="18" charset="0"/>
-                              </a:rPr>
-                              <m:t>2</m:t>
-                            </m:r>
-                          </m:sub>
-                        </m:sSub>
-                        <m:r>
-                          <a:rPr lang="en-US" altLang="zh-CN" sz="1400" b="0" i="1" smtClean="0">
-                            <a:latin typeface="Cambria Math" panose="02040503050406030204" pitchFamily="18" charset="0"/>
-                          </a:rPr>
-                          <m:t>,</m:t>
-                        </m:r>
-                        <m:sSub>
-                          <m:sSubPr>
-                            <m:ctrlPr>
-                              <a:rPr lang="en-US" altLang="zh-CN" sz="1400" b="0" i="1" smtClean="0">
-                                <a:latin typeface="Cambria Math" panose="02040503050406030204" pitchFamily="18" charset="0"/>
-                              </a:rPr>
-                            </m:ctrlPr>
-                          </m:sSubPr>
-                          <m:e>
-                            <m:r>
-                              <a:rPr lang="en-US" altLang="zh-CN" sz="1400" b="0" i="1" smtClean="0">
-                                <a:latin typeface="Cambria Math" panose="02040503050406030204" pitchFamily="18" charset="0"/>
-                              </a:rPr>
-                              <m:t>𝜃</m:t>
-                            </m:r>
-                          </m:e>
-                          <m:sub>
-                            <m:r>
-                              <a:rPr lang="en-US" altLang="zh-CN" sz="1400" b="0" i="1" smtClean="0">
-                                <a:latin typeface="Cambria Math" panose="02040503050406030204" pitchFamily="18" charset="0"/>
-                              </a:rPr>
-                              <m:t>2</m:t>
-                            </m:r>
-                          </m:sub>
-                        </m:sSub>
-                        <m:r>
-                          <a:rPr lang="en-US" altLang="zh-CN" sz="1400" b="0" i="1" smtClean="0">
-                            <a:latin typeface="Cambria Math" panose="02040503050406030204" pitchFamily="18" charset="0"/>
-                          </a:rPr>
-                          <m:t>)</m:t>
-                        </m:r>
-                      </m:oMath>
-                    </m:oMathPara>
-                  </a14:m>
-                  <a:endParaRPr lang="zh-CN" altLang="en-US" sz="1400" dirty="0"/>
-                </a:p>
-              </p:txBody>
-            </p:sp>
-          </mc:Choice>
-          <mc:Fallback>
-            <p:sp>
-              <p:nvSpPr>
-                <p:cNvPr id="32" name="文本框 31">
-                  <a:extLst>
-                    <a:ext uri="{FF2B5EF4-FFF2-40B4-BE49-F238E27FC236}">
-                      <a16:creationId xmlns:a16="http://schemas.microsoft.com/office/drawing/2014/main" id="{1426AD22-8632-4D24-AD15-4A7D2B15D2B6}"/>
-                    </a:ext>
-                  </a:extLst>
-                </p:cNvPr>
-                <p:cNvSpPr txBox="1">
-                  <a:spLocks noRot="1" noChangeAspect="1" noMove="1" noResize="1" noEditPoints="1" noAdjustHandles="1" noChangeArrowheads="1" noChangeShapeType="1" noTextEdit="1"/>
-                </p:cNvSpPr>
-                <p:nvPr/>
-              </p:nvSpPr>
-              <p:spPr>
-                <a:xfrm>
-                  <a:off x="5127565" y="1500050"/>
-                  <a:ext cx="547958" cy="215444"/>
-                </a:xfrm>
-                <a:prstGeom prst="rect">
-                  <a:avLst/>
-                </a:prstGeom>
-                <a:blipFill>
-                  <a:blip r:embed="rId5"/>
-                  <a:stretch>
-                    <a:fillRect l="-13333" r="-14444" b="-30556"/>
-                  </a:stretch>
-                </a:blipFill>
-              </p:spPr>
-              <p:txBody>
-                <a:bodyPr/>
-                <a:lstStyle/>
-                <a:p>
-                  <a:r>
-                    <a:rPr lang="zh-CN" altLang="en-US">
-                      <a:noFill/>
-                    </a:rPr>
-                    <a:t> </a:t>
-                  </a:r>
-                </a:p>
-              </p:txBody>
-            </p:sp>
-          </mc:Fallback>
-        </mc:AlternateContent>
-        <p:cxnSp>
-          <p:nvCxnSpPr>
-            <p:cNvPr id="34" name="直接箭头连接符 33">
-              <a:extLst>
-                <a:ext uri="{FF2B5EF4-FFF2-40B4-BE49-F238E27FC236}">
-                  <a16:creationId xmlns:a16="http://schemas.microsoft.com/office/drawing/2014/main" id="{1364C564-38AE-36D7-A3CB-BF1BA31237E2}"/>
-                </a:ext>
-              </a:extLst>
-            </p:cNvPr>
-            <p:cNvCxnSpPr>
-              <a:cxnSpLocks/>
-            </p:cNvCxnSpPr>
-            <p:nvPr/>
-          </p:nvCxnSpPr>
-          <p:spPr>
-            <a:xfrm flipH="1">
-              <a:off x="2595033" y="1715494"/>
-              <a:ext cx="3238014" cy="1328272"/>
-            </a:xfrm>
-            <a:prstGeom prst="straightConnector1">
-              <a:avLst/>
-            </a:prstGeom>
-            <a:ln w="12700">
-              <a:solidFill>
-                <a:schemeClr val="tx1"/>
-              </a:solidFill>
-              <a:tailEnd type="stealth"/>
-            </a:ln>
-          </p:spPr>
-          <p:style>
-            <a:lnRef idx="1">
-              <a:schemeClr val="accent1"/>
-            </a:lnRef>
-            <a:fillRef idx="0">
-              <a:schemeClr val="accent1"/>
-            </a:fillRef>
-            <a:effectRef idx="0">
-              <a:schemeClr val="accent1"/>
-            </a:effectRef>
-            <a:fontRef idx="minor">
-              <a:schemeClr val="tx1"/>
-            </a:fontRef>
-          </p:style>
-        </p:cxnSp>
-        <mc:AlternateContent xmlns:mc="http://schemas.openxmlformats.org/markup-compatibility/2006">
-          <mc:Choice xmlns:a14="http://schemas.microsoft.com/office/drawing/2010/main" Requires="a14">
-            <p:sp>
-              <p:nvSpPr>
-                <p:cNvPr id="36" name="文本框 35">
-                  <a:extLst>
-                    <a:ext uri="{FF2B5EF4-FFF2-40B4-BE49-F238E27FC236}">
-                      <a16:creationId xmlns:a16="http://schemas.microsoft.com/office/drawing/2014/main" id="{3A3E2D1B-509D-1C9E-2BA1-B55A0F665BF1}"/>
-                    </a:ext>
-                  </a:extLst>
-                </p:cNvPr>
-                <p:cNvSpPr txBox="1"/>
-                <p:nvPr/>
-              </p:nvSpPr>
-              <p:spPr>
-                <a:xfrm>
-                  <a:off x="5278214" y="1900767"/>
-                  <a:ext cx="547958" cy="215444"/>
-                </a:xfrm>
-                <a:prstGeom prst="rect">
-                  <a:avLst/>
-                </a:prstGeom>
-                <a:noFill/>
-              </p:spPr>
-              <p:txBody>
-                <a:bodyPr wrap="square" lIns="0" tIns="0" rIns="0" bIns="0" rtlCol="0">
-                  <a:spAutoFit/>
-                </a:bodyPr>
-                <a:lstStyle/>
-                <a:p>
-                  <a14:m>
-                    <m:oMathPara xmlns:m="http://schemas.openxmlformats.org/officeDocument/2006/math">
-                      <m:oMathParaPr>
-                        <m:jc m:val="centerGroup"/>
-                      </m:oMathParaPr>
-                      <m:oMath xmlns:m="http://schemas.openxmlformats.org/officeDocument/2006/math">
-                        <m:r>
-                          <a:rPr lang="en-US" altLang="zh-CN" sz="1400" b="0" i="1" smtClean="0">
-                            <a:latin typeface="Cambria Math" panose="02040503050406030204" pitchFamily="18" charset="0"/>
-                          </a:rPr>
-                          <m:t>(</m:t>
-                        </m:r>
-                        <m:sSub>
-                          <m:sSubPr>
-                            <m:ctrlPr>
-                              <a:rPr lang="en-US" altLang="zh-CN" sz="1400" b="0" i="1" smtClean="0">
-                                <a:latin typeface="Cambria Math" panose="02040503050406030204" pitchFamily="18" charset="0"/>
-                              </a:rPr>
-                            </m:ctrlPr>
-                          </m:sSubPr>
-                          <m:e>
-                            <m:r>
-                              <a:rPr lang="en-US" altLang="zh-CN" sz="1400" b="0" i="1" smtClean="0">
-                                <a:latin typeface="Cambria Math" panose="02040503050406030204" pitchFamily="18" charset="0"/>
-                              </a:rPr>
-                              <m:t>𝑟</m:t>
-                            </m:r>
-                          </m:e>
-                          <m:sub>
-                            <m:r>
-                              <a:rPr lang="en-US" altLang="zh-CN" sz="1400" b="0" i="1" smtClean="0">
-                                <a:latin typeface="Cambria Math" panose="02040503050406030204" pitchFamily="18" charset="0"/>
-                              </a:rPr>
-                              <m:t>3</m:t>
-                            </m:r>
-                          </m:sub>
-                        </m:sSub>
-                        <m:r>
-                          <a:rPr lang="en-US" altLang="zh-CN" sz="1400" b="0" i="1" smtClean="0">
-                            <a:latin typeface="Cambria Math" panose="02040503050406030204" pitchFamily="18" charset="0"/>
-                          </a:rPr>
-                          <m:t>,</m:t>
-                        </m:r>
-                        <m:sSub>
-                          <m:sSubPr>
-                            <m:ctrlPr>
-                              <a:rPr lang="en-US" altLang="zh-CN" sz="1400" b="0" i="1" smtClean="0">
-                                <a:latin typeface="Cambria Math" panose="02040503050406030204" pitchFamily="18" charset="0"/>
-                              </a:rPr>
-                            </m:ctrlPr>
-                          </m:sSubPr>
-                          <m:e>
-                            <m:r>
-                              <a:rPr lang="en-US" altLang="zh-CN" sz="1400" b="0" i="1" smtClean="0">
-                                <a:latin typeface="Cambria Math" panose="02040503050406030204" pitchFamily="18" charset="0"/>
-                              </a:rPr>
-                              <m:t>𝜃</m:t>
-                            </m:r>
-                          </m:e>
-                          <m:sub>
-                            <m:r>
-                              <a:rPr lang="en-US" altLang="zh-CN" sz="1400" b="0" i="1" smtClean="0">
-                                <a:latin typeface="Cambria Math" panose="02040503050406030204" pitchFamily="18" charset="0"/>
-                              </a:rPr>
-                              <m:t>3</m:t>
-                            </m:r>
-                          </m:sub>
-                        </m:sSub>
-                        <m:r>
-                          <a:rPr lang="en-US" altLang="zh-CN" sz="1400" b="0" i="1" smtClean="0">
-                            <a:latin typeface="Cambria Math" panose="02040503050406030204" pitchFamily="18" charset="0"/>
-                          </a:rPr>
-                          <m:t>)</m:t>
-                        </m:r>
-                      </m:oMath>
-                    </m:oMathPara>
-                  </a14:m>
-                  <a:endParaRPr lang="zh-CN" altLang="en-US" sz="1400" dirty="0"/>
-                </a:p>
-              </p:txBody>
-            </p:sp>
-          </mc:Choice>
-          <mc:Fallback>
-            <p:sp>
-              <p:nvSpPr>
-                <p:cNvPr id="36" name="文本框 35">
-                  <a:extLst>
-                    <a:ext uri="{FF2B5EF4-FFF2-40B4-BE49-F238E27FC236}">
-                      <a16:creationId xmlns:a16="http://schemas.microsoft.com/office/drawing/2014/main" id="{3A3E2D1B-509D-1C9E-2BA1-B55A0F665BF1}"/>
-                    </a:ext>
-                  </a:extLst>
-                </p:cNvPr>
-                <p:cNvSpPr txBox="1">
-                  <a:spLocks noRot="1" noChangeAspect="1" noMove="1" noResize="1" noEditPoints="1" noAdjustHandles="1" noChangeArrowheads="1" noChangeShapeType="1" noTextEdit="1"/>
-                </p:cNvSpPr>
-                <p:nvPr/>
-              </p:nvSpPr>
-              <p:spPr>
-                <a:xfrm>
-                  <a:off x="5278214" y="1900767"/>
-                  <a:ext cx="547958" cy="215444"/>
-                </a:xfrm>
-                <a:prstGeom prst="rect">
-                  <a:avLst/>
-                </a:prstGeom>
-                <a:blipFill>
-                  <a:blip r:embed="rId6"/>
-                  <a:stretch>
-                    <a:fillRect l="-14444" r="-13333" b="-30556"/>
-                  </a:stretch>
-                </a:blipFill>
-              </p:spPr>
-              <p:txBody>
-                <a:bodyPr/>
-                <a:lstStyle/>
-                <a:p>
-                  <a:r>
-                    <a:rPr lang="zh-CN" altLang="en-US">
-                      <a:noFill/>
-                    </a:rPr>
-                    <a:t> </a:t>
-                  </a:r>
-                </a:p>
-              </p:txBody>
-            </p:sp>
-          </mc:Fallback>
-        </mc:AlternateContent>
-        <p:cxnSp>
-          <p:nvCxnSpPr>
-            <p:cNvPr id="37" name="直接连接符 36">
-              <a:extLst>
-                <a:ext uri="{FF2B5EF4-FFF2-40B4-BE49-F238E27FC236}">
-                  <a16:creationId xmlns:a16="http://schemas.microsoft.com/office/drawing/2014/main" id="{D585404F-6C64-4382-7A53-A766C6445231}"/>
-                </a:ext>
-              </a:extLst>
-            </p:cNvPr>
-            <p:cNvCxnSpPr>
-              <a:cxnSpLocks/>
-            </p:cNvCxnSpPr>
-            <p:nvPr/>
-          </p:nvCxnSpPr>
-          <p:spPr>
-            <a:xfrm>
-              <a:off x="5826667" y="1715495"/>
-              <a:ext cx="0" cy="857986"/>
-            </a:xfrm>
-            <a:prstGeom prst="line">
-              <a:avLst/>
-            </a:prstGeom>
-            <a:ln w="12700">
-              <a:solidFill>
-                <a:schemeClr val="tx1"/>
-              </a:solidFill>
-              <a:headEnd type="stealth"/>
-              <a:tailEnd type="stealth"/>
-            </a:ln>
-          </p:spPr>
-          <p:style>
-            <a:lnRef idx="1">
-              <a:schemeClr val="accent1"/>
-            </a:lnRef>
-            <a:fillRef idx="0">
-              <a:schemeClr val="accent1"/>
-            </a:fillRef>
-            <a:effectRef idx="0">
-              <a:schemeClr val="accent1"/>
-            </a:effectRef>
-            <a:fontRef idx="minor">
-              <a:schemeClr val="tx1"/>
-            </a:fontRef>
-          </p:style>
-        </p:cxnSp>
-        <mc:AlternateContent xmlns:mc="http://schemas.openxmlformats.org/markup-compatibility/2006">
-          <mc:Choice xmlns:a14="http://schemas.microsoft.com/office/drawing/2010/main" Requires="a14">
-            <p:sp>
-              <p:nvSpPr>
-                <p:cNvPr id="40" name="文本框 39">
-                  <a:extLst>
-                    <a:ext uri="{FF2B5EF4-FFF2-40B4-BE49-F238E27FC236}">
-                      <a16:creationId xmlns:a16="http://schemas.microsoft.com/office/drawing/2014/main" id="{1F820EBB-F436-7212-F92E-4A538F50C8B3}"/>
-                    </a:ext>
-                  </a:extLst>
-                </p:cNvPr>
-                <p:cNvSpPr txBox="1"/>
-                <p:nvPr/>
-              </p:nvSpPr>
-              <p:spPr>
-                <a:xfrm>
-                  <a:off x="5481015" y="2214642"/>
-                  <a:ext cx="354328" cy="153888"/>
-                </a:xfrm>
-                <a:prstGeom prst="rect">
-                  <a:avLst/>
-                </a:prstGeom>
-                <a:noFill/>
-              </p:spPr>
-              <p:txBody>
-                <a:bodyPr wrap="none" lIns="0" tIns="0" rIns="0" bIns="0" rtlCol="0">
-                  <a:spAutoFit/>
-                </a:bodyPr>
-                <a:lstStyle/>
-                <a:p>
-                  <a14:m>
-                    <m:oMathPara xmlns:m="http://schemas.openxmlformats.org/officeDocument/2006/math">
-                      <m:oMathParaPr>
-                        <m:jc m:val="centerGroup"/>
-                      </m:oMathParaPr>
-                      <m:oMath xmlns:m="http://schemas.openxmlformats.org/officeDocument/2006/math">
-                        <m:sSub>
-                          <m:sSubPr>
-                            <m:ctrlPr>
-                              <a:rPr lang="en-US" altLang="zh-CN" sz="1000" b="0" i="1" smtClean="0">
-                                <a:latin typeface="Cambria Math" panose="02040503050406030204" pitchFamily="18" charset="0"/>
-                              </a:rPr>
-                            </m:ctrlPr>
-                          </m:sSubPr>
-                          <m:e>
-                            <m:r>
-                              <a:rPr lang="en-US" altLang="zh-CN" sz="1000" b="0" i="1" smtClean="0">
-                                <a:latin typeface="Cambria Math" panose="02040503050406030204" pitchFamily="18" charset="0"/>
-                              </a:rPr>
-                              <m:t>𝑟</m:t>
-                            </m:r>
-                          </m:e>
-                          <m:sub>
-                            <m:r>
-                              <a:rPr lang="en-US" altLang="zh-CN" sz="1000" b="0" i="1" smtClean="0">
-                                <a:latin typeface="Cambria Math" panose="02040503050406030204" pitchFamily="18" charset="0"/>
-                              </a:rPr>
-                              <m:t>2</m:t>
-                            </m:r>
-                          </m:sub>
-                        </m:sSub>
-                        <m:r>
-                          <a:rPr lang="en-US" altLang="zh-CN" sz="1000" b="0" i="1" smtClean="0">
-                            <a:latin typeface="Cambria Math" panose="02040503050406030204" pitchFamily="18" charset="0"/>
-                          </a:rPr>
-                          <m:t>(</m:t>
-                        </m:r>
-                        <m:sSub>
-                          <m:sSubPr>
-                            <m:ctrlPr>
-                              <a:rPr lang="en-US" altLang="zh-CN" sz="1000" b="0" i="1" smtClean="0">
-                                <a:latin typeface="Cambria Math" panose="02040503050406030204" pitchFamily="18" charset="0"/>
-                              </a:rPr>
-                            </m:ctrlPr>
-                          </m:sSubPr>
-                          <m:e>
-                            <m:r>
-                              <a:rPr lang="en-US" altLang="zh-CN" sz="1000" b="0" i="1" smtClean="0">
-                                <a:latin typeface="Cambria Math" panose="02040503050406030204" pitchFamily="18" charset="0"/>
-                              </a:rPr>
-                              <m:t>𝑟</m:t>
-                            </m:r>
-                          </m:e>
-                          <m:sub>
-                            <m:r>
-                              <a:rPr lang="en-US" altLang="zh-CN" sz="1000" b="0" i="1" smtClean="0">
-                                <a:latin typeface="Cambria Math" panose="02040503050406030204" pitchFamily="18" charset="0"/>
-                              </a:rPr>
-                              <m:t>3</m:t>
-                            </m:r>
-                          </m:sub>
-                        </m:sSub>
-                        <m:r>
-                          <a:rPr lang="en-US" altLang="zh-CN" sz="1000" b="0" i="1" smtClean="0">
-                            <a:latin typeface="Cambria Math" panose="02040503050406030204" pitchFamily="18" charset="0"/>
-                          </a:rPr>
-                          <m:t>)</m:t>
-                        </m:r>
-                      </m:oMath>
-                    </m:oMathPara>
-                  </a14:m>
-                  <a:endParaRPr lang="en-US" altLang="zh-CN" sz="1000" b="0" dirty="0"/>
-                </a:p>
-              </p:txBody>
-            </p:sp>
-          </mc:Choice>
-          <mc:Fallback>
-            <p:sp>
-              <p:nvSpPr>
-                <p:cNvPr id="40" name="文本框 39">
-                  <a:extLst>
-                    <a:ext uri="{FF2B5EF4-FFF2-40B4-BE49-F238E27FC236}">
-                      <a16:creationId xmlns:a16="http://schemas.microsoft.com/office/drawing/2014/main" id="{1F820EBB-F436-7212-F92E-4A538F50C8B3}"/>
-                    </a:ext>
-                  </a:extLst>
-                </p:cNvPr>
-                <p:cNvSpPr txBox="1">
-                  <a:spLocks noRot="1" noChangeAspect="1" noMove="1" noResize="1" noEditPoints="1" noAdjustHandles="1" noChangeArrowheads="1" noChangeShapeType="1" noTextEdit="1"/>
-                </p:cNvSpPr>
-                <p:nvPr/>
-              </p:nvSpPr>
-              <p:spPr>
-                <a:xfrm>
-                  <a:off x="5481015" y="2214642"/>
-                  <a:ext cx="354328" cy="153888"/>
-                </a:xfrm>
-                <a:prstGeom prst="rect">
-                  <a:avLst/>
-                </a:prstGeom>
-                <a:blipFill>
-                  <a:blip r:embed="rId7"/>
-                  <a:stretch>
-                    <a:fillRect l="-3448" t="-4000" r="-15517" b="-40000"/>
-                  </a:stretch>
-                </a:blipFill>
-              </p:spPr>
-              <p:txBody>
-                <a:bodyPr/>
-                <a:lstStyle/>
-                <a:p>
-                  <a:r>
-                    <a:rPr lang="zh-CN" altLang="en-US">
-                      <a:noFill/>
-                    </a:rPr>
-                    <a:t> </a:t>
-                  </a:r>
-                </a:p>
-              </p:txBody>
-            </p:sp>
-          </mc:Fallback>
-        </mc:AlternateContent>
-        <mc:AlternateContent xmlns:mc="http://schemas.openxmlformats.org/markup-compatibility/2006">
-          <mc:Choice xmlns:a14="http://schemas.microsoft.com/office/drawing/2010/main" Requires="a14">
-            <p:sp>
-              <p:nvSpPr>
-                <p:cNvPr id="41" name="文本框 40">
-                  <a:extLst>
-                    <a:ext uri="{FF2B5EF4-FFF2-40B4-BE49-F238E27FC236}">
-                      <a16:creationId xmlns:a16="http://schemas.microsoft.com/office/drawing/2014/main" id="{15F7BF37-726D-A0C1-57A6-A6930CA226DC}"/>
-                    </a:ext>
-                  </a:extLst>
-                </p:cNvPr>
-                <p:cNvSpPr txBox="1"/>
-                <p:nvPr/>
-              </p:nvSpPr>
-              <p:spPr>
-                <a:xfrm>
-                  <a:off x="2526118" y="2609537"/>
-                  <a:ext cx="577529" cy="215444"/>
-                </a:xfrm>
-                <a:prstGeom prst="rect">
-                  <a:avLst/>
-                </a:prstGeom>
-                <a:noFill/>
-              </p:spPr>
-              <p:txBody>
-                <a:bodyPr wrap="none" lIns="0" tIns="0" rIns="0" bIns="0" rtlCol="0">
-                  <a:spAutoFit/>
-                </a:bodyPr>
-                <a:lstStyle/>
-                <a:p>
-                  <a14:m>
-                    <m:oMathPara xmlns:m="http://schemas.openxmlformats.org/officeDocument/2006/math">
-                      <m:oMathParaPr>
-                        <m:jc m:val="centerGroup"/>
-                      </m:oMathParaPr>
-                      <m:oMath xmlns:m="http://schemas.openxmlformats.org/officeDocument/2006/math">
-                        <m:r>
-                          <a:rPr lang="en-US" altLang="zh-CN" sz="1400" b="0" i="1" smtClean="0">
-                            <a:latin typeface="Cambria Math" panose="02040503050406030204" pitchFamily="18" charset="0"/>
-                          </a:rPr>
-                          <m:t>(</m:t>
-                        </m:r>
-                        <m:sSub>
-                          <m:sSubPr>
-                            <m:ctrlPr>
-                              <a:rPr lang="en-US" altLang="zh-CN" sz="1400" b="0" i="1" smtClean="0">
-                                <a:latin typeface="Cambria Math" panose="02040503050406030204" pitchFamily="18" charset="0"/>
-                              </a:rPr>
-                            </m:ctrlPr>
-                          </m:sSubPr>
-                          <m:e>
-                            <m:r>
-                              <a:rPr lang="en-US" altLang="zh-CN" sz="1400" b="0" i="1" smtClean="0">
-                                <a:latin typeface="Cambria Math" panose="02040503050406030204" pitchFamily="18" charset="0"/>
-                              </a:rPr>
-                              <m:t>𝑟</m:t>
-                            </m:r>
-                          </m:e>
-                          <m:sub>
-                            <m:r>
-                              <a:rPr lang="en-US" altLang="zh-CN" sz="1400" b="0" i="1" smtClean="0">
-                                <a:latin typeface="Cambria Math" panose="02040503050406030204" pitchFamily="18" charset="0"/>
-                              </a:rPr>
-                              <m:t>4</m:t>
-                            </m:r>
-                          </m:sub>
-                        </m:sSub>
-                        <m:r>
-                          <a:rPr lang="en-US" altLang="zh-CN" sz="1400" b="0" i="1" smtClean="0">
-                            <a:latin typeface="Cambria Math" panose="02040503050406030204" pitchFamily="18" charset="0"/>
-                          </a:rPr>
-                          <m:t>,</m:t>
-                        </m:r>
-                        <m:sSub>
-                          <m:sSubPr>
-                            <m:ctrlPr>
-                              <a:rPr lang="en-US" altLang="zh-CN" sz="1400" b="0" i="1" smtClean="0">
-                                <a:latin typeface="Cambria Math" panose="02040503050406030204" pitchFamily="18" charset="0"/>
-                              </a:rPr>
-                            </m:ctrlPr>
-                          </m:sSubPr>
-                          <m:e>
-                            <m:r>
-                              <a:rPr lang="en-US" altLang="zh-CN" sz="1400" b="0" i="1" smtClean="0">
-                                <a:latin typeface="Cambria Math" panose="02040503050406030204" pitchFamily="18" charset="0"/>
-                              </a:rPr>
-                              <m:t>𝜃</m:t>
-                            </m:r>
-                          </m:e>
-                          <m:sub>
-                            <m:r>
-                              <a:rPr lang="en-US" altLang="zh-CN" sz="1400" b="0" i="1" smtClean="0">
-                                <a:latin typeface="Cambria Math" panose="02040503050406030204" pitchFamily="18" charset="0"/>
-                              </a:rPr>
-                              <m:t>4</m:t>
-                            </m:r>
-                          </m:sub>
-                        </m:sSub>
-                        <m:r>
-                          <a:rPr lang="en-US" altLang="zh-CN" sz="1400" b="0" i="1" smtClean="0">
-                            <a:latin typeface="Cambria Math" panose="02040503050406030204" pitchFamily="18" charset="0"/>
-                          </a:rPr>
-                          <m:t>)</m:t>
-                        </m:r>
-                      </m:oMath>
-                    </m:oMathPara>
-                  </a14:m>
-                  <a:endParaRPr lang="zh-CN" altLang="en-US" sz="1400" dirty="0"/>
-                </a:p>
-              </p:txBody>
-            </p:sp>
-          </mc:Choice>
-          <mc:Fallback>
-            <p:sp>
-              <p:nvSpPr>
-                <p:cNvPr id="41" name="文本框 40">
-                  <a:extLst>
-                    <a:ext uri="{FF2B5EF4-FFF2-40B4-BE49-F238E27FC236}">
-                      <a16:creationId xmlns:a16="http://schemas.microsoft.com/office/drawing/2014/main" id="{15F7BF37-726D-A0C1-57A6-A6930CA226DC}"/>
-                    </a:ext>
-                  </a:extLst>
-                </p:cNvPr>
-                <p:cNvSpPr txBox="1">
-                  <a:spLocks noRot="1" noChangeAspect="1" noMove="1" noResize="1" noEditPoints="1" noAdjustHandles="1" noChangeArrowheads="1" noChangeShapeType="1" noTextEdit="1"/>
-                </p:cNvSpPr>
-                <p:nvPr/>
-              </p:nvSpPr>
-              <p:spPr>
-                <a:xfrm>
-                  <a:off x="2526118" y="2609537"/>
-                  <a:ext cx="577529" cy="215444"/>
-                </a:xfrm>
-                <a:prstGeom prst="rect">
-                  <a:avLst/>
-                </a:prstGeom>
-                <a:blipFill>
-                  <a:blip r:embed="rId8"/>
-                  <a:stretch>
-                    <a:fillRect l="-9474" r="-9474" b="-30556"/>
-                  </a:stretch>
-                </a:blipFill>
-              </p:spPr>
-              <p:txBody>
-                <a:bodyPr/>
-                <a:lstStyle/>
-                <a:p>
-                  <a:r>
-                    <a:rPr lang="zh-CN" altLang="en-US">
-                      <a:noFill/>
-                    </a:rPr>
-                    <a:t> </a:t>
-                  </a:r>
-                </a:p>
-              </p:txBody>
-            </p:sp>
-          </mc:Fallback>
-        </mc:AlternateContent>
-        <p:sp>
-          <p:nvSpPr>
-            <p:cNvPr id="42" name="弧形 41">
-              <a:extLst>
-                <a:ext uri="{FF2B5EF4-FFF2-40B4-BE49-F238E27FC236}">
-                  <a16:creationId xmlns:a16="http://schemas.microsoft.com/office/drawing/2014/main" id="{9FAE7AC8-DB35-74F0-420F-202570508216}"/>
-                </a:ext>
-              </a:extLst>
-            </p:cNvPr>
-            <p:cNvSpPr/>
-            <p:nvPr/>
-          </p:nvSpPr>
-          <p:spPr>
-            <a:xfrm>
-              <a:off x="3096251" y="1992493"/>
-              <a:ext cx="1092200" cy="1092200"/>
-            </a:xfrm>
-            <a:prstGeom prst="arc">
-              <a:avLst>
-                <a:gd name="adj1" fmla="val 20723918"/>
-                <a:gd name="adj2" fmla="val 238535"/>
-              </a:avLst>
-            </a:prstGeom>
-            <a:ln>
-              <a:solidFill>
-                <a:schemeClr val="tx1"/>
-              </a:solidFill>
-            </a:ln>
-          </p:spPr>
-          <p:style>
-            <a:lnRef idx="1">
-              <a:schemeClr val="accent1"/>
-            </a:lnRef>
-            <a:fillRef idx="0">
-              <a:schemeClr val="accent1"/>
-            </a:fillRef>
-            <a:effectRef idx="0">
-              <a:schemeClr val="accent1"/>
-            </a:effectRef>
-            <a:fontRef idx="minor">
-              <a:schemeClr val="tx1"/>
-            </a:fontRef>
-          </p:style>
-          <p:txBody>
-            <a:bodyPr rtlCol="0" anchor="ctr"/>
-            <a:lstStyle/>
-            <a:p>
-              <a:pPr algn="ctr"/>
-              <a:endParaRPr lang="zh-CN" altLang="en-US"/>
-            </a:p>
-          </p:txBody>
-        </p:sp>
-        <mc:AlternateContent xmlns:mc="http://schemas.openxmlformats.org/markup-compatibility/2006">
-          <mc:Choice xmlns:a14="http://schemas.microsoft.com/office/drawing/2010/main" Requires="a14">
-            <p:sp>
-              <p:nvSpPr>
-                <p:cNvPr id="43" name="文本框 42">
-                  <a:extLst>
-                    <a:ext uri="{FF2B5EF4-FFF2-40B4-BE49-F238E27FC236}">
-                      <a16:creationId xmlns:a16="http://schemas.microsoft.com/office/drawing/2014/main" id="{388235FD-AE82-9A5C-F484-46B0D273A81C}"/>
-                    </a:ext>
-                  </a:extLst>
-                </p:cNvPr>
-                <p:cNvSpPr txBox="1"/>
-                <p:nvPr/>
-              </p:nvSpPr>
-              <p:spPr>
-                <a:xfrm>
-                  <a:off x="4230628" y="2384705"/>
-                  <a:ext cx="392993" cy="153888"/>
-                </a:xfrm>
-                <a:prstGeom prst="rect">
-                  <a:avLst/>
-                </a:prstGeom>
-                <a:noFill/>
-              </p:spPr>
-              <p:txBody>
-                <a:bodyPr wrap="none" lIns="0" tIns="0" rIns="0" bIns="0" rtlCol="0">
-                  <a:spAutoFit/>
-                </a:bodyPr>
-                <a:lstStyle/>
-                <a:p>
-                  <a14:m>
-                    <m:oMathPara xmlns:m="http://schemas.openxmlformats.org/officeDocument/2006/math">
-                      <m:oMathParaPr>
-                        <m:jc m:val="centerGroup"/>
-                      </m:oMathParaPr>
-                      <m:oMath xmlns:m="http://schemas.openxmlformats.org/officeDocument/2006/math">
-                        <m:sSub>
-                          <m:sSubPr>
-                            <m:ctrlPr>
-                              <a:rPr lang="en-US" altLang="zh-CN" sz="1000" b="0" i="1" smtClean="0">
-                                <a:latin typeface="Cambria Math" panose="02040503050406030204" pitchFamily="18" charset="0"/>
-                              </a:rPr>
-                            </m:ctrlPr>
-                          </m:sSubPr>
-                          <m:e>
-                            <m:r>
-                              <a:rPr lang="en-US" altLang="zh-CN" sz="1000" b="0" i="1" smtClean="0">
-                                <a:latin typeface="Cambria Math" panose="02040503050406030204" pitchFamily="18" charset="0"/>
-                              </a:rPr>
-                              <m:t>𝜃</m:t>
-                            </m:r>
-                          </m:e>
-                          <m:sub>
-                            <m:r>
-                              <a:rPr lang="en-US" altLang="zh-CN" sz="1000" b="0" i="1" smtClean="0">
-                                <a:latin typeface="Cambria Math" panose="02040503050406030204" pitchFamily="18" charset="0"/>
-                              </a:rPr>
-                              <m:t>3</m:t>
-                            </m:r>
-                          </m:sub>
-                        </m:sSub>
-                        <m:sSub>
-                          <m:sSubPr>
-                            <m:ctrlPr>
-                              <a:rPr lang="en-US" altLang="zh-CN" sz="1000" b="0" i="1" smtClean="0">
-                                <a:latin typeface="Cambria Math" panose="02040503050406030204" pitchFamily="18" charset="0"/>
-                              </a:rPr>
-                            </m:ctrlPr>
-                          </m:sSubPr>
-                          <m:e>
-                            <m:r>
-                              <a:rPr lang="en-US" altLang="zh-CN" sz="1000" b="0" i="1" smtClean="0">
-                                <a:latin typeface="Cambria Math" panose="02040503050406030204" pitchFamily="18" charset="0"/>
-                              </a:rPr>
-                              <m:t>(</m:t>
-                            </m:r>
-                            <m:r>
-                              <a:rPr lang="en-US" altLang="zh-CN" sz="1000" b="0" i="1" smtClean="0">
-                                <a:latin typeface="Cambria Math" panose="02040503050406030204" pitchFamily="18" charset="0"/>
-                              </a:rPr>
-                              <m:t>𝜃</m:t>
-                            </m:r>
-                          </m:e>
-                          <m:sub>
-                            <m:r>
-                              <a:rPr lang="en-US" altLang="zh-CN" sz="1000" b="0" i="1" smtClean="0">
-                                <a:latin typeface="Cambria Math" panose="02040503050406030204" pitchFamily="18" charset="0"/>
-                              </a:rPr>
-                              <m:t>4</m:t>
-                            </m:r>
-                          </m:sub>
-                        </m:sSub>
-                        <m:r>
-                          <a:rPr lang="en-US" altLang="zh-CN" sz="1000" b="0" i="1" smtClean="0">
-                            <a:latin typeface="Cambria Math" panose="02040503050406030204" pitchFamily="18" charset="0"/>
-                          </a:rPr>
-                          <m:t>)</m:t>
-                        </m:r>
-                      </m:oMath>
-                    </m:oMathPara>
-                  </a14:m>
-                  <a:endParaRPr lang="en-US" altLang="zh-CN" sz="1000" b="0" dirty="0"/>
-                </a:p>
-              </p:txBody>
-            </p:sp>
-          </mc:Choice>
-          <mc:Fallback>
-            <p:sp>
-              <p:nvSpPr>
-                <p:cNvPr id="43" name="文本框 42">
-                  <a:extLst>
-                    <a:ext uri="{FF2B5EF4-FFF2-40B4-BE49-F238E27FC236}">
-                      <a16:creationId xmlns:a16="http://schemas.microsoft.com/office/drawing/2014/main" id="{388235FD-AE82-9A5C-F484-46B0D273A81C}"/>
-                    </a:ext>
-                  </a:extLst>
-                </p:cNvPr>
-                <p:cNvSpPr txBox="1">
-                  <a:spLocks noRot="1" noChangeAspect="1" noMove="1" noResize="1" noEditPoints="1" noAdjustHandles="1" noChangeArrowheads="1" noChangeShapeType="1" noTextEdit="1"/>
-                </p:cNvSpPr>
-                <p:nvPr/>
-              </p:nvSpPr>
-              <p:spPr>
-                <a:xfrm>
-                  <a:off x="4230628" y="2384705"/>
-                  <a:ext cx="392993" cy="153888"/>
-                </a:xfrm>
-                <a:prstGeom prst="rect">
-                  <a:avLst/>
-                </a:prstGeom>
-                <a:blipFill>
-                  <a:blip r:embed="rId9"/>
-                  <a:stretch>
-                    <a:fillRect l="-6250" t="-4000" r="-12500" b="-40000"/>
-                  </a:stretch>
-                </a:blipFill>
-              </p:spPr>
-              <p:txBody>
-                <a:bodyPr/>
-                <a:lstStyle/>
-                <a:p>
-                  <a:r>
-                    <a:rPr lang="zh-CN" altLang="en-US">
-                      <a:noFill/>
-                    </a:rPr>
-                    <a:t> </a:t>
-                  </a:r>
-                </a:p>
-              </p:txBody>
-            </p:sp>
-          </mc:Fallback>
-        </mc:AlternateContent>
-        <p:cxnSp>
-          <p:nvCxnSpPr>
-            <p:cNvPr id="45" name="直接箭头连接符 44">
-              <a:extLst>
-                <a:ext uri="{FF2B5EF4-FFF2-40B4-BE49-F238E27FC236}">
-                  <a16:creationId xmlns:a16="http://schemas.microsoft.com/office/drawing/2014/main" id="{C21FD4B1-B720-8C0F-8B5C-998EAAA84399}"/>
-                </a:ext>
-              </a:extLst>
-            </p:cNvPr>
-            <p:cNvCxnSpPr>
-              <a:cxnSpLocks/>
-            </p:cNvCxnSpPr>
-            <p:nvPr/>
-          </p:nvCxnSpPr>
-          <p:spPr>
-            <a:xfrm flipV="1">
-              <a:off x="2592737" y="2861035"/>
-              <a:ext cx="1849138" cy="186580"/>
-            </a:xfrm>
-            <a:prstGeom prst="straightConnector1">
-              <a:avLst/>
-            </a:prstGeom>
-            <a:ln w="12700">
-              <a:solidFill>
-                <a:schemeClr val="tx1"/>
-              </a:solidFill>
-              <a:tailEnd type="stealth"/>
-            </a:ln>
-          </p:spPr>
-          <p:style>
-            <a:lnRef idx="1">
-              <a:schemeClr val="accent1"/>
-            </a:lnRef>
-            <a:fillRef idx="0">
-              <a:schemeClr val="accent1"/>
-            </a:fillRef>
-            <a:effectRef idx="0">
-              <a:schemeClr val="accent1"/>
-            </a:effectRef>
-            <a:fontRef idx="minor">
-              <a:schemeClr val="tx1"/>
-            </a:fontRef>
-          </p:style>
-        </p:cxnSp>
-        <mc:AlternateContent xmlns:mc="http://schemas.openxmlformats.org/markup-compatibility/2006">
-          <mc:Choice xmlns:a14="http://schemas.microsoft.com/office/drawing/2010/main" Requires="a14">
-            <p:sp>
-              <p:nvSpPr>
-                <p:cNvPr id="49" name="文本框 48">
-                  <a:extLst>
-                    <a:ext uri="{FF2B5EF4-FFF2-40B4-BE49-F238E27FC236}">
-                      <a16:creationId xmlns:a16="http://schemas.microsoft.com/office/drawing/2014/main" id="{B25BAB0F-5FD8-FC06-FC17-7811DAFAD449}"/>
-                    </a:ext>
-                  </a:extLst>
-                </p:cNvPr>
-                <p:cNvSpPr txBox="1"/>
-                <p:nvPr/>
-              </p:nvSpPr>
-              <p:spPr>
-                <a:xfrm>
-                  <a:off x="2775105" y="3223599"/>
-                  <a:ext cx="589457" cy="215444"/>
-                </a:xfrm>
-                <a:prstGeom prst="rect">
-                  <a:avLst/>
-                </a:prstGeom>
-                <a:noFill/>
-              </p:spPr>
-              <p:txBody>
-                <a:bodyPr wrap="none" lIns="0" tIns="0" rIns="0" bIns="0" rtlCol="0">
-                  <a:spAutoFit/>
-                </a:bodyPr>
-                <a:lstStyle/>
-                <a:p>
-                  <a14:m>
-                    <m:oMathPara xmlns:m="http://schemas.openxmlformats.org/officeDocument/2006/math">
-                      <m:oMathParaPr>
-                        <m:jc m:val="centerGroup"/>
-                      </m:oMathParaPr>
-                      <m:oMath xmlns:m="http://schemas.openxmlformats.org/officeDocument/2006/math">
-                        <m:r>
-                          <a:rPr lang="en-US" altLang="zh-CN" sz="1400" b="0" i="1" smtClean="0">
-                            <a:latin typeface="Cambria Math" panose="02040503050406030204" pitchFamily="18" charset="0"/>
-                          </a:rPr>
-                          <m:t>(</m:t>
-                        </m:r>
-                        <m:sSub>
-                          <m:sSubPr>
-                            <m:ctrlPr>
-                              <a:rPr lang="en-US" altLang="zh-CN" sz="1400" b="0" i="1" smtClean="0">
-                                <a:latin typeface="Cambria Math" panose="02040503050406030204" pitchFamily="18" charset="0"/>
-                              </a:rPr>
-                            </m:ctrlPr>
-                          </m:sSubPr>
-                          <m:e>
-                            <m:r>
-                              <a:rPr lang="en-US" altLang="zh-CN" sz="1400" b="0" i="1" smtClean="0">
-                                <a:latin typeface="Cambria Math" panose="02040503050406030204" pitchFamily="18" charset="0"/>
-                              </a:rPr>
-                              <m:t>𝑟</m:t>
-                            </m:r>
-                          </m:e>
-                          <m:sub>
-                            <m:r>
-                              <a:rPr lang="en-US" altLang="zh-CN" sz="1400" b="0" i="1" smtClean="0">
-                                <a:latin typeface="Cambria Math" panose="02040503050406030204" pitchFamily="18" charset="0"/>
-                              </a:rPr>
-                              <m:t>5</m:t>
-                            </m:r>
-                          </m:sub>
-                        </m:sSub>
-                        <m:r>
-                          <a:rPr lang="en-US" altLang="zh-CN" sz="1400" b="0" i="1" smtClean="0">
-                            <a:latin typeface="Cambria Math" panose="02040503050406030204" pitchFamily="18" charset="0"/>
-                          </a:rPr>
-                          <m:t>,</m:t>
-                        </m:r>
-                        <m:sSub>
-                          <m:sSubPr>
-                            <m:ctrlPr>
-                              <a:rPr lang="en-US" altLang="zh-CN" sz="1400" b="0" i="1" smtClean="0">
-                                <a:latin typeface="Cambria Math" panose="02040503050406030204" pitchFamily="18" charset="0"/>
-                              </a:rPr>
-                            </m:ctrlPr>
-                          </m:sSubPr>
-                          <m:e>
-                            <m:r>
-                              <a:rPr lang="en-US" altLang="zh-CN" sz="1400" b="0" i="1" smtClean="0">
-                                <a:latin typeface="Cambria Math" panose="02040503050406030204" pitchFamily="18" charset="0"/>
-                              </a:rPr>
-                              <m:t>𝜃</m:t>
-                            </m:r>
-                          </m:e>
-                          <m:sub>
-                            <m:r>
-                              <a:rPr lang="en-US" altLang="zh-CN" sz="1400" b="0" i="1" smtClean="0">
-                                <a:latin typeface="Cambria Math" panose="02040503050406030204" pitchFamily="18" charset="0"/>
-                              </a:rPr>
-                              <m:t>5</m:t>
-                            </m:r>
-                          </m:sub>
-                        </m:sSub>
-                        <m:r>
-                          <a:rPr lang="en-US" altLang="zh-CN" sz="1400" b="0" i="1" smtClean="0">
-                            <a:latin typeface="Cambria Math" panose="02040503050406030204" pitchFamily="18" charset="0"/>
-                          </a:rPr>
-                          <m:t>)</m:t>
-                        </m:r>
-                      </m:oMath>
-                    </m:oMathPara>
-                  </a14:m>
-                  <a:endParaRPr lang="zh-CN" altLang="en-US" sz="1400" dirty="0"/>
-                </a:p>
-              </p:txBody>
-            </p:sp>
-          </mc:Choice>
-          <mc:Fallback>
-            <p:sp>
-              <p:nvSpPr>
-                <p:cNvPr id="49" name="文本框 48">
-                  <a:extLst>
-                    <a:ext uri="{FF2B5EF4-FFF2-40B4-BE49-F238E27FC236}">
-                      <a16:creationId xmlns:a16="http://schemas.microsoft.com/office/drawing/2014/main" id="{B25BAB0F-5FD8-FC06-FC17-7811DAFAD449}"/>
-                    </a:ext>
-                  </a:extLst>
-                </p:cNvPr>
-                <p:cNvSpPr txBox="1">
-                  <a:spLocks noRot="1" noChangeAspect="1" noMove="1" noResize="1" noEditPoints="1" noAdjustHandles="1" noChangeArrowheads="1" noChangeShapeType="1" noTextEdit="1"/>
-                </p:cNvSpPr>
-                <p:nvPr/>
-              </p:nvSpPr>
-              <p:spPr>
-                <a:xfrm>
-                  <a:off x="2775105" y="3223599"/>
-                  <a:ext cx="589457" cy="215444"/>
-                </a:xfrm>
-                <a:prstGeom prst="rect">
-                  <a:avLst/>
-                </a:prstGeom>
-                <a:blipFill>
-                  <a:blip r:embed="rId10"/>
-                  <a:stretch>
-                    <a:fillRect l="-9278" r="-9278" b="-30556"/>
-                  </a:stretch>
-                </a:blipFill>
-              </p:spPr>
-              <p:txBody>
-                <a:bodyPr/>
-                <a:lstStyle/>
-                <a:p>
-                  <a:r>
-                    <a:rPr lang="zh-CN" altLang="en-US">
-                      <a:noFill/>
-                    </a:rPr>
-                    <a:t> </a:t>
-                  </a:r>
-                </a:p>
-              </p:txBody>
-            </p:sp>
-          </mc:Fallback>
-        </mc:AlternateContent>
-        <p:cxnSp>
-          <p:nvCxnSpPr>
-            <p:cNvPr id="50" name="直接连接符 49">
-              <a:extLst>
-                <a:ext uri="{FF2B5EF4-FFF2-40B4-BE49-F238E27FC236}">
-                  <a16:creationId xmlns:a16="http://schemas.microsoft.com/office/drawing/2014/main" id="{6D4FADA7-2703-7C02-401E-8E9B98A13650}"/>
-                </a:ext>
-              </a:extLst>
-            </p:cNvPr>
-            <p:cNvCxnSpPr>
-              <a:cxnSpLocks/>
-            </p:cNvCxnSpPr>
-            <p:nvPr/>
-          </p:nvCxnSpPr>
-          <p:spPr>
-            <a:xfrm>
-              <a:off x="2592484" y="3041649"/>
-              <a:ext cx="2211291" cy="0"/>
-            </a:xfrm>
-            <a:prstGeom prst="line">
-              <a:avLst/>
-            </a:prstGeom>
-            <a:ln w="12700">
+            <a:ln w="25400">
               <a:solidFill>
                 <a:schemeClr val="tx1"/>
               </a:solidFill>
@@ -5398,30 +3846,29 @@
             </a:fontRef>
           </p:style>
         </p:cxnSp>
-        <p:sp>
-          <p:nvSpPr>
-            <p:cNvPr id="52" name="弧形 51">
+        <p:cxnSp>
+          <p:nvCxnSpPr>
+            <p:cNvPr id="13" name="直接连接符 12">
               <a:extLst>
                 <a:ext uri="{FF2B5EF4-FFF2-40B4-BE49-F238E27FC236}">
-                  <a16:creationId xmlns:a16="http://schemas.microsoft.com/office/drawing/2014/main" id="{7DA4E17B-AFA0-F715-81A9-8BC51F746664}"/>
+                  <a16:creationId xmlns:a16="http://schemas.microsoft.com/office/drawing/2014/main" id="{2669CB41-1011-79AD-A7E9-E201C99AFBD2}"/>
                 </a:ext>
               </a:extLst>
             </p:cNvPr>
-            <p:cNvSpPr/>
+            <p:cNvCxnSpPr>
+              <a:cxnSpLocks/>
+            </p:cNvCxnSpPr>
             <p:nvPr/>
-          </p:nvSpPr>
+          </p:nvCxnSpPr>
           <p:spPr>
-            <a:xfrm>
-              <a:off x="3474998" y="2662609"/>
-              <a:ext cx="657225" cy="657225"/>
+            <a:xfrm flipH="1">
+              <a:off x="4628056" y="4777925"/>
+              <a:ext cx="360000" cy="0"/>
             </a:xfrm>
-            <a:prstGeom prst="arc">
-              <a:avLst>
-                <a:gd name="adj1" fmla="val 20612649"/>
-                <a:gd name="adj2" fmla="val 547548"/>
-              </a:avLst>
+            <a:prstGeom prst="line">
+              <a:avLst/>
             </a:prstGeom>
-            <a:ln>
+            <a:ln w="25400">
               <a:solidFill>
                 <a:schemeClr val="tx1"/>
               </a:solidFill>
@@ -5441,23 +3888,15 @@
               <a:schemeClr val="tx1"/>
             </a:fontRef>
           </p:style>
-          <p:txBody>
-            <a:bodyPr rtlCol="0" anchor="ctr"/>
-            <a:lstStyle/>
-            <a:p>
-              <a:pPr algn="ctr"/>
-              <a:endParaRPr lang="zh-CN" altLang="en-US"/>
-            </a:p>
-          </p:txBody>
-        </p:sp>
-        <mc:AlternateContent xmlns:mc="http://schemas.openxmlformats.org/markup-compatibility/2006">
-          <mc:Choice xmlns:a14="http://schemas.microsoft.com/office/drawing/2010/main" Requires="a14">
+        </p:cxnSp>
+        <mc:AlternateContent xmlns:mc="http://schemas.openxmlformats.org/markup-compatibility/2006" xmlns:a14="http://schemas.microsoft.com/office/drawing/2010/main">
+          <mc:Choice Requires="a14">
             <p:sp>
               <p:nvSpPr>
-                <p:cNvPr id="53" name="文本框 52">
+                <p:cNvPr id="15" name="文本框 14">
                   <a:extLst>
                     <a:ext uri="{FF2B5EF4-FFF2-40B4-BE49-F238E27FC236}">
-                      <a16:creationId xmlns:a16="http://schemas.microsoft.com/office/drawing/2014/main" id="{1FD99BEB-DC87-9A39-82BE-D65197CF4E88}"/>
+                      <a16:creationId xmlns:a16="http://schemas.microsoft.com/office/drawing/2014/main" id="{772E77A8-98AC-47C9-6F85-8F2A3DAFAD13}"/>
                     </a:ext>
                   </a:extLst>
                 </p:cNvPr>
@@ -5466,8 +3905,8 @@
               </p:nvSpPr>
               <p:spPr>
                 <a:xfrm>
-                  <a:off x="4161952" y="2886992"/>
-                  <a:ext cx="162737" cy="153888"/>
+                  <a:off x="4602647" y="4771769"/>
+                  <a:ext cx="410818" cy="369332"/>
                 </a:xfrm>
                 <a:prstGeom prst="rect">
                   <a:avLst/>
@@ -5480,52 +3919,43 @@
                 </a:bodyPr>
                 <a:lstStyle/>
                 <a:p>
+                  <a:pPr/>
                   <a14:m>
                     <m:oMathPara xmlns:m="http://schemas.openxmlformats.org/officeDocument/2006/math">
                       <m:oMathParaPr>
                         <m:jc m:val="centerGroup"/>
                       </m:oMathParaPr>
                       <m:oMath xmlns:m="http://schemas.openxmlformats.org/officeDocument/2006/math">
-                        <m:sSub>
-                          <m:sSubPr>
-                            <m:ctrlPr>
-                              <a:rPr lang="en-US" altLang="zh-CN" sz="1000" b="0" i="1" smtClean="0">
-                                <a:latin typeface="Cambria Math" panose="02040503050406030204" pitchFamily="18" charset="0"/>
-                              </a:rPr>
-                            </m:ctrlPr>
-                          </m:sSubPr>
-                          <m:e>
-                            <m:r>
-                              <a:rPr lang="en-US" altLang="zh-CN" sz="1000" b="0" i="1" smtClean="0">
-                                <a:latin typeface="Cambria Math" panose="02040503050406030204" pitchFamily="18" charset="0"/>
-                              </a:rPr>
-                              <m:t>𝜃</m:t>
-                            </m:r>
-                          </m:e>
-                          <m:sub>
-                            <m:r>
-                              <a:rPr lang="en-US" altLang="zh-CN" sz="1000" b="0" i="1" smtClean="0">
-                                <a:latin typeface="Cambria Math" panose="02040503050406030204" pitchFamily="18" charset="0"/>
-                              </a:rPr>
-                              <m:t>5</m:t>
-                            </m:r>
-                          </m:sub>
-                        </m:sSub>
+                        <m:r>
+                          <m:rPr>
+                            <m:sty m:val="p"/>
+                          </m:rPr>
+                          <a:rPr lang="en-US" altLang="zh-CN" sz="2400" i="1" smtClean="0">
+                            <a:latin typeface="Cambria Math" panose="02040503050406030204" pitchFamily="18" charset="0"/>
+                          </a:rPr>
+                          <m:t>d</m:t>
+                        </m:r>
+                        <m:r>
+                          <a:rPr lang="en-US" altLang="zh-CN" sz="2400" b="0" i="1" smtClean="0">
+                            <a:latin typeface="Cambria Math" panose="02040503050406030204" pitchFamily="18" charset="0"/>
+                          </a:rPr>
+                          <m:t>𝑧</m:t>
+                        </m:r>
                       </m:oMath>
                     </m:oMathPara>
                   </a14:m>
-                  <a:endParaRPr lang="en-US" altLang="zh-CN" sz="1000" b="0" dirty="0"/>
+                  <a:endParaRPr lang="en-US" altLang="zh-CN" sz="2400" b="0" dirty="0"/>
                 </a:p>
               </p:txBody>
             </p:sp>
           </mc:Choice>
-          <mc:Fallback>
+          <mc:Fallback xmlns="">
             <p:sp>
               <p:nvSpPr>
-                <p:cNvPr id="53" name="文本框 52">
+                <p:cNvPr id="15" name="文本框 14">
                   <a:extLst>
                     <a:ext uri="{FF2B5EF4-FFF2-40B4-BE49-F238E27FC236}">
-                      <a16:creationId xmlns:a16="http://schemas.microsoft.com/office/drawing/2014/main" id="{1FD99BEB-DC87-9A39-82BE-D65197CF4E88}"/>
+                      <a16:creationId xmlns:a16="http://schemas.microsoft.com/office/drawing/2014/main" id="{772E77A8-98AC-47C9-6F85-8F2A3DAFAD13}"/>
                     </a:ext>
                   </a:extLst>
                 </p:cNvPr>
@@ -5536,440 +3966,16 @@
               </p:nvSpPr>
               <p:spPr>
                 <a:xfrm>
-                  <a:off x="4161952" y="2886992"/>
-                  <a:ext cx="162737" cy="153888"/>
+                  <a:off x="4602647" y="4771769"/>
+                  <a:ext cx="410818" cy="369332"/>
                 </a:xfrm>
                 <a:prstGeom prst="rect">
                   <a:avLst/>
                 </a:prstGeom>
                 <a:blipFill>
-                  <a:blip r:embed="rId11"/>
+                  <a:blip r:embed="rId5"/>
                   <a:stretch>
-                    <a:fillRect l="-19231" r="-7692" b="-16000"/>
-                  </a:stretch>
-                </a:blipFill>
-              </p:spPr>
-              <p:txBody>
-                <a:bodyPr/>
-                <a:lstStyle/>
-                <a:p>
-                  <a:r>
-                    <a:rPr lang="zh-CN" altLang="en-US">
-                      <a:noFill/>
-                    </a:rPr>
-                    <a:t> </a:t>
-                  </a:r>
-                </a:p>
-              </p:txBody>
-            </p:sp>
-          </mc:Fallback>
-        </mc:AlternateContent>
-        <p:cxnSp>
-          <p:nvCxnSpPr>
-            <p:cNvPr id="56" name="直接连接符 55">
-              <a:extLst>
-                <a:ext uri="{FF2B5EF4-FFF2-40B4-BE49-F238E27FC236}">
-                  <a16:creationId xmlns:a16="http://schemas.microsoft.com/office/drawing/2014/main" id="{C5B807B5-01C5-E36B-C89F-455EFEA58B34}"/>
-                </a:ext>
-              </a:extLst>
-            </p:cNvPr>
-            <p:cNvCxnSpPr>
-              <a:cxnSpLocks/>
-            </p:cNvCxnSpPr>
-            <p:nvPr/>
-          </p:nvCxnSpPr>
-          <p:spPr>
-            <a:xfrm>
-              <a:off x="4623621" y="2581057"/>
-              <a:ext cx="0" cy="459823"/>
-            </a:xfrm>
-            <a:prstGeom prst="line">
-              <a:avLst/>
-            </a:prstGeom>
-            <a:ln w="12700">
-              <a:solidFill>
-                <a:schemeClr val="tx1"/>
-              </a:solidFill>
-              <a:headEnd type="stealth"/>
-              <a:tailEnd type="stealth"/>
-            </a:ln>
-          </p:spPr>
-          <p:style>
-            <a:lnRef idx="1">
-              <a:schemeClr val="accent1"/>
-            </a:lnRef>
-            <a:fillRef idx="0">
-              <a:schemeClr val="accent1"/>
-            </a:fillRef>
-            <a:effectRef idx="0">
-              <a:schemeClr val="accent1"/>
-            </a:effectRef>
-            <a:fontRef idx="minor">
-              <a:schemeClr val="tx1"/>
-            </a:fontRef>
-          </p:style>
-        </p:cxnSp>
-        <mc:AlternateContent xmlns:mc="http://schemas.openxmlformats.org/markup-compatibility/2006">
-          <mc:Choice xmlns:a14="http://schemas.microsoft.com/office/drawing/2010/main" Requires="a14">
-            <p:sp>
-              <p:nvSpPr>
-                <p:cNvPr id="58" name="文本框 57">
-                  <a:extLst>
-                    <a:ext uri="{FF2B5EF4-FFF2-40B4-BE49-F238E27FC236}">
-                      <a16:creationId xmlns:a16="http://schemas.microsoft.com/office/drawing/2014/main" id="{5FE1DE8B-8896-C1D1-9588-67CA3EEF4689}"/>
-                    </a:ext>
-                  </a:extLst>
-                </p:cNvPr>
-                <p:cNvSpPr txBox="1"/>
-                <p:nvPr/>
-              </p:nvSpPr>
-              <p:spPr>
-                <a:xfrm>
-                  <a:off x="4643048" y="2713207"/>
-                  <a:ext cx="348813" cy="153888"/>
-                </a:xfrm>
-                <a:prstGeom prst="rect">
-                  <a:avLst/>
-                </a:prstGeom>
-                <a:noFill/>
-              </p:spPr>
-              <p:txBody>
-                <a:bodyPr wrap="none" lIns="0" tIns="0" rIns="0" bIns="0" rtlCol="0">
-                  <a:spAutoFit/>
-                </a:bodyPr>
-                <a:lstStyle/>
-                <a:p>
-                  <a14:m>
-                    <m:oMathPara xmlns:m="http://schemas.openxmlformats.org/officeDocument/2006/math">
-                      <m:oMathParaPr>
-                        <m:jc m:val="centerGroup"/>
-                      </m:oMathParaPr>
-                      <m:oMath xmlns:m="http://schemas.openxmlformats.org/officeDocument/2006/math">
-                        <m:sSub>
-                          <m:sSubPr>
-                            <m:ctrlPr>
-                              <a:rPr lang="en-US" altLang="zh-CN" sz="1000" b="0" i="1" smtClean="0">
-                                <a:latin typeface="Cambria Math" panose="02040503050406030204" pitchFamily="18" charset="0"/>
-                              </a:rPr>
-                            </m:ctrlPr>
-                          </m:sSubPr>
-                          <m:e>
-                            <m:r>
-                              <a:rPr lang="en-US" altLang="zh-CN" sz="1000" b="0" i="1" smtClean="0">
-                                <a:latin typeface="Cambria Math" panose="02040503050406030204" pitchFamily="18" charset="0"/>
-                              </a:rPr>
-                              <m:t>𝑟</m:t>
-                            </m:r>
-                          </m:e>
-                          <m:sub>
-                            <m:r>
-                              <a:rPr lang="en-US" altLang="zh-CN" sz="1000" b="0" i="1" smtClean="0">
-                                <a:latin typeface="Cambria Math" panose="02040503050406030204" pitchFamily="18" charset="0"/>
-                              </a:rPr>
-                              <m:t>4</m:t>
-                            </m:r>
-                          </m:sub>
-                        </m:sSub>
-                        <m:r>
-                          <a:rPr lang="en-US" altLang="zh-CN" sz="1000" b="0" i="1" smtClean="0">
-                            <a:latin typeface="Cambria Math" panose="02040503050406030204" pitchFamily="18" charset="0"/>
-                          </a:rPr>
-                          <m:t>(</m:t>
-                        </m:r>
-                        <m:sSub>
-                          <m:sSubPr>
-                            <m:ctrlPr>
-                              <a:rPr lang="en-US" altLang="zh-CN" sz="1000" b="0" i="1" smtClean="0">
-                                <a:latin typeface="Cambria Math" panose="02040503050406030204" pitchFamily="18" charset="0"/>
-                              </a:rPr>
-                            </m:ctrlPr>
-                          </m:sSubPr>
-                          <m:e>
-                            <m:r>
-                              <a:rPr lang="en-US" altLang="zh-CN" sz="1000" b="0" i="1" smtClean="0">
-                                <a:latin typeface="Cambria Math" panose="02040503050406030204" pitchFamily="18" charset="0"/>
-                              </a:rPr>
-                              <m:t>𝑟</m:t>
-                            </m:r>
-                          </m:e>
-                          <m:sub>
-                            <m:r>
-                              <a:rPr lang="en-US" altLang="zh-CN" sz="1000" b="0" i="1" smtClean="0">
-                                <a:latin typeface="Cambria Math" panose="02040503050406030204" pitchFamily="18" charset="0"/>
-                              </a:rPr>
-                              <m:t>5</m:t>
-                            </m:r>
-                          </m:sub>
-                        </m:sSub>
-                        <m:r>
-                          <a:rPr lang="en-US" altLang="zh-CN" sz="1000" b="0" i="1" smtClean="0">
-                            <a:latin typeface="Cambria Math" panose="02040503050406030204" pitchFamily="18" charset="0"/>
-                          </a:rPr>
-                          <m:t>)</m:t>
-                        </m:r>
-                      </m:oMath>
-                    </m:oMathPara>
-                  </a14:m>
-                  <a:endParaRPr lang="en-US" altLang="zh-CN" sz="1000" b="0" dirty="0"/>
-                </a:p>
-              </p:txBody>
-            </p:sp>
-          </mc:Choice>
-          <mc:Fallback>
-            <p:sp>
-              <p:nvSpPr>
-                <p:cNvPr id="58" name="文本框 57">
-                  <a:extLst>
-                    <a:ext uri="{FF2B5EF4-FFF2-40B4-BE49-F238E27FC236}">
-                      <a16:creationId xmlns:a16="http://schemas.microsoft.com/office/drawing/2014/main" id="{5FE1DE8B-8896-C1D1-9588-67CA3EEF4689}"/>
-                    </a:ext>
-                  </a:extLst>
-                </p:cNvPr>
-                <p:cNvSpPr txBox="1">
-                  <a:spLocks noRot="1" noChangeAspect="1" noMove="1" noResize="1" noEditPoints="1" noAdjustHandles="1" noChangeArrowheads="1" noChangeShapeType="1" noTextEdit="1"/>
-                </p:cNvSpPr>
-                <p:nvPr/>
-              </p:nvSpPr>
-              <p:spPr>
-                <a:xfrm>
-                  <a:off x="4643048" y="2713207"/>
-                  <a:ext cx="348813" cy="153888"/>
-                </a:xfrm>
-                <a:prstGeom prst="rect">
-                  <a:avLst/>
-                </a:prstGeom>
-                <a:blipFill>
-                  <a:blip r:embed="rId12"/>
-                  <a:stretch>
-                    <a:fillRect l="-5263" r="-14035" b="-38462"/>
-                  </a:stretch>
-                </a:blipFill>
-              </p:spPr>
-              <p:txBody>
-                <a:bodyPr/>
-                <a:lstStyle/>
-                <a:p>
-                  <a:r>
-                    <a:rPr lang="zh-CN" altLang="en-US">
-                      <a:noFill/>
-                    </a:rPr>
-                    <a:t> </a:t>
-                  </a:r>
-                </a:p>
-              </p:txBody>
-            </p:sp>
-          </mc:Fallback>
-        </mc:AlternateContent>
-        <mc:AlternateContent xmlns:mc="http://schemas.openxmlformats.org/markup-compatibility/2006">
-          <mc:Choice xmlns:a14="http://schemas.microsoft.com/office/drawing/2010/main" Requires="a14">
-            <p:sp>
-              <p:nvSpPr>
-                <p:cNvPr id="63" name="文本框 62">
-                  <a:extLst>
-                    <a:ext uri="{FF2B5EF4-FFF2-40B4-BE49-F238E27FC236}">
-                      <a16:creationId xmlns:a16="http://schemas.microsoft.com/office/drawing/2014/main" id="{9C73EFDD-D124-EB27-FC19-A7E3C89B2AAD}"/>
-                    </a:ext>
-                  </a:extLst>
-                </p:cNvPr>
-                <p:cNvSpPr txBox="1"/>
-                <p:nvPr/>
-              </p:nvSpPr>
-              <p:spPr>
-                <a:xfrm>
-                  <a:off x="2100998" y="1212841"/>
-                  <a:ext cx="781770" cy="369332"/>
-                </a:xfrm>
-                <a:prstGeom prst="rect">
-                  <a:avLst/>
-                </a:prstGeom>
-                <a:noFill/>
-              </p:spPr>
-              <p:txBody>
-                <a:bodyPr wrap="square" rtlCol="0">
-                  <a:spAutoFit/>
-                </a:bodyPr>
-                <a:lstStyle/>
-                <a:p>
-                  <a14:m>
-                    <m:oMathPara xmlns:m="http://schemas.openxmlformats.org/officeDocument/2006/math">
-                      <m:oMathParaPr>
-                        <m:jc m:val="centerGroup"/>
-                      </m:oMathParaPr>
-                      <m:oMath xmlns:m="http://schemas.openxmlformats.org/officeDocument/2006/math">
-                        <m:sSub>
-                          <m:sSubPr>
-                            <m:ctrlPr>
-                              <a:rPr lang="en-US" altLang="zh-CN" b="0" i="1" smtClean="0">
-                                <a:latin typeface="Cambria Math" panose="02040503050406030204" pitchFamily="18" charset="0"/>
-                              </a:rPr>
-                            </m:ctrlPr>
-                          </m:sSubPr>
-                          <m:e>
-                            <m:r>
-                              <a:rPr lang="en-US" altLang="zh-CN" b="0" i="1" smtClean="0">
-                                <a:latin typeface="Cambria Math" panose="02040503050406030204" pitchFamily="18" charset="0"/>
-                              </a:rPr>
-                              <m:t>𝑀</m:t>
-                            </m:r>
-                          </m:e>
-                          <m:sub>
-                            <m:r>
-                              <a:rPr lang="en-US" altLang="zh-CN" b="0" i="1" smtClean="0">
-                                <a:latin typeface="Cambria Math" panose="02040503050406030204" pitchFamily="18" charset="0"/>
-                              </a:rPr>
-                              <m:t>1</m:t>
-                            </m:r>
-                          </m:sub>
-                        </m:sSub>
-                      </m:oMath>
-                    </m:oMathPara>
-                  </a14:m>
-                  <a:endParaRPr lang="en-US" altLang="zh-CN" b="0" dirty="0"/>
-                </a:p>
-              </p:txBody>
-            </p:sp>
-          </mc:Choice>
-          <mc:Fallback>
-            <p:sp>
-              <p:nvSpPr>
-                <p:cNvPr id="63" name="文本框 62">
-                  <a:extLst>
-                    <a:ext uri="{FF2B5EF4-FFF2-40B4-BE49-F238E27FC236}">
-                      <a16:creationId xmlns:a16="http://schemas.microsoft.com/office/drawing/2014/main" id="{9C73EFDD-D124-EB27-FC19-A7E3C89B2AAD}"/>
-                    </a:ext>
-                  </a:extLst>
-                </p:cNvPr>
-                <p:cNvSpPr txBox="1">
-                  <a:spLocks noRot="1" noChangeAspect="1" noMove="1" noResize="1" noEditPoints="1" noAdjustHandles="1" noChangeArrowheads="1" noChangeShapeType="1" noTextEdit="1"/>
-                </p:cNvSpPr>
-                <p:nvPr/>
-              </p:nvSpPr>
-              <p:spPr>
-                <a:xfrm>
-                  <a:off x="2100998" y="1212841"/>
-                  <a:ext cx="781770" cy="369332"/>
-                </a:xfrm>
-                <a:prstGeom prst="rect">
-                  <a:avLst/>
-                </a:prstGeom>
-                <a:blipFill>
-                  <a:blip r:embed="rId13"/>
-                  <a:stretch>
-                    <a:fillRect/>
-                  </a:stretch>
-                </a:blipFill>
-              </p:spPr>
-              <p:txBody>
-                <a:bodyPr/>
-                <a:lstStyle/>
-                <a:p>
-                  <a:r>
-                    <a:rPr lang="zh-CN" altLang="en-US">
-                      <a:noFill/>
-                    </a:rPr>
-                    <a:t> </a:t>
-                  </a:r>
-                </a:p>
-              </p:txBody>
-            </p:sp>
-          </mc:Fallback>
-        </mc:AlternateContent>
-        <mc:AlternateContent xmlns:mc="http://schemas.openxmlformats.org/markup-compatibility/2006">
-          <mc:Choice xmlns:a14="http://schemas.microsoft.com/office/drawing/2010/main" Requires="a14">
-            <p:sp>
-              <p:nvSpPr>
-                <p:cNvPr id="64" name="文本框 63">
-                  <a:extLst>
-                    <a:ext uri="{FF2B5EF4-FFF2-40B4-BE49-F238E27FC236}">
-                      <a16:creationId xmlns:a16="http://schemas.microsoft.com/office/drawing/2014/main" id="{BD0762FE-3289-FE16-A26F-6F7781C23EEB}"/>
-                    </a:ext>
-                  </a:extLst>
-                </p:cNvPr>
-                <p:cNvSpPr txBox="1"/>
-                <p:nvPr/>
-              </p:nvSpPr>
-              <p:spPr>
-                <a:xfrm>
-                  <a:off x="5772353" y="1223294"/>
-                  <a:ext cx="781770" cy="369332"/>
-                </a:xfrm>
-                <a:prstGeom prst="rect">
-                  <a:avLst/>
-                </a:prstGeom>
-                <a:noFill/>
-              </p:spPr>
-              <p:txBody>
-                <a:bodyPr wrap="square" rtlCol="0">
-                  <a:spAutoFit/>
-                </a:bodyPr>
-                <a:lstStyle/>
-                <a:p>
-                  <a14:m>
-                    <m:oMathPara xmlns:m="http://schemas.openxmlformats.org/officeDocument/2006/math">
-                      <m:oMathParaPr>
-                        <m:jc m:val="centerGroup"/>
-                      </m:oMathParaPr>
-                      <m:oMath xmlns:m="http://schemas.openxmlformats.org/officeDocument/2006/math">
-                        <m:sSub>
-                          <m:sSubPr>
-                            <m:ctrlPr>
-                              <a:rPr lang="en-US" altLang="zh-CN" b="0" i="1" smtClean="0">
-                                <a:latin typeface="Cambria Math" panose="02040503050406030204" pitchFamily="18" charset="0"/>
-                              </a:rPr>
-                            </m:ctrlPr>
-                          </m:sSubPr>
-                          <m:e>
-                            <m:r>
-                              <a:rPr lang="en-US" altLang="zh-CN" b="0" i="1" smtClean="0">
-                                <a:latin typeface="Cambria Math" panose="02040503050406030204" pitchFamily="18" charset="0"/>
-                              </a:rPr>
-                              <m:t>𝑀</m:t>
-                            </m:r>
-                          </m:e>
-                          <m:sub>
-                            <m:r>
-                              <a:rPr lang="en-US" altLang="zh-CN" b="0" i="1" smtClean="0">
-                                <a:latin typeface="Cambria Math" panose="02040503050406030204" pitchFamily="18" charset="0"/>
-                              </a:rPr>
-                              <m:t>2</m:t>
-                            </m:r>
-                          </m:sub>
-                        </m:sSub>
-                      </m:oMath>
-                    </m:oMathPara>
-                  </a14:m>
-                  <a:endParaRPr lang="en-US" altLang="zh-CN" b="0" dirty="0"/>
-                </a:p>
-              </p:txBody>
-            </p:sp>
-          </mc:Choice>
-          <mc:Fallback>
-            <p:sp>
-              <p:nvSpPr>
-                <p:cNvPr id="64" name="文本框 63">
-                  <a:extLst>
-                    <a:ext uri="{FF2B5EF4-FFF2-40B4-BE49-F238E27FC236}">
-                      <a16:creationId xmlns:a16="http://schemas.microsoft.com/office/drawing/2014/main" id="{BD0762FE-3289-FE16-A26F-6F7781C23EEB}"/>
-                    </a:ext>
-                  </a:extLst>
-                </p:cNvPr>
-                <p:cNvSpPr txBox="1">
-                  <a:spLocks noRot="1" noChangeAspect="1" noMove="1" noResize="1" noEditPoints="1" noAdjustHandles="1" noChangeArrowheads="1" noChangeShapeType="1" noTextEdit="1"/>
-                </p:cNvSpPr>
-                <p:nvPr/>
-              </p:nvSpPr>
-              <p:spPr>
-                <a:xfrm>
-                  <a:off x="5772353" y="1223294"/>
-                  <a:ext cx="781770" cy="369332"/>
-                </a:xfrm>
-                <a:prstGeom prst="rect">
-                  <a:avLst/>
-                </a:prstGeom>
-                <a:blipFill>
-                  <a:blip r:embed="rId14"/>
-                  <a:stretch>
-                    <a:fillRect/>
+                    <a:fillRect l="-16418" r="-7463" b="-8333"/>
                   </a:stretch>
                 </a:blipFill>
               </p:spPr>
@@ -5989,6 +3995,36 @@
           </mc:Fallback>
         </mc:AlternateContent>
       </p:grpSp>
+    </p:spTree>
+    <p:extLst>
+      <p:ext uri="{BB962C8B-B14F-4D97-AF65-F5344CB8AC3E}">
+        <p14:creationId xmlns:p14="http://schemas.microsoft.com/office/powerpoint/2010/main" val="56041771"/>
+      </p:ext>
+    </p:extLst>
+  </p:cSld>
+  <p:clrMapOvr>
+    <a:masterClrMapping/>
+  </p:clrMapOvr>
+</p:sld>
+</file>
+
+<file path=ppt/slides/slide2.xml><?xml version="1.0" encoding="utf-8"?>
+<p:sld xmlns:a="http://schemas.openxmlformats.org/drawingml/2006/main" xmlns:r="http://schemas.openxmlformats.org/officeDocument/2006/relationships" xmlns:p="http://schemas.openxmlformats.org/presentationml/2006/main">
+  <p:cSld>
+    <p:spTree>
+      <p:nvGrpSpPr>
+        <p:cNvPr id="1" name=""/>
+        <p:cNvGrpSpPr/>
+        <p:nvPr/>
+      </p:nvGrpSpPr>
+      <p:grpSpPr>
+        <a:xfrm>
+          <a:off x="0" y="0"/>
+          <a:ext cx="0" cy="0"/>
+          <a:chOff x="0" y="0"/>
+          <a:chExt cx="0" cy="0"/>
+        </a:xfrm>
+      </p:grpSpPr>
       <p:grpSp>
         <p:nvGrpSpPr>
           <p:cNvPr id="151" name="组合 150">
@@ -6242,8 +4278,8 @@
             </a:fontRef>
           </p:style>
         </p:cxnSp>
-        <mc:AlternateContent xmlns:mc="http://schemas.openxmlformats.org/markup-compatibility/2006">
-          <mc:Choice xmlns:a14="http://schemas.microsoft.com/office/drawing/2010/main" Requires="a14">
+        <mc:AlternateContent xmlns:mc="http://schemas.openxmlformats.org/markup-compatibility/2006" xmlns:a14="http://schemas.microsoft.com/office/drawing/2010/main">
+          <mc:Choice Requires="a14">
             <p:sp>
               <p:nvSpPr>
                 <p:cNvPr id="119" name="文本框 118">
@@ -6272,6 +4308,7 @@
                 </a:bodyPr>
                 <a:lstStyle/>
                 <a:p>
+                  <a:pPr/>
                   <a14:m>
                     <m:oMathPara xmlns:m="http://schemas.openxmlformats.org/officeDocument/2006/math">
                       <m:oMathParaPr>
@@ -6292,7 +4329,7 @@
               </p:txBody>
             </p:sp>
           </mc:Choice>
-          <mc:Fallback>
+          <mc:Fallback xmlns="">
             <p:sp>
               <p:nvSpPr>
                 <p:cNvPr id="119" name="文本框 118">
@@ -6337,8 +4374,8 @@
             </p:sp>
           </mc:Fallback>
         </mc:AlternateContent>
-        <mc:AlternateContent xmlns:mc="http://schemas.openxmlformats.org/markup-compatibility/2006">
-          <mc:Choice xmlns:a14="http://schemas.microsoft.com/office/drawing/2010/main" Requires="a14">
+        <mc:AlternateContent xmlns:mc="http://schemas.openxmlformats.org/markup-compatibility/2006" xmlns:a14="http://schemas.microsoft.com/office/drawing/2010/main">
+          <mc:Choice Requires="a14">
             <p:sp>
               <p:nvSpPr>
                 <p:cNvPr id="120" name="文本框 119">
@@ -6367,6 +4404,7 @@
                 </a:bodyPr>
                 <a:lstStyle/>
                 <a:p>
+                  <a:pPr/>
                   <a14:m>
                     <m:oMathPara xmlns:m="http://schemas.openxmlformats.org/officeDocument/2006/math">
                       <m:oMathParaPr>
@@ -6406,7 +4444,7 @@
               </p:txBody>
             </p:sp>
           </mc:Choice>
-          <mc:Fallback>
+          <mc:Fallback xmlns="">
             <p:sp>
               <p:nvSpPr>
                 <p:cNvPr id="120" name="文本框 119">
@@ -6555,8 +4593,8 @@
             </a:p>
           </p:txBody>
         </p:sp>
-        <mc:AlternateContent xmlns:mc="http://schemas.openxmlformats.org/markup-compatibility/2006">
-          <mc:Choice xmlns:a14="http://schemas.microsoft.com/office/drawing/2010/main" Requires="a14">
+        <mc:AlternateContent xmlns:mc="http://schemas.openxmlformats.org/markup-compatibility/2006" xmlns:a14="http://schemas.microsoft.com/office/drawing/2010/main">
+          <mc:Choice Requires="a14">
             <p:sp>
               <p:nvSpPr>
                 <p:cNvPr id="123" name="文本框 122">
@@ -6585,6 +4623,7 @@
                 </a:bodyPr>
                 <a:lstStyle/>
                 <a:p>
+                  <a:pPr/>
                   <a14:m>
                     <m:oMathPara xmlns:m="http://schemas.openxmlformats.org/officeDocument/2006/math">
                       <m:oMathParaPr>
@@ -6608,7 +4647,7 @@
               </p:txBody>
             </p:sp>
           </mc:Choice>
-          <mc:Fallback>
+          <mc:Fallback xmlns="">
             <p:sp>
               <p:nvSpPr>
                 <p:cNvPr id="123" name="文本框 122">
@@ -6705,8 +4744,8 @@
             </a:p>
           </p:txBody>
         </p:sp>
-        <mc:AlternateContent xmlns:mc="http://schemas.openxmlformats.org/markup-compatibility/2006">
-          <mc:Choice xmlns:a14="http://schemas.microsoft.com/office/drawing/2010/main" Requires="a14">
+        <mc:AlternateContent xmlns:mc="http://schemas.openxmlformats.org/markup-compatibility/2006" xmlns:a14="http://schemas.microsoft.com/office/drawing/2010/main">
+          <mc:Choice Requires="a14">
             <p:sp>
               <p:nvSpPr>
                 <p:cNvPr id="125" name="文本框 124">
@@ -6735,6 +4774,7 @@
                 </a:bodyPr>
                 <a:lstStyle/>
                 <a:p>
+                  <a:pPr/>
                   <a14:m>
                     <m:oMathPara xmlns:m="http://schemas.openxmlformats.org/officeDocument/2006/math">
                       <m:oMathParaPr>
@@ -6774,7 +4814,7 @@
               </p:txBody>
             </p:sp>
           </mc:Choice>
-          <mc:Fallback>
+          <mc:Fallback xmlns="">
             <p:sp>
               <p:nvSpPr>
                 <p:cNvPr id="125" name="文本框 124">
@@ -6871,8 +4911,8 @@
             </a:p>
           </p:txBody>
         </p:sp>
-        <mc:AlternateContent xmlns:mc="http://schemas.openxmlformats.org/markup-compatibility/2006">
-          <mc:Choice xmlns:a14="http://schemas.microsoft.com/office/drawing/2010/main" Requires="a14">
+        <mc:AlternateContent xmlns:mc="http://schemas.openxmlformats.org/markup-compatibility/2006" xmlns:a14="http://schemas.microsoft.com/office/drawing/2010/main">
+          <mc:Choice Requires="a14">
             <p:sp>
               <p:nvSpPr>
                 <p:cNvPr id="129" name="文本框 128">
@@ -6901,6 +4941,7 @@
                 </a:bodyPr>
                 <a:lstStyle/>
                 <a:p>
+                  <a:pPr/>
                   <a14:m>
                     <m:oMathPara xmlns:m="http://schemas.openxmlformats.org/officeDocument/2006/math">
                       <m:oMathParaPr>
@@ -6924,7 +4965,7 @@
               </p:txBody>
             </p:sp>
           </mc:Choice>
-          <mc:Fallback>
+          <mc:Fallback xmlns="">
             <p:sp>
               <p:nvSpPr>
                 <p:cNvPr id="129" name="文本框 128">
@@ -6969,8 +5010,8 @@
             </p:sp>
           </mc:Fallback>
         </mc:AlternateContent>
-        <mc:AlternateContent xmlns:mc="http://schemas.openxmlformats.org/markup-compatibility/2006">
-          <mc:Choice xmlns:a14="http://schemas.microsoft.com/office/drawing/2010/main" Requires="a14">
+        <mc:AlternateContent xmlns:mc="http://schemas.openxmlformats.org/markup-compatibility/2006" xmlns:a14="http://schemas.microsoft.com/office/drawing/2010/main">
+          <mc:Choice Requires="a14">
             <p:sp>
               <p:nvSpPr>
                 <p:cNvPr id="130" name="文本框 129">
@@ -6999,6 +5040,7 @@
                 </a:bodyPr>
                 <a:lstStyle/>
                 <a:p>
+                  <a:pPr/>
                   <a14:m>
                     <m:oMathPara xmlns:m="http://schemas.openxmlformats.org/officeDocument/2006/math">
                       <m:oMathParaPr>
@@ -7022,7 +5064,7 @@
               </p:txBody>
             </p:sp>
           </mc:Choice>
-          <mc:Fallback>
+          <mc:Fallback xmlns="">
             <p:sp>
               <p:nvSpPr>
                 <p:cNvPr id="130" name="文本框 129">
@@ -7250,8 +5292,8 @@
             </a:fontRef>
           </p:style>
         </p:cxnSp>
-        <mc:AlternateContent xmlns:mc="http://schemas.openxmlformats.org/markup-compatibility/2006">
-          <mc:Choice xmlns:a14="http://schemas.microsoft.com/office/drawing/2010/main" Requires="a14">
+        <mc:AlternateContent xmlns:mc="http://schemas.openxmlformats.org/markup-compatibility/2006" xmlns:a14="http://schemas.microsoft.com/office/drawing/2010/main">
+          <mc:Choice Requires="a14">
             <p:sp>
               <p:nvSpPr>
                 <p:cNvPr id="144" name="文本框 143">
@@ -7280,6 +5322,7 @@
                 </a:bodyPr>
                 <a:lstStyle/>
                 <a:p>
+                  <a:pPr/>
                   <a14:m>
                     <m:oMathPara xmlns:m="http://schemas.openxmlformats.org/officeDocument/2006/math">
                       <m:oMathParaPr>
@@ -7303,7 +5346,7 @@
               </p:txBody>
             </p:sp>
           </mc:Choice>
-          <mc:Fallback>
+          <mc:Fallback xmlns="">
             <p:sp>
               <p:nvSpPr>
                 <p:cNvPr id="144" name="文本框 143">
@@ -7393,8 +5436,8 @@
             </a:fontRef>
           </p:style>
         </p:cxnSp>
-        <mc:AlternateContent xmlns:mc="http://schemas.openxmlformats.org/markup-compatibility/2006">
-          <mc:Choice xmlns:a14="http://schemas.microsoft.com/office/drawing/2010/main" Requires="a14">
+        <mc:AlternateContent xmlns:mc="http://schemas.openxmlformats.org/markup-compatibility/2006" xmlns:a14="http://schemas.microsoft.com/office/drawing/2010/main">
+          <mc:Choice Requires="a14">
             <p:sp>
               <p:nvSpPr>
                 <p:cNvPr id="149" name="文本框 148">
@@ -7423,6 +5466,7 @@
                 </a:bodyPr>
                 <a:lstStyle/>
                 <a:p>
+                  <a:pPr/>
                   <a14:m>
                     <m:oMathPara xmlns:m="http://schemas.openxmlformats.org/officeDocument/2006/math">
                       <m:oMathParaPr>
@@ -7462,7 +5506,7 @@
               </p:txBody>
             </p:sp>
           </mc:Choice>
-          <mc:Fallback>
+          <mc:Fallback xmlns="">
             <p:sp>
               <p:nvSpPr>
                 <p:cNvPr id="149" name="文本框 148">
@@ -7508,10 +5552,4274 @@
           </mc:Fallback>
         </mc:AlternateContent>
       </p:grpSp>
+      <p:grpSp>
+        <p:nvGrpSpPr>
+          <p:cNvPr id="12" name="组合 11">
+            <a:extLst>
+              <a:ext uri="{FF2B5EF4-FFF2-40B4-BE49-F238E27FC236}">
+                <a16:creationId xmlns:a16="http://schemas.microsoft.com/office/drawing/2014/main" id="{1877007C-F6E0-F896-2653-998F807F58F1}"/>
+              </a:ext>
+            </a:extLst>
+          </p:cNvPr>
+          <p:cNvGrpSpPr/>
+          <p:nvPr/>
+        </p:nvGrpSpPr>
+        <p:grpSpPr>
+          <a:xfrm>
+            <a:off x="495300" y="50791"/>
+            <a:ext cx="5245100" cy="2799750"/>
+            <a:chOff x="495300" y="50791"/>
+            <a:chExt cx="5245100" cy="2799750"/>
+          </a:xfrm>
+        </p:grpSpPr>
+        <p:grpSp>
+          <p:nvGrpSpPr>
+            <p:cNvPr id="65" name="组合 64">
+              <a:extLst>
+                <a:ext uri="{FF2B5EF4-FFF2-40B4-BE49-F238E27FC236}">
+                  <a16:creationId xmlns:a16="http://schemas.microsoft.com/office/drawing/2014/main" id="{574BA431-B3DD-F363-A08A-60F320664AAC}"/>
+                </a:ext>
+              </a:extLst>
+            </p:cNvPr>
+            <p:cNvGrpSpPr/>
+            <p:nvPr/>
+          </p:nvGrpSpPr>
+          <p:grpSpPr>
+            <a:xfrm>
+              <a:off x="495300" y="50791"/>
+              <a:ext cx="5245100" cy="2333923"/>
+              <a:chOff x="1714500" y="1212841"/>
+              <a:chExt cx="5245100" cy="2333923"/>
+            </a:xfrm>
+          </p:grpSpPr>
+          <p:sp>
+            <p:nvSpPr>
+              <p:cNvPr id="8" name="任意多边形: 形状 7">
+                <a:extLst>
+                  <a:ext uri="{FF2B5EF4-FFF2-40B4-BE49-F238E27FC236}">
+                    <a16:creationId xmlns:a16="http://schemas.microsoft.com/office/drawing/2014/main" id="{B6464A32-0655-CF5E-3AD1-134EED44EC6E}"/>
+                  </a:ext>
+                </a:extLst>
+              </p:cNvPr>
+              <p:cNvSpPr/>
+              <p:nvPr/>
+            </p:nvSpPr>
+            <p:spPr>
+              <a:xfrm>
+                <a:off x="2168236" y="1600200"/>
+                <a:ext cx="647294" cy="1946564"/>
+              </a:xfrm>
+              <a:custGeom>
+                <a:avLst/>
+                <a:gdLst>
+                  <a:gd name="connsiteX0" fmla="*/ 0 w 647294"/>
+                  <a:gd name="connsiteY0" fmla="*/ 0 h 1946564"/>
+                  <a:gd name="connsiteX1" fmla="*/ 647294 w 647294"/>
+                  <a:gd name="connsiteY1" fmla="*/ 0 h 1946564"/>
+                  <a:gd name="connsiteX2" fmla="*/ 577250 w 647294"/>
+                  <a:gd name="connsiteY2" fmla="*/ 115295 h 1946564"/>
+                  <a:gd name="connsiteX3" fmla="*/ 360000 w 647294"/>
+                  <a:gd name="connsiteY3" fmla="*/ 973282 h 1946564"/>
+                  <a:gd name="connsiteX4" fmla="*/ 577250 w 647294"/>
+                  <a:gd name="connsiteY4" fmla="*/ 1831269 h 1946564"/>
+                  <a:gd name="connsiteX5" fmla="*/ 647294 w 647294"/>
+                  <a:gd name="connsiteY5" fmla="*/ 1946564 h 1946564"/>
+                  <a:gd name="connsiteX6" fmla="*/ 0 w 647294"/>
+                  <a:gd name="connsiteY6" fmla="*/ 1946564 h 1946564"/>
+                </a:gdLst>
+                <a:ahLst/>
+                <a:cxnLst>
+                  <a:cxn ang="0">
+                    <a:pos x="connsiteX0" y="connsiteY0"/>
+                  </a:cxn>
+                  <a:cxn ang="0">
+                    <a:pos x="connsiteX1" y="connsiteY1"/>
+                  </a:cxn>
+                  <a:cxn ang="0">
+                    <a:pos x="connsiteX2" y="connsiteY2"/>
+                  </a:cxn>
+                  <a:cxn ang="0">
+                    <a:pos x="connsiteX3" y="connsiteY3"/>
+                  </a:cxn>
+                  <a:cxn ang="0">
+                    <a:pos x="connsiteX4" y="connsiteY4"/>
+                  </a:cxn>
+                  <a:cxn ang="0">
+                    <a:pos x="connsiteX5" y="connsiteY5"/>
+                  </a:cxn>
+                  <a:cxn ang="0">
+                    <a:pos x="connsiteX6" y="connsiteY6"/>
+                  </a:cxn>
+                </a:cxnLst>
+                <a:rect l="l" t="t" r="r" b="b"/>
+                <a:pathLst>
+                  <a:path w="647294" h="1946564">
+                    <a:moveTo>
+                      <a:pt x="0" y="0"/>
+                    </a:moveTo>
+                    <a:lnTo>
+                      <a:pt x="647294" y="0"/>
+                    </a:lnTo>
+                    <a:lnTo>
+                      <a:pt x="577250" y="115295"/>
+                    </a:lnTo>
+                    <a:cubicBezTo>
+                      <a:pt x="438700" y="370343"/>
+                      <a:pt x="360000" y="662622"/>
+                      <a:pt x="360000" y="973282"/>
+                    </a:cubicBezTo>
+                    <a:cubicBezTo>
+                      <a:pt x="360000" y="1283942"/>
+                      <a:pt x="438700" y="1576221"/>
+                      <a:pt x="577250" y="1831269"/>
+                    </a:cubicBezTo>
+                    <a:lnTo>
+                      <a:pt x="647294" y="1946564"/>
+                    </a:lnTo>
+                    <a:lnTo>
+                      <a:pt x="0" y="1946564"/>
+                    </a:lnTo>
+                    <a:close/>
+                  </a:path>
+                </a:pathLst>
+              </a:custGeom>
+              <a:noFill/>
+              <a:ln w="25400">
+                <a:solidFill>
+                  <a:schemeClr val="tx1"/>
+                </a:solidFill>
+              </a:ln>
+            </p:spPr>
+            <p:style>
+              <a:lnRef idx="2">
+                <a:schemeClr val="accent1">
+                  <a:shade val="15000"/>
+                </a:schemeClr>
+              </a:lnRef>
+              <a:fillRef idx="1">
+                <a:schemeClr val="accent1"/>
+              </a:fillRef>
+              <a:effectRef idx="0">
+                <a:schemeClr val="accent1"/>
+              </a:effectRef>
+              <a:fontRef idx="minor">
+                <a:schemeClr val="lt1"/>
+              </a:fontRef>
+            </p:style>
+            <p:txBody>
+              <a:bodyPr wrap="square" rtlCol="0" anchor="ctr">
+                <a:noAutofit/>
+              </a:bodyPr>
+              <a:lstStyle/>
+              <a:p>
+                <a:pPr algn="ctr"/>
+                <a:endParaRPr lang="zh-CN" altLang="en-US"/>
+              </a:p>
+            </p:txBody>
+          </p:sp>
+          <p:sp>
+            <p:nvSpPr>
+              <p:cNvPr id="9" name="任意多边形: 形状 8">
+                <a:extLst>
+                  <a:ext uri="{FF2B5EF4-FFF2-40B4-BE49-F238E27FC236}">
+                    <a16:creationId xmlns:a16="http://schemas.microsoft.com/office/drawing/2014/main" id="{FB80A6CD-B5B6-9C2F-21D2-511A0E92E6C9}"/>
+                  </a:ext>
+                </a:extLst>
+              </p:cNvPr>
+              <p:cNvSpPr/>
+              <p:nvPr/>
+            </p:nvSpPr>
+            <p:spPr>
+              <a:xfrm rot="10800000">
+                <a:off x="5772353" y="1600200"/>
+                <a:ext cx="647294" cy="1946564"/>
+              </a:xfrm>
+              <a:custGeom>
+                <a:avLst/>
+                <a:gdLst>
+                  <a:gd name="connsiteX0" fmla="*/ 0 w 647294"/>
+                  <a:gd name="connsiteY0" fmla="*/ 0 h 1946564"/>
+                  <a:gd name="connsiteX1" fmla="*/ 647294 w 647294"/>
+                  <a:gd name="connsiteY1" fmla="*/ 0 h 1946564"/>
+                  <a:gd name="connsiteX2" fmla="*/ 577250 w 647294"/>
+                  <a:gd name="connsiteY2" fmla="*/ 115295 h 1946564"/>
+                  <a:gd name="connsiteX3" fmla="*/ 360000 w 647294"/>
+                  <a:gd name="connsiteY3" fmla="*/ 973282 h 1946564"/>
+                  <a:gd name="connsiteX4" fmla="*/ 577250 w 647294"/>
+                  <a:gd name="connsiteY4" fmla="*/ 1831269 h 1946564"/>
+                  <a:gd name="connsiteX5" fmla="*/ 647294 w 647294"/>
+                  <a:gd name="connsiteY5" fmla="*/ 1946564 h 1946564"/>
+                  <a:gd name="connsiteX6" fmla="*/ 0 w 647294"/>
+                  <a:gd name="connsiteY6" fmla="*/ 1946564 h 1946564"/>
+                </a:gdLst>
+                <a:ahLst/>
+                <a:cxnLst>
+                  <a:cxn ang="0">
+                    <a:pos x="connsiteX0" y="connsiteY0"/>
+                  </a:cxn>
+                  <a:cxn ang="0">
+                    <a:pos x="connsiteX1" y="connsiteY1"/>
+                  </a:cxn>
+                  <a:cxn ang="0">
+                    <a:pos x="connsiteX2" y="connsiteY2"/>
+                  </a:cxn>
+                  <a:cxn ang="0">
+                    <a:pos x="connsiteX3" y="connsiteY3"/>
+                  </a:cxn>
+                  <a:cxn ang="0">
+                    <a:pos x="connsiteX4" y="connsiteY4"/>
+                  </a:cxn>
+                  <a:cxn ang="0">
+                    <a:pos x="connsiteX5" y="connsiteY5"/>
+                  </a:cxn>
+                  <a:cxn ang="0">
+                    <a:pos x="connsiteX6" y="connsiteY6"/>
+                  </a:cxn>
+                </a:cxnLst>
+                <a:rect l="l" t="t" r="r" b="b"/>
+                <a:pathLst>
+                  <a:path w="647294" h="1946564">
+                    <a:moveTo>
+                      <a:pt x="0" y="0"/>
+                    </a:moveTo>
+                    <a:lnTo>
+                      <a:pt x="647294" y="0"/>
+                    </a:lnTo>
+                    <a:lnTo>
+                      <a:pt x="577250" y="115295"/>
+                    </a:lnTo>
+                    <a:cubicBezTo>
+                      <a:pt x="438700" y="370343"/>
+                      <a:pt x="360000" y="662622"/>
+                      <a:pt x="360000" y="973282"/>
+                    </a:cubicBezTo>
+                    <a:cubicBezTo>
+                      <a:pt x="360000" y="1283942"/>
+                      <a:pt x="438700" y="1576221"/>
+                      <a:pt x="577250" y="1831269"/>
+                    </a:cubicBezTo>
+                    <a:lnTo>
+                      <a:pt x="647294" y="1946564"/>
+                    </a:lnTo>
+                    <a:lnTo>
+                      <a:pt x="0" y="1946564"/>
+                    </a:lnTo>
+                    <a:close/>
+                  </a:path>
+                </a:pathLst>
+              </a:custGeom>
+              <a:noFill/>
+              <a:ln w="25400">
+                <a:solidFill>
+                  <a:schemeClr val="tx1"/>
+                </a:solidFill>
+              </a:ln>
+            </p:spPr>
+            <p:style>
+              <a:lnRef idx="2">
+                <a:schemeClr val="accent1">
+                  <a:shade val="15000"/>
+                </a:schemeClr>
+              </a:lnRef>
+              <a:fillRef idx="1">
+                <a:schemeClr val="accent1"/>
+              </a:fillRef>
+              <a:effectRef idx="0">
+                <a:schemeClr val="accent1"/>
+              </a:effectRef>
+              <a:fontRef idx="minor">
+                <a:schemeClr val="lt1"/>
+              </a:fontRef>
+            </p:style>
+            <p:txBody>
+              <a:bodyPr wrap="square" rtlCol="0" anchor="ctr">
+                <a:noAutofit/>
+              </a:bodyPr>
+              <a:lstStyle/>
+              <a:p>
+                <a:pPr algn="ctr"/>
+                <a:endParaRPr lang="zh-CN" altLang="en-US"/>
+              </a:p>
+            </p:txBody>
+          </p:sp>
+          <p:cxnSp>
+            <p:nvCxnSpPr>
+              <p:cNvPr id="13" name="直接连接符 12">
+                <a:extLst>
+                  <a:ext uri="{FF2B5EF4-FFF2-40B4-BE49-F238E27FC236}">
+                    <a16:creationId xmlns:a16="http://schemas.microsoft.com/office/drawing/2014/main" id="{643F3726-52A2-CF2A-BA2C-86B3FD10A0CF}"/>
+                  </a:ext>
+                </a:extLst>
+              </p:cNvPr>
+              <p:cNvCxnSpPr>
+                <a:cxnSpLocks/>
+              </p:cNvCxnSpPr>
+              <p:nvPr/>
+            </p:nvCxnSpPr>
+            <p:spPr>
+              <a:xfrm>
+                <a:off x="1714500" y="2573482"/>
+                <a:ext cx="5245100" cy="0"/>
+              </a:xfrm>
+              <a:prstGeom prst="line">
+                <a:avLst/>
+              </a:prstGeom>
+              <a:ln w="12700">
+                <a:solidFill>
+                  <a:schemeClr val="tx1"/>
+                </a:solidFill>
+                <a:prstDash val="lgDashDot"/>
+              </a:ln>
+            </p:spPr>
+            <p:style>
+              <a:lnRef idx="1">
+                <a:schemeClr val="accent1"/>
+              </a:lnRef>
+              <a:fillRef idx="0">
+                <a:schemeClr val="accent1"/>
+              </a:fillRef>
+              <a:effectRef idx="0">
+                <a:schemeClr val="accent1"/>
+              </a:effectRef>
+              <a:fontRef idx="minor">
+                <a:schemeClr val="tx1"/>
+              </a:fontRef>
+            </p:style>
+          </p:cxnSp>
+          <p:cxnSp>
+            <p:nvCxnSpPr>
+              <p:cNvPr id="18" name="直接箭头连接符 17">
+                <a:extLst>
+                  <a:ext uri="{FF2B5EF4-FFF2-40B4-BE49-F238E27FC236}">
+                    <a16:creationId xmlns:a16="http://schemas.microsoft.com/office/drawing/2014/main" id="{2ABF5480-DF89-3FE4-7E8D-C4E0F2B3E58D}"/>
+                  </a:ext>
+                </a:extLst>
+              </p:cNvPr>
+              <p:cNvCxnSpPr>
+                <a:cxnSpLocks/>
+                <a:endCxn id="9" idx="4"/>
+              </p:cNvCxnSpPr>
+              <p:nvPr/>
+            </p:nvCxnSpPr>
+            <p:spPr>
+              <a:xfrm flipV="1">
+                <a:off x="2595033" y="1715495"/>
+                <a:ext cx="3247364" cy="358838"/>
+              </a:xfrm>
+              <a:prstGeom prst="straightConnector1">
+                <a:avLst/>
+              </a:prstGeom>
+              <a:ln w="12700">
+                <a:solidFill>
+                  <a:schemeClr val="tx1"/>
+                </a:solidFill>
+                <a:tailEnd type="stealth"/>
+              </a:ln>
+            </p:spPr>
+            <p:style>
+              <a:lnRef idx="1">
+                <a:schemeClr val="accent1"/>
+              </a:lnRef>
+              <a:fillRef idx="0">
+                <a:schemeClr val="accent1"/>
+              </a:fillRef>
+              <a:effectRef idx="0">
+                <a:schemeClr val="accent1"/>
+              </a:effectRef>
+              <a:fontRef idx="minor">
+                <a:schemeClr val="tx1"/>
+              </a:fontRef>
+            </p:style>
+          </p:cxnSp>
+          <mc:AlternateContent xmlns:mc="http://schemas.openxmlformats.org/markup-compatibility/2006" xmlns:a14="http://schemas.microsoft.com/office/drawing/2010/main">
+            <mc:Choice Requires="a14">
+              <p:sp>
+                <p:nvSpPr>
+                  <p:cNvPr id="20" name="文本框 19">
+                    <a:extLst>
+                      <a:ext uri="{FF2B5EF4-FFF2-40B4-BE49-F238E27FC236}">
+                        <a16:creationId xmlns:a16="http://schemas.microsoft.com/office/drawing/2014/main" id="{243057D0-9D77-3D54-71DF-9E313E1177A8}"/>
+                      </a:ext>
+                    </a:extLst>
+                  </p:cNvPr>
+                  <p:cNvSpPr txBox="1"/>
+                  <p:nvPr/>
+                </p:nvSpPr>
+                <p:spPr>
+                  <a:xfrm>
+                    <a:off x="2692533" y="1737700"/>
+                    <a:ext cx="581120" cy="215444"/>
+                  </a:xfrm>
+                  <a:prstGeom prst="rect">
+                    <a:avLst/>
+                  </a:prstGeom>
+                  <a:noFill/>
+                </p:spPr>
+                <p:txBody>
+                  <a:bodyPr wrap="none" lIns="0" tIns="0" rIns="0" bIns="0" rtlCol="0">
+                    <a:spAutoFit/>
+                  </a:bodyPr>
+                  <a:lstStyle/>
+                  <a:p>
+                    <a:pPr/>
+                    <a14:m>
+                      <m:oMathPara xmlns:m="http://schemas.openxmlformats.org/officeDocument/2006/math">
+                        <m:oMathParaPr>
+                          <m:jc m:val="centerGroup"/>
+                        </m:oMathParaPr>
+                        <m:oMath xmlns:m="http://schemas.openxmlformats.org/officeDocument/2006/math">
+                          <m:r>
+                            <a:rPr lang="en-US" altLang="zh-CN" sz="1400" b="0" i="1" smtClean="0">
+                              <a:latin typeface="Cambria Math" panose="02040503050406030204" pitchFamily="18" charset="0"/>
+                            </a:rPr>
+                            <m:t>(</m:t>
+                          </m:r>
+                          <m:sSub>
+                            <m:sSubPr>
+                              <m:ctrlPr>
+                                <a:rPr lang="en-US" altLang="zh-CN" sz="1400" b="0" i="1" smtClean="0">
+                                  <a:latin typeface="Cambria Math" panose="02040503050406030204" pitchFamily="18" charset="0"/>
+                                </a:rPr>
+                              </m:ctrlPr>
+                            </m:sSubPr>
+                            <m:e>
+                              <m:r>
+                                <a:rPr lang="en-US" altLang="zh-CN" sz="1400" b="0" i="1" smtClean="0">
+                                  <a:latin typeface="Cambria Math" panose="02040503050406030204" pitchFamily="18" charset="0"/>
+                                </a:rPr>
+                                <m:t>𝑟</m:t>
+                              </m:r>
+                            </m:e>
+                            <m:sub>
+                              <m:r>
+                                <a:rPr lang="en-US" altLang="zh-CN" sz="1400" b="0" i="1" smtClean="0">
+                                  <a:latin typeface="Cambria Math" panose="02040503050406030204" pitchFamily="18" charset="0"/>
+                                </a:rPr>
+                                <m:t>1</m:t>
+                              </m:r>
+                            </m:sub>
+                          </m:sSub>
+                          <m:r>
+                            <a:rPr lang="en-US" altLang="zh-CN" sz="1400" b="0" i="1" smtClean="0">
+                              <a:latin typeface="Cambria Math" panose="02040503050406030204" pitchFamily="18" charset="0"/>
+                            </a:rPr>
+                            <m:t>,</m:t>
+                          </m:r>
+                          <m:sSub>
+                            <m:sSubPr>
+                              <m:ctrlPr>
+                                <a:rPr lang="en-US" altLang="zh-CN" sz="1400" b="0" i="1" smtClean="0">
+                                  <a:latin typeface="Cambria Math" panose="02040503050406030204" pitchFamily="18" charset="0"/>
+                                </a:rPr>
+                              </m:ctrlPr>
+                            </m:sSubPr>
+                            <m:e>
+                              <m:r>
+                                <a:rPr lang="en-US" altLang="zh-CN" sz="1400" b="0" i="1" smtClean="0">
+                                  <a:latin typeface="Cambria Math" panose="02040503050406030204" pitchFamily="18" charset="0"/>
+                                </a:rPr>
+                                <m:t>𝜃</m:t>
+                              </m:r>
+                            </m:e>
+                            <m:sub>
+                              <m:r>
+                                <a:rPr lang="en-US" altLang="zh-CN" sz="1400" b="0" i="1" smtClean="0">
+                                  <a:latin typeface="Cambria Math" panose="02040503050406030204" pitchFamily="18" charset="0"/>
+                                </a:rPr>
+                                <m:t>1</m:t>
+                              </m:r>
+                            </m:sub>
+                          </m:sSub>
+                          <m:r>
+                            <a:rPr lang="en-US" altLang="zh-CN" sz="1400" b="0" i="1" smtClean="0">
+                              <a:latin typeface="Cambria Math" panose="02040503050406030204" pitchFamily="18" charset="0"/>
+                            </a:rPr>
+                            <m:t>)</m:t>
+                          </m:r>
+                        </m:oMath>
+                      </m:oMathPara>
+                    </a14:m>
+                    <a:endParaRPr lang="zh-CN" altLang="en-US" sz="1400" dirty="0"/>
+                  </a:p>
+                </p:txBody>
+              </p:sp>
+            </mc:Choice>
+            <mc:Fallback xmlns="">
+              <p:sp>
+                <p:nvSpPr>
+                  <p:cNvPr id="20" name="文本框 19">
+                    <a:extLst>
+                      <a:ext uri="{FF2B5EF4-FFF2-40B4-BE49-F238E27FC236}">
+                        <a16:creationId xmlns:a16="http://schemas.microsoft.com/office/drawing/2014/main" id="{243057D0-9D77-3D54-71DF-9E313E1177A8}"/>
+                      </a:ext>
+                    </a:extLst>
+                  </p:cNvPr>
+                  <p:cNvSpPr txBox="1">
+                    <a:spLocks noRot="1" noChangeAspect="1" noMove="1" noResize="1" noEditPoints="1" noAdjustHandles="1" noChangeArrowheads="1" noChangeShapeType="1" noTextEdit="1"/>
+                  </p:cNvSpPr>
+                  <p:nvPr/>
+                </p:nvSpPr>
+                <p:spPr>
+                  <a:xfrm>
+                    <a:off x="2692533" y="1737700"/>
+                    <a:ext cx="581120" cy="215444"/>
+                  </a:xfrm>
+                  <a:prstGeom prst="rect">
+                    <a:avLst/>
+                  </a:prstGeom>
+                  <a:blipFill>
+                    <a:blip r:embed="rId2"/>
+                    <a:stretch>
+                      <a:fillRect l="-10526" r="-9474" b="-30556"/>
+                    </a:stretch>
+                  </a:blipFill>
+                </p:spPr>
+                <p:txBody>
+                  <a:bodyPr/>
+                  <a:lstStyle/>
+                  <a:p>
+                    <a:r>
+                      <a:rPr lang="zh-CN" altLang="en-US">
+                        <a:noFill/>
+                      </a:rPr>
+                      <a:t> </a:t>
+                    </a:r>
+                  </a:p>
+                </p:txBody>
+              </p:sp>
+            </mc:Fallback>
+          </mc:AlternateContent>
+          <p:cxnSp>
+            <p:nvCxnSpPr>
+              <p:cNvPr id="22" name="直接连接符 21">
+                <a:extLst>
+                  <a:ext uri="{FF2B5EF4-FFF2-40B4-BE49-F238E27FC236}">
+                    <a16:creationId xmlns:a16="http://schemas.microsoft.com/office/drawing/2014/main" id="{2F085D2E-F6EE-C753-11C2-605ED2F5F0C3}"/>
+                  </a:ext>
+                </a:extLst>
+              </p:cNvPr>
+              <p:cNvCxnSpPr/>
+              <p:nvPr/>
+            </p:nvCxnSpPr>
+            <p:spPr>
+              <a:xfrm>
+                <a:off x="2595033" y="2074333"/>
+                <a:ext cx="1962790" cy="0"/>
+              </a:xfrm>
+              <a:prstGeom prst="line">
+                <a:avLst/>
+              </a:prstGeom>
+              <a:ln w="12700">
+                <a:solidFill>
+                  <a:schemeClr val="tx1"/>
+                </a:solidFill>
+              </a:ln>
+            </p:spPr>
+            <p:style>
+              <a:lnRef idx="1">
+                <a:schemeClr val="accent1"/>
+              </a:lnRef>
+              <a:fillRef idx="0">
+                <a:schemeClr val="accent1"/>
+              </a:fillRef>
+              <a:effectRef idx="0">
+                <a:schemeClr val="accent1"/>
+              </a:effectRef>
+              <a:fontRef idx="minor">
+                <a:schemeClr val="tx1"/>
+              </a:fontRef>
+            </p:style>
+          </p:cxnSp>
+          <p:sp>
+            <p:nvSpPr>
+              <p:cNvPr id="23" name="弧形 22">
+                <a:extLst>
+                  <a:ext uri="{FF2B5EF4-FFF2-40B4-BE49-F238E27FC236}">
+                    <a16:creationId xmlns:a16="http://schemas.microsoft.com/office/drawing/2014/main" id="{58B4B86B-D6FF-F8DA-E6C1-614C0AEF5526}"/>
+                  </a:ext>
+                </a:extLst>
+              </p:cNvPr>
+              <p:cNvSpPr/>
+              <p:nvPr/>
+            </p:nvSpPr>
+            <p:spPr>
+              <a:xfrm>
+                <a:off x="3358484" y="1737700"/>
+                <a:ext cx="509587" cy="509587"/>
+              </a:xfrm>
+              <a:prstGeom prst="arc">
+                <a:avLst>
+                  <a:gd name="adj1" fmla="val 20808270"/>
+                  <a:gd name="adj2" fmla="val 1144584"/>
+                </a:avLst>
+              </a:prstGeom>
+              <a:ln>
+                <a:solidFill>
+                  <a:schemeClr val="tx1"/>
+                </a:solidFill>
+              </a:ln>
+            </p:spPr>
+            <p:style>
+              <a:lnRef idx="1">
+                <a:schemeClr val="accent1"/>
+              </a:lnRef>
+              <a:fillRef idx="0">
+                <a:schemeClr val="accent1"/>
+              </a:fillRef>
+              <a:effectRef idx="0">
+                <a:schemeClr val="accent1"/>
+              </a:effectRef>
+              <a:fontRef idx="minor">
+                <a:schemeClr val="tx1"/>
+              </a:fontRef>
+            </p:style>
+            <p:txBody>
+              <a:bodyPr rtlCol="0" anchor="ctr"/>
+              <a:lstStyle/>
+              <a:p>
+                <a:pPr algn="ctr"/>
+                <a:endParaRPr lang="zh-CN" altLang="en-US"/>
+              </a:p>
+            </p:txBody>
+          </p:sp>
+          <mc:AlternateContent xmlns:mc="http://schemas.openxmlformats.org/markup-compatibility/2006" xmlns:a14="http://schemas.microsoft.com/office/drawing/2010/main">
+            <mc:Choice Requires="a14">
+              <p:sp>
+                <p:nvSpPr>
+                  <p:cNvPr id="24" name="文本框 23">
+                    <a:extLst>
+                      <a:ext uri="{FF2B5EF4-FFF2-40B4-BE49-F238E27FC236}">
+                        <a16:creationId xmlns:a16="http://schemas.microsoft.com/office/drawing/2014/main" id="{4455EBD5-8EC3-3ED4-AEC6-0C076CAA2207}"/>
+                      </a:ext>
+                    </a:extLst>
+                  </p:cNvPr>
+                  <p:cNvSpPr txBox="1"/>
+                  <p:nvPr/>
+                </p:nvSpPr>
+                <p:spPr>
+                  <a:xfrm>
+                    <a:off x="4082280" y="1901380"/>
+                    <a:ext cx="393056" cy="153888"/>
+                  </a:xfrm>
+                  <a:prstGeom prst="rect">
+                    <a:avLst/>
+                  </a:prstGeom>
+                  <a:noFill/>
+                </p:spPr>
+                <p:txBody>
+                  <a:bodyPr wrap="none" lIns="0" tIns="0" rIns="0" bIns="0" rtlCol="0">
+                    <a:spAutoFit/>
+                  </a:bodyPr>
+                  <a:lstStyle/>
+                  <a:p>
+                    <a:pPr/>
+                    <a14:m>
+                      <m:oMathPara xmlns:m="http://schemas.openxmlformats.org/officeDocument/2006/math">
+                        <m:oMathParaPr>
+                          <m:jc m:val="centerGroup"/>
+                        </m:oMathParaPr>
+                        <m:oMath xmlns:m="http://schemas.openxmlformats.org/officeDocument/2006/math">
+                          <m:sSub>
+                            <m:sSubPr>
+                              <m:ctrlPr>
+                                <a:rPr lang="en-US" altLang="zh-CN" sz="1000" b="0" i="1" smtClean="0">
+                                  <a:latin typeface="Cambria Math" panose="02040503050406030204" pitchFamily="18" charset="0"/>
+                                </a:rPr>
+                              </m:ctrlPr>
+                            </m:sSubPr>
+                            <m:e>
+                              <m:r>
+                                <a:rPr lang="en-US" altLang="zh-CN" sz="1000" b="0" i="1" smtClean="0">
+                                  <a:latin typeface="Cambria Math" panose="02040503050406030204" pitchFamily="18" charset="0"/>
+                                </a:rPr>
+                                <m:t>𝜃</m:t>
+                              </m:r>
+                            </m:e>
+                            <m:sub>
+                              <m:r>
+                                <a:rPr lang="en-US" altLang="zh-CN" sz="1000" b="0" i="1" smtClean="0">
+                                  <a:latin typeface="Cambria Math" panose="02040503050406030204" pitchFamily="18" charset="0"/>
+                                </a:rPr>
+                                <m:t>1</m:t>
+                              </m:r>
+                            </m:sub>
+                          </m:sSub>
+                          <m:sSub>
+                            <m:sSubPr>
+                              <m:ctrlPr>
+                                <a:rPr lang="en-US" altLang="zh-CN" sz="1000" b="0" i="1" smtClean="0">
+                                  <a:latin typeface="Cambria Math" panose="02040503050406030204" pitchFamily="18" charset="0"/>
+                                </a:rPr>
+                              </m:ctrlPr>
+                            </m:sSubPr>
+                            <m:e>
+                              <m:r>
+                                <a:rPr lang="en-US" altLang="zh-CN" sz="1000" b="0" i="1" smtClean="0">
+                                  <a:latin typeface="Cambria Math" panose="02040503050406030204" pitchFamily="18" charset="0"/>
+                                </a:rPr>
+                                <m:t>(</m:t>
+                              </m:r>
+                              <m:r>
+                                <a:rPr lang="en-US" altLang="zh-CN" sz="1000" b="0" i="1" smtClean="0">
+                                  <a:latin typeface="Cambria Math" panose="02040503050406030204" pitchFamily="18" charset="0"/>
+                                </a:rPr>
+                                <m:t>𝜃</m:t>
+                              </m:r>
+                            </m:e>
+                            <m:sub>
+                              <m:r>
+                                <a:rPr lang="en-US" altLang="zh-CN" sz="1000" b="0" i="1" smtClean="0">
+                                  <a:latin typeface="Cambria Math" panose="02040503050406030204" pitchFamily="18" charset="0"/>
+                                </a:rPr>
+                                <m:t>2</m:t>
+                              </m:r>
+                            </m:sub>
+                          </m:sSub>
+                          <m:r>
+                            <a:rPr lang="en-US" altLang="zh-CN" sz="1000" b="0" i="1" smtClean="0">
+                              <a:latin typeface="Cambria Math" panose="02040503050406030204" pitchFamily="18" charset="0"/>
+                            </a:rPr>
+                            <m:t>)</m:t>
+                          </m:r>
+                        </m:oMath>
+                      </m:oMathPara>
+                    </a14:m>
+                    <a:endParaRPr lang="en-US" altLang="zh-CN" sz="1000" b="0" dirty="0"/>
+                  </a:p>
+                </p:txBody>
+              </p:sp>
+            </mc:Choice>
+            <mc:Fallback xmlns="">
+              <p:sp>
+                <p:nvSpPr>
+                  <p:cNvPr id="24" name="文本框 23">
+                    <a:extLst>
+                      <a:ext uri="{FF2B5EF4-FFF2-40B4-BE49-F238E27FC236}">
+                        <a16:creationId xmlns:a16="http://schemas.microsoft.com/office/drawing/2014/main" id="{4455EBD5-8EC3-3ED4-AEC6-0C076CAA2207}"/>
+                      </a:ext>
+                    </a:extLst>
+                  </p:cNvPr>
+                  <p:cNvSpPr txBox="1">
+                    <a:spLocks noRot="1" noChangeAspect="1" noMove="1" noResize="1" noEditPoints="1" noAdjustHandles="1" noChangeArrowheads="1" noChangeShapeType="1" noTextEdit="1"/>
+                  </p:cNvSpPr>
+                  <p:nvPr/>
+                </p:nvSpPr>
+                <p:spPr>
+                  <a:xfrm>
+                    <a:off x="4082280" y="1901380"/>
+                    <a:ext cx="393056" cy="153888"/>
+                  </a:xfrm>
+                  <a:prstGeom prst="rect">
+                    <a:avLst/>
+                  </a:prstGeom>
+                  <a:blipFill>
+                    <a:blip r:embed="rId3"/>
+                    <a:stretch>
+                      <a:fillRect l="-7813" r="-12500" b="-38462"/>
+                    </a:stretch>
+                  </a:blipFill>
+                </p:spPr>
+                <p:txBody>
+                  <a:bodyPr/>
+                  <a:lstStyle/>
+                  <a:p>
+                    <a:r>
+                      <a:rPr lang="zh-CN" altLang="en-US">
+                        <a:noFill/>
+                      </a:rPr>
+                      <a:t> </a:t>
+                    </a:r>
+                  </a:p>
+                </p:txBody>
+              </p:sp>
+            </mc:Fallback>
+          </mc:AlternateContent>
+          <p:cxnSp>
+            <p:nvCxnSpPr>
+              <p:cNvPr id="29" name="直接连接符 28">
+                <a:extLst>
+                  <a:ext uri="{FF2B5EF4-FFF2-40B4-BE49-F238E27FC236}">
+                    <a16:creationId xmlns:a16="http://schemas.microsoft.com/office/drawing/2014/main" id="{C3CC0435-CE25-7A15-A7C6-A14A6C7F2BCF}"/>
+                  </a:ext>
+                </a:extLst>
+              </p:cNvPr>
+              <p:cNvCxnSpPr>
+                <a:cxnSpLocks/>
+              </p:cNvCxnSpPr>
+              <p:nvPr/>
+            </p:nvCxnSpPr>
+            <p:spPr>
+              <a:xfrm>
+                <a:off x="2779513" y="2074333"/>
+                <a:ext cx="0" cy="499149"/>
+              </a:xfrm>
+              <a:prstGeom prst="line">
+                <a:avLst/>
+              </a:prstGeom>
+              <a:ln w="12700">
+                <a:solidFill>
+                  <a:schemeClr val="tx1"/>
+                </a:solidFill>
+                <a:headEnd type="stealth"/>
+                <a:tailEnd type="stealth"/>
+              </a:ln>
+            </p:spPr>
+            <p:style>
+              <a:lnRef idx="1">
+                <a:schemeClr val="accent1"/>
+              </a:lnRef>
+              <a:fillRef idx="0">
+                <a:schemeClr val="accent1"/>
+              </a:fillRef>
+              <a:effectRef idx="0">
+                <a:schemeClr val="accent1"/>
+              </a:effectRef>
+              <a:fontRef idx="minor">
+                <a:schemeClr val="tx1"/>
+              </a:fontRef>
+            </p:style>
+          </p:cxnSp>
+          <mc:AlternateContent xmlns:mc="http://schemas.openxmlformats.org/markup-compatibility/2006" xmlns:a14="http://schemas.microsoft.com/office/drawing/2010/main">
+            <mc:Choice Requires="a14">
+              <p:sp>
+                <p:nvSpPr>
+                  <p:cNvPr id="31" name="文本框 30">
+                    <a:extLst>
+                      <a:ext uri="{FF2B5EF4-FFF2-40B4-BE49-F238E27FC236}">
+                        <a16:creationId xmlns:a16="http://schemas.microsoft.com/office/drawing/2014/main" id="{8B5DF6DE-13DA-3795-D083-AD1793FBC351}"/>
+                      </a:ext>
+                    </a:extLst>
+                  </p:cNvPr>
+                  <p:cNvSpPr txBox="1"/>
+                  <p:nvPr/>
+                </p:nvSpPr>
+                <p:spPr>
+                  <a:xfrm>
+                    <a:off x="2815530" y="2230236"/>
+                    <a:ext cx="138948" cy="153888"/>
+                  </a:xfrm>
+                  <a:prstGeom prst="rect">
+                    <a:avLst/>
+                  </a:prstGeom>
+                  <a:noFill/>
+                </p:spPr>
+                <p:txBody>
+                  <a:bodyPr wrap="none" lIns="0" tIns="0" rIns="0" bIns="0" rtlCol="0">
+                    <a:spAutoFit/>
+                  </a:bodyPr>
+                  <a:lstStyle/>
+                  <a:p>
+                    <a:pPr/>
+                    <a14:m>
+                      <m:oMathPara xmlns:m="http://schemas.openxmlformats.org/officeDocument/2006/math">
+                        <m:oMathParaPr>
+                          <m:jc m:val="centerGroup"/>
+                        </m:oMathParaPr>
+                        <m:oMath xmlns:m="http://schemas.openxmlformats.org/officeDocument/2006/math">
+                          <m:sSub>
+                            <m:sSubPr>
+                              <m:ctrlPr>
+                                <a:rPr lang="en-US" altLang="zh-CN" sz="1000" b="0" i="1" smtClean="0">
+                                  <a:latin typeface="Cambria Math" panose="02040503050406030204" pitchFamily="18" charset="0"/>
+                                </a:rPr>
+                              </m:ctrlPr>
+                            </m:sSubPr>
+                            <m:e>
+                              <m:r>
+                                <a:rPr lang="en-US" altLang="zh-CN" sz="1000" b="0" i="1" smtClean="0">
+                                  <a:latin typeface="Cambria Math" panose="02040503050406030204" pitchFamily="18" charset="0"/>
+                                </a:rPr>
+                                <m:t>𝑟</m:t>
+                              </m:r>
+                            </m:e>
+                            <m:sub>
+                              <m:r>
+                                <a:rPr lang="en-US" altLang="zh-CN" sz="1000" b="0" i="1" smtClean="0">
+                                  <a:latin typeface="Cambria Math" panose="02040503050406030204" pitchFamily="18" charset="0"/>
+                                </a:rPr>
+                                <m:t>1</m:t>
+                              </m:r>
+                            </m:sub>
+                          </m:sSub>
+                        </m:oMath>
+                      </m:oMathPara>
+                    </a14:m>
+                    <a:endParaRPr lang="en-US" altLang="zh-CN" sz="1000" b="0" dirty="0"/>
+                  </a:p>
+                </p:txBody>
+              </p:sp>
+            </mc:Choice>
+            <mc:Fallback xmlns="">
+              <p:sp>
+                <p:nvSpPr>
+                  <p:cNvPr id="31" name="文本框 30">
+                    <a:extLst>
+                      <a:ext uri="{FF2B5EF4-FFF2-40B4-BE49-F238E27FC236}">
+                        <a16:creationId xmlns:a16="http://schemas.microsoft.com/office/drawing/2014/main" id="{8B5DF6DE-13DA-3795-D083-AD1793FBC351}"/>
+                      </a:ext>
+                    </a:extLst>
+                  </p:cNvPr>
+                  <p:cNvSpPr txBox="1">
+                    <a:spLocks noRot="1" noChangeAspect="1" noMove="1" noResize="1" noEditPoints="1" noAdjustHandles="1" noChangeArrowheads="1" noChangeShapeType="1" noTextEdit="1"/>
+                  </p:cNvSpPr>
+                  <p:nvPr/>
+                </p:nvSpPr>
+                <p:spPr>
+                  <a:xfrm>
+                    <a:off x="2815530" y="2230236"/>
+                    <a:ext cx="138948" cy="153888"/>
+                  </a:xfrm>
+                  <a:prstGeom prst="rect">
+                    <a:avLst/>
+                  </a:prstGeom>
+                  <a:blipFill>
+                    <a:blip r:embed="rId4"/>
+                    <a:stretch>
+                      <a:fillRect l="-13043" r="-8696" b="-16000"/>
+                    </a:stretch>
+                  </a:blipFill>
+                </p:spPr>
+                <p:txBody>
+                  <a:bodyPr/>
+                  <a:lstStyle/>
+                  <a:p>
+                    <a:r>
+                      <a:rPr lang="zh-CN" altLang="en-US">
+                        <a:noFill/>
+                      </a:rPr>
+                      <a:t> </a:t>
+                    </a:r>
+                  </a:p>
+                </p:txBody>
+              </p:sp>
+            </mc:Fallback>
+          </mc:AlternateContent>
+          <mc:AlternateContent xmlns:mc="http://schemas.openxmlformats.org/markup-compatibility/2006" xmlns:a14="http://schemas.microsoft.com/office/drawing/2010/main">
+            <mc:Choice Requires="a14">
+              <p:sp>
+                <p:nvSpPr>
+                  <p:cNvPr id="32" name="文本框 31">
+                    <a:extLst>
+                      <a:ext uri="{FF2B5EF4-FFF2-40B4-BE49-F238E27FC236}">
+                        <a16:creationId xmlns:a16="http://schemas.microsoft.com/office/drawing/2014/main" id="{1426AD22-8632-4D24-AD15-4A7D2B15D2B6}"/>
+                      </a:ext>
+                    </a:extLst>
+                  </p:cNvPr>
+                  <p:cNvSpPr txBox="1"/>
+                  <p:nvPr/>
+                </p:nvSpPr>
+                <p:spPr>
+                  <a:xfrm>
+                    <a:off x="5127565" y="1500050"/>
+                    <a:ext cx="547958" cy="215444"/>
+                  </a:xfrm>
+                  <a:prstGeom prst="rect">
+                    <a:avLst/>
+                  </a:prstGeom>
+                  <a:noFill/>
+                </p:spPr>
+                <p:txBody>
+                  <a:bodyPr wrap="square" lIns="0" tIns="0" rIns="0" bIns="0" rtlCol="0">
+                    <a:spAutoFit/>
+                  </a:bodyPr>
+                  <a:lstStyle/>
+                  <a:p>
+                    <a:pPr/>
+                    <a14:m>
+                      <m:oMathPara xmlns:m="http://schemas.openxmlformats.org/officeDocument/2006/math">
+                        <m:oMathParaPr>
+                          <m:jc m:val="centerGroup"/>
+                        </m:oMathParaPr>
+                        <m:oMath xmlns:m="http://schemas.openxmlformats.org/officeDocument/2006/math">
+                          <m:r>
+                            <a:rPr lang="en-US" altLang="zh-CN" sz="1400" b="0" i="1" smtClean="0">
+                              <a:latin typeface="Cambria Math" panose="02040503050406030204" pitchFamily="18" charset="0"/>
+                            </a:rPr>
+                            <m:t>(</m:t>
+                          </m:r>
+                          <m:sSub>
+                            <m:sSubPr>
+                              <m:ctrlPr>
+                                <a:rPr lang="en-US" altLang="zh-CN" sz="1400" b="0" i="1" smtClean="0">
+                                  <a:latin typeface="Cambria Math" panose="02040503050406030204" pitchFamily="18" charset="0"/>
+                                </a:rPr>
+                              </m:ctrlPr>
+                            </m:sSubPr>
+                            <m:e>
+                              <m:r>
+                                <a:rPr lang="en-US" altLang="zh-CN" sz="1400" b="0" i="1" smtClean="0">
+                                  <a:latin typeface="Cambria Math" panose="02040503050406030204" pitchFamily="18" charset="0"/>
+                                </a:rPr>
+                                <m:t>𝑟</m:t>
+                              </m:r>
+                            </m:e>
+                            <m:sub>
+                              <m:r>
+                                <a:rPr lang="en-US" altLang="zh-CN" sz="1400" b="0" i="1" smtClean="0">
+                                  <a:latin typeface="Cambria Math" panose="02040503050406030204" pitchFamily="18" charset="0"/>
+                                </a:rPr>
+                                <m:t>2</m:t>
+                              </m:r>
+                            </m:sub>
+                          </m:sSub>
+                          <m:r>
+                            <a:rPr lang="en-US" altLang="zh-CN" sz="1400" b="0" i="1" smtClean="0">
+                              <a:latin typeface="Cambria Math" panose="02040503050406030204" pitchFamily="18" charset="0"/>
+                            </a:rPr>
+                            <m:t>,</m:t>
+                          </m:r>
+                          <m:sSub>
+                            <m:sSubPr>
+                              <m:ctrlPr>
+                                <a:rPr lang="en-US" altLang="zh-CN" sz="1400" b="0" i="1" smtClean="0">
+                                  <a:latin typeface="Cambria Math" panose="02040503050406030204" pitchFamily="18" charset="0"/>
+                                </a:rPr>
+                              </m:ctrlPr>
+                            </m:sSubPr>
+                            <m:e>
+                              <m:r>
+                                <a:rPr lang="en-US" altLang="zh-CN" sz="1400" b="0" i="1" smtClean="0">
+                                  <a:latin typeface="Cambria Math" panose="02040503050406030204" pitchFamily="18" charset="0"/>
+                                </a:rPr>
+                                <m:t>𝜃</m:t>
+                              </m:r>
+                            </m:e>
+                            <m:sub>
+                              <m:r>
+                                <a:rPr lang="en-US" altLang="zh-CN" sz="1400" b="0" i="1" smtClean="0">
+                                  <a:latin typeface="Cambria Math" panose="02040503050406030204" pitchFamily="18" charset="0"/>
+                                </a:rPr>
+                                <m:t>2</m:t>
+                              </m:r>
+                            </m:sub>
+                          </m:sSub>
+                          <m:r>
+                            <a:rPr lang="en-US" altLang="zh-CN" sz="1400" b="0" i="1" smtClean="0">
+                              <a:latin typeface="Cambria Math" panose="02040503050406030204" pitchFamily="18" charset="0"/>
+                            </a:rPr>
+                            <m:t>)</m:t>
+                          </m:r>
+                        </m:oMath>
+                      </m:oMathPara>
+                    </a14:m>
+                    <a:endParaRPr lang="zh-CN" altLang="en-US" sz="1400" dirty="0"/>
+                  </a:p>
+                </p:txBody>
+              </p:sp>
+            </mc:Choice>
+            <mc:Fallback xmlns="">
+              <p:sp>
+                <p:nvSpPr>
+                  <p:cNvPr id="32" name="文本框 31">
+                    <a:extLst>
+                      <a:ext uri="{FF2B5EF4-FFF2-40B4-BE49-F238E27FC236}">
+                        <a16:creationId xmlns:a16="http://schemas.microsoft.com/office/drawing/2014/main" id="{1426AD22-8632-4D24-AD15-4A7D2B15D2B6}"/>
+                      </a:ext>
+                    </a:extLst>
+                  </p:cNvPr>
+                  <p:cNvSpPr txBox="1">
+                    <a:spLocks noRot="1" noChangeAspect="1" noMove="1" noResize="1" noEditPoints="1" noAdjustHandles="1" noChangeArrowheads="1" noChangeShapeType="1" noTextEdit="1"/>
+                  </p:cNvSpPr>
+                  <p:nvPr/>
+                </p:nvSpPr>
+                <p:spPr>
+                  <a:xfrm>
+                    <a:off x="5127565" y="1500050"/>
+                    <a:ext cx="547958" cy="215444"/>
+                  </a:xfrm>
+                  <a:prstGeom prst="rect">
+                    <a:avLst/>
+                  </a:prstGeom>
+                  <a:blipFill>
+                    <a:blip r:embed="rId5"/>
+                    <a:stretch>
+                      <a:fillRect l="-13333" r="-14444" b="-30556"/>
+                    </a:stretch>
+                  </a:blipFill>
+                </p:spPr>
+                <p:txBody>
+                  <a:bodyPr/>
+                  <a:lstStyle/>
+                  <a:p>
+                    <a:r>
+                      <a:rPr lang="zh-CN" altLang="en-US">
+                        <a:noFill/>
+                      </a:rPr>
+                      <a:t> </a:t>
+                    </a:r>
+                  </a:p>
+                </p:txBody>
+              </p:sp>
+            </mc:Fallback>
+          </mc:AlternateContent>
+          <p:cxnSp>
+            <p:nvCxnSpPr>
+              <p:cNvPr id="34" name="直接箭头连接符 33">
+                <a:extLst>
+                  <a:ext uri="{FF2B5EF4-FFF2-40B4-BE49-F238E27FC236}">
+                    <a16:creationId xmlns:a16="http://schemas.microsoft.com/office/drawing/2014/main" id="{1364C564-38AE-36D7-A3CB-BF1BA31237E2}"/>
+                  </a:ext>
+                </a:extLst>
+              </p:cNvPr>
+              <p:cNvCxnSpPr>
+                <a:cxnSpLocks/>
+              </p:cNvCxnSpPr>
+              <p:nvPr/>
+            </p:nvCxnSpPr>
+            <p:spPr>
+              <a:xfrm flipH="1">
+                <a:off x="2595033" y="1715494"/>
+                <a:ext cx="3238014" cy="1328272"/>
+              </a:xfrm>
+              <a:prstGeom prst="straightConnector1">
+                <a:avLst/>
+              </a:prstGeom>
+              <a:ln w="12700">
+                <a:solidFill>
+                  <a:schemeClr val="tx1"/>
+                </a:solidFill>
+                <a:tailEnd type="stealth"/>
+              </a:ln>
+            </p:spPr>
+            <p:style>
+              <a:lnRef idx="1">
+                <a:schemeClr val="accent1"/>
+              </a:lnRef>
+              <a:fillRef idx="0">
+                <a:schemeClr val="accent1"/>
+              </a:fillRef>
+              <a:effectRef idx="0">
+                <a:schemeClr val="accent1"/>
+              </a:effectRef>
+              <a:fontRef idx="minor">
+                <a:schemeClr val="tx1"/>
+              </a:fontRef>
+            </p:style>
+          </p:cxnSp>
+          <mc:AlternateContent xmlns:mc="http://schemas.openxmlformats.org/markup-compatibility/2006" xmlns:a14="http://schemas.microsoft.com/office/drawing/2010/main">
+            <mc:Choice Requires="a14">
+              <p:sp>
+                <p:nvSpPr>
+                  <p:cNvPr id="36" name="文本框 35">
+                    <a:extLst>
+                      <a:ext uri="{FF2B5EF4-FFF2-40B4-BE49-F238E27FC236}">
+                        <a16:creationId xmlns:a16="http://schemas.microsoft.com/office/drawing/2014/main" id="{3A3E2D1B-509D-1C9E-2BA1-B55A0F665BF1}"/>
+                      </a:ext>
+                    </a:extLst>
+                  </p:cNvPr>
+                  <p:cNvSpPr txBox="1"/>
+                  <p:nvPr/>
+                </p:nvSpPr>
+                <p:spPr>
+                  <a:xfrm>
+                    <a:off x="5278214" y="1900767"/>
+                    <a:ext cx="547958" cy="215444"/>
+                  </a:xfrm>
+                  <a:prstGeom prst="rect">
+                    <a:avLst/>
+                  </a:prstGeom>
+                  <a:noFill/>
+                </p:spPr>
+                <p:txBody>
+                  <a:bodyPr wrap="square" lIns="0" tIns="0" rIns="0" bIns="0" rtlCol="0">
+                    <a:spAutoFit/>
+                  </a:bodyPr>
+                  <a:lstStyle/>
+                  <a:p>
+                    <a:pPr/>
+                    <a14:m>
+                      <m:oMathPara xmlns:m="http://schemas.openxmlformats.org/officeDocument/2006/math">
+                        <m:oMathParaPr>
+                          <m:jc m:val="centerGroup"/>
+                        </m:oMathParaPr>
+                        <m:oMath xmlns:m="http://schemas.openxmlformats.org/officeDocument/2006/math">
+                          <m:r>
+                            <a:rPr lang="en-US" altLang="zh-CN" sz="1400" b="0" i="1" smtClean="0">
+                              <a:latin typeface="Cambria Math" panose="02040503050406030204" pitchFamily="18" charset="0"/>
+                            </a:rPr>
+                            <m:t>(</m:t>
+                          </m:r>
+                          <m:sSub>
+                            <m:sSubPr>
+                              <m:ctrlPr>
+                                <a:rPr lang="en-US" altLang="zh-CN" sz="1400" b="0" i="1" smtClean="0">
+                                  <a:latin typeface="Cambria Math" panose="02040503050406030204" pitchFamily="18" charset="0"/>
+                                </a:rPr>
+                              </m:ctrlPr>
+                            </m:sSubPr>
+                            <m:e>
+                              <m:r>
+                                <a:rPr lang="en-US" altLang="zh-CN" sz="1400" b="0" i="1" smtClean="0">
+                                  <a:latin typeface="Cambria Math" panose="02040503050406030204" pitchFamily="18" charset="0"/>
+                                </a:rPr>
+                                <m:t>𝑟</m:t>
+                              </m:r>
+                            </m:e>
+                            <m:sub>
+                              <m:r>
+                                <a:rPr lang="en-US" altLang="zh-CN" sz="1400" b="0" i="1" smtClean="0">
+                                  <a:latin typeface="Cambria Math" panose="02040503050406030204" pitchFamily="18" charset="0"/>
+                                </a:rPr>
+                                <m:t>3</m:t>
+                              </m:r>
+                            </m:sub>
+                          </m:sSub>
+                          <m:r>
+                            <a:rPr lang="en-US" altLang="zh-CN" sz="1400" b="0" i="1" smtClean="0">
+                              <a:latin typeface="Cambria Math" panose="02040503050406030204" pitchFamily="18" charset="0"/>
+                            </a:rPr>
+                            <m:t>,</m:t>
+                          </m:r>
+                          <m:sSub>
+                            <m:sSubPr>
+                              <m:ctrlPr>
+                                <a:rPr lang="en-US" altLang="zh-CN" sz="1400" b="0" i="1" smtClean="0">
+                                  <a:latin typeface="Cambria Math" panose="02040503050406030204" pitchFamily="18" charset="0"/>
+                                </a:rPr>
+                              </m:ctrlPr>
+                            </m:sSubPr>
+                            <m:e>
+                              <m:r>
+                                <a:rPr lang="en-US" altLang="zh-CN" sz="1400" b="0" i="1" smtClean="0">
+                                  <a:latin typeface="Cambria Math" panose="02040503050406030204" pitchFamily="18" charset="0"/>
+                                </a:rPr>
+                                <m:t>𝜃</m:t>
+                              </m:r>
+                            </m:e>
+                            <m:sub>
+                              <m:r>
+                                <a:rPr lang="en-US" altLang="zh-CN" sz="1400" b="0" i="1" smtClean="0">
+                                  <a:latin typeface="Cambria Math" panose="02040503050406030204" pitchFamily="18" charset="0"/>
+                                </a:rPr>
+                                <m:t>3</m:t>
+                              </m:r>
+                            </m:sub>
+                          </m:sSub>
+                          <m:r>
+                            <a:rPr lang="en-US" altLang="zh-CN" sz="1400" b="0" i="1" smtClean="0">
+                              <a:latin typeface="Cambria Math" panose="02040503050406030204" pitchFamily="18" charset="0"/>
+                            </a:rPr>
+                            <m:t>)</m:t>
+                          </m:r>
+                        </m:oMath>
+                      </m:oMathPara>
+                    </a14:m>
+                    <a:endParaRPr lang="zh-CN" altLang="en-US" sz="1400" dirty="0"/>
+                  </a:p>
+                </p:txBody>
+              </p:sp>
+            </mc:Choice>
+            <mc:Fallback xmlns="">
+              <p:sp>
+                <p:nvSpPr>
+                  <p:cNvPr id="36" name="文本框 35">
+                    <a:extLst>
+                      <a:ext uri="{FF2B5EF4-FFF2-40B4-BE49-F238E27FC236}">
+                        <a16:creationId xmlns:a16="http://schemas.microsoft.com/office/drawing/2014/main" id="{3A3E2D1B-509D-1C9E-2BA1-B55A0F665BF1}"/>
+                      </a:ext>
+                    </a:extLst>
+                  </p:cNvPr>
+                  <p:cNvSpPr txBox="1">
+                    <a:spLocks noRot="1" noChangeAspect="1" noMove="1" noResize="1" noEditPoints="1" noAdjustHandles="1" noChangeArrowheads="1" noChangeShapeType="1" noTextEdit="1"/>
+                  </p:cNvSpPr>
+                  <p:nvPr/>
+                </p:nvSpPr>
+                <p:spPr>
+                  <a:xfrm>
+                    <a:off x="5278214" y="1900767"/>
+                    <a:ext cx="547958" cy="215444"/>
+                  </a:xfrm>
+                  <a:prstGeom prst="rect">
+                    <a:avLst/>
+                  </a:prstGeom>
+                  <a:blipFill>
+                    <a:blip r:embed="rId6"/>
+                    <a:stretch>
+                      <a:fillRect l="-14444" r="-13333" b="-30556"/>
+                    </a:stretch>
+                  </a:blipFill>
+                </p:spPr>
+                <p:txBody>
+                  <a:bodyPr/>
+                  <a:lstStyle/>
+                  <a:p>
+                    <a:r>
+                      <a:rPr lang="zh-CN" altLang="en-US">
+                        <a:noFill/>
+                      </a:rPr>
+                      <a:t> </a:t>
+                    </a:r>
+                  </a:p>
+                </p:txBody>
+              </p:sp>
+            </mc:Fallback>
+          </mc:AlternateContent>
+          <p:cxnSp>
+            <p:nvCxnSpPr>
+              <p:cNvPr id="37" name="直接连接符 36">
+                <a:extLst>
+                  <a:ext uri="{FF2B5EF4-FFF2-40B4-BE49-F238E27FC236}">
+                    <a16:creationId xmlns:a16="http://schemas.microsoft.com/office/drawing/2014/main" id="{D585404F-6C64-4382-7A53-A766C6445231}"/>
+                  </a:ext>
+                </a:extLst>
+              </p:cNvPr>
+              <p:cNvCxnSpPr>
+                <a:cxnSpLocks/>
+              </p:cNvCxnSpPr>
+              <p:nvPr/>
+            </p:nvCxnSpPr>
+            <p:spPr>
+              <a:xfrm>
+                <a:off x="5826667" y="1715495"/>
+                <a:ext cx="0" cy="857986"/>
+              </a:xfrm>
+              <a:prstGeom prst="line">
+                <a:avLst/>
+              </a:prstGeom>
+              <a:ln w="12700">
+                <a:solidFill>
+                  <a:schemeClr val="tx1"/>
+                </a:solidFill>
+                <a:headEnd type="stealth"/>
+                <a:tailEnd type="stealth"/>
+              </a:ln>
+            </p:spPr>
+            <p:style>
+              <a:lnRef idx="1">
+                <a:schemeClr val="accent1"/>
+              </a:lnRef>
+              <a:fillRef idx="0">
+                <a:schemeClr val="accent1"/>
+              </a:fillRef>
+              <a:effectRef idx="0">
+                <a:schemeClr val="accent1"/>
+              </a:effectRef>
+              <a:fontRef idx="minor">
+                <a:schemeClr val="tx1"/>
+              </a:fontRef>
+            </p:style>
+          </p:cxnSp>
+          <mc:AlternateContent xmlns:mc="http://schemas.openxmlformats.org/markup-compatibility/2006" xmlns:a14="http://schemas.microsoft.com/office/drawing/2010/main">
+            <mc:Choice Requires="a14">
+              <p:sp>
+                <p:nvSpPr>
+                  <p:cNvPr id="40" name="文本框 39">
+                    <a:extLst>
+                      <a:ext uri="{FF2B5EF4-FFF2-40B4-BE49-F238E27FC236}">
+                        <a16:creationId xmlns:a16="http://schemas.microsoft.com/office/drawing/2014/main" id="{1F820EBB-F436-7212-F92E-4A538F50C8B3}"/>
+                      </a:ext>
+                    </a:extLst>
+                  </p:cNvPr>
+                  <p:cNvSpPr txBox="1"/>
+                  <p:nvPr/>
+                </p:nvSpPr>
+                <p:spPr>
+                  <a:xfrm>
+                    <a:off x="5481015" y="2214642"/>
+                    <a:ext cx="354328" cy="153888"/>
+                  </a:xfrm>
+                  <a:prstGeom prst="rect">
+                    <a:avLst/>
+                  </a:prstGeom>
+                  <a:noFill/>
+                </p:spPr>
+                <p:txBody>
+                  <a:bodyPr wrap="none" lIns="0" tIns="0" rIns="0" bIns="0" rtlCol="0">
+                    <a:spAutoFit/>
+                  </a:bodyPr>
+                  <a:lstStyle/>
+                  <a:p>
+                    <a:pPr/>
+                    <a14:m>
+                      <m:oMathPara xmlns:m="http://schemas.openxmlformats.org/officeDocument/2006/math">
+                        <m:oMathParaPr>
+                          <m:jc m:val="centerGroup"/>
+                        </m:oMathParaPr>
+                        <m:oMath xmlns:m="http://schemas.openxmlformats.org/officeDocument/2006/math">
+                          <m:sSub>
+                            <m:sSubPr>
+                              <m:ctrlPr>
+                                <a:rPr lang="en-US" altLang="zh-CN" sz="1000" b="0" i="1" smtClean="0">
+                                  <a:latin typeface="Cambria Math" panose="02040503050406030204" pitchFamily="18" charset="0"/>
+                                </a:rPr>
+                              </m:ctrlPr>
+                            </m:sSubPr>
+                            <m:e>
+                              <m:r>
+                                <a:rPr lang="en-US" altLang="zh-CN" sz="1000" b="0" i="1" smtClean="0">
+                                  <a:latin typeface="Cambria Math" panose="02040503050406030204" pitchFamily="18" charset="0"/>
+                                </a:rPr>
+                                <m:t>𝑟</m:t>
+                              </m:r>
+                            </m:e>
+                            <m:sub>
+                              <m:r>
+                                <a:rPr lang="en-US" altLang="zh-CN" sz="1000" b="0" i="1" smtClean="0">
+                                  <a:latin typeface="Cambria Math" panose="02040503050406030204" pitchFamily="18" charset="0"/>
+                                </a:rPr>
+                                <m:t>2</m:t>
+                              </m:r>
+                            </m:sub>
+                          </m:sSub>
+                          <m:r>
+                            <a:rPr lang="en-US" altLang="zh-CN" sz="1000" b="0" i="1" smtClean="0">
+                              <a:latin typeface="Cambria Math" panose="02040503050406030204" pitchFamily="18" charset="0"/>
+                            </a:rPr>
+                            <m:t>(</m:t>
+                          </m:r>
+                          <m:sSub>
+                            <m:sSubPr>
+                              <m:ctrlPr>
+                                <a:rPr lang="en-US" altLang="zh-CN" sz="1000" b="0" i="1" smtClean="0">
+                                  <a:latin typeface="Cambria Math" panose="02040503050406030204" pitchFamily="18" charset="0"/>
+                                </a:rPr>
+                              </m:ctrlPr>
+                            </m:sSubPr>
+                            <m:e>
+                              <m:r>
+                                <a:rPr lang="en-US" altLang="zh-CN" sz="1000" b="0" i="1" smtClean="0">
+                                  <a:latin typeface="Cambria Math" panose="02040503050406030204" pitchFamily="18" charset="0"/>
+                                </a:rPr>
+                                <m:t>𝑟</m:t>
+                              </m:r>
+                            </m:e>
+                            <m:sub>
+                              <m:r>
+                                <a:rPr lang="en-US" altLang="zh-CN" sz="1000" b="0" i="1" smtClean="0">
+                                  <a:latin typeface="Cambria Math" panose="02040503050406030204" pitchFamily="18" charset="0"/>
+                                </a:rPr>
+                                <m:t>3</m:t>
+                              </m:r>
+                            </m:sub>
+                          </m:sSub>
+                          <m:r>
+                            <a:rPr lang="en-US" altLang="zh-CN" sz="1000" b="0" i="1" smtClean="0">
+                              <a:latin typeface="Cambria Math" panose="02040503050406030204" pitchFamily="18" charset="0"/>
+                            </a:rPr>
+                            <m:t>)</m:t>
+                          </m:r>
+                        </m:oMath>
+                      </m:oMathPara>
+                    </a14:m>
+                    <a:endParaRPr lang="en-US" altLang="zh-CN" sz="1000" b="0" dirty="0"/>
+                  </a:p>
+                </p:txBody>
+              </p:sp>
+            </mc:Choice>
+            <mc:Fallback xmlns="">
+              <p:sp>
+                <p:nvSpPr>
+                  <p:cNvPr id="40" name="文本框 39">
+                    <a:extLst>
+                      <a:ext uri="{FF2B5EF4-FFF2-40B4-BE49-F238E27FC236}">
+                        <a16:creationId xmlns:a16="http://schemas.microsoft.com/office/drawing/2014/main" id="{1F820EBB-F436-7212-F92E-4A538F50C8B3}"/>
+                      </a:ext>
+                    </a:extLst>
+                  </p:cNvPr>
+                  <p:cNvSpPr txBox="1">
+                    <a:spLocks noRot="1" noChangeAspect="1" noMove="1" noResize="1" noEditPoints="1" noAdjustHandles="1" noChangeArrowheads="1" noChangeShapeType="1" noTextEdit="1"/>
+                  </p:cNvSpPr>
+                  <p:nvPr/>
+                </p:nvSpPr>
+                <p:spPr>
+                  <a:xfrm>
+                    <a:off x="5481015" y="2214642"/>
+                    <a:ext cx="354328" cy="153888"/>
+                  </a:xfrm>
+                  <a:prstGeom prst="rect">
+                    <a:avLst/>
+                  </a:prstGeom>
+                  <a:blipFill>
+                    <a:blip r:embed="rId7"/>
+                    <a:stretch>
+                      <a:fillRect l="-3448" t="-4000" r="-15517" b="-40000"/>
+                    </a:stretch>
+                  </a:blipFill>
+                </p:spPr>
+                <p:txBody>
+                  <a:bodyPr/>
+                  <a:lstStyle/>
+                  <a:p>
+                    <a:r>
+                      <a:rPr lang="zh-CN" altLang="en-US">
+                        <a:noFill/>
+                      </a:rPr>
+                      <a:t> </a:t>
+                    </a:r>
+                  </a:p>
+                </p:txBody>
+              </p:sp>
+            </mc:Fallback>
+          </mc:AlternateContent>
+          <mc:AlternateContent xmlns:mc="http://schemas.openxmlformats.org/markup-compatibility/2006" xmlns:a14="http://schemas.microsoft.com/office/drawing/2010/main">
+            <mc:Choice Requires="a14">
+              <p:sp>
+                <p:nvSpPr>
+                  <p:cNvPr id="41" name="文本框 40">
+                    <a:extLst>
+                      <a:ext uri="{FF2B5EF4-FFF2-40B4-BE49-F238E27FC236}">
+                        <a16:creationId xmlns:a16="http://schemas.microsoft.com/office/drawing/2014/main" id="{15F7BF37-726D-A0C1-57A6-A6930CA226DC}"/>
+                      </a:ext>
+                    </a:extLst>
+                  </p:cNvPr>
+                  <p:cNvSpPr txBox="1"/>
+                  <p:nvPr/>
+                </p:nvSpPr>
+                <p:spPr>
+                  <a:xfrm>
+                    <a:off x="2526118" y="2609537"/>
+                    <a:ext cx="577529" cy="215444"/>
+                  </a:xfrm>
+                  <a:prstGeom prst="rect">
+                    <a:avLst/>
+                  </a:prstGeom>
+                  <a:noFill/>
+                </p:spPr>
+                <p:txBody>
+                  <a:bodyPr wrap="none" lIns="0" tIns="0" rIns="0" bIns="0" rtlCol="0">
+                    <a:spAutoFit/>
+                  </a:bodyPr>
+                  <a:lstStyle/>
+                  <a:p>
+                    <a:pPr/>
+                    <a14:m>
+                      <m:oMathPara xmlns:m="http://schemas.openxmlformats.org/officeDocument/2006/math">
+                        <m:oMathParaPr>
+                          <m:jc m:val="centerGroup"/>
+                        </m:oMathParaPr>
+                        <m:oMath xmlns:m="http://schemas.openxmlformats.org/officeDocument/2006/math">
+                          <m:r>
+                            <a:rPr lang="en-US" altLang="zh-CN" sz="1400" b="0" i="1" smtClean="0">
+                              <a:latin typeface="Cambria Math" panose="02040503050406030204" pitchFamily="18" charset="0"/>
+                            </a:rPr>
+                            <m:t>(</m:t>
+                          </m:r>
+                          <m:sSub>
+                            <m:sSubPr>
+                              <m:ctrlPr>
+                                <a:rPr lang="en-US" altLang="zh-CN" sz="1400" b="0" i="1" smtClean="0">
+                                  <a:latin typeface="Cambria Math" panose="02040503050406030204" pitchFamily="18" charset="0"/>
+                                </a:rPr>
+                              </m:ctrlPr>
+                            </m:sSubPr>
+                            <m:e>
+                              <m:r>
+                                <a:rPr lang="en-US" altLang="zh-CN" sz="1400" b="0" i="1" smtClean="0">
+                                  <a:latin typeface="Cambria Math" panose="02040503050406030204" pitchFamily="18" charset="0"/>
+                                </a:rPr>
+                                <m:t>𝑟</m:t>
+                              </m:r>
+                            </m:e>
+                            <m:sub>
+                              <m:r>
+                                <a:rPr lang="en-US" altLang="zh-CN" sz="1400" b="0" i="1" smtClean="0">
+                                  <a:latin typeface="Cambria Math" panose="02040503050406030204" pitchFamily="18" charset="0"/>
+                                </a:rPr>
+                                <m:t>4</m:t>
+                              </m:r>
+                            </m:sub>
+                          </m:sSub>
+                          <m:r>
+                            <a:rPr lang="en-US" altLang="zh-CN" sz="1400" b="0" i="1" smtClean="0">
+                              <a:latin typeface="Cambria Math" panose="02040503050406030204" pitchFamily="18" charset="0"/>
+                            </a:rPr>
+                            <m:t>,</m:t>
+                          </m:r>
+                          <m:sSub>
+                            <m:sSubPr>
+                              <m:ctrlPr>
+                                <a:rPr lang="en-US" altLang="zh-CN" sz="1400" b="0" i="1" smtClean="0">
+                                  <a:latin typeface="Cambria Math" panose="02040503050406030204" pitchFamily="18" charset="0"/>
+                                </a:rPr>
+                              </m:ctrlPr>
+                            </m:sSubPr>
+                            <m:e>
+                              <m:r>
+                                <a:rPr lang="en-US" altLang="zh-CN" sz="1400" b="0" i="1" smtClean="0">
+                                  <a:latin typeface="Cambria Math" panose="02040503050406030204" pitchFamily="18" charset="0"/>
+                                </a:rPr>
+                                <m:t>𝜃</m:t>
+                              </m:r>
+                            </m:e>
+                            <m:sub>
+                              <m:r>
+                                <a:rPr lang="en-US" altLang="zh-CN" sz="1400" b="0" i="1" smtClean="0">
+                                  <a:latin typeface="Cambria Math" panose="02040503050406030204" pitchFamily="18" charset="0"/>
+                                </a:rPr>
+                                <m:t>4</m:t>
+                              </m:r>
+                            </m:sub>
+                          </m:sSub>
+                          <m:r>
+                            <a:rPr lang="en-US" altLang="zh-CN" sz="1400" b="0" i="1" smtClean="0">
+                              <a:latin typeface="Cambria Math" panose="02040503050406030204" pitchFamily="18" charset="0"/>
+                            </a:rPr>
+                            <m:t>)</m:t>
+                          </m:r>
+                        </m:oMath>
+                      </m:oMathPara>
+                    </a14:m>
+                    <a:endParaRPr lang="zh-CN" altLang="en-US" sz="1400" dirty="0"/>
+                  </a:p>
+                </p:txBody>
+              </p:sp>
+            </mc:Choice>
+            <mc:Fallback xmlns="">
+              <p:sp>
+                <p:nvSpPr>
+                  <p:cNvPr id="41" name="文本框 40">
+                    <a:extLst>
+                      <a:ext uri="{FF2B5EF4-FFF2-40B4-BE49-F238E27FC236}">
+                        <a16:creationId xmlns:a16="http://schemas.microsoft.com/office/drawing/2014/main" id="{15F7BF37-726D-A0C1-57A6-A6930CA226DC}"/>
+                      </a:ext>
+                    </a:extLst>
+                  </p:cNvPr>
+                  <p:cNvSpPr txBox="1">
+                    <a:spLocks noRot="1" noChangeAspect="1" noMove="1" noResize="1" noEditPoints="1" noAdjustHandles="1" noChangeArrowheads="1" noChangeShapeType="1" noTextEdit="1"/>
+                  </p:cNvSpPr>
+                  <p:nvPr/>
+                </p:nvSpPr>
+                <p:spPr>
+                  <a:xfrm>
+                    <a:off x="2526118" y="2609537"/>
+                    <a:ext cx="577529" cy="215444"/>
+                  </a:xfrm>
+                  <a:prstGeom prst="rect">
+                    <a:avLst/>
+                  </a:prstGeom>
+                  <a:blipFill>
+                    <a:blip r:embed="rId8"/>
+                    <a:stretch>
+                      <a:fillRect l="-9474" r="-9474" b="-30556"/>
+                    </a:stretch>
+                  </a:blipFill>
+                </p:spPr>
+                <p:txBody>
+                  <a:bodyPr/>
+                  <a:lstStyle/>
+                  <a:p>
+                    <a:r>
+                      <a:rPr lang="zh-CN" altLang="en-US">
+                        <a:noFill/>
+                      </a:rPr>
+                      <a:t> </a:t>
+                    </a:r>
+                  </a:p>
+                </p:txBody>
+              </p:sp>
+            </mc:Fallback>
+          </mc:AlternateContent>
+          <p:sp>
+            <p:nvSpPr>
+              <p:cNvPr id="42" name="弧形 41">
+                <a:extLst>
+                  <a:ext uri="{FF2B5EF4-FFF2-40B4-BE49-F238E27FC236}">
+                    <a16:creationId xmlns:a16="http://schemas.microsoft.com/office/drawing/2014/main" id="{9FAE7AC8-DB35-74F0-420F-202570508216}"/>
+                  </a:ext>
+                </a:extLst>
+              </p:cNvPr>
+              <p:cNvSpPr/>
+              <p:nvPr/>
+            </p:nvSpPr>
+            <p:spPr>
+              <a:xfrm>
+                <a:off x="3096251" y="1992493"/>
+                <a:ext cx="1092200" cy="1092200"/>
+              </a:xfrm>
+              <a:prstGeom prst="arc">
+                <a:avLst>
+                  <a:gd name="adj1" fmla="val 20723918"/>
+                  <a:gd name="adj2" fmla="val 238535"/>
+                </a:avLst>
+              </a:prstGeom>
+              <a:ln>
+                <a:solidFill>
+                  <a:schemeClr val="tx1"/>
+                </a:solidFill>
+              </a:ln>
+            </p:spPr>
+            <p:style>
+              <a:lnRef idx="1">
+                <a:schemeClr val="accent1"/>
+              </a:lnRef>
+              <a:fillRef idx="0">
+                <a:schemeClr val="accent1"/>
+              </a:fillRef>
+              <a:effectRef idx="0">
+                <a:schemeClr val="accent1"/>
+              </a:effectRef>
+              <a:fontRef idx="minor">
+                <a:schemeClr val="tx1"/>
+              </a:fontRef>
+            </p:style>
+            <p:txBody>
+              <a:bodyPr rtlCol="0" anchor="ctr"/>
+              <a:lstStyle/>
+              <a:p>
+                <a:pPr algn="ctr"/>
+                <a:endParaRPr lang="zh-CN" altLang="en-US"/>
+              </a:p>
+            </p:txBody>
+          </p:sp>
+          <mc:AlternateContent xmlns:mc="http://schemas.openxmlformats.org/markup-compatibility/2006" xmlns:a14="http://schemas.microsoft.com/office/drawing/2010/main">
+            <mc:Choice Requires="a14">
+              <p:sp>
+                <p:nvSpPr>
+                  <p:cNvPr id="43" name="文本框 42">
+                    <a:extLst>
+                      <a:ext uri="{FF2B5EF4-FFF2-40B4-BE49-F238E27FC236}">
+                        <a16:creationId xmlns:a16="http://schemas.microsoft.com/office/drawing/2014/main" id="{388235FD-AE82-9A5C-F484-46B0D273A81C}"/>
+                      </a:ext>
+                    </a:extLst>
+                  </p:cNvPr>
+                  <p:cNvSpPr txBox="1"/>
+                  <p:nvPr/>
+                </p:nvSpPr>
+                <p:spPr>
+                  <a:xfrm>
+                    <a:off x="4230628" y="2384705"/>
+                    <a:ext cx="392993" cy="153888"/>
+                  </a:xfrm>
+                  <a:prstGeom prst="rect">
+                    <a:avLst/>
+                  </a:prstGeom>
+                  <a:noFill/>
+                </p:spPr>
+                <p:txBody>
+                  <a:bodyPr wrap="none" lIns="0" tIns="0" rIns="0" bIns="0" rtlCol="0">
+                    <a:spAutoFit/>
+                  </a:bodyPr>
+                  <a:lstStyle/>
+                  <a:p>
+                    <a:pPr/>
+                    <a14:m>
+                      <m:oMathPara xmlns:m="http://schemas.openxmlformats.org/officeDocument/2006/math">
+                        <m:oMathParaPr>
+                          <m:jc m:val="centerGroup"/>
+                        </m:oMathParaPr>
+                        <m:oMath xmlns:m="http://schemas.openxmlformats.org/officeDocument/2006/math">
+                          <m:sSub>
+                            <m:sSubPr>
+                              <m:ctrlPr>
+                                <a:rPr lang="en-US" altLang="zh-CN" sz="1000" b="0" i="1" smtClean="0">
+                                  <a:latin typeface="Cambria Math" panose="02040503050406030204" pitchFamily="18" charset="0"/>
+                                </a:rPr>
+                              </m:ctrlPr>
+                            </m:sSubPr>
+                            <m:e>
+                              <m:r>
+                                <a:rPr lang="en-US" altLang="zh-CN" sz="1000" b="0" i="1" smtClean="0">
+                                  <a:latin typeface="Cambria Math" panose="02040503050406030204" pitchFamily="18" charset="0"/>
+                                </a:rPr>
+                                <m:t>𝜃</m:t>
+                              </m:r>
+                            </m:e>
+                            <m:sub>
+                              <m:r>
+                                <a:rPr lang="en-US" altLang="zh-CN" sz="1000" b="0" i="1" smtClean="0">
+                                  <a:latin typeface="Cambria Math" panose="02040503050406030204" pitchFamily="18" charset="0"/>
+                                </a:rPr>
+                                <m:t>3</m:t>
+                              </m:r>
+                            </m:sub>
+                          </m:sSub>
+                          <m:sSub>
+                            <m:sSubPr>
+                              <m:ctrlPr>
+                                <a:rPr lang="en-US" altLang="zh-CN" sz="1000" b="0" i="1" smtClean="0">
+                                  <a:latin typeface="Cambria Math" panose="02040503050406030204" pitchFamily="18" charset="0"/>
+                                </a:rPr>
+                              </m:ctrlPr>
+                            </m:sSubPr>
+                            <m:e>
+                              <m:r>
+                                <a:rPr lang="en-US" altLang="zh-CN" sz="1000" b="0" i="1" smtClean="0">
+                                  <a:latin typeface="Cambria Math" panose="02040503050406030204" pitchFamily="18" charset="0"/>
+                                </a:rPr>
+                                <m:t>(</m:t>
+                              </m:r>
+                              <m:r>
+                                <a:rPr lang="en-US" altLang="zh-CN" sz="1000" b="0" i="1" smtClean="0">
+                                  <a:latin typeface="Cambria Math" panose="02040503050406030204" pitchFamily="18" charset="0"/>
+                                </a:rPr>
+                                <m:t>𝜃</m:t>
+                              </m:r>
+                            </m:e>
+                            <m:sub>
+                              <m:r>
+                                <a:rPr lang="en-US" altLang="zh-CN" sz="1000" b="0" i="1" smtClean="0">
+                                  <a:latin typeface="Cambria Math" panose="02040503050406030204" pitchFamily="18" charset="0"/>
+                                </a:rPr>
+                                <m:t>4</m:t>
+                              </m:r>
+                            </m:sub>
+                          </m:sSub>
+                          <m:r>
+                            <a:rPr lang="en-US" altLang="zh-CN" sz="1000" b="0" i="1" smtClean="0">
+                              <a:latin typeface="Cambria Math" panose="02040503050406030204" pitchFamily="18" charset="0"/>
+                            </a:rPr>
+                            <m:t>)</m:t>
+                          </m:r>
+                        </m:oMath>
+                      </m:oMathPara>
+                    </a14:m>
+                    <a:endParaRPr lang="en-US" altLang="zh-CN" sz="1000" b="0" dirty="0"/>
+                  </a:p>
+                </p:txBody>
+              </p:sp>
+            </mc:Choice>
+            <mc:Fallback xmlns="">
+              <p:sp>
+                <p:nvSpPr>
+                  <p:cNvPr id="43" name="文本框 42">
+                    <a:extLst>
+                      <a:ext uri="{FF2B5EF4-FFF2-40B4-BE49-F238E27FC236}">
+                        <a16:creationId xmlns:a16="http://schemas.microsoft.com/office/drawing/2014/main" id="{388235FD-AE82-9A5C-F484-46B0D273A81C}"/>
+                      </a:ext>
+                    </a:extLst>
+                  </p:cNvPr>
+                  <p:cNvSpPr txBox="1">
+                    <a:spLocks noRot="1" noChangeAspect="1" noMove="1" noResize="1" noEditPoints="1" noAdjustHandles="1" noChangeArrowheads="1" noChangeShapeType="1" noTextEdit="1"/>
+                  </p:cNvSpPr>
+                  <p:nvPr/>
+                </p:nvSpPr>
+                <p:spPr>
+                  <a:xfrm>
+                    <a:off x="4230628" y="2384705"/>
+                    <a:ext cx="392993" cy="153888"/>
+                  </a:xfrm>
+                  <a:prstGeom prst="rect">
+                    <a:avLst/>
+                  </a:prstGeom>
+                  <a:blipFill>
+                    <a:blip r:embed="rId9"/>
+                    <a:stretch>
+                      <a:fillRect l="-6250" t="-4000" r="-12500" b="-40000"/>
+                    </a:stretch>
+                  </a:blipFill>
+                </p:spPr>
+                <p:txBody>
+                  <a:bodyPr/>
+                  <a:lstStyle/>
+                  <a:p>
+                    <a:r>
+                      <a:rPr lang="zh-CN" altLang="en-US">
+                        <a:noFill/>
+                      </a:rPr>
+                      <a:t> </a:t>
+                    </a:r>
+                  </a:p>
+                </p:txBody>
+              </p:sp>
+            </mc:Fallback>
+          </mc:AlternateContent>
+          <p:cxnSp>
+            <p:nvCxnSpPr>
+              <p:cNvPr id="45" name="直接箭头连接符 44">
+                <a:extLst>
+                  <a:ext uri="{FF2B5EF4-FFF2-40B4-BE49-F238E27FC236}">
+                    <a16:creationId xmlns:a16="http://schemas.microsoft.com/office/drawing/2014/main" id="{C21FD4B1-B720-8C0F-8B5C-998EAAA84399}"/>
+                  </a:ext>
+                </a:extLst>
+              </p:cNvPr>
+              <p:cNvCxnSpPr>
+                <a:cxnSpLocks/>
+              </p:cNvCxnSpPr>
+              <p:nvPr/>
+            </p:nvCxnSpPr>
+            <p:spPr>
+              <a:xfrm flipV="1">
+                <a:off x="2592737" y="2861035"/>
+                <a:ext cx="1849138" cy="186580"/>
+              </a:xfrm>
+              <a:prstGeom prst="straightConnector1">
+                <a:avLst/>
+              </a:prstGeom>
+              <a:ln w="12700">
+                <a:solidFill>
+                  <a:schemeClr val="tx1"/>
+                </a:solidFill>
+                <a:tailEnd type="stealth"/>
+              </a:ln>
+            </p:spPr>
+            <p:style>
+              <a:lnRef idx="1">
+                <a:schemeClr val="accent1"/>
+              </a:lnRef>
+              <a:fillRef idx="0">
+                <a:schemeClr val="accent1"/>
+              </a:fillRef>
+              <a:effectRef idx="0">
+                <a:schemeClr val="accent1"/>
+              </a:effectRef>
+              <a:fontRef idx="minor">
+                <a:schemeClr val="tx1"/>
+              </a:fontRef>
+            </p:style>
+          </p:cxnSp>
+          <mc:AlternateContent xmlns:mc="http://schemas.openxmlformats.org/markup-compatibility/2006" xmlns:a14="http://schemas.microsoft.com/office/drawing/2010/main">
+            <mc:Choice Requires="a14">
+              <p:sp>
+                <p:nvSpPr>
+                  <p:cNvPr id="49" name="文本框 48">
+                    <a:extLst>
+                      <a:ext uri="{FF2B5EF4-FFF2-40B4-BE49-F238E27FC236}">
+                        <a16:creationId xmlns:a16="http://schemas.microsoft.com/office/drawing/2014/main" id="{B25BAB0F-5FD8-FC06-FC17-7811DAFAD449}"/>
+                      </a:ext>
+                    </a:extLst>
+                  </p:cNvPr>
+                  <p:cNvSpPr txBox="1"/>
+                  <p:nvPr/>
+                </p:nvSpPr>
+                <p:spPr>
+                  <a:xfrm>
+                    <a:off x="2775105" y="3223599"/>
+                    <a:ext cx="589457" cy="215444"/>
+                  </a:xfrm>
+                  <a:prstGeom prst="rect">
+                    <a:avLst/>
+                  </a:prstGeom>
+                  <a:noFill/>
+                </p:spPr>
+                <p:txBody>
+                  <a:bodyPr wrap="none" lIns="0" tIns="0" rIns="0" bIns="0" rtlCol="0">
+                    <a:spAutoFit/>
+                  </a:bodyPr>
+                  <a:lstStyle/>
+                  <a:p>
+                    <a:pPr/>
+                    <a14:m>
+                      <m:oMathPara xmlns:m="http://schemas.openxmlformats.org/officeDocument/2006/math">
+                        <m:oMathParaPr>
+                          <m:jc m:val="centerGroup"/>
+                        </m:oMathParaPr>
+                        <m:oMath xmlns:m="http://schemas.openxmlformats.org/officeDocument/2006/math">
+                          <m:r>
+                            <a:rPr lang="en-US" altLang="zh-CN" sz="1400" b="0" i="1" smtClean="0">
+                              <a:latin typeface="Cambria Math" panose="02040503050406030204" pitchFamily="18" charset="0"/>
+                            </a:rPr>
+                            <m:t>(</m:t>
+                          </m:r>
+                          <m:sSub>
+                            <m:sSubPr>
+                              <m:ctrlPr>
+                                <a:rPr lang="en-US" altLang="zh-CN" sz="1400" b="0" i="1" smtClean="0">
+                                  <a:latin typeface="Cambria Math" panose="02040503050406030204" pitchFamily="18" charset="0"/>
+                                </a:rPr>
+                              </m:ctrlPr>
+                            </m:sSubPr>
+                            <m:e>
+                              <m:r>
+                                <a:rPr lang="en-US" altLang="zh-CN" sz="1400" b="0" i="1" smtClean="0">
+                                  <a:latin typeface="Cambria Math" panose="02040503050406030204" pitchFamily="18" charset="0"/>
+                                </a:rPr>
+                                <m:t>𝑟</m:t>
+                              </m:r>
+                            </m:e>
+                            <m:sub>
+                              <m:r>
+                                <a:rPr lang="en-US" altLang="zh-CN" sz="1400" b="0" i="1" smtClean="0">
+                                  <a:latin typeface="Cambria Math" panose="02040503050406030204" pitchFamily="18" charset="0"/>
+                                </a:rPr>
+                                <m:t>5</m:t>
+                              </m:r>
+                            </m:sub>
+                          </m:sSub>
+                          <m:r>
+                            <a:rPr lang="en-US" altLang="zh-CN" sz="1400" b="0" i="1" smtClean="0">
+                              <a:latin typeface="Cambria Math" panose="02040503050406030204" pitchFamily="18" charset="0"/>
+                            </a:rPr>
+                            <m:t>,</m:t>
+                          </m:r>
+                          <m:sSub>
+                            <m:sSubPr>
+                              <m:ctrlPr>
+                                <a:rPr lang="en-US" altLang="zh-CN" sz="1400" b="0" i="1" smtClean="0">
+                                  <a:latin typeface="Cambria Math" panose="02040503050406030204" pitchFamily="18" charset="0"/>
+                                </a:rPr>
+                              </m:ctrlPr>
+                            </m:sSubPr>
+                            <m:e>
+                              <m:r>
+                                <a:rPr lang="en-US" altLang="zh-CN" sz="1400" b="0" i="1" smtClean="0">
+                                  <a:latin typeface="Cambria Math" panose="02040503050406030204" pitchFamily="18" charset="0"/>
+                                </a:rPr>
+                                <m:t>𝜃</m:t>
+                              </m:r>
+                            </m:e>
+                            <m:sub>
+                              <m:r>
+                                <a:rPr lang="en-US" altLang="zh-CN" sz="1400" b="0" i="1" smtClean="0">
+                                  <a:latin typeface="Cambria Math" panose="02040503050406030204" pitchFamily="18" charset="0"/>
+                                </a:rPr>
+                                <m:t>5</m:t>
+                              </m:r>
+                            </m:sub>
+                          </m:sSub>
+                          <m:r>
+                            <a:rPr lang="en-US" altLang="zh-CN" sz="1400" b="0" i="1" smtClean="0">
+                              <a:latin typeface="Cambria Math" panose="02040503050406030204" pitchFamily="18" charset="0"/>
+                            </a:rPr>
+                            <m:t>)</m:t>
+                          </m:r>
+                        </m:oMath>
+                      </m:oMathPara>
+                    </a14:m>
+                    <a:endParaRPr lang="zh-CN" altLang="en-US" sz="1400" dirty="0"/>
+                  </a:p>
+                </p:txBody>
+              </p:sp>
+            </mc:Choice>
+            <mc:Fallback xmlns="">
+              <p:sp>
+                <p:nvSpPr>
+                  <p:cNvPr id="49" name="文本框 48">
+                    <a:extLst>
+                      <a:ext uri="{FF2B5EF4-FFF2-40B4-BE49-F238E27FC236}">
+                        <a16:creationId xmlns:a16="http://schemas.microsoft.com/office/drawing/2014/main" id="{B25BAB0F-5FD8-FC06-FC17-7811DAFAD449}"/>
+                      </a:ext>
+                    </a:extLst>
+                  </p:cNvPr>
+                  <p:cNvSpPr txBox="1">
+                    <a:spLocks noRot="1" noChangeAspect="1" noMove="1" noResize="1" noEditPoints="1" noAdjustHandles="1" noChangeArrowheads="1" noChangeShapeType="1" noTextEdit="1"/>
+                  </p:cNvSpPr>
+                  <p:nvPr/>
+                </p:nvSpPr>
+                <p:spPr>
+                  <a:xfrm>
+                    <a:off x="2775105" y="3223599"/>
+                    <a:ext cx="589457" cy="215444"/>
+                  </a:xfrm>
+                  <a:prstGeom prst="rect">
+                    <a:avLst/>
+                  </a:prstGeom>
+                  <a:blipFill>
+                    <a:blip r:embed="rId10"/>
+                    <a:stretch>
+                      <a:fillRect l="-9278" r="-9278" b="-30556"/>
+                    </a:stretch>
+                  </a:blipFill>
+                </p:spPr>
+                <p:txBody>
+                  <a:bodyPr/>
+                  <a:lstStyle/>
+                  <a:p>
+                    <a:r>
+                      <a:rPr lang="zh-CN" altLang="en-US">
+                        <a:noFill/>
+                      </a:rPr>
+                      <a:t> </a:t>
+                    </a:r>
+                  </a:p>
+                </p:txBody>
+              </p:sp>
+            </mc:Fallback>
+          </mc:AlternateContent>
+          <p:cxnSp>
+            <p:nvCxnSpPr>
+              <p:cNvPr id="50" name="直接连接符 49">
+                <a:extLst>
+                  <a:ext uri="{FF2B5EF4-FFF2-40B4-BE49-F238E27FC236}">
+                    <a16:creationId xmlns:a16="http://schemas.microsoft.com/office/drawing/2014/main" id="{6D4FADA7-2703-7C02-401E-8E9B98A13650}"/>
+                  </a:ext>
+                </a:extLst>
+              </p:cNvPr>
+              <p:cNvCxnSpPr>
+                <a:cxnSpLocks/>
+              </p:cNvCxnSpPr>
+              <p:nvPr/>
+            </p:nvCxnSpPr>
+            <p:spPr>
+              <a:xfrm>
+                <a:off x="2592484" y="3041649"/>
+                <a:ext cx="2211291" cy="0"/>
+              </a:xfrm>
+              <a:prstGeom prst="line">
+                <a:avLst/>
+              </a:prstGeom>
+              <a:ln w="12700">
+                <a:solidFill>
+                  <a:schemeClr val="tx1"/>
+                </a:solidFill>
+              </a:ln>
+            </p:spPr>
+            <p:style>
+              <a:lnRef idx="1">
+                <a:schemeClr val="accent1"/>
+              </a:lnRef>
+              <a:fillRef idx="0">
+                <a:schemeClr val="accent1"/>
+              </a:fillRef>
+              <a:effectRef idx="0">
+                <a:schemeClr val="accent1"/>
+              </a:effectRef>
+              <a:fontRef idx="minor">
+                <a:schemeClr val="tx1"/>
+              </a:fontRef>
+            </p:style>
+          </p:cxnSp>
+          <p:sp>
+            <p:nvSpPr>
+              <p:cNvPr id="52" name="弧形 51">
+                <a:extLst>
+                  <a:ext uri="{FF2B5EF4-FFF2-40B4-BE49-F238E27FC236}">
+                    <a16:creationId xmlns:a16="http://schemas.microsoft.com/office/drawing/2014/main" id="{7DA4E17B-AFA0-F715-81A9-8BC51F746664}"/>
+                  </a:ext>
+                </a:extLst>
+              </p:cNvPr>
+              <p:cNvSpPr/>
+              <p:nvPr/>
+            </p:nvSpPr>
+            <p:spPr>
+              <a:xfrm>
+                <a:off x="3474998" y="2662609"/>
+                <a:ext cx="657225" cy="657225"/>
+              </a:xfrm>
+              <a:prstGeom prst="arc">
+                <a:avLst>
+                  <a:gd name="adj1" fmla="val 20612649"/>
+                  <a:gd name="adj2" fmla="val 547548"/>
+                </a:avLst>
+              </a:prstGeom>
+              <a:ln>
+                <a:solidFill>
+                  <a:schemeClr val="tx1"/>
+                </a:solidFill>
+              </a:ln>
+            </p:spPr>
+            <p:style>
+              <a:lnRef idx="1">
+                <a:schemeClr val="accent1"/>
+              </a:lnRef>
+              <a:fillRef idx="0">
+                <a:schemeClr val="accent1"/>
+              </a:fillRef>
+              <a:effectRef idx="0">
+                <a:schemeClr val="accent1"/>
+              </a:effectRef>
+              <a:fontRef idx="minor">
+                <a:schemeClr val="tx1"/>
+              </a:fontRef>
+            </p:style>
+            <p:txBody>
+              <a:bodyPr rtlCol="0" anchor="ctr"/>
+              <a:lstStyle/>
+              <a:p>
+                <a:pPr algn="ctr"/>
+                <a:endParaRPr lang="zh-CN" altLang="en-US"/>
+              </a:p>
+            </p:txBody>
+          </p:sp>
+          <mc:AlternateContent xmlns:mc="http://schemas.openxmlformats.org/markup-compatibility/2006" xmlns:a14="http://schemas.microsoft.com/office/drawing/2010/main">
+            <mc:Choice Requires="a14">
+              <p:sp>
+                <p:nvSpPr>
+                  <p:cNvPr id="53" name="文本框 52">
+                    <a:extLst>
+                      <a:ext uri="{FF2B5EF4-FFF2-40B4-BE49-F238E27FC236}">
+                        <a16:creationId xmlns:a16="http://schemas.microsoft.com/office/drawing/2014/main" id="{1FD99BEB-DC87-9A39-82BE-D65197CF4E88}"/>
+                      </a:ext>
+                    </a:extLst>
+                  </p:cNvPr>
+                  <p:cNvSpPr txBox="1"/>
+                  <p:nvPr/>
+                </p:nvSpPr>
+                <p:spPr>
+                  <a:xfrm>
+                    <a:off x="4161952" y="2886992"/>
+                    <a:ext cx="162737" cy="153888"/>
+                  </a:xfrm>
+                  <a:prstGeom prst="rect">
+                    <a:avLst/>
+                  </a:prstGeom>
+                  <a:noFill/>
+                </p:spPr>
+                <p:txBody>
+                  <a:bodyPr wrap="none" lIns="0" tIns="0" rIns="0" bIns="0" rtlCol="0">
+                    <a:spAutoFit/>
+                  </a:bodyPr>
+                  <a:lstStyle/>
+                  <a:p>
+                    <a:pPr/>
+                    <a14:m>
+                      <m:oMathPara xmlns:m="http://schemas.openxmlformats.org/officeDocument/2006/math">
+                        <m:oMathParaPr>
+                          <m:jc m:val="centerGroup"/>
+                        </m:oMathParaPr>
+                        <m:oMath xmlns:m="http://schemas.openxmlformats.org/officeDocument/2006/math">
+                          <m:sSub>
+                            <m:sSubPr>
+                              <m:ctrlPr>
+                                <a:rPr lang="en-US" altLang="zh-CN" sz="1000" b="0" i="1" smtClean="0">
+                                  <a:latin typeface="Cambria Math" panose="02040503050406030204" pitchFamily="18" charset="0"/>
+                                </a:rPr>
+                              </m:ctrlPr>
+                            </m:sSubPr>
+                            <m:e>
+                              <m:r>
+                                <a:rPr lang="en-US" altLang="zh-CN" sz="1000" b="0" i="1" smtClean="0">
+                                  <a:latin typeface="Cambria Math" panose="02040503050406030204" pitchFamily="18" charset="0"/>
+                                </a:rPr>
+                                <m:t>𝜃</m:t>
+                              </m:r>
+                            </m:e>
+                            <m:sub>
+                              <m:r>
+                                <a:rPr lang="en-US" altLang="zh-CN" sz="1000" b="0" i="1" smtClean="0">
+                                  <a:latin typeface="Cambria Math" panose="02040503050406030204" pitchFamily="18" charset="0"/>
+                                </a:rPr>
+                                <m:t>5</m:t>
+                              </m:r>
+                            </m:sub>
+                          </m:sSub>
+                        </m:oMath>
+                      </m:oMathPara>
+                    </a14:m>
+                    <a:endParaRPr lang="en-US" altLang="zh-CN" sz="1000" b="0" dirty="0"/>
+                  </a:p>
+                </p:txBody>
+              </p:sp>
+            </mc:Choice>
+            <mc:Fallback xmlns="">
+              <p:sp>
+                <p:nvSpPr>
+                  <p:cNvPr id="53" name="文本框 52">
+                    <a:extLst>
+                      <a:ext uri="{FF2B5EF4-FFF2-40B4-BE49-F238E27FC236}">
+                        <a16:creationId xmlns:a16="http://schemas.microsoft.com/office/drawing/2014/main" id="{1FD99BEB-DC87-9A39-82BE-D65197CF4E88}"/>
+                      </a:ext>
+                    </a:extLst>
+                  </p:cNvPr>
+                  <p:cNvSpPr txBox="1">
+                    <a:spLocks noRot="1" noChangeAspect="1" noMove="1" noResize="1" noEditPoints="1" noAdjustHandles="1" noChangeArrowheads="1" noChangeShapeType="1" noTextEdit="1"/>
+                  </p:cNvSpPr>
+                  <p:nvPr/>
+                </p:nvSpPr>
+                <p:spPr>
+                  <a:xfrm>
+                    <a:off x="4161952" y="2886992"/>
+                    <a:ext cx="162737" cy="153888"/>
+                  </a:xfrm>
+                  <a:prstGeom prst="rect">
+                    <a:avLst/>
+                  </a:prstGeom>
+                  <a:blipFill>
+                    <a:blip r:embed="rId11"/>
+                    <a:stretch>
+                      <a:fillRect l="-19231" r="-7692" b="-16000"/>
+                    </a:stretch>
+                  </a:blipFill>
+                </p:spPr>
+                <p:txBody>
+                  <a:bodyPr/>
+                  <a:lstStyle/>
+                  <a:p>
+                    <a:r>
+                      <a:rPr lang="zh-CN" altLang="en-US">
+                        <a:noFill/>
+                      </a:rPr>
+                      <a:t> </a:t>
+                    </a:r>
+                  </a:p>
+                </p:txBody>
+              </p:sp>
+            </mc:Fallback>
+          </mc:AlternateContent>
+          <p:cxnSp>
+            <p:nvCxnSpPr>
+              <p:cNvPr id="56" name="直接连接符 55">
+                <a:extLst>
+                  <a:ext uri="{FF2B5EF4-FFF2-40B4-BE49-F238E27FC236}">
+                    <a16:creationId xmlns:a16="http://schemas.microsoft.com/office/drawing/2014/main" id="{C5B807B5-01C5-E36B-C89F-455EFEA58B34}"/>
+                  </a:ext>
+                </a:extLst>
+              </p:cNvPr>
+              <p:cNvCxnSpPr>
+                <a:cxnSpLocks/>
+              </p:cNvCxnSpPr>
+              <p:nvPr/>
+            </p:nvCxnSpPr>
+            <p:spPr>
+              <a:xfrm>
+                <a:off x="4623621" y="2581057"/>
+                <a:ext cx="0" cy="459823"/>
+              </a:xfrm>
+              <a:prstGeom prst="line">
+                <a:avLst/>
+              </a:prstGeom>
+              <a:ln w="12700">
+                <a:solidFill>
+                  <a:schemeClr val="tx1"/>
+                </a:solidFill>
+                <a:headEnd type="stealth"/>
+                <a:tailEnd type="stealth"/>
+              </a:ln>
+            </p:spPr>
+            <p:style>
+              <a:lnRef idx="1">
+                <a:schemeClr val="accent1"/>
+              </a:lnRef>
+              <a:fillRef idx="0">
+                <a:schemeClr val="accent1"/>
+              </a:fillRef>
+              <a:effectRef idx="0">
+                <a:schemeClr val="accent1"/>
+              </a:effectRef>
+              <a:fontRef idx="minor">
+                <a:schemeClr val="tx1"/>
+              </a:fontRef>
+            </p:style>
+          </p:cxnSp>
+          <mc:AlternateContent xmlns:mc="http://schemas.openxmlformats.org/markup-compatibility/2006" xmlns:a14="http://schemas.microsoft.com/office/drawing/2010/main">
+            <mc:Choice Requires="a14">
+              <p:sp>
+                <p:nvSpPr>
+                  <p:cNvPr id="58" name="文本框 57">
+                    <a:extLst>
+                      <a:ext uri="{FF2B5EF4-FFF2-40B4-BE49-F238E27FC236}">
+                        <a16:creationId xmlns:a16="http://schemas.microsoft.com/office/drawing/2014/main" id="{5FE1DE8B-8896-C1D1-9588-67CA3EEF4689}"/>
+                      </a:ext>
+                    </a:extLst>
+                  </p:cNvPr>
+                  <p:cNvSpPr txBox="1"/>
+                  <p:nvPr/>
+                </p:nvSpPr>
+                <p:spPr>
+                  <a:xfrm>
+                    <a:off x="4643048" y="2713207"/>
+                    <a:ext cx="348813" cy="153888"/>
+                  </a:xfrm>
+                  <a:prstGeom prst="rect">
+                    <a:avLst/>
+                  </a:prstGeom>
+                  <a:noFill/>
+                </p:spPr>
+                <p:txBody>
+                  <a:bodyPr wrap="none" lIns="0" tIns="0" rIns="0" bIns="0" rtlCol="0">
+                    <a:spAutoFit/>
+                  </a:bodyPr>
+                  <a:lstStyle/>
+                  <a:p>
+                    <a:pPr/>
+                    <a14:m>
+                      <m:oMathPara xmlns:m="http://schemas.openxmlformats.org/officeDocument/2006/math">
+                        <m:oMathParaPr>
+                          <m:jc m:val="centerGroup"/>
+                        </m:oMathParaPr>
+                        <m:oMath xmlns:m="http://schemas.openxmlformats.org/officeDocument/2006/math">
+                          <m:sSub>
+                            <m:sSubPr>
+                              <m:ctrlPr>
+                                <a:rPr lang="en-US" altLang="zh-CN" sz="1000" b="0" i="1" smtClean="0">
+                                  <a:latin typeface="Cambria Math" panose="02040503050406030204" pitchFamily="18" charset="0"/>
+                                </a:rPr>
+                              </m:ctrlPr>
+                            </m:sSubPr>
+                            <m:e>
+                              <m:r>
+                                <a:rPr lang="en-US" altLang="zh-CN" sz="1000" b="0" i="1" smtClean="0">
+                                  <a:latin typeface="Cambria Math" panose="02040503050406030204" pitchFamily="18" charset="0"/>
+                                </a:rPr>
+                                <m:t>𝑟</m:t>
+                              </m:r>
+                            </m:e>
+                            <m:sub>
+                              <m:r>
+                                <a:rPr lang="en-US" altLang="zh-CN" sz="1000" b="0" i="1" smtClean="0">
+                                  <a:latin typeface="Cambria Math" panose="02040503050406030204" pitchFamily="18" charset="0"/>
+                                </a:rPr>
+                                <m:t>4</m:t>
+                              </m:r>
+                            </m:sub>
+                          </m:sSub>
+                          <m:r>
+                            <a:rPr lang="en-US" altLang="zh-CN" sz="1000" b="0" i="1" smtClean="0">
+                              <a:latin typeface="Cambria Math" panose="02040503050406030204" pitchFamily="18" charset="0"/>
+                            </a:rPr>
+                            <m:t>(</m:t>
+                          </m:r>
+                          <m:sSub>
+                            <m:sSubPr>
+                              <m:ctrlPr>
+                                <a:rPr lang="en-US" altLang="zh-CN" sz="1000" b="0" i="1" smtClean="0">
+                                  <a:latin typeface="Cambria Math" panose="02040503050406030204" pitchFamily="18" charset="0"/>
+                                </a:rPr>
+                              </m:ctrlPr>
+                            </m:sSubPr>
+                            <m:e>
+                              <m:r>
+                                <a:rPr lang="en-US" altLang="zh-CN" sz="1000" b="0" i="1" smtClean="0">
+                                  <a:latin typeface="Cambria Math" panose="02040503050406030204" pitchFamily="18" charset="0"/>
+                                </a:rPr>
+                                <m:t>𝑟</m:t>
+                              </m:r>
+                            </m:e>
+                            <m:sub>
+                              <m:r>
+                                <a:rPr lang="en-US" altLang="zh-CN" sz="1000" b="0" i="1" smtClean="0">
+                                  <a:latin typeface="Cambria Math" panose="02040503050406030204" pitchFamily="18" charset="0"/>
+                                </a:rPr>
+                                <m:t>5</m:t>
+                              </m:r>
+                            </m:sub>
+                          </m:sSub>
+                          <m:r>
+                            <a:rPr lang="en-US" altLang="zh-CN" sz="1000" b="0" i="1" smtClean="0">
+                              <a:latin typeface="Cambria Math" panose="02040503050406030204" pitchFamily="18" charset="0"/>
+                            </a:rPr>
+                            <m:t>)</m:t>
+                          </m:r>
+                        </m:oMath>
+                      </m:oMathPara>
+                    </a14:m>
+                    <a:endParaRPr lang="en-US" altLang="zh-CN" sz="1000" b="0" dirty="0"/>
+                  </a:p>
+                </p:txBody>
+              </p:sp>
+            </mc:Choice>
+            <mc:Fallback xmlns="">
+              <p:sp>
+                <p:nvSpPr>
+                  <p:cNvPr id="58" name="文本框 57">
+                    <a:extLst>
+                      <a:ext uri="{FF2B5EF4-FFF2-40B4-BE49-F238E27FC236}">
+                        <a16:creationId xmlns:a16="http://schemas.microsoft.com/office/drawing/2014/main" id="{5FE1DE8B-8896-C1D1-9588-67CA3EEF4689}"/>
+                      </a:ext>
+                    </a:extLst>
+                  </p:cNvPr>
+                  <p:cNvSpPr txBox="1">
+                    <a:spLocks noRot="1" noChangeAspect="1" noMove="1" noResize="1" noEditPoints="1" noAdjustHandles="1" noChangeArrowheads="1" noChangeShapeType="1" noTextEdit="1"/>
+                  </p:cNvSpPr>
+                  <p:nvPr/>
+                </p:nvSpPr>
+                <p:spPr>
+                  <a:xfrm>
+                    <a:off x="4643048" y="2713207"/>
+                    <a:ext cx="348813" cy="153888"/>
+                  </a:xfrm>
+                  <a:prstGeom prst="rect">
+                    <a:avLst/>
+                  </a:prstGeom>
+                  <a:blipFill>
+                    <a:blip r:embed="rId12"/>
+                    <a:stretch>
+                      <a:fillRect l="-5263" r="-14035" b="-38462"/>
+                    </a:stretch>
+                  </a:blipFill>
+                </p:spPr>
+                <p:txBody>
+                  <a:bodyPr/>
+                  <a:lstStyle/>
+                  <a:p>
+                    <a:r>
+                      <a:rPr lang="zh-CN" altLang="en-US">
+                        <a:noFill/>
+                      </a:rPr>
+                      <a:t> </a:t>
+                    </a:r>
+                  </a:p>
+                </p:txBody>
+              </p:sp>
+            </mc:Fallback>
+          </mc:AlternateContent>
+          <mc:AlternateContent xmlns:mc="http://schemas.openxmlformats.org/markup-compatibility/2006" xmlns:a14="http://schemas.microsoft.com/office/drawing/2010/main">
+            <mc:Choice Requires="a14">
+              <p:sp>
+                <p:nvSpPr>
+                  <p:cNvPr id="63" name="文本框 62">
+                    <a:extLst>
+                      <a:ext uri="{FF2B5EF4-FFF2-40B4-BE49-F238E27FC236}">
+                        <a16:creationId xmlns:a16="http://schemas.microsoft.com/office/drawing/2014/main" id="{9C73EFDD-D124-EB27-FC19-A7E3C89B2AAD}"/>
+                      </a:ext>
+                    </a:extLst>
+                  </p:cNvPr>
+                  <p:cNvSpPr txBox="1"/>
+                  <p:nvPr/>
+                </p:nvSpPr>
+                <p:spPr>
+                  <a:xfrm>
+                    <a:off x="2100998" y="1212841"/>
+                    <a:ext cx="781770" cy="369332"/>
+                  </a:xfrm>
+                  <a:prstGeom prst="rect">
+                    <a:avLst/>
+                  </a:prstGeom>
+                  <a:noFill/>
+                </p:spPr>
+                <p:txBody>
+                  <a:bodyPr wrap="square" rtlCol="0">
+                    <a:spAutoFit/>
+                  </a:bodyPr>
+                  <a:lstStyle/>
+                  <a:p>
+                    <a:pPr/>
+                    <a14:m>
+                      <m:oMathPara xmlns:m="http://schemas.openxmlformats.org/officeDocument/2006/math">
+                        <m:oMathParaPr>
+                          <m:jc m:val="centerGroup"/>
+                        </m:oMathParaPr>
+                        <m:oMath xmlns:m="http://schemas.openxmlformats.org/officeDocument/2006/math">
+                          <m:sSub>
+                            <m:sSubPr>
+                              <m:ctrlPr>
+                                <a:rPr lang="en-US" altLang="zh-CN" b="0" i="1" smtClean="0">
+                                  <a:latin typeface="Cambria Math" panose="02040503050406030204" pitchFamily="18" charset="0"/>
+                                </a:rPr>
+                              </m:ctrlPr>
+                            </m:sSubPr>
+                            <m:e>
+                              <m:r>
+                                <a:rPr lang="en-US" altLang="zh-CN" b="0" i="1" smtClean="0">
+                                  <a:latin typeface="Cambria Math" panose="02040503050406030204" pitchFamily="18" charset="0"/>
+                                </a:rPr>
+                                <m:t>𝑀</m:t>
+                              </m:r>
+                            </m:e>
+                            <m:sub>
+                              <m:r>
+                                <a:rPr lang="en-US" altLang="zh-CN" b="0" i="1" smtClean="0">
+                                  <a:latin typeface="Cambria Math" panose="02040503050406030204" pitchFamily="18" charset="0"/>
+                                </a:rPr>
+                                <m:t>1</m:t>
+                              </m:r>
+                            </m:sub>
+                          </m:sSub>
+                        </m:oMath>
+                      </m:oMathPara>
+                    </a14:m>
+                    <a:endParaRPr lang="en-US" altLang="zh-CN" b="0" dirty="0"/>
+                  </a:p>
+                </p:txBody>
+              </p:sp>
+            </mc:Choice>
+            <mc:Fallback xmlns="">
+              <p:sp>
+                <p:nvSpPr>
+                  <p:cNvPr id="63" name="文本框 62">
+                    <a:extLst>
+                      <a:ext uri="{FF2B5EF4-FFF2-40B4-BE49-F238E27FC236}">
+                        <a16:creationId xmlns:a16="http://schemas.microsoft.com/office/drawing/2014/main" id="{9C73EFDD-D124-EB27-FC19-A7E3C89B2AAD}"/>
+                      </a:ext>
+                    </a:extLst>
+                  </p:cNvPr>
+                  <p:cNvSpPr txBox="1">
+                    <a:spLocks noRot="1" noChangeAspect="1" noMove="1" noResize="1" noEditPoints="1" noAdjustHandles="1" noChangeArrowheads="1" noChangeShapeType="1" noTextEdit="1"/>
+                  </p:cNvSpPr>
+                  <p:nvPr/>
+                </p:nvSpPr>
+                <p:spPr>
+                  <a:xfrm>
+                    <a:off x="2100998" y="1212841"/>
+                    <a:ext cx="781770" cy="369332"/>
+                  </a:xfrm>
+                  <a:prstGeom prst="rect">
+                    <a:avLst/>
+                  </a:prstGeom>
+                  <a:blipFill>
+                    <a:blip r:embed="rId13"/>
+                    <a:stretch>
+                      <a:fillRect/>
+                    </a:stretch>
+                  </a:blipFill>
+                </p:spPr>
+                <p:txBody>
+                  <a:bodyPr/>
+                  <a:lstStyle/>
+                  <a:p>
+                    <a:r>
+                      <a:rPr lang="zh-CN" altLang="en-US">
+                        <a:noFill/>
+                      </a:rPr>
+                      <a:t> </a:t>
+                    </a:r>
+                  </a:p>
+                </p:txBody>
+              </p:sp>
+            </mc:Fallback>
+          </mc:AlternateContent>
+          <mc:AlternateContent xmlns:mc="http://schemas.openxmlformats.org/markup-compatibility/2006" xmlns:a14="http://schemas.microsoft.com/office/drawing/2010/main">
+            <mc:Choice Requires="a14">
+              <p:sp>
+                <p:nvSpPr>
+                  <p:cNvPr id="64" name="文本框 63">
+                    <a:extLst>
+                      <a:ext uri="{FF2B5EF4-FFF2-40B4-BE49-F238E27FC236}">
+                        <a16:creationId xmlns:a16="http://schemas.microsoft.com/office/drawing/2014/main" id="{BD0762FE-3289-FE16-A26F-6F7781C23EEB}"/>
+                      </a:ext>
+                    </a:extLst>
+                  </p:cNvPr>
+                  <p:cNvSpPr txBox="1"/>
+                  <p:nvPr/>
+                </p:nvSpPr>
+                <p:spPr>
+                  <a:xfrm>
+                    <a:off x="5772353" y="1223294"/>
+                    <a:ext cx="781770" cy="369332"/>
+                  </a:xfrm>
+                  <a:prstGeom prst="rect">
+                    <a:avLst/>
+                  </a:prstGeom>
+                  <a:noFill/>
+                </p:spPr>
+                <p:txBody>
+                  <a:bodyPr wrap="square" rtlCol="0">
+                    <a:spAutoFit/>
+                  </a:bodyPr>
+                  <a:lstStyle/>
+                  <a:p>
+                    <a:pPr/>
+                    <a14:m>
+                      <m:oMathPara xmlns:m="http://schemas.openxmlformats.org/officeDocument/2006/math">
+                        <m:oMathParaPr>
+                          <m:jc m:val="centerGroup"/>
+                        </m:oMathParaPr>
+                        <m:oMath xmlns:m="http://schemas.openxmlformats.org/officeDocument/2006/math">
+                          <m:sSub>
+                            <m:sSubPr>
+                              <m:ctrlPr>
+                                <a:rPr lang="en-US" altLang="zh-CN" b="0" i="1" smtClean="0">
+                                  <a:latin typeface="Cambria Math" panose="02040503050406030204" pitchFamily="18" charset="0"/>
+                                </a:rPr>
+                              </m:ctrlPr>
+                            </m:sSubPr>
+                            <m:e>
+                              <m:r>
+                                <a:rPr lang="en-US" altLang="zh-CN" b="0" i="1" smtClean="0">
+                                  <a:latin typeface="Cambria Math" panose="02040503050406030204" pitchFamily="18" charset="0"/>
+                                </a:rPr>
+                                <m:t>𝑀</m:t>
+                              </m:r>
+                            </m:e>
+                            <m:sub>
+                              <m:r>
+                                <a:rPr lang="en-US" altLang="zh-CN" b="0" i="1" smtClean="0">
+                                  <a:latin typeface="Cambria Math" panose="02040503050406030204" pitchFamily="18" charset="0"/>
+                                </a:rPr>
+                                <m:t>2</m:t>
+                              </m:r>
+                            </m:sub>
+                          </m:sSub>
+                        </m:oMath>
+                      </m:oMathPara>
+                    </a14:m>
+                    <a:endParaRPr lang="en-US" altLang="zh-CN" b="0" dirty="0"/>
+                  </a:p>
+                </p:txBody>
+              </p:sp>
+            </mc:Choice>
+            <mc:Fallback xmlns="">
+              <p:sp>
+                <p:nvSpPr>
+                  <p:cNvPr id="64" name="文本框 63">
+                    <a:extLst>
+                      <a:ext uri="{FF2B5EF4-FFF2-40B4-BE49-F238E27FC236}">
+                        <a16:creationId xmlns:a16="http://schemas.microsoft.com/office/drawing/2014/main" id="{BD0762FE-3289-FE16-A26F-6F7781C23EEB}"/>
+                      </a:ext>
+                    </a:extLst>
+                  </p:cNvPr>
+                  <p:cNvSpPr txBox="1">
+                    <a:spLocks noRot="1" noChangeAspect="1" noMove="1" noResize="1" noEditPoints="1" noAdjustHandles="1" noChangeArrowheads="1" noChangeShapeType="1" noTextEdit="1"/>
+                  </p:cNvSpPr>
+                  <p:nvPr/>
+                </p:nvSpPr>
+                <p:spPr>
+                  <a:xfrm>
+                    <a:off x="5772353" y="1223294"/>
+                    <a:ext cx="781770" cy="369332"/>
+                  </a:xfrm>
+                  <a:prstGeom prst="rect">
+                    <a:avLst/>
+                  </a:prstGeom>
+                  <a:blipFill>
+                    <a:blip r:embed="rId14"/>
+                    <a:stretch>
+                      <a:fillRect/>
+                    </a:stretch>
+                  </a:blipFill>
+                </p:spPr>
+                <p:txBody>
+                  <a:bodyPr/>
+                  <a:lstStyle/>
+                  <a:p>
+                    <a:r>
+                      <a:rPr lang="zh-CN" altLang="en-US">
+                        <a:noFill/>
+                      </a:rPr>
+                      <a:t> </a:t>
+                    </a:r>
+                  </a:p>
+                </p:txBody>
+              </p:sp>
+            </mc:Fallback>
+          </mc:AlternateContent>
+        </p:grpSp>
+        <p:cxnSp>
+          <p:nvCxnSpPr>
+            <p:cNvPr id="3" name="直接连接符 2">
+              <a:extLst>
+                <a:ext uri="{FF2B5EF4-FFF2-40B4-BE49-F238E27FC236}">
+                  <a16:creationId xmlns:a16="http://schemas.microsoft.com/office/drawing/2014/main" id="{E94B9421-6DC2-3AA9-8CD4-47EDABE3A2E5}"/>
+                </a:ext>
+              </a:extLst>
+            </p:cNvPr>
+            <p:cNvCxnSpPr/>
+            <p:nvPr/>
+          </p:nvCxnSpPr>
+          <p:spPr>
+            <a:xfrm>
+              <a:off x="1306918" y="1410541"/>
+              <a:ext cx="0" cy="1440000"/>
+            </a:xfrm>
+            <a:prstGeom prst="line">
+              <a:avLst/>
+            </a:prstGeom>
+            <a:ln w="12700"/>
+          </p:spPr>
+          <p:style>
+            <a:lnRef idx="1">
+              <a:schemeClr val="dk1"/>
+            </a:lnRef>
+            <a:fillRef idx="0">
+              <a:schemeClr val="dk1"/>
+            </a:fillRef>
+            <a:effectRef idx="0">
+              <a:schemeClr val="dk1"/>
+            </a:effectRef>
+            <a:fontRef idx="minor">
+              <a:schemeClr val="tx1"/>
+            </a:fontRef>
+          </p:style>
+        </p:cxnSp>
+        <p:cxnSp>
+          <p:nvCxnSpPr>
+            <p:cNvPr id="4" name="直接连接符 3">
+              <a:extLst>
+                <a:ext uri="{FF2B5EF4-FFF2-40B4-BE49-F238E27FC236}">
+                  <a16:creationId xmlns:a16="http://schemas.microsoft.com/office/drawing/2014/main" id="{4F5320E8-55B4-F6ED-3C36-F782D39AFDAE}"/>
+                </a:ext>
+              </a:extLst>
+            </p:cNvPr>
+            <p:cNvCxnSpPr/>
+            <p:nvPr/>
+          </p:nvCxnSpPr>
+          <p:spPr>
+            <a:xfrm>
+              <a:off x="4843330" y="1410541"/>
+              <a:ext cx="0" cy="1440000"/>
+            </a:xfrm>
+            <a:prstGeom prst="line">
+              <a:avLst/>
+            </a:prstGeom>
+            <a:ln w="12700"/>
+          </p:spPr>
+          <p:style>
+            <a:lnRef idx="1">
+              <a:schemeClr val="dk1"/>
+            </a:lnRef>
+            <a:fillRef idx="0">
+              <a:schemeClr val="dk1"/>
+            </a:fillRef>
+            <a:effectRef idx="0">
+              <a:schemeClr val="dk1"/>
+            </a:effectRef>
+            <a:fontRef idx="minor">
+              <a:schemeClr val="tx1"/>
+            </a:fontRef>
+          </p:style>
+        </p:cxnSp>
+        <p:cxnSp>
+          <p:nvCxnSpPr>
+            <p:cNvPr id="6" name="直接连接符 5">
+              <a:extLst>
+                <a:ext uri="{FF2B5EF4-FFF2-40B4-BE49-F238E27FC236}">
+                  <a16:creationId xmlns:a16="http://schemas.microsoft.com/office/drawing/2014/main" id="{82A7E5B4-0968-6F71-7AC4-FE895CBBD7D5}"/>
+                </a:ext>
+              </a:extLst>
+            </p:cNvPr>
+            <p:cNvCxnSpPr>
+              <a:cxnSpLocks/>
+            </p:cNvCxnSpPr>
+            <p:nvPr/>
+          </p:nvCxnSpPr>
+          <p:spPr>
+            <a:xfrm>
+              <a:off x="1306918" y="2650067"/>
+              <a:ext cx="3536412" cy="0"/>
+            </a:xfrm>
+            <a:prstGeom prst="line">
+              <a:avLst/>
+            </a:prstGeom>
+            <a:ln w="12700">
+              <a:solidFill>
+                <a:schemeClr val="tx1"/>
+              </a:solidFill>
+              <a:headEnd type="stealth"/>
+              <a:tailEnd type="stealth"/>
+            </a:ln>
+          </p:spPr>
+          <p:style>
+            <a:lnRef idx="1">
+              <a:schemeClr val="accent1"/>
+            </a:lnRef>
+            <a:fillRef idx="0">
+              <a:schemeClr val="accent1"/>
+            </a:fillRef>
+            <a:effectRef idx="0">
+              <a:schemeClr val="accent1"/>
+            </a:effectRef>
+            <a:fontRef idx="minor">
+              <a:schemeClr val="tx1"/>
+            </a:fontRef>
+          </p:style>
+        </p:cxnSp>
+        <mc:AlternateContent xmlns:mc="http://schemas.openxmlformats.org/markup-compatibility/2006" xmlns:a14="http://schemas.microsoft.com/office/drawing/2010/main">
+          <mc:Choice Requires="a14">
+            <p:sp>
+              <p:nvSpPr>
+                <p:cNvPr id="11" name="文本框 10">
+                  <a:extLst>
+                    <a:ext uri="{FF2B5EF4-FFF2-40B4-BE49-F238E27FC236}">
+                      <a16:creationId xmlns:a16="http://schemas.microsoft.com/office/drawing/2014/main" id="{1F72DDD9-7C96-382B-8D71-4C9983F9DC95}"/>
+                    </a:ext>
+                  </a:extLst>
+                </p:cNvPr>
+                <p:cNvSpPr txBox="1"/>
+                <p:nvPr/>
+              </p:nvSpPr>
+              <p:spPr>
+                <a:xfrm>
+                  <a:off x="3011428" y="2366333"/>
+                  <a:ext cx="190693" cy="276999"/>
+                </a:xfrm>
+                <a:prstGeom prst="rect">
+                  <a:avLst/>
+                </a:prstGeom>
+                <a:noFill/>
+              </p:spPr>
+              <p:txBody>
+                <a:bodyPr wrap="none" lIns="0" tIns="0" rIns="0" bIns="0" rtlCol="0">
+                  <a:spAutoFit/>
+                </a:bodyPr>
+                <a:lstStyle/>
+                <a:p>
+                  <a:pPr/>
+                  <a14:m>
+                    <m:oMathPara xmlns:m="http://schemas.openxmlformats.org/officeDocument/2006/math">
+                      <m:oMathParaPr>
+                        <m:jc m:val="centerGroup"/>
+                      </m:oMathParaPr>
+                      <m:oMath xmlns:m="http://schemas.openxmlformats.org/officeDocument/2006/math">
+                        <m:r>
+                          <a:rPr lang="en-US" altLang="zh-CN" b="0" i="1" smtClean="0">
+                            <a:latin typeface="Cambria Math" panose="02040503050406030204" pitchFamily="18" charset="0"/>
+                          </a:rPr>
+                          <m:t>𝐿</m:t>
+                        </m:r>
+                      </m:oMath>
+                    </m:oMathPara>
+                  </a14:m>
+                  <a:endParaRPr lang="en-US" altLang="zh-CN" b="0" dirty="0"/>
+                </a:p>
+              </p:txBody>
+            </p:sp>
+          </mc:Choice>
+          <mc:Fallback xmlns="">
+            <p:sp>
+              <p:nvSpPr>
+                <p:cNvPr id="11" name="文本框 10">
+                  <a:extLst>
+                    <a:ext uri="{FF2B5EF4-FFF2-40B4-BE49-F238E27FC236}">
+                      <a16:creationId xmlns:a16="http://schemas.microsoft.com/office/drawing/2014/main" id="{1F72DDD9-7C96-382B-8D71-4C9983F9DC95}"/>
+                    </a:ext>
+                  </a:extLst>
+                </p:cNvPr>
+                <p:cNvSpPr txBox="1">
+                  <a:spLocks noRot="1" noChangeAspect="1" noMove="1" noResize="1" noEditPoints="1" noAdjustHandles="1" noChangeArrowheads="1" noChangeShapeType="1" noTextEdit="1"/>
+                </p:cNvSpPr>
+                <p:nvPr/>
+              </p:nvSpPr>
+              <p:spPr>
+                <a:xfrm>
+                  <a:off x="3011428" y="2366333"/>
+                  <a:ext cx="190693" cy="276999"/>
+                </a:xfrm>
+                <a:prstGeom prst="rect">
+                  <a:avLst/>
+                </a:prstGeom>
+                <a:blipFill>
+                  <a:blip r:embed="rId23"/>
+                  <a:stretch>
+                    <a:fillRect l="-25806" r="-22581" b="-6522"/>
+                  </a:stretch>
+                </a:blipFill>
+              </p:spPr>
+              <p:txBody>
+                <a:bodyPr/>
+                <a:lstStyle/>
+                <a:p>
+                  <a:r>
+                    <a:rPr lang="zh-CN" altLang="en-US">
+                      <a:noFill/>
+                    </a:rPr>
+                    <a:t> </a:t>
+                  </a:r>
+                </a:p>
+              </p:txBody>
+            </p:sp>
+          </mc:Fallback>
+        </mc:AlternateContent>
+      </p:grpSp>
     </p:spTree>
     <p:extLst>
       <p:ext uri="{BB962C8B-B14F-4D97-AF65-F5344CB8AC3E}">
         <p14:creationId xmlns:p14="http://schemas.microsoft.com/office/powerpoint/2010/main" val="1331045757"/>
+      </p:ext>
+    </p:extLst>
+  </p:cSld>
+  <p:clrMapOvr>
+    <a:masterClrMapping/>
+  </p:clrMapOvr>
+</p:sld>
+</file>
+
+<file path=ppt/slides/slide3.xml><?xml version="1.0" encoding="utf-8"?>
+<p:sld xmlns:a="http://schemas.openxmlformats.org/drawingml/2006/main" xmlns:r="http://schemas.openxmlformats.org/officeDocument/2006/relationships" xmlns:p="http://schemas.openxmlformats.org/presentationml/2006/main">
+  <p:cSld>
+    <p:spTree>
+      <p:nvGrpSpPr>
+        <p:cNvPr id="1" name=""/>
+        <p:cNvGrpSpPr/>
+        <p:nvPr/>
+      </p:nvGrpSpPr>
+      <p:grpSpPr>
+        <a:xfrm>
+          <a:off x="0" y="0"/>
+          <a:ext cx="0" cy="0"/>
+          <a:chOff x="0" y="0"/>
+          <a:chExt cx="0" cy="0"/>
+        </a:xfrm>
+      </p:grpSpPr>
+      <p:grpSp>
+        <p:nvGrpSpPr>
+          <p:cNvPr id="46" name="组合 45">
+            <a:extLst>
+              <a:ext uri="{FF2B5EF4-FFF2-40B4-BE49-F238E27FC236}">
+                <a16:creationId xmlns:a16="http://schemas.microsoft.com/office/drawing/2014/main" id="{D5AA3AE1-7B1D-F44B-DE2C-43FDD4F391A7}"/>
+              </a:ext>
+            </a:extLst>
+          </p:cNvPr>
+          <p:cNvGrpSpPr/>
+          <p:nvPr/>
+        </p:nvGrpSpPr>
+        <p:grpSpPr>
+          <a:xfrm>
+            <a:off x="-29904000" y="-33668363"/>
+            <a:ext cx="58217033" cy="74292092"/>
+            <a:chOff x="-29904000" y="-33668363"/>
+            <a:chExt cx="58217033" cy="74292092"/>
+          </a:xfrm>
+        </p:grpSpPr>
+        <p:cxnSp>
+          <p:nvCxnSpPr>
+            <p:cNvPr id="5" name="直接连接符 4">
+              <a:extLst>
+                <a:ext uri="{FF2B5EF4-FFF2-40B4-BE49-F238E27FC236}">
+                  <a16:creationId xmlns:a16="http://schemas.microsoft.com/office/drawing/2014/main" id="{A73C410F-3368-C816-00AC-6B8955FC10DF}"/>
+                </a:ext>
+              </a:extLst>
+            </p:cNvPr>
+            <p:cNvCxnSpPr>
+              <a:cxnSpLocks/>
+            </p:cNvCxnSpPr>
+            <p:nvPr/>
+          </p:nvCxnSpPr>
+          <p:spPr>
+            <a:xfrm>
+              <a:off x="2636976" y="3505200"/>
+              <a:ext cx="7388843" cy="0"/>
+            </a:xfrm>
+            <a:prstGeom prst="line">
+              <a:avLst/>
+            </a:prstGeom>
+            <a:ln w="12700">
+              <a:solidFill>
+                <a:schemeClr val="tx1"/>
+              </a:solidFill>
+              <a:prstDash val="lgDashDot"/>
+            </a:ln>
+          </p:spPr>
+          <p:style>
+            <a:lnRef idx="1">
+              <a:schemeClr val="accent1"/>
+            </a:lnRef>
+            <a:fillRef idx="0">
+              <a:schemeClr val="accent1"/>
+            </a:fillRef>
+            <a:effectRef idx="0">
+              <a:schemeClr val="accent1"/>
+            </a:effectRef>
+            <a:fontRef idx="minor">
+              <a:schemeClr val="tx1"/>
+            </a:fontRef>
+          </p:style>
+        </p:cxnSp>
+        <p:sp>
+          <p:nvSpPr>
+            <p:cNvPr id="6" name="椭圆 5">
+              <a:extLst>
+                <a:ext uri="{FF2B5EF4-FFF2-40B4-BE49-F238E27FC236}">
+                  <a16:creationId xmlns:a16="http://schemas.microsoft.com/office/drawing/2014/main" id="{365517C1-2FD1-635E-426E-DACA83F21EDB}"/>
+                </a:ext>
+              </a:extLst>
+            </p:cNvPr>
+            <p:cNvSpPr/>
+            <p:nvPr/>
+          </p:nvSpPr>
+          <p:spPr>
+            <a:xfrm>
+              <a:off x="6088566" y="1598342"/>
+              <a:ext cx="624468" cy="3813717"/>
+            </a:xfrm>
+            <a:prstGeom prst="ellipse">
+              <a:avLst/>
+            </a:prstGeom>
+            <a:noFill/>
+            <a:ln w="25400">
+              <a:solidFill>
+                <a:schemeClr val="tx1"/>
+              </a:solidFill>
+            </a:ln>
+          </p:spPr>
+          <p:style>
+            <a:lnRef idx="2">
+              <a:schemeClr val="accent1">
+                <a:shade val="15000"/>
+              </a:schemeClr>
+            </a:lnRef>
+            <a:fillRef idx="1">
+              <a:schemeClr val="accent1"/>
+            </a:fillRef>
+            <a:effectRef idx="0">
+              <a:schemeClr val="accent1"/>
+            </a:effectRef>
+            <a:fontRef idx="minor">
+              <a:schemeClr val="lt1"/>
+            </a:fontRef>
+          </p:style>
+          <p:txBody>
+            <a:bodyPr rtlCol="0" anchor="ctr"/>
+            <a:lstStyle/>
+            <a:p>
+              <a:pPr algn="ctr"/>
+              <a:endParaRPr lang="zh-CN" altLang="en-US"/>
+            </a:p>
+          </p:txBody>
+        </p:sp>
+        <p:sp>
+          <p:nvSpPr>
+            <p:cNvPr id="7" name="弧形 6">
+              <a:extLst>
+                <a:ext uri="{FF2B5EF4-FFF2-40B4-BE49-F238E27FC236}">
+                  <a16:creationId xmlns:a16="http://schemas.microsoft.com/office/drawing/2014/main" id="{713AE35C-ED68-2AD2-D8E5-BB2E3F358F05}"/>
+                </a:ext>
+              </a:extLst>
+            </p:cNvPr>
+            <p:cNvSpPr>
+              <a:spLocks/>
+            </p:cNvSpPr>
+            <p:nvPr/>
+          </p:nvSpPr>
+          <p:spPr>
+            <a:xfrm>
+              <a:off x="-29904000" y="-14494800"/>
+              <a:ext cx="36000000" cy="36000000"/>
+            </a:xfrm>
+            <a:prstGeom prst="arc">
+              <a:avLst>
+                <a:gd name="adj1" fmla="val 21277670"/>
+                <a:gd name="adj2" fmla="val 349030"/>
+              </a:avLst>
+            </a:prstGeom>
+            <a:ln w="25400">
+              <a:solidFill>
+                <a:schemeClr val="tx1"/>
+              </a:solidFill>
+            </a:ln>
+          </p:spPr>
+          <p:style>
+            <a:lnRef idx="1">
+              <a:schemeClr val="accent1"/>
+            </a:lnRef>
+            <a:fillRef idx="0">
+              <a:schemeClr val="accent1"/>
+            </a:fillRef>
+            <a:effectRef idx="0">
+              <a:schemeClr val="accent1"/>
+            </a:effectRef>
+            <a:fontRef idx="minor">
+              <a:schemeClr val="tx1"/>
+            </a:fontRef>
+          </p:style>
+          <p:txBody>
+            <a:bodyPr rtlCol="0" anchor="ctr"/>
+            <a:lstStyle/>
+            <a:p>
+              <a:pPr algn="ctr"/>
+              <a:endParaRPr lang="zh-CN" altLang="en-US"/>
+            </a:p>
+          </p:txBody>
+        </p:sp>
+        <p:sp>
+          <p:nvSpPr>
+            <p:cNvPr id="8" name="弧形 7">
+              <a:extLst>
+                <a:ext uri="{FF2B5EF4-FFF2-40B4-BE49-F238E27FC236}">
+                  <a16:creationId xmlns:a16="http://schemas.microsoft.com/office/drawing/2014/main" id="{C19D3B5E-D6D1-2BEB-9D0F-3369E1298F6A}"/>
+                </a:ext>
+              </a:extLst>
+            </p:cNvPr>
+            <p:cNvSpPr>
+              <a:spLocks/>
+            </p:cNvSpPr>
+            <p:nvPr/>
+          </p:nvSpPr>
+          <p:spPr>
+            <a:xfrm rot="5400000">
+              <a:off x="-13351363" y="-33668363"/>
+              <a:ext cx="35999999" cy="36000000"/>
+            </a:xfrm>
+            <a:prstGeom prst="arc">
+              <a:avLst>
+                <a:gd name="adj1" fmla="val 21312071"/>
+                <a:gd name="adj2" fmla="val 338233"/>
+              </a:avLst>
+            </a:prstGeom>
+            <a:ln w="25400">
+              <a:solidFill>
+                <a:schemeClr val="tx1"/>
+              </a:solidFill>
+            </a:ln>
+          </p:spPr>
+          <p:style>
+            <a:lnRef idx="1">
+              <a:schemeClr val="accent1"/>
+            </a:lnRef>
+            <a:fillRef idx="0">
+              <a:schemeClr val="accent1"/>
+            </a:fillRef>
+            <a:effectRef idx="0">
+              <a:schemeClr val="accent1"/>
+            </a:effectRef>
+            <a:fontRef idx="minor">
+              <a:schemeClr val="tx1"/>
+            </a:fontRef>
+          </p:style>
+          <p:txBody>
+            <a:bodyPr rtlCol="0" anchor="ctr"/>
+            <a:lstStyle/>
+            <a:p>
+              <a:pPr algn="ctr"/>
+              <a:endParaRPr lang="zh-CN" altLang="en-US"/>
+            </a:p>
+          </p:txBody>
+        </p:sp>
+        <p:sp>
+          <p:nvSpPr>
+            <p:cNvPr id="9" name="弧形 8">
+              <a:extLst>
+                <a:ext uri="{FF2B5EF4-FFF2-40B4-BE49-F238E27FC236}">
+                  <a16:creationId xmlns:a16="http://schemas.microsoft.com/office/drawing/2014/main" id="{B871B276-ED22-0C5A-1E92-473372DE7E10}"/>
+                </a:ext>
+              </a:extLst>
+            </p:cNvPr>
+            <p:cNvSpPr>
+              <a:spLocks/>
+            </p:cNvSpPr>
+            <p:nvPr/>
+          </p:nvSpPr>
+          <p:spPr>
+            <a:xfrm rot="16200000">
+              <a:off x="-13351364" y="4623729"/>
+              <a:ext cx="36000000" cy="36000000"/>
+            </a:xfrm>
+            <a:prstGeom prst="arc">
+              <a:avLst>
+                <a:gd name="adj1" fmla="val 21270575"/>
+                <a:gd name="adj2" fmla="val 285500"/>
+              </a:avLst>
+            </a:prstGeom>
+            <a:ln w="25400">
+              <a:solidFill>
+                <a:schemeClr val="tx1"/>
+              </a:solidFill>
+            </a:ln>
+          </p:spPr>
+          <p:style>
+            <a:lnRef idx="1">
+              <a:schemeClr val="accent1"/>
+            </a:lnRef>
+            <a:fillRef idx="0">
+              <a:schemeClr val="accent1"/>
+            </a:fillRef>
+            <a:effectRef idx="0">
+              <a:schemeClr val="accent1"/>
+            </a:effectRef>
+            <a:fontRef idx="minor">
+              <a:schemeClr val="tx1"/>
+            </a:fontRef>
+          </p:style>
+          <p:txBody>
+            <a:bodyPr rtlCol="0" anchor="ctr"/>
+            <a:lstStyle/>
+            <a:p>
+              <a:pPr algn="ctr"/>
+              <a:endParaRPr lang="zh-CN" altLang="en-US"/>
+            </a:p>
+          </p:txBody>
+        </p:sp>
+        <p:cxnSp>
+          <p:nvCxnSpPr>
+            <p:cNvPr id="11" name="直接连接符 10">
+              <a:extLst>
+                <a:ext uri="{FF2B5EF4-FFF2-40B4-BE49-F238E27FC236}">
+                  <a16:creationId xmlns:a16="http://schemas.microsoft.com/office/drawing/2014/main" id="{0587D98E-6665-07C4-15AA-2B8C188C97B8}"/>
+                </a:ext>
+              </a:extLst>
+            </p:cNvPr>
+            <p:cNvCxnSpPr>
+              <a:cxnSpLocks/>
+            </p:cNvCxnSpPr>
+            <p:nvPr/>
+          </p:nvCxnSpPr>
+          <p:spPr>
+            <a:xfrm>
+              <a:off x="4648635" y="1397000"/>
+              <a:ext cx="0" cy="3575050"/>
+            </a:xfrm>
+            <a:prstGeom prst="line">
+              <a:avLst/>
+            </a:prstGeom>
+            <a:ln w="12700">
+              <a:solidFill>
+                <a:schemeClr val="tx1"/>
+              </a:solidFill>
+              <a:prstDash val="dash"/>
+            </a:ln>
+          </p:spPr>
+          <p:style>
+            <a:lnRef idx="1">
+              <a:schemeClr val="accent1"/>
+            </a:lnRef>
+            <a:fillRef idx="0">
+              <a:schemeClr val="accent1"/>
+            </a:fillRef>
+            <a:effectRef idx="0">
+              <a:schemeClr val="accent1"/>
+            </a:effectRef>
+            <a:fontRef idx="minor">
+              <a:schemeClr val="tx1"/>
+            </a:fontRef>
+          </p:style>
+        </p:cxnSp>
+        <p:sp>
+          <p:nvSpPr>
+            <p:cNvPr id="15" name="弧形 14">
+              <a:extLst>
+                <a:ext uri="{FF2B5EF4-FFF2-40B4-BE49-F238E27FC236}">
+                  <a16:creationId xmlns:a16="http://schemas.microsoft.com/office/drawing/2014/main" id="{732AC9D7-FCCA-E19B-D0F1-A9141933625B}"/>
+                </a:ext>
+              </a:extLst>
+            </p:cNvPr>
+            <p:cNvSpPr>
+              <a:spLocks noChangeAspect="1"/>
+            </p:cNvSpPr>
+            <p:nvPr/>
+          </p:nvSpPr>
+          <p:spPr>
+            <a:xfrm rot="5400000">
+              <a:off x="-2888361" y="-19268364"/>
+              <a:ext cx="21599999" cy="21600000"/>
+            </a:xfrm>
+            <a:prstGeom prst="arc">
+              <a:avLst>
+                <a:gd name="adj1" fmla="val 21095630"/>
+                <a:gd name="adj2" fmla="val 403751"/>
+              </a:avLst>
+            </a:prstGeom>
+            <a:ln w="25400">
+              <a:solidFill>
+                <a:schemeClr val="tx1"/>
+              </a:solidFill>
+            </a:ln>
+          </p:spPr>
+          <p:style>
+            <a:lnRef idx="1">
+              <a:schemeClr val="accent1"/>
+            </a:lnRef>
+            <a:fillRef idx="0">
+              <a:schemeClr val="accent1"/>
+            </a:fillRef>
+            <a:effectRef idx="0">
+              <a:schemeClr val="accent1"/>
+            </a:effectRef>
+            <a:fontRef idx="minor">
+              <a:schemeClr val="tx1"/>
+            </a:fontRef>
+          </p:style>
+          <p:txBody>
+            <a:bodyPr rtlCol="0" anchor="ctr"/>
+            <a:lstStyle/>
+            <a:p>
+              <a:pPr algn="ctr"/>
+              <a:endParaRPr lang="zh-CN" altLang="en-US"/>
+            </a:p>
+          </p:txBody>
+        </p:sp>
+        <p:sp>
+          <p:nvSpPr>
+            <p:cNvPr id="16" name="弧形 15">
+              <a:extLst>
+                <a:ext uri="{FF2B5EF4-FFF2-40B4-BE49-F238E27FC236}">
+                  <a16:creationId xmlns:a16="http://schemas.microsoft.com/office/drawing/2014/main" id="{50AB0F2A-C020-599E-87CD-FD640EEA1A68}"/>
+                </a:ext>
+              </a:extLst>
+            </p:cNvPr>
+            <p:cNvSpPr>
+              <a:spLocks noChangeAspect="1"/>
+            </p:cNvSpPr>
+            <p:nvPr/>
+          </p:nvSpPr>
+          <p:spPr>
+            <a:xfrm rot="16200000">
+              <a:off x="-2830702" y="4605606"/>
+              <a:ext cx="21599999" cy="21600000"/>
+            </a:xfrm>
+            <a:prstGeom prst="arc">
+              <a:avLst>
+                <a:gd name="adj1" fmla="val 21176106"/>
+                <a:gd name="adj2" fmla="val 520343"/>
+              </a:avLst>
+            </a:prstGeom>
+            <a:ln w="25400">
+              <a:solidFill>
+                <a:schemeClr val="tx1"/>
+              </a:solidFill>
+            </a:ln>
+          </p:spPr>
+          <p:style>
+            <a:lnRef idx="1">
+              <a:schemeClr val="accent1"/>
+            </a:lnRef>
+            <a:fillRef idx="0">
+              <a:schemeClr val="accent1"/>
+            </a:fillRef>
+            <a:effectRef idx="0">
+              <a:schemeClr val="accent1"/>
+            </a:effectRef>
+            <a:fontRef idx="minor">
+              <a:schemeClr val="tx1"/>
+            </a:fontRef>
+          </p:style>
+          <p:txBody>
+            <a:bodyPr rtlCol="0" anchor="ctr"/>
+            <a:lstStyle/>
+            <a:p>
+              <a:pPr algn="ctr"/>
+              <a:endParaRPr lang="zh-CN" altLang="en-US"/>
+            </a:p>
+          </p:txBody>
+        </p:sp>
+        <p:cxnSp>
+          <p:nvCxnSpPr>
+            <p:cNvPr id="18" name="直接连接符 17">
+              <a:extLst>
+                <a:ext uri="{FF2B5EF4-FFF2-40B4-BE49-F238E27FC236}">
+                  <a16:creationId xmlns:a16="http://schemas.microsoft.com/office/drawing/2014/main" id="{B3637EE0-C498-C6A2-788C-7C99A9163EB3}"/>
+                </a:ext>
+              </a:extLst>
+            </p:cNvPr>
+            <p:cNvCxnSpPr>
+              <a:cxnSpLocks/>
+            </p:cNvCxnSpPr>
+            <p:nvPr/>
+          </p:nvCxnSpPr>
+          <p:spPr>
+            <a:xfrm>
+              <a:off x="7910590" y="2331636"/>
+              <a:ext cx="50963" cy="2292091"/>
+            </a:xfrm>
+            <a:prstGeom prst="line">
+              <a:avLst/>
+            </a:prstGeom>
+            <a:ln w="12700">
+              <a:solidFill>
+                <a:schemeClr val="tx1"/>
+              </a:solidFill>
+              <a:prstDash val="dash"/>
+            </a:ln>
+          </p:spPr>
+          <p:style>
+            <a:lnRef idx="1">
+              <a:schemeClr val="accent1"/>
+            </a:lnRef>
+            <a:fillRef idx="0">
+              <a:schemeClr val="accent1"/>
+            </a:fillRef>
+            <a:effectRef idx="0">
+              <a:schemeClr val="accent1"/>
+            </a:effectRef>
+            <a:fontRef idx="minor">
+              <a:schemeClr val="tx1"/>
+            </a:fontRef>
+          </p:style>
+        </p:cxnSp>
+        <p:sp>
+          <p:nvSpPr>
+            <p:cNvPr id="24" name="弧形 23">
+              <a:extLst>
+                <a:ext uri="{FF2B5EF4-FFF2-40B4-BE49-F238E27FC236}">
+                  <a16:creationId xmlns:a16="http://schemas.microsoft.com/office/drawing/2014/main" id="{111E9295-0FD8-2B9D-3F31-C1FB1B9D8D0A}"/>
+                </a:ext>
+              </a:extLst>
+            </p:cNvPr>
+            <p:cNvSpPr>
+              <a:spLocks noChangeAspect="1"/>
+            </p:cNvSpPr>
+            <p:nvPr/>
+          </p:nvSpPr>
+          <p:spPr>
+            <a:xfrm rot="10800000">
+              <a:off x="6713034" y="-7278925"/>
+              <a:ext cx="21599999" cy="21600000"/>
+            </a:xfrm>
+            <a:prstGeom prst="arc">
+              <a:avLst>
+                <a:gd name="adj1" fmla="val 21083818"/>
+                <a:gd name="adj2" fmla="val 520343"/>
+              </a:avLst>
+            </a:prstGeom>
+            <a:ln w="25400">
+              <a:solidFill>
+                <a:schemeClr val="tx1"/>
+              </a:solidFill>
+            </a:ln>
+          </p:spPr>
+          <p:style>
+            <a:lnRef idx="1">
+              <a:schemeClr val="accent1"/>
+            </a:lnRef>
+            <a:fillRef idx="0">
+              <a:schemeClr val="accent1"/>
+            </a:fillRef>
+            <a:effectRef idx="0">
+              <a:schemeClr val="accent1"/>
+            </a:effectRef>
+            <a:fontRef idx="minor">
+              <a:schemeClr val="tx1"/>
+            </a:fontRef>
+          </p:style>
+          <p:txBody>
+            <a:bodyPr rtlCol="0" anchor="ctr"/>
+            <a:lstStyle/>
+            <a:p>
+              <a:pPr algn="ctr"/>
+              <a:endParaRPr lang="zh-CN" altLang="en-US"/>
+            </a:p>
+          </p:txBody>
+        </p:sp>
+        <p:cxnSp>
+          <p:nvCxnSpPr>
+            <p:cNvPr id="26" name="直接连接符 25">
+              <a:extLst>
+                <a:ext uri="{FF2B5EF4-FFF2-40B4-BE49-F238E27FC236}">
+                  <a16:creationId xmlns:a16="http://schemas.microsoft.com/office/drawing/2014/main" id="{F951C633-D9F5-F46D-F9D1-A7A262B3CE42}"/>
+                </a:ext>
+              </a:extLst>
+            </p:cNvPr>
+            <p:cNvCxnSpPr>
+              <a:cxnSpLocks/>
+            </p:cNvCxnSpPr>
+            <p:nvPr/>
+          </p:nvCxnSpPr>
+          <p:spPr>
+            <a:xfrm>
+              <a:off x="8934374" y="1524000"/>
+              <a:ext cx="64300" cy="3550920"/>
+            </a:xfrm>
+            <a:prstGeom prst="line">
+              <a:avLst/>
+            </a:prstGeom>
+            <a:ln w="12700">
+              <a:solidFill>
+                <a:schemeClr val="tx1"/>
+              </a:solidFill>
+              <a:prstDash val="dash"/>
+            </a:ln>
+          </p:spPr>
+          <p:style>
+            <a:lnRef idx="1">
+              <a:schemeClr val="accent1"/>
+            </a:lnRef>
+            <a:fillRef idx="0">
+              <a:schemeClr val="accent1"/>
+            </a:fillRef>
+            <a:effectRef idx="0">
+              <a:schemeClr val="accent1"/>
+            </a:effectRef>
+            <a:fontRef idx="minor">
+              <a:schemeClr val="tx1"/>
+            </a:fontRef>
+          </p:style>
+        </p:cxnSp>
+        <p:cxnSp>
+          <p:nvCxnSpPr>
+            <p:cNvPr id="29" name="直接连接符 28">
+              <a:extLst>
+                <a:ext uri="{FF2B5EF4-FFF2-40B4-BE49-F238E27FC236}">
+                  <a16:creationId xmlns:a16="http://schemas.microsoft.com/office/drawing/2014/main" id="{630CED0E-7FCF-38A7-E804-FD32ABFD2822}"/>
+                </a:ext>
+              </a:extLst>
+            </p:cNvPr>
+            <p:cNvCxnSpPr>
+              <a:cxnSpLocks/>
+            </p:cNvCxnSpPr>
+            <p:nvPr/>
+          </p:nvCxnSpPr>
+          <p:spPr>
+            <a:xfrm>
+              <a:off x="4648635" y="1596484"/>
+              <a:ext cx="1752165" cy="0"/>
+            </a:xfrm>
+            <a:prstGeom prst="line">
+              <a:avLst/>
+            </a:prstGeom>
+            <a:ln w="12700">
+              <a:solidFill>
+                <a:schemeClr val="tx1"/>
+              </a:solidFill>
+              <a:headEnd type="stealth"/>
+              <a:tailEnd type="stealth"/>
+            </a:ln>
+          </p:spPr>
+          <p:style>
+            <a:lnRef idx="1">
+              <a:schemeClr val="accent1"/>
+            </a:lnRef>
+            <a:fillRef idx="0">
+              <a:schemeClr val="accent1"/>
+            </a:fillRef>
+            <a:effectRef idx="0">
+              <a:schemeClr val="accent1"/>
+            </a:effectRef>
+            <a:fontRef idx="minor">
+              <a:schemeClr val="tx1"/>
+            </a:fontRef>
+          </p:style>
+        </p:cxnSp>
+        <p:cxnSp>
+          <p:nvCxnSpPr>
+            <p:cNvPr id="35" name="直接连接符 34">
+              <a:extLst>
+                <a:ext uri="{FF2B5EF4-FFF2-40B4-BE49-F238E27FC236}">
+                  <a16:creationId xmlns:a16="http://schemas.microsoft.com/office/drawing/2014/main" id="{67868E73-CE3F-1D1B-97E3-875D6045AB73}"/>
+                </a:ext>
+              </a:extLst>
+            </p:cNvPr>
+            <p:cNvCxnSpPr>
+              <a:cxnSpLocks/>
+            </p:cNvCxnSpPr>
+            <p:nvPr/>
+          </p:nvCxnSpPr>
+          <p:spPr>
+            <a:xfrm>
+              <a:off x="6400800" y="1596484"/>
+              <a:ext cx="2533574" cy="0"/>
+            </a:xfrm>
+            <a:prstGeom prst="line">
+              <a:avLst/>
+            </a:prstGeom>
+            <a:ln w="12700">
+              <a:solidFill>
+                <a:schemeClr val="tx1"/>
+              </a:solidFill>
+              <a:headEnd type="stealth"/>
+              <a:tailEnd type="stealth"/>
+            </a:ln>
+          </p:spPr>
+          <p:style>
+            <a:lnRef idx="1">
+              <a:schemeClr val="accent1"/>
+            </a:lnRef>
+            <a:fillRef idx="0">
+              <a:schemeClr val="accent1"/>
+            </a:fillRef>
+            <a:effectRef idx="0">
+              <a:schemeClr val="accent1"/>
+            </a:effectRef>
+            <a:fontRef idx="minor">
+              <a:schemeClr val="tx1"/>
+            </a:fontRef>
+          </p:style>
+        </p:cxnSp>
+        <mc:AlternateContent xmlns:mc="http://schemas.openxmlformats.org/markup-compatibility/2006">
+          <mc:Choice xmlns:a14="http://schemas.microsoft.com/office/drawing/2010/main" Requires="a14">
+            <p:sp>
+              <p:nvSpPr>
+                <p:cNvPr id="37" name="文本框 36">
+                  <a:extLst>
+                    <a:ext uri="{FF2B5EF4-FFF2-40B4-BE49-F238E27FC236}">
+                      <a16:creationId xmlns:a16="http://schemas.microsoft.com/office/drawing/2014/main" id="{7086DA9A-A602-6B0B-534B-67ABAEF47844}"/>
+                    </a:ext>
+                  </a:extLst>
+                </p:cNvPr>
+                <p:cNvSpPr txBox="1"/>
+                <p:nvPr/>
+              </p:nvSpPr>
+              <p:spPr>
+                <a:xfrm>
+                  <a:off x="5471532" y="1319485"/>
+                  <a:ext cx="141962" cy="276999"/>
+                </a:xfrm>
+                <a:prstGeom prst="rect">
+                  <a:avLst/>
+                </a:prstGeom>
+                <a:noFill/>
+              </p:spPr>
+              <p:txBody>
+                <a:bodyPr wrap="none" lIns="0" tIns="0" rIns="0" bIns="0" rtlCol="0">
+                  <a:spAutoFit/>
+                </a:bodyPr>
+                <a:lstStyle/>
+                <a:p>
+                  <a14:m>
+                    <m:oMathPara xmlns:m="http://schemas.openxmlformats.org/officeDocument/2006/math">
+                      <m:oMathParaPr>
+                        <m:jc m:val="centerGroup"/>
+                      </m:oMathParaPr>
+                      <m:oMath xmlns:m="http://schemas.openxmlformats.org/officeDocument/2006/math">
+                        <m:r>
+                          <a:rPr lang="en-US" altLang="zh-CN" b="0" i="1" smtClean="0">
+                            <a:latin typeface="Cambria Math" panose="02040503050406030204" pitchFamily="18" charset="0"/>
+                          </a:rPr>
+                          <m:t>𝑙</m:t>
+                        </m:r>
+                      </m:oMath>
+                    </m:oMathPara>
+                  </a14:m>
+                  <a:endParaRPr lang="en-US" altLang="zh-CN" b="0" dirty="0"/>
+                </a:p>
+              </p:txBody>
+            </p:sp>
+          </mc:Choice>
+          <mc:Fallback>
+            <p:sp>
+              <p:nvSpPr>
+                <p:cNvPr id="37" name="文本框 36">
+                  <a:extLst>
+                    <a:ext uri="{FF2B5EF4-FFF2-40B4-BE49-F238E27FC236}">
+                      <a16:creationId xmlns:a16="http://schemas.microsoft.com/office/drawing/2014/main" id="{7086DA9A-A602-6B0B-534B-67ABAEF47844}"/>
+                    </a:ext>
+                  </a:extLst>
+                </p:cNvPr>
+                <p:cNvSpPr txBox="1">
+                  <a:spLocks noRot="1" noChangeAspect="1" noMove="1" noResize="1" noEditPoints="1" noAdjustHandles="1" noChangeArrowheads="1" noChangeShapeType="1" noTextEdit="1"/>
+                </p:cNvSpPr>
+                <p:nvPr/>
+              </p:nvSpPr>
+              <p:spPr>
+                <a:xfrm>
+                  <a:off x="5471532" y="1319485"/>
+                  <a:ext cx="141962" cy="276999"/>
+                </a:xfrm>
+                <a:prstGeom prst="rect">
+                  <a:avLst/>
+                </a:prstGeom>
+                <a:blipFill>
+                  <a:blip r:embed="rId2"/>
+                  <a:stretch>
+                    <a:fillRect l="-39130" r="-34783" b="-6522"/>
+                  </a:stretch>
+                </a:blipFill>
+              </p:spPr>
+              <p:txBody>
+                <a:bodyPr/>
+                <a:lstStyle/>
+                <a:p>
+                  <a:r>
+                    <a:rPr lang="zh-CN" altLang="en-US">
+                      <a:noFill/>
+                    </a:rPr>
+                    <a:t> </a:t>
+                  </a:r>
+                </a:p>
+              </p:txBody>
+            </p:sp>
+          </mc:Fallback>
+        </mc:AlternateContent>
+        <mc:AlternateContent xmlns:mc="http://schemas.openxmlformats.org/markup-compatibility/2006">
+          <mc:Choice xmlns:a14="http://schemas.microsoft.com/office/drawing/2010/main" Requires="a14">
+            <p:sp>
+              <p:nvSpPr>
+                <p:cNvPr id="38" name="文本框 37">
+                  <a:extLst>
+                    <a:ext uri="{FF2B5EF4-FFF2-40B4-BE49-F238E27FC236}">
+                      <a16:creationId xmlns:a16="http://schemas.microsoft.com/office/drawing/2014/main" id="{D4B56693-97A0-352B-07DC-4C40484FC74F}"/>
+                    </a:ext>
+                  </a:extLst>
+                </p:cNvPr>
+                <p:cNvSpPr txBox="1"/>
+                <p:nvPr/>
+              </p:nvSpPr>
+              <p:spPr>
+                <a:xfrm>
+                  <a:off x="7794109" y="1258500"/>
+                  <a:ext cx="234487" cy="276999"/>
+                </a:xfrm>
+                <a:prstGeom prst="rect">
+                  <a:avLst/>
+                </a:prstGeom>
+                <a:noFill/>
+              </p:spPr>
+              <p:txBody>
+                <a:bodyPr wrap="none" lIns="0" tIns="0" rIns="0" bIns="0" rtlCol="0">
+                  <a:spAutoFit/>
+                </a:bodyPr>
+                <a:lstStyle/>
+                <a:p>
+                  <a14:m>
+                    <m:oMathPara xmlns:m="http://schemas.openxmlformats.org/officeDocument/2006/math">
+                      <m:oMathParaPr>
+                        <m:jc m:val="centerGroup"/>
+                      </m:oMathParaPr>
+                      <m:oMath xmlns:m="http://schemas.openxmlformats.org/officeDocument/2006/math">
+                        <m:sSub>
+                          <m:sSubPr>
+                            <m:ctrlPr>
+                              <a:rPr lang="en-US" altLang="zh-CN" b="0" i="1" smtClean="0">
+                                <a:latin typeface="Cambria Math" panose="02040503050406030204" pitchFamily="18" charset="0"/>
+                              </a:rPr>
+                            </m:ctrlPr>
+                          </m:sSubPr>
+                          <m:e>
+                            <m:r>
+                              <a:rPr lang="en-US" altLang="zh-CN" b="0" i="1" smtClean="0">
+                                <a:latin typeface="Cambria Math" panose="02040503050406030204" pitchFamily="18" charset="0"/>
+                              </a:rPr>
+                              <m:t>𝑙</m:t>
+                            </m:r>
+                          </m:e>
+                          <m:sub>
+                            <m:r>
+                              <a:rPr lang="en-US" altLang="zh-CN" b="0" i="1" smtClean="0">
+                                <a:latin typeface="Cambria Math" panose="02040503050406030204" pitchFamily="18" charset="0"/>
+                              </a:rPr>
+                              <m:t>𝑐</m:t>
+                            </m:r>
+                          </m:sub>
+                        </m:sSub>
+                      </m:oMath>
+                    </m:oMathPara>
+                  </a14:m>
+                  <a:endParaRPr lang="en-US" altLang="zh-CN" b="0" dirty="0"/>
+                </a:p>
+              </p:txBody>
+            </p:sp>
+          </mc:Choice>
+          <mc:Fallback>
+            <p:sp>
+              <p:nvSpPr>
+                <p:cNvPr id="38" name="文本框 37">
+                  <a:extLst>
+                    <a:ext uri="{FF2B5EF4-FFF2-40B4-BE49-F238E27FC236}">
+                      <a16:creationId xmlns:a16="http://schemas.microsoft.com/office/drawing/2014/main" id="{D4B56693-97A0-352B-07DC-4C40484FC74F}"/>
+                    </a:ext>
+                  </a:extLst>
+                </p:cNvPr>
+                <p:cNvSpPr txBox="1">
+                  <a:spLocks noRot="1" noChangeAspect="1" noMove="1" noResize="1" noEditPoints="1" noAdjustHandles="1" noChangeArrowheads="1" noChangeShapeType="1" noTextEdit="1"/>
+                </p:cNvSpPr>
+                <p:nvPr/>
+              </p:nvSpPr>
+              <p:spPr>
+                <a:xfrm>
+                  <a:off x="7794109" y="1258500"/>
+                  <a:ext cx="234487" cy="276999"/>
+                </a:xfrm>
+                <a:prstGeom prst="rect">
+                  <a:avLst/>
+                </a:prstGeom>
+                <a:blipFill>
+                  <a:blip r:embed="rId3"/>
+                  <a:stretch>
+                    <a:fillRect l="-23684" b="-8696"/>
+                  </a:stretch>
+                </a:blipFill>
+              </p:spPr>
+              <p:txBody>
+                <a:bodyPr/>
+                <a:lstStyle/>
+                <a:p>
+                  <a:r>
+                    <a:rPr lang="zh-CN" altLang="en-US">
+                      <a:noFill/>
+                    </a:rPr>
+                    <a:t> </a:t>
+                  </a:r>
+                </a:p>
+              </p:txBody>
+            </p:sp>
+          </mc:Fallback>
+        </mc:AlternateContent>
+        <mc:AlternateContent xmlns:mc="http://schemas.openxmlformats.org/markup-compatibility/2006">
+          <mc:Choice xmlns:a14="http://schemas.microsoft.com/office/drawing/2010/main" Requires="a14">
+            <p:sp>
+              <p:nvSpPr>
+                <p:cNvPr id="39" name="文本框 38">
+                  <a:extLst>
+                    <a:ext uri="{FF2B5EF4-FFF2-40B4-BE49-F238E27FC236}">
+                      <a16:creationId xmlns:a16="http://schemas.microsoft.com/office/drawing/2014/main" id="{A9249677-9E6F-1DBD-4307-EC800099BA59}"/>
+                    </a:ext>
+                  </a:extLst>
+                </p:cNvPr>
+                <p:cNvSpPr txBox="1"/>
+                <p:nvPr/>
+              </p:nvSpPr>
+              <p:spPr>
+                <a:xfrm>
+                  <a:off x="4312068" y="2816498"/>
+                  <a:ext cx="336567" cy="276999"/>
+                </a:xfrm>
+                <a:prstGeom prst="rect">
+                  <a:avLst/>
+                </a:prstGeom>
+                <a:noFill/>
+              </p:spPr>
+              <p:txBody>
+                <a:bodyPr wrap="none" lIns="0" tIns="0" rIns="0" bIns="0" rtlCol="0">
+                  <a:spAutoFit/>
+                </a:bodyPr>
+                <a:lstStyle/>
+                <a:p>
+                  <a14:m>
+                    <m:oMathPara xmlns:m="http://schemas.openxmlformats.org/officeDocument/2006/math">
+                      <m:oMathParaPr>
+                        <m:jc m:val="centerGroup"/>
+                      </m:oMathParaPr>
+                      <m:oMath xmlns:m="http://schemas.openxmlformats.org/officeDocument/2006/math">
+                        <m:sSub>
+                          <m:sSubPr>
+                            <m:ctrlPr>
+                              <a:rPr lang="en-US" altLang="zh-CN" b="0" i="1" smtClean="0">
+                                <a:latin typeface="Cambria Math" panose="02040503050406030204" pitchFamily="18" charset="0"/>
+                              </a:rPr>
+                            </m:ctrlPr>
+                          </m:sSubPr>
+                          <m:e>
+                            <m:r>
+                              <a:rPr lang="en-US" altLang="zh-CN" b="0" i="1" smtClean="0">
+                                <a:latin typeface="Cambria Math" panose="02040503050406030204" pitchFamily="18" charset="0"/>
+                              </a:rPr>
+                              <m:t>𝜔</m:t>
+                            </m:r>
+                          </m:e>
+                          <m:sub>
+                            <m:r>
+                              <a:rPr lang="en-US" altLang="zh-CN" b="0" i="1" smtClean="0">
+                                <a:latin typeface="Cambria Math" panose="02040503050406030204" pitchFamily="18" charset="0"/>
+                              </a:rPr>
+                              <m:t>0</m:t>
+                            </m:r>
+                          </m:sub>
+                        </m:sSub>
+                      </m:oMath>
+                    </m:oMathPara>
+                  </a14:m>
+                  <a:endParaRPr lang="en-US" altLang="zh-CN" b="0" dirty="0"/>
+                </a:p>
+              </p:txBody>
+            </p:sp>
+          </mc:Choice>
+          <mc:Fallback>
+            <p:sp>
+              <p:nvSpPr>
+                <p:cNvPr id="39" name="文本框 38">
+                  <a:extLst>
+                    <a:ext uri="{FF2B5EF4-FFF2-40B4-BE49-F238E27FC236}">
+                      <a16:creationId xmlns:a16="http://schemas.microsoft.com/office/drawing/2014/main" id="{A9249677-9E6F-1DBD-4307-EC800099BA59}"/>
+                    </a:ext>
+                  </a:extLst>
+                </p:cNvPr>
+                <p:cNvSpPr txBox="1">
+                  <a:spLocks noRot="1" noChangeAspect="1" noMove="1" noResize="1" noEditPoints="1" noAdjustHandles="1" noChangeArrowheads="1" noChangeShapeType="1" noTextEdit="1"/>
+                </p:cNvSpPr>
+                <p:nvPr/>
+              </p:nvSpPr>
+              <p:spPr>
+                <a:xfrm>
+                  <a:off x="4312068" y="2816498"/>
+                  <a:ext cx="336567" cy="276999"/>
+                </a:xfrm>
+                <a:prstGeom prst="rect">
+                  <a:avLst/>
+                </a:prstGeom>
+                <a:blipFill>
+                  <a:blip r:embed="rId4"/>
+                  <a:stretch>
+                    <a:fillRect l="-8929" r="-3571" b="-15556"/>
+                  </a:stretch>
+                </a:blipFill>
+              </p:spPr>
+              <p:txBody>
+                <a:bodyPr/>
+                <a:lstStyle/>
+                <a:p>
+                  <a:r>
+                    <a:rPr lang="zh-CN" altLang="en-US">
+                      <a:noFill/>
+                    </a:rPr>
+                    <a:t> </a:t>
+                  </a:r>
+                </a:p>
+              </p:txBody>
+            </p:sp>
+          </mc:Fallback>
+        </mc:AlternateContent>
+        <mc:AlternateContent xmlns:mc="http://schemas.openxmlformats.org/markup-compatibility/2006">
+          <mc:Choice xmlns:a14="http://schemas.microsoft.com/office/drawing/2010/main" Requires="a14">
+            <p:sp>
+              <p:nvSpPr>
+                <p:cNvPr id="40" name="文本框 39">
+                  <a:extLst>
+                    <a:ext uri="{FF2B5EF4-FFF2-40B4-BE49-F238E27FC236}">
+                      <a16:creationId xmlns:a16="http://schemas.microsoft.com/office/drawing/2014/main" id="{2B165D00-A079-E6D1-D9C9-0CD02D4589A8}"/>
+                    </a:ext>
+                  </a:extLst>
+                </p:cNvPr>
+                <p:cNvSpPr txBox="1"/>
+                <p:nvPr/>
+              </p:nvSpPr>
+              <p:spPr>
+                <a:xfrm>
+                  <a:off x="7535930" y="2816498"/>
+                  <a:ext cx="336567" cy="276999"/>
+                </a:xfrm>
+                <a:prstGeom prst="rect">
+                  <a:avLst/>
+                </a:prstGeom>
+                <a:noFill/>
+              </p:spPr>
+              <p:txBody>
+                <a:bodyPr wrap="none" lIns="0" tIns="0" rIns="0" bIns="0" rtlCol="0">
+                  <a:spAutoFit/>
+                </a:bodyPr>
+                <a:lstStyle/>
+                <a:p>
+                  <a14:m>
+                    <m:oMathPara xmlns:m="http://schemas.openxmlformats.org/officeDocument/2006/math">
+                      <m:oMathParaPr>
+                        <m:jc m:val="centerGroup"/>
+                      </m:oMathParaPr>
+                      <m:oMath xmlns:m="http://schemas.openxmlformats.org/officeDocument/2006/math">
+                        <m:sSubSup>
+                          <m:sSubSupPr>
+                            <m:ctrlPr>
+                              <a:rPr lang="en-US" altLang="zh-CN" b="0" i="1" smtClean="0">
+                                <a:latin typeface="Cambria Math" panose="02040503050406030204" pitchFamily="18" charset="0"/>
+                              </a:rPr>
+                            </m:ctrlPr>
+                          </m:sSubSupPr>
+                          <m:e>
+                            <m:r>
+                              <a:rPr lang="en-US" altLang="zh-CN" b="0" i="1" smtClean="0">
+                                <a:latin typeface="Cambria Math" panose="02040503050406030204" pitchFamily="18" charset="0"/>
+                              </a:rPr>
+                              <m:t>𝜔</m:t>
+                            </m:r>
+                          </m:e>
+                          <m:sub>
+                            <m:r>
+                              <a:rPr lang="en-US" altLang="zh-CN" b="0" i="1" smtClean="0">
+                                <a:latin typeface="Cambria Math" panose="02040503050406030204" pitchFamily="18" charset="0"/>
+                              </a:rPr>
+                              <m:t>0</m:t>
+                            </m:r>
+                          </m:sub>
+                          <m:sup>
+                            <m:r>
+                              <a:rPr lang="en-US" altLang="zh-CN" b="0" i="1" smtClean="0">
+                                <a:latin typeface="Cambria Math" panose="02040503050406030204" pitchFamily="18" charset="0"/>
+                              </a:rPr>
+                              <m:t>′</m:t>
+                            </m:r>
+                          </m:sup>
+                        </m:sSubSup>
+                      </m:oMath>
+                    </m:oMathPara>
+                  </a14:m>
+                  <a:endParaRPr lang="en-US" altLang="zh-CN" b="0" dirty="0"/>
+                </a:p>
+              </p:txBody>
+            </p:sp>
+          </mc:Choice>
+          <mc:Fallback>
+            <p:sp>
+              <p:nvSpPr>
+                <p:cNvPr id="40" name="文本框 39">
+                  <a:extLst>
+                    <a:ext uri="{FF2B5EF4-FFF2-40B4-BE49-F238E27FC236}">
+                      <a16:creationId xmlns:a16="http://schemas.microsoft.com/office/drawing/2014/main" id="{2B165D00-A079-E6D1-D9C9-0CD02D4589A8}"/>
+                    </a:ext>
+                  </a:extLst>
+                </p:cNvPr>
+                <p:cNvSpPr txBox="1">
+                  <a:spLocks noRot="1" noChangeAspect="1" noMove="1" noResize="1" noEditPoints="1" noAdjustHandles="1" noChangeArrowheads="1" noChangeShapeType="1" noTextEdit="1"/>
+                </p:cNvSpPr>
+                <p:nvPr/>
+              </p:nvSpPr>
+              <p:spPr>
+                <a:xfrm>
+                  <a:off x="7535930" y="2816498"/>
+                  <a:ext cx="336567" cy="276999"/>
+                </a:xfrm>
+                <a:prstGeom prst="rect">
+                  <a:avLst/>
+                </a:prstGeom>
+                <a:blipFill>
+                  <a:blip r:embed="rId5"/>
+                  <a:stretch>
+                    <a:fillRect l="-9091" r="-3636" b="-17778"/>
+                  </a:stretch>
+                </a:blipFill>
+              </p:spPr>
+              <p:txBody>
+                <a:bodyPr/>
+                <a:lstStyle/>
+                <a:p>
+                  <a:r>
+                    <a:rPr lang="zh-CN" altLang="en-US">
+                      <a:noFill/>
+                    </a:rPr>
+                    <a:t> </a:t>
+                  </a:r>
+                </a:p>
+              </p:txBody>
+            </p:sp>
+          </mc:Fallback>
+        </mc:AlternateContent>
+        <mc:AlternateContent xmlns:mc="http://schemas.openxmlformats.org/markup-compatibility/2006">
+          <mc:Choice xmlns:a14="http://schemas.microsoft.com/office/drawing/2010/main" Requires="a14">
+            <p:sp>
+              <p:nvSpPr>
+                <p:cNvPr id="41" name="文本框 40">
+                  <a:extLst>
+                    <a:ext uri="{FF2B5EF4-FFF2-40B4-BE49-F238E27FC236}">
+                      <a16:creationId xmlns:a16="http://schemas.microsoft.com/office/drawing/2014/main" id="{B5C21B90-49C0-5C20-C236-7CD0E581EE22}"/>
+                    </a:ext>
+                  </a:extLst>
+                </p:cNvPr>
+                <p:cNvSpPr txBox="1"/>
+                <p:nvPr/>
+              </p:nvSpPr>
+              <p:spPr>
+                <a:xfrm>
+                  <a:off x="8578587" y="2816497"/>
+                  <a:ext cx="320024" cy="276999"/>
+                </a:xfrm>
+                <a:prstGeom prst="rect">
+                  <a:avLst/>
+                </a:prstGeom>
+                <a:noFill/>
+              </p:spPr>
+              <p:txBody>
+                <a:bodyPr wrap="none" lIns="0" tIns="0" rIns="0" bIns="0" rtlCol="0">
+                  <a:spAutoFit/>
+                </a:bodyPr>
+                <a:lstStyle/>
+                <a:p>
+                  <a14:m>
+                    <m:oMathPara xmlns:m="http://schemas.openxmlformats.org/officeDocument/2006/math">
+                      <m:oMathParaPr>
+                        <m:jc m:val="centerGroup"/>
+                      </m:oMathParaPr>
+                      <m:oMath xmlns:m="http://schemas.openxmlformats.org/officeDocument/2006/math">
+                        <m:sSub>
+                          <m:sSubPr>
+                            <m:ctrlPr>
+                              <a:rPr lang="en-US" altLang="zh-CN" b="0" i="1" smtClean="0">
+                                <a:latin typeface="Cambria Math" panose="02040503050406030204" pitchFamily="18" charset="0"/>
+                              </a:rPr>
+                            </m:ctrlPr>
+                          </m:sSubPr>
+                          <m:e>
+                            <m:r>
+                              <a:rPr lang="en-US" altLang="zh-CN" b="0" i="1" smtClean="0">
+                                <a:latin typeface="Cambria Math" panose="02040503050406030204" pitchFamily="18" charset="0"/>
+                              </a:rPr>
+                              <m:t>𝜔</m:t>
+                            </m:r>
+                          </m:e>
+                          <m:sub>
+                            <m:r>
+                              <a:rPr lang="en-US" altLang="zh-CN" b="0" i="1" smtClean="0">
+                                <a:latin typeface="Cambria Math" panose="02040503050406030204" pitchFamily="18" charset="0"/>
+                              </a:rPr>
+                              <m:t>𝑐</m:t>
+                            </m:r>
+                          </m:sub>
+                        </m:sSub>
+                      </m:oMath>
+                    </m:oMathPara>
+                  </a14:m>
+                  <a:endParaRPr lang="en-US" altLang="zh-CN" b="0" dirty="0"/>
+                </a:p>
+              </p:txBody>
+            </p:sp>
+          </mc:Choice>
+          <mc:Fallback>
+            <p:sp>
+              <p:nvSpPr>
+                <p:cNvPr id="41" name="文本框 40">
+                  <a:extLst>
+                    <a:ext uri="{FF2B5EF4-FFF2-40B4-BE49-F238E27FC236}">
+                      <a16:creationId xmlns:a16="http://schemas.microsoft.com/office/drawing/2014/main" id="{B5C21B90-49C0-5C20-C236-7CD0E581EE22}"/>
+                    </a:ext>
+                  </a:extLst>
+                </p:cNvPr>
+                <p:cNvSpPr txBox="1">
+                  <a:spLocks noRot="1" noChangeAspect="1" noMove="1" noResize="1" noEditPoints="1" noAdjustHandles="1" noChangeArrowheads="1" noChangeShapeType="1" noTextEdit="1"/>
+                </p:cNvSpPr>
+                <p:nvPr/>
+              </p:nvSpPr>
+              <p:spPr>
+                <a:xfrm>
+                  <a:off x="8578587" y="2816497"/>
+                  <a:ext cx="320024" cy="276999"/>
+                </a:xfrm>
+                <a:prstGeom prst="rect">
+                  <a:avLst/>
+                </a:prstGeom>
+                <a:blipFill>
+                  <a:blip r:embed="rId6"/>
+                  <a:stretch>
+                    <a:fillRect l="-9434" b="-11111"/>
+                  </a:stretch>
+                </a:blipFill>
+              </p:spPr>
+              <p:txBody>
+                <a:bodyPr/>
+                <a:lstStyle/>
+                <a:p>
+                  <a:r>
+                    <a:rPr lang="zh-CN" altLang="en-US">
+                      <a:noFill/>
+                    </a:rPr>
+                    <a:t> </a:t>
+                  </a:r>
+                </a:p>
+              </p:txBody>
+            </p:sp>
+          </mc:Fallback>
+        </mc:AlternateContent>
+        <mc:AlternateContent xmlns:mc="http://schemas.openxmlformats.org/markup-compatibility/2006">
+          <mc:Choice xmlns:a14="http://schemas.microsoft.com/office/drawing/2010/main" Requires="a14">
+            <p:sp>
+              <p:nvSpPr>
+                <p:cNvPr id="42" name="文本框 41">
+                  <a:extLst>
+                    <a:ext uri="{FF2B5EF4-FFF2-40B4-BE49-F238E27FC236}">
+                      <a16:creationId xmlns:a16="http://schemas.microsoft.com/office/drawing/2014/main" id="{5EF05D6E-8766-B559-45BA-7409F01E591C}"/>
+                    </a:ext>
+                  </a:extLst>
+                </p:cNvPr>
+                <p:cNvSpPr txBox="1"/>
+                <p:nvPr/>
+              </p:nvSpPr>
+              <p:spPr>
+                <a:xfrm>
+                  <a:off x="6301923" y="5430181"/>
+                  <a:ext cx="212622" cy="276999"/>
+                </a:xfrm>
+                <a:prstGeom prst="rect">
+                  <a:avLst/>
+                </a:prstGeom>
+                <a:noFill/>
+              </p:spPr>
+              <p:txBody>
+                <a:bodyPr wrap="none" lIns="0" tIns="0" rIns="0" bIns="0" rtlCol="0">
+                  <a:spAutoFit/>
+                </a:bodyPr>
+                <a:lstStyle/>
+                <a:p>
+                  <a14:m>
+                    <m:oMathPara xmlns:m="http://schemas.openxmlformats.org/officeDocument/2006/math">
+                      <m:oMathParaPr>
+                        <m:jc m:val="centerGroup"/>
+                      </m:oMathParaPr>
+                      <m:oMath xmlns:m="http://schemas.openxmlformats.org/officeDocument/2006/math">
+                        <m:r>
+                          <a:rPr lang="en-US" altLang="zh-CN" b="0" i="1" smtClean="0">
+                            <a:latin typeface="Cambria Math" panose="02040503050406030204" pitchFamily="18" charset="0"/>
+                          </a:rPr>
+                          <m:t>𝐹</m:t>
+                        </m:r>
+                      </m:oMath>
+                    </m:oMathPara>
+                  </a14:m>
+                  <a:endParaRPr lang="zh-CN" altLang="en-US" dirty="0"/>
+                </a:p>
+              </p:txBody>
+            </p:sp>
+          </mc:Choice>
+          <mc:Fallback>
+            <p:sp>
+              <p:nvSpPr>
+                <p:cNvPr id="42" name="文本框 41">
+                  <a:extLst>
+                    <a:ext uri="{FF2B5EF4-FFF2-40B4-BE49-F238E27FC236}">
+                      <a16:creationId xmlns:a16="http://schemas.microsoft.com/office/drawing/2014/main" id="{5EF05D6E-8766-B559-45BA-7409F01E591C}"/>
+                    </a:ext>
+                  </a:extLst>
+                </p:cNvPr>
+                <p:cNvSpPr txBox="1">
+                  <a:spLocks noRot="1" noChangeAspect="1" noMove="1" noResize="1" noEditPoints="1" noAdjustHandles="1" noChangeArrowheads="1" noChangeShapeType="1" noTextEdit="1"/>
+                </p:cNvSpPr>
+                <p:nvPr/>
+              </p:nvSpPr>
+              <p:spPr>
+                <a:xfrm>
+                  <a:off x="6301923" y="5430181"/>
+                  <a:ext cx="212622" cy="276999"/>
+                </a:xfrm>
+                <a:prstGeom prst="rect">
+                  <a:avLst/>
+                </a:prstGeom>
+                <a:blipFill>
+                  <a:blip r:embed="rId7"/>
+                  <a:stretch>
+                    <a:fillRect l="-25714" r="-17143" b="-6667"/>
+                  </a:stretch>
+                </a:blipFill>
+              </p:spPr>
+              <p:txBody>
+                <a:bodyPr/>
+                <a:lstStyle/>
+                <a:p>
+                  <a:r>
+                    <a:rPr lang="zh-CN" altLang="en-US">
+                      <a:noFill/>
+                    </a:rPr>
+                    <a:t> </a:t>
+                  </a:r>
+                </a:p>
+              </p:txBody>
+            </p:sp>
+          </mc:Fallback>
+        </mc:AlternateContent>
+      </p:grpSp>
+    </p:spTree>
+    <p:extLst>
+      <p:ext uri="{BB962C8B-B14F-4D97-AF65-F5344CB8AC3E}">
+        <p14:creationId xmlns:p14="http://schemas.microsoft.com/office/powerpoint/2010/main" val="722566704"/>
       </p:ext>
     </p:extLst>
   </p:cSld>

--- a/PPT/Laser.pptx
+++ b/PPT/Laser.pptx
@@ -4,10 +4,16 @@
   <p:sldMasterIdLst>
     <p:sldMasterId id="2147483648" r:id="rId1"/>
   </p:sldMasterIdLst>
+  <p:notesMasterIdLst>
+    <p:notesMasterId r:id="rId8"/>
+  </p:notesMasterIdLst>
   <p:sldIdLst>
     <p:sldId id="257" r:id="rId2"/>
     <p:sldId id="256" r:id="rId3"/>
     <p:sldId id="258" r:id="rId4"/>
+    <p:sldId id="259" r:id="rId5"/>
+    <p:sldId id="260" r:id="rId6"/>
+    <p:sldId id="261" r:id="rId7"/>
   </p:sldIdLst>
   <p:sldSz cx="12192000" cy="6858000"/>
   <p:notesSz cx="6858000" cy="9144000"/>
@@ -112,6 +118,547 @@
     </p:ext>
   </p:extLst>
 </p:presentation>
+</file>
+
+<file path=ppt/notesMasters/notesMaster1.xml><?xml version="1.0" encoding="utf-8"?>
+<p:notesMaster xmlns:a="http://schemas.openxmlformats.org/drawingml/2006/main" xmlns:r="http://schemas.openxmlformats.org/officeDocument/2006/relationships" xmlns:p="http://schemas.openxmlformats.org/presentationml/2006/main">
+  <p:cSld>
+    <p:bg>
+      <p:bgRef idx="1001">
+        <a:schemeClr val="bg1"/>
+      </p:bgRef>
+    </p:bg>
+    <p:spTree>
+      <p:nvGrpSpPr>
+        <p:cNvPr id="1" name=""/>
+        <p:cNvGrpSpPr/>
+        <p:nvPr/>
+      </p:nvGrpSpPr>
+      <p:grpSpPr>
+        <a:xfrm>
+          <a:off x="0" y="0"/>
+          <a:ext cx="0" cy="0"/>
+          <a:chOff x="0" y="0"/>
+          <a:chExt cx="0" cy="0"/>
+        </a:xfrm>
+      </p:grpSpPr>
+      <p:sp>
+        <p:nvSpPr>
+          <p:cNvPr id="2" name="页眉占位符 1"/>
+          <p:cNvSpPr>
+            <a:spLocks noGrp="1"/>
+          </p:cNvSpPr>
+          <p:nvPr>
+            <p:ph type="hdr" sz="quarter"/>
+          </p:nvPr>
+        </p:nvSpPr>
+        <p:spPr>
+          <a:xfrm>
+            <a:off x="0" y="0"/>
+            <a:ext cx="2971800" cy="458788"/>
+          </a:xfrm>
+          <a:prstGeom prst="rect">
+            <a:avLst/>
+          </a:prstGeom>
+        </p:spPr>
+        <p:txBody>
+          <a:bodyPr vert="horz" lIns="91440" tIns="45720" rIns="91440" bIns="45720" rtlCol="0"/>
+          <a:lstStyle>
+            <a:lvl1pPr algn="l">
+              <a:defRPr sz="1200"/>
+            </a:lvl1pPr>
+          </a:lstStyle>
+          <a:p>
+            <a:endParaRPr lang="zh-CN" altLang="en-US"/>
+          </a:p>
+        </p:txBody>
+      </p:sp>
+      <p:sp>
+        <p:nvSpPr>
+          <p:cNvPr id="3" name="日期占位符 2"/>
+          <p:cNvSpPr>
+            <a:spLocks noGrp="1"/>
+          </p:cNvSpPr>
+          <p:nvPr>
+            <p:ph type="dt" idx="1"/>
+          </p:nvPr>
+        </p:nvSpPr>
+        <p:spPr>
+          <a:xfrm>
+            <a:off x="3884613" y="0"/>
+            <a:ext cx="2971800" cy="458788"/>
+          </a:xfrm>
+          <a:prstGeom prst="rect">
+            <a:avLst/>
+          </a:prstGeom>
+        </p:spPr>
+        <p:txBody>
+          <a:bodyPr vert="horz" lIns="91440" tIns="45720" rIns="91440" bIns="45720" rtlCol="0"/>
+          <a:lstStyle>
+            <a:lvl1pPr algn="r">
+              <a:defRPr sz="1200"/>
+            </a:lvl1pPr>
+          </a:lstStyle>
+          <a:p>
+            <a:fld id="{DAAA3719-F3D1-40F7-B01F-830F19DCC3FD}" type="datetimeFigureOut">
+              <a:rPr lang="zh-CN" altLang="en-US" smtClean="0"/>
+              <a:t>2026-05-10</a:t>
+            </a:fld>
+            <a:endParaRPr lang="zh-CN" altLang="en-US"/>
+          </a:p>
+        </p:txBody>
+      </p:sp>
+      <p:sp>
+        <p:nvSpPr>
+          <p:cNvPr id="4" name="幻灯片图像占位符 3"/>
+          <p:cNvSpPr>
+            <a:spLocks noGrp="1" noRot="1" noChangeAspect="1"/>
+          </p:cNvSpPr>
+          <p:nvPr>
+            <p:ph type="sldImg" idx="2"/>
+          </p:nvPr>
+        </p:nvSpPr>
+        <p:spPr>
+          <a:xfrm>
+            <a:off x="685800" y="1143000"/>
+            <a:ext cx="5486400" cy="3086100"/>
+          </a:xfrm>
+          <a:prstGeom prst="rect">
+            <a:avLst/>
+          </a:prstGeom>
+          <a:noFill/>
+          <a:ln w="12700">
+            <a:solidFill>
+              <a:prstClr val="black"/>
+            </a:solidFill>
+          </a:ln>
+        </p:spPr>
+        <p:txBody>
+          <a:bodyPr vert="horz" lIns="91440" tIns="45720" rIns="91440" bIns="45720" rtlCol="0" anchor="ctr"/>
+          <a:lstStyle/>
+          <a:p>
+            <a:endParaRPr lang="zh-CN" altLang="en-US"/>
+          </a:p>
+        </p:txBody>
+      </p:sp>
+      <p:sp>
+        <p:nvSpPr>
+          <p:cNvPr id="5" name="备注占位符 4"/>
+          <p:cNvSpPr>
+            <a:spLocks noGrp="1"/>
+          </p:cNvSpPr>
+          <p:nvPr>
+            <p:ph type="body" sz="quarter" idx="3"/>
+          </p:nvPr>
+        </p:nvSpPr>
+        <p:spPr>
+          <a:xfrm>
+            <a:off x="685800" y="4400550"/>
+            <a:ext cx="5486400" cy="3600450"/>
+          </a:xfrm>
+          <a:prstGeom prst="rect">
+            <a:avLst/>
+          </a:prstGeom>
+        </p:spPr>
+        <p:txBody>
+          <a:bodyPr vert="horz" lIns="91440" tIns="45720" rIns="91440" bIns="45720" rtlCol="0"/>
+          <a:lstStyle/>
+          <a:p>
+            <a:pPr lvl="0"/>
+            <a:r>
+              <a:rPr lang="zh-CN" altLang="en-US"/>
+              <a:t>单击此处编辑母版文本样式</a:t>
+            </a:r>
+          </a:p>
+          <a:p>
+            <a:pPr lvl="1"/>
+            <a:r>
+              <a:rPr lang="zh-CN" altLang="en-US"/>
+              <a:t>二级</a:t>
+            </a:r>
+          </a:p>
+          <a:p>
+            <a:pPr lvl="2"/>
+            <a:r>
+              <a:rPr lang="zh-CN" altLang="en-US"/>
+              <a:t>三级</a:t>
+            </a:r>
+          </a:p>
+          <a:p>
+            <a:pPr lvl="3"/>
+            <a:r>
+              <a:rPr lang="zh-CN" altLang="en-US"/>
+              <a:t>四级</a:t>
+            </a:r>
+          </a:p>
+          <a:p>
+            <a:pPr lvl="4"/>
+            <a:r>
+              <a:rPr lang="zh-CN" altLang="en-US"/>
+              <a:t>五级</a:t>
+            </a:r>
+          </a:p>
+        </p:txBody>
+      </p:sp>
+      <p:sp>
+        <p:nvSpPr>
+          <p:cNvPr id="6" name="页脚占位符 5"/>
+          <p:cNvSpPr>
+            <a:spLocks noGrp="1"/>
+          </p:cNvSpPr>
+          <p:nvPr>
+            <p:ph type="ftr" sz="quarter" idx="4"/>
+          </p:nvPr>
+        </p:nvSpPr>
+        <p:spPr>
+          <a:xfrm>
+            <a:off x="0" y="8685213"/>
+            <a:ext cx="2971800" cy="458787"/>
+          </a:xfrm>
+          <a:prstGeom prst="rect">
+            <a:avLst/>
+          </a:prstGeom>
+        </p:spPr>
+        <p:txBody>
+          <a:bodyPr vert="horz" lIns="91440" tIns="45720" rIns="91440" bIns="45720" rtlCol="0" anchor="b"/>
+          <a:lstStyle>
+            <a:lvl1pPr algn="l">
+              <a:defRPr sz="1200"/>
+            </a:lvl1pPr>
+          </a:lstStyle>
+          <a:p>
+            <a:endParaRPr lang="zh-CN" altLang="en-US"/>
+          </a:p>
+        </p:txBody>
+      </p:sp>
+      <p:sp>
+        <p:nvSpPr>
+          <p:cNvPr id="7" name="灯片编号占位符 6"/>
+          <p:cNvSpPr>
+            <a:spLocks noGrp="1"/>
+          </p:cNvSpPr>
+          <p:nvPr>
+            <p:ph type="sldNum" sz="quarter" idx="5"/>
+          </p:nvPr>
+        </p:nvSpPr>
+        <p:spPr>
+          <a:xfrm>
+            <a:off x="3884613" y="8685213"/>
+            <a:ext cx="2971800" cy="458787"/>
+          </a:xfrm>
+          <a:prstGeom prst="rect">
+            <a:avLst/>
+          </a:prstGeom>
+        </p:spPr>
+        <p:txBody>
+          <a:bodyPr vert="horz" lIns="91440" tIns="45720" rIns="91440" bIns="45720" rtlCol="0" anchor="b"/>
+          <a:lstStyle>
+            <a:lvl1pPr algn="r">
+              <a:defRPr sz="1200"/>
+            </a:lvl1pPr>
+          </a:lstStyle>
+          <a:p>
+            <a:fld id="{377509A7-27CE-4A5F-B955-0A9086FC198A}" type="slidenum">
+              <a:rPr lang="zh-CN" altLang="en-US" smtClean="0"/>
+              <a:t>‹#›</a:t>
+            </a:fld>
+            <a:endParaRPr lang="zh-CN" altLang="en-US"/>
+          </a:p>
+        </p:txBody>
+      </p:sp>
+    </p:spTree>
+    <p:extLst>
+      <p:ext uri="{BB962C8B-B14F-4D97-AF65-F5344CB8AC3E}">
+        <p14:creationId xmlns:p14="http://schemas.microsoft.com/office/powerpoint/2010/main" val="656809194"/>
+      </p:ext>
+    </p:extLst>
+  </p:cSld>
+  <p:clrMap bg1="lt1" tx1="dk1" bg2="lt2" tx2="dk2" accent1="accent1" accent2="accent2" accent3="accent3" accent4="accent4" accent5="accent5" accent6="accent6" hlink="hlink" folHlink="folHlink"/>
+  <p:notesStyle>
+    <a:lvl1pPr marL="0" algn="l" defTabSz="914400" rtl="0" eaLnBrk="1" latinLnBrk="0" hangingPunct="1">
+      <a:defRPr sz="1200" kern="1200">
+        <a:solidFill>
+          <a:schemeClr val="tx1"/>
+        </a:solidFill>
+        <a:latin typeface="+mn-lt"/>
+        <a:ea typeface="+mn-ea"/>
+        <a:cs typeface="+mn-cs"/>
+      </a:defRPr>
+    </a:lvl1pPr>
+    <a:lvl2pPr marL="457200" algn="l" defTabSz="914400" rtl="0" eaLnBrk="1" latinLnBrk="0" hangingPunct="1">
+      <a:defRPr sz="1200" kern="1200">
+        <a:solidFill>
+          <a:schemeClr val="tx1"/>
+        </a:solidFill>
+        <a:latin typeface="+mn-lt"/>
+        <a:ea typeface="+mn-ea"/>
+        <a:cs typeface="+mn-cs"/>
+      </a:defRPr>
+    </a:lvl2pPr>
+    <a:lvl3pPr marL="914400" algn="l" defTabSz="914400" rtl="0" eaLnBrk="1" latinLnBrk="0" hangingPunct="1">
+      <a:defRPr sz="1200" kern="1200">
+        <a:solidFill>
+          <a:schemeClr val="tx1"/>
+        </a:solidFill>
+        <a:latin typeface="+mn-lt"/>
+        <a:ea typeface="+mn-ea"/>
+        <a:cs typeface="+mn-cs"/>
+      </a:defRPr>
+    </a:lvl3pPr>
+    <a:lvl4pPr marL="1371600" algn="l" defTabSz="914400" rtl="0" eaLnBrk="1" latinLnBrk="0" hangingPunct="1">
+      <a:defRPr sz="1200" kern="1200">
+        <a:solidFill>
+          <a:schemeClr val="tx1"/>
+        </a:solidFill>
+        <a:latin typeface="+mn-lt"/>
+        <a:ea typeface="+mn-ea"/>
+        <a:cs typeface="+mn-cs"/>
+      </a:defRPr>
+    </a:lvl4pPr>
+    <a:lvl5pPr marL="1828800" algn="l" defTabSz="914400" rtl="0" eaLnBrk="1" latinLnBrk="0" hangingPunct="1">
+      <a:defRPr sz="1200" kern="1200">
+        <a:solidFill>
+          <a:schemeClr val="tx1"/>
+        </a:solidFill>
+        <a:latin typeface="+mn-lt"/>
+        <a:ea typeface="+mn-ea"/>
+        <a:cs typeface="+mn-cs"/>
+      </a:defRPr>
+    </a:lvl5pPr>
+    <a:lvl6pPr marL="2286000" algn="l" defTabSz="914400" rtl="0" eaLnBrk="1" latinLnBrk="0" hangingPunct="1">
+      <a:defRPr sz="1200" kern="1200">
+        <a:solidFill>
+          <a:schemeClr val="tx1"/>
+        </a:solidFill>
+        <a:latin typeface="+mn-lt"/>
+        <a:ea typeface="+mn-ea"/>
+        <a:cs typeface="+mn-cs"/>
+      </a:defRPr>
+    </a:lvl6pPr>
+    <a:lvl7pPr marL="2743200" algn="l" defTabSz="914400" rtl="0" eaLnBrk="1" latinLnBrk="0" hangingPunct="1">
+      <a:defRPr sz="1200" kern="1200">
+        <a:solidFill>
+          <a:schemeClr val="tx1"/>
+        </a:solidFill>
+        <a:latin typeface="+mn-lt"/>
+        <a:ea typeface="+mn-ea"/>
+        <a:cs typeface="+mn-cs"/>
+      </a:defRPr>
+    </a:lvl7pPr>
+    <a:lvl8pPr marL="3200400" algn="l" defTabSz="914400" rtl="0" eaLnBrk="1" latinLnBrk="0" hangingPunct="1">
+      <a:defRPr sz="1200" kern="1200">
+        <a:solidFill>
+          <a:schemeClr val="tx1"/>
+        </a:solidFill>
+        <a:latin typeface="+mn-lt"/>
+        <a:ea typeface="+mn-ea"/>
+        <a:cs typeface="+mn-cs"/>
+      </a:defRPr>
+    </a:lvl8pPr>
+    <a:lvl9pPr marL="3657600" algn="l" defTabSz="914400" rtl="0" eaLnBrk="1" latinLnBrk="0" hangingPunct="1">
+      <a:defRPr sz="1200" kern="1200">
+        <a:solidFill>
+          <a:schemeClr val="tx1"/>
+        </a:solidFill>
+        <a:latin typeface="+mn-lt"/>
+        <a:ea typeface="+mn-ea"/>
+        <a:cs typeface="+mn-cs"/>
+      </a:defRPr>
+    </a:lvl9pPr>
+  </p:notesStyle>
+</p:notesMaster>
+</file>
+
+<file path=ppt/notesSlides/notesSlide1.xml><?xml version="1.0" encoding="utf-8"?>
+<p:notes xmlns:a="http://schemas.openxmlformats.org/drawingml/2006/main" xmlns:r="http://schemas.openxmlformats.org/officeDocument/2006/relationships" xmlns:p="http://schemas.openxmlformats.org/presentationml/2006/main">
+  <p:cSld>
+    <p:spTree>
+      <p:nvGrpSpPr>
+        <p:cNvPr id="1" name=""/>
+        <p:cNvGrpSpPr/>
+        <p:nvPr/>
+      </p:nvGrpSpPr>
+      <p:grpSpPr>
+        <a:xfrm>
+          <a:off x="0" y="0"/>
+          <a:ext cx="0" cy="0"/>
+          <a:chOff x="0" y="0"/>
+          <a:chExt cx="0" cy="0"/>
+        </a:xfrm>
+      </p:grpSpPr>
+      <p:sp>
+        <p:nvSpPr>
+          <p:cNvPr id="2" name="幻灯片图像占位符 1"/>
+          <p:cNvSpPr>
+            <a:spLocks noGrp="1" noRot="1" noChangeAspect="1"/>
+          </p:cNvSpPr>
+          <p:nvPr>
+            <p:ph type="sldImg"/>
+          </p:nvPr>
+        </p:nvSpPr>
+        <p:spPr/>
+      </p:sp>
+      <p:sp>
+        <p:nvSpPr>
+          <p:cNvPr id="3" name="备注占位符 2"/>
+          <p:cNvSpPr>
+            <a:spLocks noGrp="1"/>
+          </p:cNvSpPr>
+          <p:nvPr>
+            <p:ph type="body" idx="1"/>
+          </p:nvPr>
+        </p:nvSpPr>
+        <p:spPr/>
+        <p:txBody>
+          <a:bodyPr/>
+          <a:lstStyle/>
+          <a:p>
+            <a:endParaRPr lang="zh-CN" altLang="en-US" dirty="0"/>
+          </a:p>
+        </p:txBody>
+      </p:sp>
+      <p:sp>
+        <p:nvSpPr>
+          <p:cNvPr id="4" name="灯片编号占位符 3"/>
+          <p:cNvSpPr>
+            <a:spLocks noGrp="1"/>
+          </p:cNvSpPr>
+          <p:nvPr>
+            <p:ph type="sldNum" sz="quarter" idx="5"/>
+          </p:nvPr>
+        </p:nvSpPr>
+        <p:spPr/>
+        <p:txBody>
+          <a:bodyPr/>
+          <a:lstStyle/>
+          <a:p>
+            <a:fld id="{377509A7-27CE-4A5F-B955-0A9086FC198A}" type="slidenum">
+              <a:rPr lang="zh-CN" altLang="en-US" smtClean="0"/>
+              <a:t>5</a:t>
+            </a:fld>
+            <a:endParaRPr lang="zh-CN" altLang="en-US"/>
+          </a:p>
+        </p:txBody>
+      </p:sp>
+    </p:spTree>
+    <p:extLst>
+      <p:ext uri="{BB962C8B-B14F-4D97-AF65-F5344CB8AC3E}">
+        <p14:creationId xmlns:p14="http://schemas.microsoft.com/office/powerpoint/2010/main" val="3952827760"/>
+      </p:ext>
+    </p:extLst>
+  </p:cSld>
+  <p:clrMapOvr>
+    <a:masterClrMapping/>
+  </p:clrMapOvr>
+</p:notes>
+</file>
+
+<file path=ppt/notesSlides/notesSlide2.xml><?xml version="1.0" encoding="utf-8"?>
+<p:notes xmlns:a="http://schemas.openxmlformats.org/drawingml/2006/main" xmlns:r="http://schemas.openxmlformats.org/officeDocument/2006/relationships" xmlns:p="http://schemas.openxmlformats.org/presentationml/2006/main">
+  <p:cSld>
+    <p:spTree>
+      <p:nvGrpSpPr>
+        <p:cNvPr id="1" name="">
+          <a:extLst>
+            <a:ext uri="{FF2B5EF4-FFF2-40B4-BE49-F238E27FC236}">
+              <a16:creationId xmlns:a16="http://schemas.microsoft.com/office/drawing/2014/main" id="{DA718E4F-6889-484E-4FA0-77A64BCAFFE4}"/>
+            </a:ext>
+          </a:extLst>
+        </p:cNvPr>
+        <p:cNvGrpSpPr/>
+        <p:nvPr/>
+      </p:nvGrpSpPr>
+      <p:grpSpPr>
+        <a:xfrm>
+          <a:off x="0" y="0"/>
+          <a:ext cx="0" cy="0"/>
+          <a:chOff x="0" y="0"/>
+          <a:chExt cx="0" cy="0"/>
+        </a:xfrm>
+      </p:grpSpPr>
+      <p:sp>
+        <p:nvSpPr>
+          <p:cNvPr id="2" name="幻灯片图像占位符 1">
+            <a:extLst>
+              <a:ext uri="{FF2B5EF4-FFF2-40B4-BE49-F238E27FC236}">
+                <a16:creationId xmlns:a16="http://schemas.microsoft.com/office/drawing/2014/main" id="{5FD93563-D8AE-2859-6D1A-1372E0077D62}"/>
+              </a:ext>
+            </a:extLst>
+          </p:cNvPr>
+          <p:cNvSpPr>
+            <a:spLocks noGrp="1" noRot="1" noChangeAspect="1"/>
+          </p:cNvSpPr>
+          <p:nvPr>
+            <p:ph type="sldImg"/>
+          </p:nvPr>
+        </p:nvSpPr>
+        <p:spPr/>
+      </p:sp>
+      <p:sp>
+        <p:nvSpPr>
+          <p:cNvPr id="3" name="备注占位符 2">
+            <a:extLst>
+              <a:ext uri="{FF2B5EF4-FFF2-40B4-BE49-F238E27FC236}">
+                <a16:creationId xmlns:a16="http://schemas.microsoft.com/office/drawing/2014/main" id="{3C9E21BA-8B2B-2448-BA76-7229D3A80029}"/>
+              </a:ext>
+            </a:extLst>
+          </p:cNvPr>
+          <p:cNvSpPr>
+            <a:spLocks noGrp="1"/>
+          </p:cNvSpPr>
+          <p:nvPr>
+            <p:ph type="body" idx="1"/>
+          </p:nvPr>
+        </p:nvSpPr>
+        <p:spPr/>
+        <p:txBody>
+          <a:bodyPr/>
+          <a:lstStyle/>
+          <a:p>
+            <a:endParaRPr lang="zh-CN" altLang="en-US" dirty="0"/>
+          </a:p>
+        </p:txBody>
+      </p:sp>
+      <p:sp>
+        <p:nvSpPr>
+          <p:cNvPr id="4" name="灯片编号占位符 3">
+            <a:extLst>
+              <a:ext uri="{FF2B5EF4-FFF2-40B4-BE49-F238E27FC236}">
+                <a16:creationId xmlns:a16="http://schemas.microsoft.com/office/drawing/2014/main" id="{09AAF4FD-4D39-C299-4B60-6C34B09748FB}"/>
+              </a:ext>
+            </a:extLst>
+          </p:cNvPr>
+          <p:cNvSpPr>
+            <a:spLocks noGrp="1"/>
+          </p:cNvSpPr>
+          <p:nvPr>
+            <p:ph type="sldNum" sz="quarter" idx="5"/>
+          </p:nvPr>
+        </p:nvSpPr>
+        <p:spPr/>
+        <p:txBody>
+          <a:bodyPr/>
+          <a:lstStyle/>
+          <a:p>
+            <a:fld id="{377509A7-27CE-4A5F-B955-0A9086FC198A}" type="slidenum">
+              <a:rPr lang="zh-CN" altLang="en-US" smtClean="0"/>
+              <a:t>6</a:t>
+            </a:fld>
+            <a:endParaRPr lang="zh-CN" altLang="en-US"/>
+          </a:p>
+        </p:txBody>
+      </p:sp>
+    </p:spTree>
+    <p:extLst>
+      <p:ext uri="{BB962C8B-B14F-4D97-AF65-F5344CB8AC3E}">
+        <p14:creationId xmlns:p14="http://schemas.microsoft.com/office/powerpoint/2010/main" val="2223122307"/>
+      </p:ext>
+    </p:extLst>
+  </p:cSld>
+  <p:clrMapOvr>
+    <a:masterClrMapping/>
+  </p:clrMapOvr>
+</p:notes>
 </file>
 
 <file path=ppt/slideLayouts/slideLayout1.xml><?xml version="1.0" encoding="utf-8"?>
@@ -261,7 +808,7 @@
           <a:p>
             <a:fld id="{A308533E-0AE3-4C05-B5B1-6E310A0229D7}" type="datetimeFigureOut">
               <a:rPr lang="zh-CN" altLang="en-US" smtClean="0"/>
-              <a:t>2025-12-06</a:t>
+              <a:t>2026-05-10</a:t>
             </a:fld>
             <a:endParaRPr lang="zh-CN" altLang="en-US"/>
           </a:p>
@@ -459,7 +1006,7 @@
           <a:p>
             <a:fld id="{A308533E-0AE3-4C05-B5B1-6E310A0229D7}" type="datetimeFigureOut">
               <a:rPr lang="zh-CN" altLang="en-US" smtClean="0"/>
-              <a:t>2025-12-06</a:t>
+              <a:t>2026-05-10</a:t>
             </a:fld>
             <a:endParaRPr lang="zh-CN" altLang="en-US"/>
           </a:p>
@@ -667,7 +1214,7 @@
           <a:p>
             <a:fld id="{A308533E-0AE3-4C05-B5B1-6E310A0229D7}" type="datetimeFigureOut">
               <a:rPr lang="zh-CN" altLang="en-US" smtClean="0"/>
-              <a:t>2025-12-06</a:t>
+              <a:t>2026-05-10</a:t>
             </a:fld>
             <a:endParaRPr lang="zh-CN" altLang="en-US"/>
           </a:p>
@@ -865,7 +1412,7 @@
           <a:p>
             <a:fld id="{A308533E-0AE3-4C05-B5B1-6E310A0229D7}" type="datetimeFigureOut">
               <a:rPr lang="zh-CN" altLang="en-US" smtClean="0"/>
-              <a:t>2025-12-06</a:t>
+              <a:t>2026-05-10</a:t>
             </a:fld>
             <a:endParaRPr lang="zh-CN" altLang="en-US"/>
           </a:p>
@@ -1140,7 +1687,7 @@
           <a:p>
             <a:fld id="{A308533E-0AE3-4C05-B5B1-6E310A0229D7}" type="datetimeFigureOut">
               <a:rPr lang="zh-CN" altLang="en-US" smtClean="0"/>
-              <a:t>2025-12-06</a:t>
+              <a:t>2026-05-10</a:t>
             </a:fld>
             <a:endParaRPr lang="zh-CN" altLang="en-US"/>
           </a:p>
@@ -1405,7 +1952,7 @@
           <a:p>
             <a:fld id="{A308533E-0AE3-4C05-B5B1-6E310A0229D7}" type="datetimeFigureOut">
               <a:rPr lang="zh-CN" altLang="en-US" smtClean="0"/>
-              <a:t>2025-12-06</a:t>
+              <a:t>2026-05-10</a:t>
             </a:fld>
             <a:endParaRPr lang="zh-CN" altLang="en-US"/>
           </a:p>
@@ -1817,7 +2364,7 @@
           <a:p>
             <a:fld id="{A308533E-0AE3-4C05-B5B1-6E310A0229D7}" type="datetimeFigureOut">
               <a:rPr lang="zh-CN" altLang="en-US" smtClean="0"/>
-              <a:t>2025-12-06</a:t>
+              <a:t>2026-05-10</a:t>
             </a:fld>
             <a:endParaRPr lang="zh-CN" altLang="en-US"/>
           </a:p>
@@ -1958,7 +2505,7 @@
           <a:p>
             <a:fld id="{A308533E-0AE3-4C05-B5B1-6E310A0229D7}" type="datetimeFigureOut">
               <a:rPr lang="zh-CN" altLang="en-US" smtClean="0"/>
-              <a:t>2025-12-06</a:t>
+              <a:t>2026-05-10</a:t>
             </a:fld>
             <a:endParaRPr lang="zh-CN" altLang="en-US"/>
           </a:p>
@@ -2071,7 +2618,7 @@
           <a:p>
             <a:fld id="{A308533E-0AE3-4C05-B5B1-6E310A0229D7}" type="datetimeFigureOut">
               <a:rPr lang="zh-CN" altLang="en-US" smtClean="0"/>
-              <a:t>2025-12-06</a:t>
+              <a:t>2026-05-10</a:t>
             </a:fld>
             <a:endParaRPr lang="zh-CN" altLang="en-US"/>
           </a:p>
@@ -2382,7 +2929,7 @@
           <a:p>
             <a:fld id="{A308533E-0AE3-4C05-B5B1-6E310A0229D7}" type="datetimeFigureOut">
               <a:rPr lang="zh-CN" altLang="en-US" smtClean="0"/>
-              <a:t>2025-12-06</a:t>
+              <a:t>2026-05-10</a:t>
             </a:fld>
             <a:endParaRPr lang="zh-CN" altLang="en-US"/>
           </a:p>
@@ -2670,7 +3217,7 @@
           <a:p>
             <a:fld id="{A308533E-0AE3-4C05-B5B1-6E310A0229D7}" type="datetimeFigureOut">
               <a:rPr lang="zh-CN" altLang="en-US" smtClean="0"/>
-              <a:t>2025-12-06</a:t>
+              <a:t>2026-05-10</a:t>
             </a:fld>
             <a:endParaRPr lang="zh-CN" altLang="en-US"/>
           </a:p>
@@ -2911,7 +3458,7 @@
           <a:p>
             <a:fld id="{A308533E-0AE3-4C05-B5B1-6E310A0229D7}" type="datetimeFigureOut">
               <a:rPr lang="zh-CN" altLang="en-US" smtClean="0"/>
-              <a:t>2025-12-06</a:t>
+              <a:t>2026-05-10</a:t>
             </a:fld>
             <a:endParaRPr lang="zh-CN" altLang="en-US"/>
           </a:p>
@@ -9161,8 +9708,8 @@
             </a:fontRef>
           </p:style>
         </p:cxnSp>
-        <mc:AlternateContent xmlns:mc="http://schemas.openxmlformats.org/markup-compatibility/2006">
-          <mc:Choice xmlns:a14="http://schemas.microsoft.com/office/drawing/2010/main" Requires="a14">
+        <mc:AlternateContent xmlns:mc="http://schemas.openxmlformats.org/markup-compatibility/2006" xmlns:a14="http://schemas.microsoft.com/office/drawing/2010/main">
+          <mc:Choice Requires="a14">
             <p:sp>
               <p:nvSpPr>
                 <p:cNvPr id="37" name="文本框 36">
@@ -9191,6 +9738,7 @@
                 </a:bodyPr>
                 <a:lstStyle/>
                 <a:p>
+                  <a:pPr/>
                   <a14:m>
                     <m:oMathPara xmlns:m="http://schemas.openxmlformats.org/officeDocument/2006/math">
                       <m:oMathParaPr>
@@ -9211,7 +9759,7 @@
               </p:txBody>
             </p:sp>
           </mc:Choice>
-          <mc:Fallback>
+          <mc:Fallback xmlns="">
             <p:sp>
               <p:nvSpPr>
                 <p:cNvPr id="37" name="文本框 36">
@@ -9256,8 +9804,8 @@
             </p:sp>
           </mc:Fallback>
         </mc:AlternateContent>
-        <mc:AlternateContent xmlns:mc="http://schemas.openxmlformats.org/markup-compatibility/2006">
-          <mc:Choice xmlns:a14="http://schemas.microsoft.com/office/drawing/2010/main" Requires="a14">
+        <mc:AlternateContent xmlns:mc="http://schemas.openxmlformats.org/markup-compatibility/2006" xmlns:a14="http://schemas.microsoft.com/office/drawing/2010/main">
+          <mc:Choice Requires="a14">
             <p:sp>
               <p:nvSpPr>
                 <p:cNvPr id="38" name="文本框 37">
@@ -9286,6 +9834,7 @@
                 </a:bodyPr>
                 <a:lstStyle/>
                 <a:p>
+                  <a:pPr/>
                   <a14:m>
                     <m:oMathPara xmlns:m="http://schemas.openxmlformats.org/officeDocument/2006/math">
                       <m:oMathParaPr>
@@ -9325,7 +9874,7 @@
               </p:txBody>
             </p:sp>
           </mc:Choice>
-          <mc:Fallback>
+          <mc:Fallback xmlns="">
             <p:sp>
               <p:nvSpPr>
                 <p:cNvPr id="38" name="文本框 37">
@@ -9370,8 +9919,8 @@
             </p:sp>
           </mc:Fallback>
         </mc:AlternateContent>
-        <mc:AlternateContent xmlns:mc="http://schemas.openxmlformats.org/markup-compatibility/2006">
-          <mc:Choice xmlns:a14="http://schemas.microsoft.com/office/drawing/2010/main" Requires="a14">
+        <mc:AlternateContent xmlns:mc="http://schemas.openxmlformats.org/markup-compatibility/2006" xmlns:a14="http://schemas.microsoft.com/office/drawing/2010/main">
+          <mc:Choice Requires="a14">
             <p:sp>
               <p:nvSpPr>
                 <p:cNvPr id="39" name="文本框 38">
@@ -9400,6 +9949,7 @@
                 </a:bodyPr>
                 <a:lstStyle/>
                 <a:p>
+                  <a:pPr/>
                   <a14:m>
                     <m:oMathPara xmlns:m="http://schemas.openxmlformats.org/officeDocument/2006/math">
                       <m:oMathParaPr>
@@ -9439,7 +9989,7 @@
               </p:txBody>
             </p:sp>
           </mc:Choice>
-          <mc:Fallback>
+          <mc:Fallback xmlns="">
             <p:sp>
               <p:nvSpPr>
                 <p:cNvPr id="39" name="文本框 38">
@@ -9484,8 +10034,8 @@
             </p:sp>
           </mc:Fallback>
         </mc:AlternateContent>
-        <mc:AlternateContent xmlns:mc="http://schemas.openxmlformats.org/markup-compatibility/2006">
-          <mc:Choice xmlns:a14="http://schemas.microsoft.com/office/drawing/2010/main" Requires="a14">
+        <mc:AlternateContent xmlns:mc="http://schemas.openxmlformats.org/markup-compatibility/2006" xmlns:a14="http://schemas.microsoft.com/office/drawing/2010/main">
+          <mc:Choice Requires="a14">
             <p:sp>
               <p:nvSpPr>
                 <p:cNvPr id="40" name="文本框 39">
@@ -9514,6 +10064,7 @@
                 </a:bodyPr>
                 <a:lstStyle/>
                 <a:p>
+                  <a:pPr/>
                   <a14:m>
                     <m:oMathPara xmlns:m="http://schemas.openxmlformats.org/officeDocument/2006/math">
                       <m:oMathParaPr>
@@ -9561,7 +10112,7 @@
               </p:txBody>
             </p:sp>
           </mc:Choice>
-          <mc:Fallback>
+          <mc:Fallback xmlns="">
             <p:sp>
               <p:nvSpPr>
                 <p:cNvPr id="40" name="文本框 39">
@@ -9606,8 +10157,8 @@
             </p:sp>
           </mc:Fallback>
         </mc:AlternateContent>
-        <mc:AlternateContent xmlns:mc="http://schemas.openxmlformats.org/markup-compatibility/2006">
-          <mc:Choice xmlns:a14="http://schemas.microsoft.com/office/drawing/2010/main" Requires="a14">
+        <mc:AlternateContent xmlns:mc="http://schemas.openxmlformats.org/markup-compatibility/2006" xmlns:a14="http://schemas.microsoft.com/office/drawing/2010/main">
+          <mc:Choice Requires="a14">
             <p:sp>
               <p:nvSpPr>
                 <p:cNvPr id="41" name="文本框 40">
@@ -9636,6 +10187,7 @@
                 </a:bodyPr>
                 <a:lstStyle/>
                 <a:p>
+                  <a:pPr/>
                   <a14:m>
                     <m:oMathPara xmlns:m="http://schemas.openxmlformats.org/officeDocument/2006/math">
                       <m:oMathParaPr>
@@ -9675,7 +10227,7 @@
               </p:txBody>
             </p:sp>
           </mc:Choice>
-          <mc:Fallback>
+          <mc:Fallback xmlns="">
             <p:sp>
               <p:nvSpPr>
                 <p:cNvPr id="41" name="文本框 40">
@@ -9720,8 +10272,8 @@
             </p:sp>
           </mc:Fallback>
         </mc:AlternateContent>
-        <mc:AlternateContent xmlns:mc="http://schemas.openxmlformats.org/markup-compatibility/2006">
-          <mc:Choice xmlns:a14="http://schemas.microsoft.com/office/drawing/2010/main" Requires="a14">
+        <mc:AlternateContent xmlns:mc="http://schemas.openxmlformats.org/markup-compatibility/2006" xmlns:a14="http://schemas.microsoft.com/office/drawing/2010/main">
+          <mc:Choice Requires="a14">
             <p:sp>
               <p:nvSpPr>
                 <p:cNvPr id="42" name="文本框 41">
@@ -9750,6 +10302,7 @@
                 </a:bodyPr>
                 <a:lstStyle/>
                 <a:p>
+                  <a:pPr/>
                   <a14:m>
                     <m:oMathPara xmlns:m="http://schemas.openxmlformats.org/officeDocument/2006/math">
                       <m:oMathParaPr>
@@ -9770,7 +10323,7 @@
               </p:txBody>
             </p:sp>
           </mc:Choice>
-          <mc:Fallback>
+          <mc:Fallback xmlns="">
             <p:sp>
               <p:nvSpPr>
                 <p:cNvPr id="42" name="文本框 41">
@@ -9820,6 +10373,4511 @@
     <p:extLst>
       <p:ext uri="{BB962C8B-B14F-4D97-AF65-F5344CB8AC3E}">
         <p14:creationId xmlns:p14="http://schemas.microsoft.com/office/powerpoint/2010/main" val="722566704"/>
+      </p:ext>
+    </p:extLst>
+  </p:cSld>
+  <p:clrMapOvr>
+    <a:masterClrMapping/>
+  </p:clrMapOvr>
+</p:sld>
+</file>
+
+<file path=ppt/slides/slide4.xml><?xml version="1.0" encoding="utf-8"?>
+<p:sld xmlns:a="http://schemas.openxmlformats.org/drawingml/2006/main" xmlns:r="http://schemas.openxmlformats.org/officeDocument/2006/relationships" xmlns:p="http://schemas.openxmlformats.org/presentationml/2006/main">
+  <p:cSld>
+    <p:spTree>
+      <p:nvGrpSpPr>
+        <p:cNvPr id="1" name=""/>
+        <p:cNvGrpSpPr/>
+        <p:nvPr/>
+      </p:nvGrpSpPr>
+      <p:grpSpPr>
+        <a:xfrm>
+          <a:off x="0" y="0"/>
+          <a:ext cx="0" cy="0"/>
+          <a:chOff x="0" y="0"/>
+          <a:chExt cx="0" cy="0"/>
+        </a:xfrm>
+      </p:grpSpPr>
+      <p:grpSp>
+        <p:nvGrpSpPr>
+          <p:cNvPr id="50" name="组合 49">
+            <a:extLst>
+              <a:ext uri="{FF2B5EF4-FFF2-40B4-BE49-F238E27FC236}">
+                <a16:creationId xmlns:a16="http://schemas.microsoft.com/office/drawing/2014/main" id="{6D7B5B94-C94C-7057-0638-6D6C362BD189}"/>
+              </a:ext>
+            </a:extLst>
+          </p:cNvPr>
+          <p:cNvGrpSpPr/>
+          <p:nvPr/>
+        </p:nvGrpSpPr>
+        <p:grpSpPr>
+          <a:xfrm>
+            <a:off x="3296766" y="2487420"/>
+            <a:ext cx="4751011" cy="2584475"/>
+            <a:chOff x="3296766" y="2487420"/>
+            <a:chExt cx="4751011" cy="2584475"/>
+          </a:xfrm>
+        </p:grpSpPr>
+        <p:grpSp>
+          <p:nvGrpSpPr>
+            <p:cNvPr id="48" name="组合 47">
+              <a:extLst>
+                <a:ext uri="{FF2B5EF4-FFF2-40B4-BE49-F238E27FC236}">
+                  <a16:creationId xmlns:a16="http://schemas.microsoft.com/office/drawing/2014/main" id="{F31F5F95-25F8-ED9C-FA4B-3D80BC1A2CE3}"/>
+                </a:ext>
+              </a:extLst>
+            </p:cNvPr>
+            <p:cNvGrpSpPr/>
+            <p:nvPr/>
+          </p:nvGrpSpPr>
+          <p:grpSpPr>
+            <a:xfrm>
+              <a:off x="3296766" y="2487420"/>
+              <a:ext cx="4751011" cy="2584475"/>
+              <a:chOff x="1655926" y="2690620"/>
+              <a:chExt cx="4751011" cy="2584475"/>
+            </a:xfrm>
+          </p:grpSpPr>
+          <p:cxnSp>
+            <p:nvCxnSpPr>
+              <p:cNvPr id="5" name="直接连接符 4">
+                <a:extLst>
+                  <a:ext uri="{FF2B5EF4-FFF2-40B4-BE49-F238E27FC236}">
+                    <a16:creationId xmlns:a16="http://schemas.microsoft.com/office/drawing/2014/main" id="{B4AAD02D-1F65-C45C-49AF-7D2590D41C22}"/>
+                  </a:ext>
+                </a:extLst>
+              </p:cNvPr>
+              <p:cNvCxnSpPr>
+                <a:cxnSpLocks/>
+              </p:cNvCxnSpPr>
+              <p:nvPr/>
+            </p:nvCxnSpPr>
+            <p:spPr>
+              <a:xfrm>
+                <a:off x="2025181" y="2829120"/>
+                <a:ext cx="1865622" cy="0"/>
+              </a:xfrm>
+              <a:prstGeom prst="line">
+                <a:avLst/>
+              </a:prstGeom>
+            </p:spPr>
+            <p:style>
+              <a:lnRef idx="2">
+                <a:schemeClr val="dk1"/>
+              </a:lnRef>
+              <a:fillRef idx="0">
+                <a:schemeClr val="dk1"/>
+              </a:fillRef>
+              <a:effectRef idx="1">
+                <a:schemeClr val="dk1"/>
+              </a:effectRef>
+              <a:fontRef idx="minor">
+                <a:schemeClr val="tx1"/>
+              </a:fontRef>
+            </p:style>
+          </p:cxnSp>
+          <p:cxnSp>
+            <p:nvCxnSpPr>
+              <p:cNvPr id="9" name="直接连接符 8">
+                <a:extLst>
+                  <a:ext uri="{FF2B5EF4-FFF2-40B4-BE49-F238E27FC236}">
+                    <a16:creationId xmlns:a16="http://schemas.microsoft.com/office/drawing/2014/main" id="{7FA48A99-2661-479C-9F8F-1A900E246AEB}"/>
+                  </a:ext>
+                </a:extLst>
+              </p:cNvPr>
+              <p:cNvCxnSpPr/>
+              <p:nvPr/>
+            </p:nvCxnSpPr>
+            <p:spPr>
+              <a:xfrm>
+                <a:off x="2025181" y="5136596"/>
+                <a:ext cx="4381756" cy="0"/>
+              </a:xfrm>
+              <a:prstGeom prst="line">
+                <a:avLst/>
+              </a:prstGeom>
+            </p:spPr>
+            <p:style>
+              <a:lnRef idx="2">
+                <a:schemeClr val="dk1"/>
+              </a:lnRef>
+              <a:fillRef idx="0">
+                <a:schemeClr val="dk1"/>
+              </a:fillRef>
+              <a:effectRef idx="1">
+                <a:schemeClr val="dk1"/>
+              </a:effectRef>
+              <a:fontRef idx="minor">
+                <a:schemeClr val="tx1"/>
+              </a:fontRef>
+            </p:style>
+          </p:cxnSp>
+          <p:cxnSp>
+            <p:nvCxnSpPr>
+              <p:cNvPr id="11" name="直接箭头连接符 10">
+                <a:extLst>
+                  <a:ext uri="{FF2B5EF4-FFF2-40B4-BE49-F238E27FC236}">
+                    <a16:creationId xmlns:a16="http://schemas.microsoft.com/office/drawing/2014/main" id="{7DB03B67-E5AB-2C15-472A-06686C22AE9C}"/>
+                  </a:ext>
+                </a:extLst>
+              </p:cNvPr>
+              <p:cNvCxnSpPr/>
+              <p:nvPr/>
+            </p:nvCxnSpPr>
+            <p:spPr>
+              <a:xfrm flipV="1">
+                <a:off x="2430217" y="2829120"/>
+                <a:ext cx="0" cy="2307476"/>
+              </a:xfrm>
+              <a:prstGeom prst="straightConnector1">
+                <a:avLst/>
+              </a:prstGeom>
+              <a:ln>
+                <a:tailEnd type="triangle"/>
+              </a:ln>
+            </p:spPr>
+            <p:style>
+              <a:lnRef idx="2">
+                <a:schemeClr val="dk1"/>
+              </a:lnRef>
+              <a:fillRef idx="0">
+                <a:schemeClr val="dk1"/>
+              </a:fillRef>
+              <a:effectRef idx="1">
+                <a:schemeClr val="dk1"/>
+              </a:effectRef>
+              <a:fontRef idx="minor">
+                <a:schemeClr val="tx1"/>
+              </a:fontRef>
+            </p:style>
+          </p:cxnSp>
+          <p:cxnSp>
+            <p:nvCxnSpPr>
+              <p:cNvPr id="13" name="直接箭头连接符 12">
+                <a:extLst>
+                  <a:ext uri="{FF2B5EF4-FFF2-40B4-BE49-F238E27FC236}">
+                    <a16:creationId xmlns:a16="http://schemas.microsoft.com/office/drawing/2014/main" id="{9596F582-F469-B84D-8D1B-9B5EFCCD462E}"/>
+                  </a:ext>
+                </a:extLst>
+              </p:cNvPr>
+              <p:cNvCxnSpPr/>
+              <p:nvPr/>
+            </p:nvCxnSpPr>
+            <p:spPr>
+              <a:xfrm>
+                <a:off x="2902760" y="2829120"/>
+                <a:ext cx="0" cy="2307476"/>
+              </a:xfrm>
+              <a:prstGeom prst="straightConnector1">
+                <a:avLst/>
+              </a:prstGeom>
+              <a:ln>
+                <a:tailEnd type="triangle"/>
+              </a:ln>
+            </p:spPr>
+            <p:style>
+              <a:lnRef idx="2">
+                <a:schemeClr val="dk1"/>
+              </a:lnRef>
+              <a:fillRef idx="0">
+                <a:schemeClr val="dk1"/>
+              </a:fillRef>
+              <a:effectRef idx="1">
+                <a:schemeClr val="dk1"/>
+              </a:effectRef>
+              <a:fontRef idx="minor">
+                <a:schemeClr val="tx1"/>
+              </a:fontRef>
+            </p:style>
+          </p:cxnSp>
+          <p:cxnSp>
+            <p:nvCxnSpPr>
+              <p:cNvPr id="14" name="直接箭头连接符 13">
+                <a:extLst>
+                  <a:ext uri="{FF2B5EF4-FFF2-40B4-BE49-F238E27FC236}">
+                    <a16:creationId xmlns:a16="http://schemas.microsoft.com/office/drawing/2014/main" id="{7B6F5AC8-32A9-7F2D-68CE-863D63FF9AE1}"/>
+                  </a:ext>
+                </a:extLst>
+              </p:cNvPr>
+              <p:cNvCxnSpPr/>
+              <p:nvPr/>
+            </p:nvCxnSpPr>
+            <p:spPr>
+              <a:xfrm>
+                <a:off x="3392690" y="2829120"/>
+                <a:ext cx="0" cy="2307476"/>
+              </a:xfrm>
+              <a:prstGeom prst="straightConnector1">
+                <a:avLst/>
+              </a:prstGeom>
+              <a:ln>
+                <a:tailEnd type="triangle"/>
+              </a:ln>
+            </p:spPr>
+            <p:style>
+              <a:lnRef idx="2">
+                <a:schemeClr val="dk1"/>
+              </a:lnRef>
+              <a:fillRef idx="0">
+                <a:schemeClr val="dk1"/>
+              </a:fillRef>
+              <a:effectRef idx="1">
+                <a:schemeClr val="dk1"/>
+              </a:effectRef>
+              <a:fontRef idx="minor">
+                <a:schemeClr val="tx1"/>
+              </a:fontRef>
+            </p:style>
+          </p:cxnSp>
+          <p:cxnSp>
+            <p:nvCxnSpPr>
+              <p:cNvPr id="16" name="直接连接符 15">
+                <a:extLst>
+                  <a:ext uri="{FF2B5EF4-FFF2-40B4-BE49-F238E27FC236}">
+                    <a16:creationId xmlns:a16="http://schemas.microsoft.com/office/drawing/2014/main" id="{E24732A1-7F42-CE67-1344-6105E16AE394}"/>
+                  </a:ext>
+                </a:extLst>
+              </p:cNvPr>
+              <p:cNvCxnSpPr>
+                <a:cxnSpLocks/>
+              </p:cNvCxnSpPr>
+              <p:nvPr/>
+            </p:nvCxnSpPr>
+            <p:spPr>
+              <a:xfrm>
+                <a:off x="4018655" y="4386876"/>
+                <a:ext cx="1762317" cy="0"/>
+              </a:xfrm>
+              <a:prstGeom prst="line">
+                <a:avLst/>
+              </a:prstGeom>
+            </p:spPr>
+            <p:style>
+              <a:lnRef idx="2">
+                <a:schemeClr val="dk1"/>
+              </a:lnRef>
+              <a:fillRef idx="0">
+                <a:schemeClr val="dk1"/>
+              </a:fillRef>
+              <a:effectRef idx="1">
+                <a:schemeClr val="dk1"/>
+              </a:effectRef>
+              <a:fontRef idx="minor">
+                <a:schemeClr val="tx1"/>
+              </a:fontRef>
+            </p:style>
+          </p:cxnSp>
+          <p:cxnSp>
+            <p:nvCxnSpPr>
+              <p:cNvPr id="17" name="直接连接符 16">
+                <a:extLst>
+                  <a:ext uri="{FF2B5EF4-FFF2-40B4-BE49-F238E27FC236}">
+                    <a16:creationId xmlns:a16="http://schemas.microsoft.com/office/drawing/2014/main" id="{3CF92FAC-097A-9282-E8E4-8A74F96C30FF}"/>
+                  </a:ext>
+                </a:extLst>
+              </p:cNvPr>
+              <p:cNvCxnSpPr>
+                <a:cxnSpLocks/>
+              </p:cNvCxnSpPr>
+              <p:nvPr/>
+            </p:nvCxnSpPr>
+            <p:spPr>
+              <a:xfrm>
+                <a:off x="4018655" y="3546116"/>
+                <a:ext cx="1762317" cy="0"/>
+              </a:xfrm>
+              <a:prstGeom prst="line">
+                <a:avLst/>
+              </a:prstGeom>
+            </p:spPr>
+            <p:style>
+              <a:lnRef idx="2">
+                <a:schemeClr val="dk1"/>
+              </a:lnRef>
+              <a:fillRef idx="0">
+                <a:schemeClr val="dk1"/>
+              </a:fillRef>
+              <a:effectRef idx="1">
+                <a:schemeClr val="dk1"/>
+              </a:effectRef>
+              <a:fontRef idx="minor">
+                <a:schemeClr val="tx1"/>
+              </a:fontRef>
+            </p:style>
+          </p:cxnSp>
+          <p:cxnSp>
+            <p:nvCxnSpPr>
+              <p:cNvPr id="19" name="直接箭头连接符 18">
+                <a:extLst>
+                  <a:ext uri="{FF2B5EF4-FFF2-40B4-BE49-F238E27FC236}">
+                    <a16:creationId xmlns:a16="http://schemas.microsoft.com/office/drawing/2014/main" id="{70E89DBB-7B22-29FD-F934-C7B46EDC8E49}"/>
+                  </a:ext>
+                </a:extLst>
+              </p:cNvPr>
+              <p:cNvCxnSpPr/>
+              <p:nvPr/>
+            </p:nvCxnSpPr>
+            <p:spPr>
+              <a:xfrm>
+                <a:off x="3694421" y="2829120"/>
+                <a:ext cx="914400" cy="716996"/>
+              </a:xfrm>
+              <a:prstGeom prst="straightConnector1">
+                <a:avLst/>
+              </a:prstGeom>
+              <a:ln>
+                <a:tailEnd type="triangle"/>
+              </a:ln>
+            </p:spPr>
+            <p:style>
+              <a:lnRef idx="2">
+                <a:schemeClr val="dk1"/>
+              </a:lnRef>
+              <a:fillRef idx="0">
+                <a:schemeClr val="dk1"/>
+              </a:fillRef>
+              <a:effectRef idx="1">
+                <a:schemeClr val="dk1"/>
+              </a:effectRef>
+              <a:fontRef idx="minor">
+                <a:schemeClr val="tx1"/>
+              </a:fontRef>
+            </p:style>
+          </p:cxnSp>
+          <p:cxnSp>
+            <p:nvCxnSpPr>
+              <p:cNvPr id="21" name="直接箭头连接符 20">
+                <a:extLst>
+                  <a:ext uri="{FF2B5EF4-FFF2-40B4-BE49-F238E27FC236}">
+                    <a16:creationId xmlns:a16="http://schemas.microsoft.com/office/drawing/2014/main" id="{354D6E30-17DA-EA5D-648E-AFC6A855A86F}"/>
+                  </a:ext>
+                </a:extLst>
+              </p:cNvPr>
+              <p:cNvCxnSpPr/>
+              <p:nvPr/>
+            </p:nvCxnSpPr>
+            <p:spPr>
+              <a:xfrm>
+                <a:off x="4259017" y="3546116"/>
+                <a:ext cx="0" cy="840760"/>
+              </a:xfrm>
+              <a:prstGeom prst="straightConnector1">
+                <a:avLst/>
+              </a:prstGeom>
+              <a:ln>
+                <a:tailEnd type="triangle"/>
+              </a:ln>
+            </p:spPr>
+            <p:style>
+              <a:lnRef idx="2">
+                <a:schemeClr val="dk1"/>
+              </a:lnRef>
+              <a:fillRef idx="0">
+                <a:schemeClr val="dk1"/>
+              </a:fillRef>
+              <a:effectRef idx="1">
+                <a:schemeClr val="dk1"/>
+              </a:effectRef>
+              <a:fontRef idx="minor">
+                <a:schemeClr val="tx1"/>
+              </a:fontRef>
+            </p:style>
+          </p:cxnSp>
+          <p:cxnSp>
+            <p:nvCxnSpPr>
+              <p:cNvPr id="22" name="直接箭头连接符 21">
+                <a:extLst>
+                  <a:ext uri="{FF2B5EF4-FFF2-40B4-BE49-F238E27FC236}">
+                    <a16:creationId xmlns:a16="http://schemas.microsoft.com/office/drawing/2014/main" id="{DFE87E8D-1530-80BD-7C4C-0CA17F470557}"/>
+                  </a:ext>
+                </a:extLst>
+              </p:cNvPr>
+              <p:cNvCxnSpPr/>
+              <p:nvPr/>
+            </p:nvCxnSpPr>
+            <p:spPr>
+              <a:xfrm>
+                <a:off x="4681441" y="3546116"/>
+                <a:ext cx="0" cy="840760"/>
+              </a:xfrm>
+              <a:prstGeom prst="straightConnector1">
+                <a:avLst/>
+              </a:prstGeom>
+              <a:ln>
+                <a:tailEnd type="triangle"/>
+              </a:ln>
+            </p:spPr>
+            <p:style>
+              <a:lnRef idx="2">
+                <a:schemeClr val="dk1"/>
+              </a:lnRef>
+              <a:fillRef idx="0">
+                <a:schemeClr val="dk1"/>
+              </a:fillRef>
+              <a:effectRef idx="1">
+                <a:schemeClr val="dk1"/>
+              </a:effectRef>
+              <a:fontRef idx="minor">
+                <a:schemeClr val="tx1"/>
+              </a:fontRef>
+            </p:style>
+          </p:cxnSp>
+          <p:cxnSp>
+            <p:nvCxnSpPr>
+              <p:cNvPr id="23" name="直接箭头连接符 22">
+                <a:extLst>
+                  <a:ext uri="{FF2B5EF4-FFF2-40B4-BE49-F238E27FC236}">
+                    <a16:creationId xmlns:a16="http://schemas.microsoft.com/office/drawing/2014/main" id="{C0E536AE-F36E-B484-CC53-AC81FC3109EB}"/>
+                  </a:ext>
+                </a:extLst>
+              </p:cNvPr>
+              <p:cNvCxnSpPr/>
+              <p:nvPr/>
+            </p:nvCxnSpPr>
+            <p:spPr>
+              <a:xfrm>
+                <a:off x="5111025" y="3546116"/>
+                <a:ext cx="0" cy="840760"/>
+              </a:xfrm>
+              <a:prstGeom prst="straightConnector1">
+                <a:avLst/>
+              </a:prstGeom>
+              <a:ln>
+                <a:tailEnd type="triangle"/>
+              </a:ln>
+            </p:spPr>
+            <p:style>
+              <a:lnRef idx="2">
+                <a:schemeClr val="dk1"/>
+              </a:lnRef>
+              <a:fillRef idx="0">
+                <a:schemeClr val="dk1"/>
+              </a:fillRef>
+              <a:effectRef idx="1">
+                <a:schemeClr val="dk1"/>
+              </a:effectRef>
+              <a:fontRef idx="minor">
+                <a:schemeClr val="tx1"/>
+              </a:fontRef>
+            </p:style>
+          </p:cxnSp>
+          <p:cxnSp>
+            <p:nvCxnSpPr>
+              <p:cNvPr id="24" name="直接箭头连接符 23">
+                <a:extLst>
+                  <a:ext uri="{FF2B5EF4-FFF2-40B4-BE49-F238E27FC236}">
+                    <a16:creationId xmlns:a16="http://schemas.microsoft.com/office/drawing/2014/main" id="{A869CF53-2127-0078-40F1-4DB461C65FFE}"/>
+                  </a:ext>
+                </a:extLst>
+              </p:cNvPr>
+              <p:cNvCxnSpPr>
+                <a:cxnSpLocks/>
+              </p:cNvCxnSpPr>
+              <p:nvPr/>
+            </p:nvCxnSpPr>
+            <p:spPr>
+              <a:xfrm flipV="1">
+                <a:off x="5546746" y="3541233"/>
+                <a:ext cx="0" cy="840760"/>
+              </a:xfrm>
+              <a:prstGeom prst="straightConnector1">
+                <a:avLst/>
+              </a:prstGeom>
+              <a:ln>
+                <a:tailEnd type="triangle"/>
+              </a:ln>
+            </p:spPr>
+            <p:style>
+              <a:lnRef idx="2">
+                <a:schemeClr val="dk1"/>
+              </a:lnRef>
+              <a:fillRef idx="0">
+                <a:schemeClr val="dk1"/>
+              </a:fillRef>
+              <a:effectRef idx="1">
+                <a:schemeClr val="dk1"/>
+              </a:effectRef>
+              <a:fontRef idx="minor">
+                <a:schemeClr val="tx1"/>
+              </a:fontRef>
+            </p:style>
+          </p:cxnSp>
+          <p:cxnSp>
+            <p:nvCxnSpPr>
+              <p:cNvPr id="27" name="直接箭头连接符 26">
+                <a:extLst>
+                  <a:ext uri="{FF2B5EF4-FFF2-40B4-BE49-F238E27FC236}">
+                    <a16:creationId xmlns:a16="http://schemas.microsoft.com/office/drawing/2014/main" id="{1B789079-2038-5E2C-24F6-014127EB47E8}"/>
+                  </a:ext>
+                </a:extLst>
+              </p:cNvPr>
+              <p:cNvCxnSpPr/>
+              <p:nvPr/>
+            </p:nvCxnSpPr>
+            <p:spPr>
+              <a:xfrm>
+                <a:off x="4878846" y="4386876"/>
+                <a:ext cx="0" cy="749720"/>
+              </a:xfrm>
+              <a:prstGeom prst="straightConnector1">
+                <a:avLst/>
+              </a:prstGeom>
+              <a:ln>
+                <a:tailEnd type="triangle"/>
+              </a:ln>
+            </p:spPr>
+            <p:style>
+              <a:lnRef idx="2">
+                <a:schemeClr val="dk1"/>
+              </a:lnRef>
+              <a:fillRef idx="0">
+                <a:schemeClr val="dk1"/>
+              </a:fillRef>
+              <a:effectRef idx="1">
+                <a:schemeClr val="dk1"/>
+              </a:effectRef>
+              <a:fontRef idx="minor">
+                <a:schemeClr val="tx1"/>
+              </a:fontRef>
+            </p:style>
+          </p:cxnSp>
+          <mc:AlternateContent xmlns:mc="http://schemas.openxmlformats.org/markup-compatibility/2006" xmlns:a14="http://schemas.microsoft.com/office/drawing/2010/main">
+            <mc:Choice Requires="a14">
+              <p:sp>
+                <p:nvSpPr>
+                  <p:cNvPr id="28" name="文本框 27">
+                    <a:extLst>
+                      <a:ext uri="{FF2B5EF4-FFF2-40B4-BE49-F238E27FC236}">
+                        <a16:creationId xmlns:a16="http://schemas.microsoft.com/office/drawing/2014/main" id="{64F896C4-2E25-1D55-48B1-24BDDFFBA51B}"/>
+                      </a:ext>
+                    </a:extLst>
+                  </p:cNvPr>
+                  <p:cNvSpPr txBox="1"/>
+                  <p:nvPr/>
+                </p:nvSpPr>
+                <p:spPr>
+                  <a:xfrm>
+                    <a:off x="1655926" y="4998096"/>
+                    <a:ext cx="301749" cy="276999"/>
+                  </a:xfrm>
+                  <a:prstGeom prst="rect">
+                    <a:avLst/>
+                  </a:prstGeom>
+                  <a:noFill/>
+                </p:spPr>
+                <p:txBody>
+                  <a:bodyPr wrap="none" lIns="0" tIns="0" rIns="0" bIns="0" rtlCol="0">
+                    <a:spAutoFit/>
+                  </a:bodyPr>
+                  <a:lstStyle/>
+                  <a:p>
+                    <a:pPr/>
+                    <a14:m>
+                      <m:oMathPara xmlns:m="http://schemas.openxmlformats.org/officeDocument/2006/math">
+                        <m:oMathParaPr>
+                          <m:jc m:val="centerGroup"/>
+                        </m:oMathParaPr>
+                        <m:oMath xmlns:m="http://schemas.openxmlformats.org/officeDocument/2006/math">
+                          <m:sSub>
+                            <m:sSubPr>
+                              <m:ctrlPr>
+                                <a:rPr lang="en-US" altLang="zh-CN" b="0" i="1" smtClean="0">
+                                  <a:latin typeface="Cambria Math" panose="02040503050406030204" pitchFamily="18" charset="0"/>
+                                </a:rPr>
+                              </m:ctrlPr>
+                            </m:sSubPr>
+                            <m:e>
+                              <m:r>
+                                <a:rPr lang="en-US" altLang="zh-CN" b="0" i="1" smtClean="0">
+                                  <a:latin typeface="Cambria Math" panose="02040503050406030204" pitchFamily="18" charset="0"/>
+                                </a:rPr>
+                                <m:t>𝐸</m:t>
+                              </m:r>
+                            </m:e>
+                            <m:sub>
+                              <m:r>
+                                <a:rPr lang="en-US" altLang="zh-CN" b="0" i="1" smtClean="0">
+                                  <a:latin typeface="Cambria Math" panose="02040503050406030204" pitchFamily="18" charset="0"/>
+                                </a:rPr>
+                                <m:t>0</m:t>
+                              </m:r>
+                            </m:sub>
+                          </m:sSub>
+                        </m:oMath>
+                      </m:oMathPara>
+                    </a14:m>
+                    <a:endParaRPr lang="en-US" altLang="zh-CN" b="0" dirty="0"/>
+                  </a:p>
+                </p:txBody>
+              </p:sp>
+            </mc:Choice>
+            <mc:Fallback xmlns="">
+              <p:sp>
+                <p:nvSpPr>
+                  <p:cNvPr id="28" name="文本框 27">
+                    <a:extLst>
+                      <a:ext uri="{FF2B5EF4-FFF2-40B4-BE49-F238E27FC236}">
+                        <a16:creationId xmlns:a16="http://schemas.microsoft.com/office/drawing/2014/main" id="{64F896C4-2E25-1D55-48B1-24BDDFFBA51B}"/>
+                      </a:ext>
+                    </a:extLst>
+                  </p:cNvPr>
+                  <p:cNvSpPr txBox="1">
+                    <a:spLocks noRot="1" noChangeAspect="1" noMove="1" noResize="1" noEditPoints="1" noAdjustHandles="1" noChangeArrowheads="1" noChangeShapeType="1" noTextEdit="1"/>
+                  </p:cNvSpPr>
+                  <p:nvPr/>
+                </p:nvSpPr>
+                <p:spPr>
+                  <a:xfrm>
+                    <a:off x="1655926" y="4998096"/>
+                    <a:ext cx="301749" cy="276999"/>
+                  </a:xfrm>
+                  <a:prstGeom prst="rect">
+                    <a:avLst/>
+                  </a:prstGeom>
+                  <a:blipFill>
+                    <a:blip r:embed="rId2"/>
+                    <a:stretch>
+                      <a:fillRect l="-18367" r="-6122" b="-15556"/>
+                    </a:stretch>
+                  </a:blipFill>
+                </p:spPr>
+                <p:txBody>
+                  <a:bodyPr/>
+                  <a:lstStyle/>
+                  <a:p>
+                    <a:r>
+                      <a:rPr lang="zh-CN" altLang="en-US">
+                        <a:noFill/>
+                      </a:rPr>
+                      <a:t> </a:t>
+                    </a:r>
+                  </a:p>
+                </p:txBody>
+              </p:sp>
+            </mc:Fallback>
+          </mc:AlternateContent>
+          <mc:AlternateContent xmlns:mc="http://schemas.openxmlformats.org/markup-compatibility/2006" xmlns:a14="http://schemas.microsoft.com/office/drawing/2010/main">
+            <mc:Choice Requires="a14">
+              <p:sp>
+                <p:nvSpPr>
+                  <p:cNvPr id="29" name="文本框 28">
+                    <a:extLst>
+                      <a:ext uri="{FF2B5EF4-FFF2-40B4-BE49-F238E27FC236}">
+                        <a16:creationId xmlns:a16="http://schemas.microsoft.com/office/drawing/2014/main" id="{1E3AC3E0-FDA1-25A9-FEFF-0DB351766D3C}"/>
+                      </a:ext>
+                    </a:extLst>
+                  </p:cNvPr>
+                  <p:cNvSpPr txBox="1"/>
+                  <p:nvPr/>
+                </p:nvSpPr>
+                <p:spPr>
+                  <a:xfrm>
+                    <a:off x="1723432" y="2690620"/>
+                    <a:ext cx="301749" cy="276999"/>
+                  </a:xfrm>
+                  <a:prstGeom prst="rect">
+                    <a:avLst/>
+                  </a:prstGeom>
+                  <a:noFill/>
+                </p:spPr>
+                <p:txBody>
+                  <a:bodyPr wrap="none" lIns="0" tIns="0" rIns="0" bIns="0" rtlCol="0">
+                    <a:spAutoFit/>
+                  </a:bodyPr>
+                  <a:lstStyle/>
+                  <a:p>
+                    <a:pPr/>
+                    <a14:m>
+                      <m:oMathPara xmlns:m="http://schemas.openxmlformats.org/officeDocument/2006/math">
+                        <m:oMathParaPr>
+                          <m:jc m:val="centerGroup"/>
+                        </m:oMathParaPr>
+                        <m:oMath xmlns:m="http://schemas.openxmlformats.org/officeDocument/2006/math">
+                          <m:sSub>
+                            <m:sSubPr>
+                              <m:ctrlPr>
+                                <a:rPr lang="en-US" altLang="zh-CN" b="0" i="1" smtClean="0">
+                                  <a:latin typeface="Cambria Math" panose="02040503050406030204" pitchFamily="18" charset="0"/>
+                                </a:rPr>
+                              </m:ctrlPr>
+                            </m:sSubPr>
+                            <m:e>
+                              <m:r>
+                                <a:rPr lang="en-US" altLang="zh-CN" b="0" i="1" smtClean="0">
+                                  <a:latin typeface="Cambria Math" panose="02040503050406030204" pitchFamily="18" charset="0"/>
+                                </a:rPr>
+                                <m:t>𝐸</m:t>
+                              </m:r>
+                            </m:e>
+                            <m:sub>
+                              <m:r>
+                                <a:rPr lang="en-US" altLang="zh-CN" b="0" i="1" smtClean="0">
+                                  <a:latin typeface="Cambria Math" panose="02040503050406030204" pitchFamily="18" charset="0"/>
+                                </a:rPr>
+                                <m:t>3</m:t>
+                              </m:r>
+                            </m:sub>
+                          </m:sSub>
+                        </m:oMath>
+                      </m:oMathPara>
+                    </a14:m>
+                    <a:endParaRPr lang="en-US" altLang="zh-CN" b="0" dirty="0"/>
+                  </a:p>
+                </p:txBody>
+              </p:sp>
+            </mc:Choice>
+            <mc:Fallback xmlns="">
+              <p:sp>
+                <p:nvSpPr>
+                  <p:cNvPr id="29" name="文本框 28">
+                    <a:extLst>
+                      <a:ext uri="{FF2B5EF4-FFF2-40B4-BE49-F238E27FC236}">
+                        <a16:creationId xmlns:a16="http://schemas.microsoft.com/office/drawing/2014/main" id="{1E3AC3E0-FDA1-25A9-FEFF-0DB351766D3C}"/>
+                      </a:ext>
+                    </a:extLst>
+                  </p:cNvPr>
+                  <p:cNvSpPr txBox="1">
+                    <a:spLocks noRot="1" noChangeAspect="1" noMove="1" noResize="1" noEditPoints="1" noAdjustHandles="1" noChangeArrowheads="1" noChangeShapeType="1" noTextEdit="1"/>
+                  </p:cNvSpPr>
+                  <p:nvPr/>
+                </p:nvSpPr>
+                <p:spPr>
+                  <a:xfrm>
+                    <a:off x="1723432" y="2690620"/>
+                    <a:ext cx="301749" cy="276999"/>
+                  </a:xfrm>
+                  <a:prstGeom prst="rect">
+                    <a:avLst/>
+                  </a:prstGeom>
+                  <a:blipFill>
+                    <a:blip r:embed="rId3"/>
+                    <a:stretch>
+                      <a:fillRect l="-18367" r="-6122" b="-15556"/>
+                    </a:stretch>
+                  </a:blipFill>
+                </p:spPr>
+                <p:txBody>
+                  <a:bodyPr/>
+                  <a:lstStyle/>
+                  <a:p>
+                    <a:r>
+                      <a:rPr lang="zh-CN" altLang="en-US">
+                        <a:noFill/>
+                      </a:rPr>
+                      <a:t> </a:t>
+                    </a:r>
+                  </a:p>
+                </p:txBody>
+              </p:sp>
+            </mc:Fallback>
+          </mc:AlternateContent>
+          <mc:AlternateContent xmlns:mc="http://schemas.openxmlformats.org/markup-compatibility/2006" xmlns:a14="http://schemas.microsoft.com/office/drawing/2010/main">
+            <mc:Choice Requires="a14">
+              <p:sp>
+                <p:nvSpPr>
+                  <p:cNvPr id="30" name="文本框 29">
+                    <a:extLst>
+                      <a:ext uri="{FF2B5EF4-FFF2-40B4-BE49-F238E27FC236}">
+                        <a16:creationId xmlns:a16="http://schemas.microsoft.com/office/drawing/2014/main" id="{0AA6D618-1BC0-896E-B719-4923832F2A3D}"/>
+                      </a:ext>
+                    </a:extLst>
+                  </p:cNvPr>
+                  <p:cNvSpPr txBox="1"/>
+                  <p:nvPr/>
+                </p:nvSpPr>
+                <p:spPr>
+                  <a:xfrm>
+                    <a:off x="5862275" y="4248376"/>
+                    <a:ext cx="296427" cy="276999"/>
+                  </a:xfrm>
+                  <a:prstGeom prst="rect">
+                    <a:avLst/>
+                  </a:prstGeom>
+                  <a:noFill/>
+                </p:spPr>
+                <p:txBody>
+                  <a:bodyPr wrap="none" lIns="0" tIns="0" rIns="0" bIns="0" rtlCol="0">
+                    <a:spAutoFit/>
+                  </a:bodyPr>
+                  <a:lstStyle/>
+                  <a:p>
+                    <a:pPr/>
+                    <a14:m>
+                      <m:oMathPara xmlns:m="http://schemas.openxmlformats.org/officeDocument/2006/math">
+                        <m:oMathParaPr>
+                          <m:jc m:val="centerGroup"/>
+                        </m:oMathParaPr>
+                        <m:oMath xmlns:m="http://schemas.openxmlformats.org/officeDocument/2006/math">
+                          <m:sSub>
+                            <m:sSubPr>
+                              <m:ctrlPr>
+                                <a:rPr lang="en-US" altLang="zh-CN" b="0" i="1" smtClean="0">
+                                  <a:latin typeface="Cambria Math" panose="02040503050406030204" pitchFamily="18" charset="0"/>
+                                </a:rPr>
+                              </m:ctrlPr>
+                            </m:sSubPr>
+                            <m:e>
+                              <m:r>
+                                <a:rPr lang="en-US" altLang="zh-CN" b="0" i="1" smtClean="0">
+                                  <a:latin typeface="Cambria Math" panose="02040503050406030204" pitchFamily="18" charset="0"/>
+                                </a:rPr>
+                                <m:t>𝐸</m:t>
+                              </m:r>
+                            </m:e>
+                            <m:sub>
+                              <m:r>
+                                <a:rPr lang="en-US" altLang="zh-CN" b="0" i="1" smtClean="0">
+                                  <a:latin typeface="Cambria Math" panose="02040503050406030204" pitchFamily="18" charset="0"/>
+                                </a:rPr>
+                                <m:t>1</m:t>
+                              </m:r>
+                            </m:sub>
+                          </m:sSub>
+                        </m:oMath>
+                      </m:oMathPara>
+                    </a14:m>
+                    <a:endParaRPr lang="en-US" altLang="zh-CN" b="0" dirty="0"/>
+                  </a:p>
+                </p:txBody>
+              </p:sp>
+            </mc:Choice>
+            <mc:Fallback xmlns="">
+              <p:sp>
+                <p:nvSpPr>
+                  <p:cNvPr id="30" name="文本框 29">
+                    <a:extLst>
+                      <a:ext uri="{FF2B5EF4-FFF2-40B4-BE49-F238E27FC236}">
+                        <a16:creationId xmlns:a16="http://schemas.microsoft.com/office/drawing/2014/main" id="{0AA6D618-1BC0-896E-B719-4923832F2A3D}"/>
+                      </a:ext>
+                    </a:extLst>
+                  </p:cNvPr>
+                  <p:cNvSpPr txBox="1">
+                    <a:spLocks noRot="1" noChangeAspect="1" noMove="1" noResize="1" noEditPoints="1" noAdjustHandles="1" noChangeArrowheads="1" noChangeShapeType="1" noTextEdit="1"/>
+                  </p:cNvSpPr>
+                  <p:nvPr/>
+                </p:nvSpPr>
+                <p:spPr>
+                  <a:xfrm>
+                    <a:off x="5862275" y="4248376"/>
+                    <a:ext cx="296427" cy="276999"/>
+                  </a:xfrm>
+                  <a:prstGeom prst="rect">
+                    <a:avLst/>
+                  </a:prstGeom>
+                  <a:blipFill>
+                    <a:blip r:embed="rId4"/>
+                    <a:stretch>
+                      <a:fillRect l="-18750" r="-6250" b="-15556"/>
+                    </a:stretch>
+                  </a:blipFill>
+                </p:spPr>
+                <p:txBody>
+                  <a:bodyPr/>
+                  <a:lstStyle/>
+                  <a:p>
+                    <a:r>
+                      <a:rPr lang="zh-CN" altLang="en-US">
+                        <a:noFill/>
+                      </a:rPr>
+                      <a:t> </a:t>
+                    </a:r>
+                  </a:p>
+                </p:txBody>
+              </p:sp>
+            </mc:Fallback>
+          </mc:AlternateContent>
+          <mc:AlternateContent xmlns:mc="http://schemas.openxmlformats.org/markup-compatibility/2006" xmlns:a14="http://schemas.microsoft.com/office/drawing/2010/main">
+            <mc:Choice Requires="a14">
+              <p:sp>
+                <p:nvSpPr>
+                  <p:cNvPr id="37" name="文本框 36">
+                    <a:extLst>
+                      <a:ext uri="{FF2B5EF4-FFF2-40B4-BE49-F238E27FC236}">
+                        <a16:creationId xmlns:a16="http://schemas.microsoft.com/office/drawing/2014/main" id="{5C2C90F8-DD93-AB05-A517-F0B3400677F7}"/>
+                      </a:ext>
+                    </a:extLst>
+                  </p:cNvPr>
+                  <p:cNvSpPr txBox="1"/>
+                  <p:nvPr/>
+                </p:nvSpPr>
+                <p:spPr>
+                  <a:xfrm>
+                    <a:off x="5862275" y="3407616"/>
+                    <a:ext cx="301749" cy="276999"/>
+                  </a:xfrm>
+                  <a:prstGeom prst="rect">
+                    <a:avLst/>
+                  </a:prstGeom>
+                  <a:noFill/>
+                </p:spPr>
+                <p:txBody>
+                  <a:bodyPr wrap="none" lIns="0" tIns="0" rIns="0" bIns="0" rtlCol="0">
+                    <a:spAutoFit/>
+                  </a:bodyPr>
+                  <a:lstStyle/>
+                  <a:p>
+                    <a:pPr/>
+                    <a14:m>
+                      <m:oMathPara xmlns:m="http://schemas.openxmlformats.org/officeDocument/2006/math">
+                        <m:oMathParaPr>
+                          <m:jc m:val="centerGroup"/>
+                        </m:oMathParaPr>
+                        <m:oMath xmlns:m="http://schemas.openxmlformats.org/officeDocument/2006/math">
+                          <m:sSub>
+                            <m:sSubPr>
+                              <m:ctrlPr>
+                                <a:rPr lang="en-US" altLang="zh-CN" b="0" i="1" smtClean="0">
+                                  <a:latin typeface="Cambria Math" panose="02040503050406030204" pitchFamily="18" charset="0"/>
+                                </a:rPr>
+                              </m:ctrlPr>
+                            </m:sSubPr>
+                            <m:e>
+                              <m:r>
+                                <a:rPr lang="en-US" altLang="zh-CN" b="0" i="1" smtClean="0">
+                                  <a:latin typeface="Cambria Math" panose="02040503050406030204" pitchFamily="18" charset="0"/>
+                                </a:rPr>
+                                <m:t>𝐸</m:t>
+                              </m:r>
+                            </m:e>
+                            <m:sub>
+                              <m:r>
+                                <a:rPr lang="en-US" altLang="zh-CN" b="0" i="1" smtClean="0">
+                                  <a:latin typeface="Cambria Math" panose="02040503050406030204" pitchFamily="18" charset="0"/>
+                                </a:rPr>
+                                <m:t>2</m:t>
+                              </m:r>
+                            </m:sub>
+                          </m:sSub>
+                        </m:oMath>
+                      </m:oMathPara>
+                    </a14:m>
+                    <a:endParaRPr lang="en-US" altLang="zh-CN" b="0" dirty="0"/>
+                  </a:p>
+                </p:txBody>
+              </p:sp>
+            </mc:Choice>
+            <mc:Fallback xmlns="">
+              <p:sp>
+                <p:nvSpPr>
+                  <p:cNvPr id="37" name="文本框 36">
+                    <a:extLst>
+                      <a:ext uri="{FF2B5EF4-FFF2-40B4-BE49-F238E27FC236}">
+                        <a16:creationId xmlns:a16="http://schemas.microsoft.com/office/drawing/2014/main" id="{5C2C90F8-DD93-AB05-A517-F0B3400677F7}"/>
+                      </a:ext>
+                    </a:extLst>
+                  </p:cNvPr>
+                  <p:cNvSpPr txBox="1">
+                    <a:spLocks noRot="1" noChangeAspect="1" noMove="1" noResize="1" noEditPoints="1" noAdjustHandles="1" noChangeArrowheads="1" noChangeShapeType="1" noTextEdit="1"/>
+                  </p:cNvSpPr>
+                  <p:nvPr/>
+                </p:nvSpPr>
+                <p:spPr>
+                  <a:xfrm>
+                    <a:off x="5862275" y="3407616"/>
+                    <a:ext cx="301749" cy="276999"/>
+                  </a:xfrm>
+                  <a:prstGeom prst="rect">
+                    <a:avLst/>
+                  </a:prstGeom>
+                  <a:blipFill>
+                    <a:blip r:embed="rId5"/>
+                    <a:stretch>
+                      <a:fillRect l="-18367" r="-6122" b="-15556"/>
+                    </a:stretch>
+                  </a:blipFill>
+                </p:spPr>
+                <p:txBody>
+                  <a:bodyPr/>
+                  <a:lstStyle/>
+                  <a:p>
+                    <a:r>
+                      <a:rPr lang="zh-CN" altLang="en-US">
+                        <a:noFill/>
+                      </a:rPr>
+                      <a:t> </a:t>
+                    </a:r>
+                  </a:p>
+                </p:txBody>
+              </p:sp>
+            </mc:Fallback>
+          </mc:AlternateContent>
+          <mc:AlternateContent xmlns:mc="http://schemas.openxmlformats.org/markup-compatibility/2006" xmlns:a14="http://schemas.microsoft.com/office/drawing/2010/main">
+            <mc:Choice Requires="a14">
+              <p:sp>
+                <p:nvSpPr>
+                  <p:cNvPr id="38" name="文本框 37">
+                    <a:extLst>
+                      <a:ext uri="{FF2B5EF4-FFF2-40B4-BE49-F238E27FC236}">
+                        <a16:creationId xmlns:a16="http://schemas.microsoft.com/office/drawing/2014/main" id="{E27F4D45-6FF0-C0A6-EB8B-679347BFE1E6}"/>
+                      </a:ext>
+                    </a:extLst>
+                  </p:cNvPr>
+                  <p:cNvSpPr txBox="1"/>
+                  <p:nvPr/>
+                </p:nvSpPr>
+                <p:spPr>
+                  <a:xfrm>
+                    <a:off x="1961555" y="3705859"/>
+                    <a:ext cx="456599" cy="276999"/>
+                  </a:xfrm>
+                  <a:prstGeom prst="rect">
+                    <a:avLst/>
+                  </a:prstGeom>
+                  <a:noFill/>
+                </p:spPr>
+                <p:txBody>
+                  <a:bodyPr wrap="none" lIns="0" tIns="0" rIns="0" bIns="0" rtlCol="0">
+                    <a:spAutoFit/>
+                  </a:bodyPr>
+                  <a:lstStyle/>
+                  <a:p>
+                    <a:pPr/>
+                    <a14:m>
+                      <m:oMathPara xmlns:m="http://schemas.openxmlformats.org/officeDocument/2006/math">
+                        <m:oMathParaPr>
+                          <m:jc m:val="centerGroup"/>
+                        </m:oMathParaPr>
+                        <m:oMath xmlns:m="http://schemas.openxmlformats.org/officeDocument/2006/math">
+                          <m:sSub>
+                            <m:sSubPr>
+                              <m:ctrlPr>
+                                <a:rPr lang="en-US" altLang="zh-CN" b="0" i="1" smtClean="0">
+                                  <a:latin typeface="Cambria Math" panose="02040503050406030204" pitchFamily="18" charset="0"/>
+                                </a:rPr>
+                              </m:ctrlPr>
+                            </m:sSubPr>
+                            <m:e>
+                              <m:r>
+                                <a:rPr lang="en-US" altLang="zh-CN" b="0" i="1" smtClean="0">
+                                  <a:latin typeface="Cambria Math" panose="02040503050406030204" pitchFamily="18" charset="0"/>
+                                </a:rPr>
+                                <m:t>𝑊</m:t>
+                              </m:r>
+                            </m:e>
+                            <m:sub>
+                              <m:r>
+                                <a:rPr lang="en-US" altLang="zh-CN" b="0" i="1" smtClean="0">
+                                  <a:latin typeface="Cambria Math" panose="02040503050406030204" pitchFamily="18" charset="0"/>
+                                </a:rPr>
+                                <m:t>03</m:t>
+                              </m:r>
+                            </m:sub>
+                          </m:sSub>
+                        </m:oMath>
+                      </m:oMathPara>
+                    </a14:m>
+                    <a:endParaRPr lang="en-US" altLang="zh-CN" b="0" dirty="0"/>
+                  </a:p>
+                </p:txBody>
+              </p:sp>
+            </mc:Choice>
+            <mc:Fallback xmlns="">
+              <p:sp>
+                <p:nvSpPr>
+                  <p:cNvPr id="38" name="文本框 37">
+                    <a:extLst>
+                      <a:ext uri="{FF2B5EF4-FFF2-40B4-BE49-F238E27FC236}">
+                        <a16:creationId xmlns:a16="http://schemas.microsoft.com/office/drawing/2014/main" id="{E27F4D45-6FF0-C0A6-EB8B-679347BFE1E6}"/>
+                      </a:ext>
+                    </a:extLst>
+                  </p:cNvPr>
+                  <p:cNvSpPr txBox="1">
+                    <a:spLocks noRot="1" noChangeAspect="1" noMove="1" noResize="1" noEditPoints="1" noAdjustHandles="1" noChangeArrowheads="1" noChangeShapeType="1" noTextEdit="1"/>
+                  </p:cNvSpPr>
+                  <p:nvPr/>
+                </p:nvSpPr>
+                <p:spPr>
+                  <a:xfrm>
+                    <a:off x="1961555" y="3705859"/>
+                    <a:ext cx="456599" cy="276999"/>
+                  </a:xfrm>
+                  <a:prstGeom prst="rect">
+                    <a:avLst/>
+                  </a:prstGeom>
+                  <a:blipFill>
+                    <a:blip r:embed="rId6"/>
+                    <a:stretch>
+                      <a:fillRect l="-12000" r="-2667" b="-15556"/>
+                    </a:stretch>
+                  </a:blipFill>
+                </p:spPr>
+                <p:txBody>
+                  <a:bodyPr/>
+                  <a:lstStyle/>
+                  <a:p>
+                    <a:r>
+                      <a:rPr lang="zh-CN" altLang="en-US">
+                        <a:noFill/>
+                      </a:rPr>
+                      <a:t> </a:t>
+                    </a:r>
+                  </a:p>
+                </p:txBody>
+              </p:sp>
+            </mc:Fallback>
+          </mc:AlternateContent>
+          <mc:AlternateContent xmlns:mc="http://schemas.openxmlformats.org/markup-compatibility/2006" xmlns:a14="http://schemas.microsoft.com/office/drawing/2010/main">
+            <mc:Choice Requires="a14">
+              <p:sp>
+                <p:nvSpPr>
+                  <p:cNvPr id="39" name="文本框 38">
+                    <a:extLst>
+                      <a:ext uri="{FF2B5EF4-FFF2-40B4-BE49-F238E27FC236}">
+                        <a16:creationId xmlns:a16="http://schemas.microsoft.com/office/drawing/2014/main" id="{03F65D3D-8713-84D0-EBE8-38BC7B83E9F5}"/>
+                      </a:ext>
+                    </a:extLst>
+                  </p:cNvPr>
+                  <p:cNvSpPr txBox="1"/>
+                  <p:nvPr/>
+                </p:nvSpPr>
+                <p:spPr>
+                  <a:xfrm>
+                    <a:off x="2489250" y="3684615"/>
+                    <a:ext cx="413510" cy="276999"/>
+                  </a:xfrm>
+                  <a:prstGeom prst="rect">
+                    <a:avLst/>
+                  </a:prstGeom>
+                  <a:noFill/>
+                </p:spPr>
+                <p:txBody>
+                  <a:bodyPr wrap="none" lIns="0" tIns="0" rIns="0" bIns="0" rtlCol="0">
+                    <a:spAutoFit/>
+                  </a:bodyPr>
+                  <a:lstStyle/>
+                  <a:p>
+                    <a:pPr/>
+                    <a14:m>
+                      <m:oMathPara xmlns:m="http://schemas.openxmlformats.org/officeDocument/2006/math">
+                        <m:oMathParaPr>
+                          <m:jc m:val="centerGroup"/>
+                        </m:oMathParaPr>
+                        <m:oMath xmlns:m="http://schemas.openxmlformats.org/officeDocument/2006/math">
+                          <m:sSub>
+                            <m:sSubPr>
+                              <m:ctrlPr>
+                                <a:rPr lang="en-US" altLang="zh-CN" b="0" i="1" smtClean="0">
+                                  <a:latin typeface="Cambria Math" panose="02040503050406030204" pitchFamily="18" charset="0"/>
+                                </a:rPr>
+                              </m:ctrlPr>
+                            </m:sSubPr>
+                            <m:e>
+                              <m:r>
+                                <a:rPr lang="en-US" altLang="zh-CN" b="0" i="1" smtClean="0">
+                                  <a:latin typeface="Cambria Math" panose="02040503050406030204" pitchFamily="18" charset="0"/>
+                                </a:rPr>
+                                <m:t>𝐴</m:t>
+                              </m:r>
+                            </m:e>
+                            <m:sub>
+                              <m:r>
+                                <a:rPr lang="en-US" altLang="zh-CN" b="0" i="1" smtClean="0">
+                                  <a:latin typeface="Cambria Math" panose="02040503050406030204" pitchFamily="18" charset="0"/>
+                                </a:rPr>
+                                <m:t>30</m:t>
+                              </m:r>
+                            </m:sub>
+                          </m:sSub>
+                        </m:oMath>
+                      </m:oMathPara>
+                    </a14:m>
+                    <a:endParaRPr lang="en-US" altLang="zh-CN" b="0" dirty="0"/>
+                  </a:p>
+                </p:txBody>
+              </p:sp>
+            </mc:Choice>
+            <mc:Fallback xmlns="">
+              <p:sp>
+                <p:nvSpPr>
+                  <p:cNvPr id="39" name="文本框 38">
+                    <a:extLst>
+                      <a:ext uri="{FF2B5EF4-FFF2-40B4-BE49-F238E27FC236}">
+                        <a16:creationId xmlns:a16="http://schemas.microsoft.com/office/drawing/2014/main" id="{03F65D3D-8713-84D0-EBE8-38BC7B83E9F5}"/>
+                      </a:ext>
+                    </a:extLst>
+                  </p:cNvPr>
+                  <p:cNvSpPr txBox="1">
+                    <a:spLocks noRot="1" noChangeAspect="1" noMove="1" noResize="1" noEditPoints="1" noAdjustHandles="1" noChangeArrowheads="1" noChangeShapeType="1" noTextEdit="1"/>
+                  </p:cNvSpPr>
+                  <p:nvPr/>
+                </p:nvSpPr>
+                <p:spPr>
+                  <a:xfrm>
+                    <a:off x="2489250" y="3684615"/>
+                    <a:ext cx="413510" cy="276999"/>
+                  </a:xfrm>
+                  <a:prstGeom prst="rect">
+                    <a:avLst/>
+                  </a:prstGeom>
+                  <a:blipFill>
+                    <a:blip r:embed="rId7"/>
+                    <a:stretch>
+                      <a:fillRect l="-13433" r="-4478" b="-13043"/>
+                    </a:stretch>
+                  </a:blipFill>
+                </p:spPr>
+                <p:txBody>
+                  <a:bodyPr/>
+                  <a:lstStyle/>
+                  <a:p>
+                    <a:r>
+                      <a:rPr lang="zh-CN" altLang="en-US">
+                        <a:noFill/>
+                      </a:rPr>
+                      <a:t> </a:t>
+                    </a:r>
+                  </a:p>
+                </p:txBody>
+              </p:sp>
+            </mc:Fallback>
+          </mc:AlternateContent>
+          <mc:AlternateContent xmlns:mc="http://schemas.openxmlformats.org/markup-compatibility/2006" xmlns:a14="http://schemas.microsoft.com/office/drawing/2010/main">
+            <mc:Choice Requires="a14">
+              <p:sp>
+                <p:nvSpPr>
+                  <p:cNvPr id="40" name="文本框 39">
+                    <a:extLst>
+                      <a:ext uri="{FF2B5EF4-FFF2-40B4-BE49-F238E27FC236}">
+                        <a16:creationId xmlns:a16="http://schemas.microsoft.com/office/drawing/2014/main" id="{6CE88972-9556-F43B-35DA-4EABE3C00577}"/>
+                      </a:ext>
+                    </a:extLst>
+                  </p:cNvPr>
+                  <p:cNvSpPr txBox="1"/>
+                  <p:nvPr/>
+                </p:nvSpPr>
+                <p:spPr>
+                  <a:xfrm>
+                    <a:off x="2995967" y="3684614"/>
+                    <a:ext cx="379335" cy="276999"/>
+                  </a:xfrm>
+                  <a:prstGeom prst="rect">
+                    <a:avLst/>
+                  </a:prstGeom>
+                  <a:noFill/>
+                </p:spPr>
+                <p:txBody>
+                  <a:bodyPr wrap="none" lIns="0" tIns="0" rIns="0" bIns="0" rtlCol="0">
+                    <a:spAutoFit/>
+                  </a:bodyPr>
+                  <a:lstStyle/>
+                  <a:p>
+                    <a:pPr/>
+                    <a14:m>
+                      <m:oMathPara xmlns:m="http://schemas.openxmlformats.org/officeDocument/2006/math">
+                        <m:oMathParaPr>
+                          <m:jc m:val="centerGroup"/>
+                        </m:oMathParaPr>
+                        <m:oMath xmlns:m="http://schemas.openxmlformats.org/officeDocument/2006/math">
+                          <m:sSub>
+                            <m:sSubPr>
+                              <m:ctrlPr>
+                                <a:rPr lang="en-US" altLang="zh-CN" b="0" i="1" smtClean="0">
+                                  <a:latin typeface="Cambria Math" panose="02040503050406030204" pitchFamily="18" charset="0"/>
+                                </a:rPr>
+                              </m:ctrlPr>
+                            </m:sSubPr>
+                            <m:e>
+                              <m:r>
+                                <a:rPr lang="en-US" altLang="zh-CN" b="0" i="1" smtClean="0">
+                                  <a:latin typeface="Cambria Math" panose="02040503050406030204" pitchFamily="18" charset="0"/>
+                                </a:rPr>
+                                <m:t>𝑆</m:t>
+                              </m:r>
+                            </m:e>
+                            <m:sub>
+                              <m:r>
+                                <a:rPr lang="en-US" altLang="zh-CN" b="0" i="1" smtClean="0">
+                                  <a:latin typeface="Cambria Math" panose="02040503050406030204" pitchFamily="18" charset="0"/>
+                                </a:rPr>
+                                <m:t>30</m:t>
+                              </m:r>
+                            </m:sub>
+                          </m:sSub>
+                        </m:oMath>
+                      </m:oMathPara>
+                    </a14:m>
+                    <a:endParaRPr lang="en-US" altLang="zh-CN" b="0" dirty="0"/>
+                  </a:p>
+                </p:txBody>
+              </p:sp>
+            </mc:Choice>
+            <mc:Fallback xmlns="">
+              <p:sp>
+                <p:nvSpPr>
+                  <p:cNvPr id="40" name="文本框 39">
+                    <a:extLst>
+                      <a:ext uri="{FF2B5EF4-FFF2-40B4-BE49-F238E27FC236}">
+                        <a16:creationId xmlns:a16="http://schemas.microsoft.com/office/drawing/2014/main" id="{6CE88972-9556-F43B-35DA-4EABE3C00577}"/>
+                      </a:ext>
+                    </a:extLst>
+                  </p:cNvPr>
+                  <p:cNvSpPr txBox="1">
+                    <a:spLocks noRot="1" noChangeAspect="1" noMove="1" noResize="1" noEditPoints="1" noAdjustHandles="1" noChangeArrowheads="1" noChangeShapeType="1" noTextEdit="1"/>
+                  </p:cNvSpPr>
+                  <p:nvPr/>
+                </p:nvSpPr>
+                <p:spPr>
+                  <a:xfrm>
+                    <a:off x="2995967" y="3684614"/>
+                    <a:ext cx="379335" cy="276999"/>
+                  </a:xfrm>
+                  <a:prstGeom prst="rect">
+                    <a:avLst/>
+                  </a:prstGeom>
+                  <a:blipFill>
+                    <a:blip r:embed="rId8"/>
+                    <a:stretch>
+                      <a:fillRect l="-14516" r="-3226" b="-13043"/>
+                    </a:stretch>
+                  </a:blipFill>
+                </p:spPr>
+                <p:txBody>
+                  <a:bodyPr/>
+                  <a:lstStyle/>
+                  <a:p>
+                    <a:r>
+                      <a:rPr lang="zh-CN" altLang="en-US">
+                        <a:noFill/>
+                      </a:rPr>
+                      <a:t> </a:t>
+                    </a:r>
+                  </a:p>
+                </p:txBody>
+              </p:sp>
+            </mc:Fallback>
+          </mc:AlternateContent>
+          <mc:AlternateContent xmlns:mc="http://schemas.openxmlformats.org/markup-compatibility/2006" xmlns:a14="http://schemas.microsoft.com/office/drawing/2010/main">
+            <mc:Choice Requires="a14">
+              <p:sp>
+                <p:nvSpPr>
+                  <p:cNvPr id="41" name="文本框 40">
+                    <a:extLst>
+                      <a:ext uri="{FF2B5EF4-FFF2-40B4-BE49-F238E27FC236}">
+                        <a16:creationId xmlns:a16="http://schemas.microsoft.com/office/drawing/2014/main" id="{F319C373-3487-C105-186C-3ACD29A44957}"/>
+                      </a:ext>
+                    </a:extLst>
+                  </p:cNvPr>
+                  <p:cNvSpPr txBox="1"/>
+                  <p:nvPr/>
+                </p:nvSpPr>
+                <p:spPr>
+                  <a:xfrm>
+                    <a:off x="4217582" y="2910619"/>
+                    <a:ext cx="379335" cy="276999"/>
+                  </a:xfrm>
+                  <a:prstGeom prst="rect">
+                    <a:avLst/>
+                  </a:prstGeom>
+                  <a:noFill/>
+                </p:spPr>
+                <p:txBody>
+                  <a:bodyPr wrap="none" lIns="0" tIns="0" rIns="0" bIns="0" rtlCol="0">
+                    <a:spAutoFit/>
+                  </a:bodyPr>
+                  <a:lstStyle/>
+                  <a:p>
+                    <a:pPr/>
+                    <a14:m>
+                      <m:oMathPara xmlns:m="http://schemas.openxmlformats.org/officeDocument/2006/math">
+                        <m:oMathParaPr>
+                          <m:jc m:val="centerGroup"/>
+                        </m:oMathParaPr>
+                        <m:oMath xmlns:m="http://schemas.openxmlformats.org/officeDocument/2006/math">
+                          <m:sSub>
+                            <m:sSubPr>
+                              <m:ctrlPr>
+                                <a:rPr lang="en-US" altLang="zh-CN" b="0" i="1" smtClean="0">
+                                  <a:latin typeface="Cambria Math" panose="02040503050406030204" pitchFamily="18" charset="0"/>
+                                </a:rPr>
+                              </m:ctrlPr>
+                            </m:sSubPr>
+                            <m:e>
+                              <m:r>
+                                <a:rPr lang="en-US" altLang="zh-CN" b="0" i="1" smtClean="0">
+                                  <a:latin typeface="Cambria Math" panose="02040503050406030204" pitchFamily="18" charset="0"/>
+                                </a:rPr>
+                                <m:t>𝑆</m:t>
+                              </m:r>
+                            </m:e>
+                            <m:sub>
+                              <m:r>
+                                <a:rPr lang="en-US" altLang="zh-CN" b="0" i="1" smtClean="0">
+                                  <a:latin typeface="Cambria Math" panose="02040503050406030204" pitchFamily="18" charset="0"/>
+                                </a:rPr>
+                                <m:t>32</m:t>
+                              </m:r>
+                            </m:sub>
+                          </m:sSub>
+                        </m:oMath>
+                      </m:oMathPara>
+                    </a14:m>
+                    <a:endParaRPr lang="en-US" altLang="zh-CN" b="0" dirty="0"/>
+                  </a:p>
+                </p:txBody>
+              </p:sp>
+            </mc:Choice>
+            <mc:Fallback xmlns="">
+              <p:sp>
+                <p:nvSpPr>
+                  <p:cNvPr id="41" name="文本框 40">
+                    <a:extLst>
+                      <a:ext uri="{FF2B5EF4-FFF2-40B4-BE49-F238E27FC236}">
+                        <a16:creationId xmlns:a16="http://schemas.microsoft.com/office/drawing/2014/main" id="{F319C373-3487-C105-186C-3ACD29A44957}"/>
+                      </a:ext>
+                    </a:extLst>
+                  </p:cNvPr>
+                  <p:cNvSpPr txBox="1">
+                    <a:spLocks noRot="1" noChangeAspect="1" noMove="1" noResize="1" noEditPoints="1" noAdjustHandles="1" noChangeArrowheads="1" noChangeShapeType="1" noTextEdit="1"/>
+                  </p:cNvSpPr>
+                  <p:nvPr/>
+                </p:nvSpPr>
+                <p:spPr>
+                  <a:xfrm>
+                    <a:off x="4217582" y="2910619"/>
+                    <a:ext cx="379335" cy="276999"/>
+                  </a:xfrm>
+                  <a:prstGeom prst="rect">
+                    <a:avLst/>
+                  </a:prstGeom>
+                  <a:blipFill>
+                    <a:blip r:embed="rId9"/>
+                    <a:stretch>
+                      <a:fillRect l="-12903" r="-3226" b="-13043"/>
+                    </a:stretch>
+                  </a:blipFill>
+                </p:spPr>
+                <p:txBody>
+                  <a:bodyPr/>
+                  <a:lstStyle/>
+                  <a:p>
+                    <a:r>
+                      <a:rPr lang="zh-CN" altLang="en-US">
+                        <a:noFill/>
+                      </a:rPr>
+                      <a:t> </a:t>
+                    </a:r>
+                  </a:p>
+                </p:txBody>
+              </p:sp>
+            </mc:Fallback>
+          </mc:AlternateContent>
+          <mc:AlternateContent xmlns:mc="http://schemas.openxmlformats.org/markup-compatibility/2006" xmlns:a14="http://schemas.microsoft.com/office/drawing/2010/main">
+            <mc:Choice Requires="a14">
+              <p:sp>
+                <p:nvSpPr>
+                  <p:cNvPr id="44" name="文本框 43">
+                    <a:extLst>
+                      <a:ext uri="{FF2B5EF4-FFF2-40B4-BE49-F238E27FC236}">
+                        <a16:creationId xmlns:a16="http://schemas.microsoft.com/office/drawing/2014/main" id="{A78794EA-F074-B138-1730-4815A6B9FC6C}"/>
+                      </a:ext>
+                    </a:extLst>
+                  </p:cNvPr>
+                  <p:cNvSpPr txBox="1"/>
+                  <p:nvPr/>
+                </p:nvSpPr>
+                <p:spPr>
+                  <a:xfrm>
+                    <a:off x="3856759" y="3751378"/>
+                    <a:ext cx="413510" cy="276999"/>
+                  </a:xfrm>
+                  <a:prstGeom prst="rect">
+                    <a:avLst/>
+                  </a:prstGeom>
+                  <a:noFill/>
+                </p:spPr>
+                <p:txBody>
+                  <a:bodyPr wrap="none" lIns="0" tIns="0" rIns="0" bIns="0" rtlCol="0">
+                    <a:spAutoFit/>
+                  </a:bodyPr>
+                  <a:lstStyle/>
+                  <a:p>
+                    <a:pPr/>
+                    <a14:m>
+                      <m:oMathPara xmlns:m="http://schemas.openxmlformats.org/officeDocument/2006/math">
+                        <m:oMathParaPr>
+                          <m:jc m:val="centerGroup"/>
+                        </m:oMathParaPr>
+                        <m:oMath xmlns:m="http://schemas.openxmlformats.org/officeDocument/2006/math">
+                          <m:sSub>
+                            <m:sSubPr>
+                              <m:ctrlPr>
+                                <a:rPr lang="en-US" altLang="zh-CN" b="0" i="1" smtClean="0">
+                                  <a:latin typeface="Cambria Math" panose="02040503050406030204" pitchFamily="18" charset="0"/>
+                                </a:rPr>
+                              </m:ctrlPr>
+                            </m:sSubPr>
+                            <m:e>
+                              <m:r>
+                                <a:rPr lang="en-US" altLang="zh-CN" b="0" i="1" smtClean="0">
+                                  <a:latin typeface="Cambria Math" panose="02040503050406030204" pitchFamily="18" charset="0"/>
+                                </a:rPr>
+                                <m:t>𝐴</m:t>
+                              </m:r>
+                            </m:e>
+                            <m:sub>
+                              <m:r>
+                                <a:rPr lang="en-US" altLang="zh-CN" b="0" i="1" smtClean="0">
+                                  <a:latin typeface="Cambria Math" panose="02040503050406030204" pitchFamily="18" charset="0"/>
+                                </a:rPr>
+                                <m:t>21</m:t>
+                              </m:r>
+                            </m:sub>
+                          </m:sSub>
+                        </m:oMath>
+                      </m:oMathPara>
+                    </a14:m>
+                    <a:endParaRPr lang="en-US" altLang="zh-CN" b="0" dirty="0"/>
+                  </a:p>
+                </p:txBody>
+              </p:sp>
+            </mc:Choice>
+            <mc:Fallback xmlns="">
+              <p:sp>
+                <p:nvSpPr>
+                  <p:cNvPr id="44" name="文本框 43">
+                    <a:extLst>
+                      <a:ext uri="{FF2B5EF4-FFF2-40B4-BE49-F238E27FC236}">
+                        <a16:creationId xmlns:a16="http://schemas.microsoft.com/office/drawing/2014/main" id="{A78794EA-F074-B138-1730-4815A6B9FC6C}"/>
+                      </a:ext>
+                    </a:extLst>
+                  </p:cNvPr>
+                  <p:cNvSpPr txBox="1">
+                    <a:spLocks noRot="1" noChangeAspect="1" noMove="1" noResize="1" noEditPoints="1" noAdjustHandles="1" noChangeArrowheads="1" noChangeShapeType="1" noTextEdit="1"/>
+                  </p:cNvSpPr>
+                  <p:nvPr/>
+                </p:nvSpPr>
+                <p:spPr>
+                  <a:xfrm>
+                    <a:off x="3856759" y="3751378"/>
+                    <a:ext cx="413510" cy="276999"/>
+                  </a:xfrm>
+                  <a:prstGeom prst="rect">
+                    <a:avLst/>
+                  </a:prstGeom>
+                  <a:blipFill>
+                    <a:blip r:embed="rId10"/>
+                    <a:stretch>
+                      <a:fillRect l="-13235" r="-2941" b="-15556"/>
+                    </a:stretch>
+                  </a:blipFill>
+                </p:spPr>
+                <p:txBody>
+                  <a:bodyPr/>
+                  <a:lstStyle/>
+                  <a:p>
+                    <a:r>
+                      <a:rPr lang="zh-CN" altLang="en-US">
+                        <a:noFill/>
+                      </a:rPr>
+                      <a:t> </a:t>
+                    </a:r>
+                  </a:p>
+                </p:txBody>
+              </p:sp>
+            </mc:Fallback>
+          </mc:AlternateContent>
+          <mc:AlternateContent xmlns:mc="http://schemas.openxmlformats.org/markup-compatibility/2006" xmlns:a14="http://schemas.microsoft.com/office/drawing/2010/main">
+            <mc:Choice Requires="a14">
+              <p:sp>
+                <p:nvSpPr>
+                  <p:cNvPr id="45" name="文本框 44">
+                    <a:extLst>
+                      <a:ext uri="{FF2B5EF4-FFF2-40B4-BE49-F238E27FC236}">
+                        <a16:creationId xmlns:a16="http://schemas.microsoft.com/office/drawing/2014/main" id="{52E5B4F7-4C63-6180-95C8-A85DB7C25A2D}"/>
+                      </a:ext>
+                    </a:extLst>
+                  </p:cNvPr>
+                  <p:cNvSpPr txBox="1"/>
+                  <p:nvPr/>
+                </p:nvSpPr>
+                <p:spPr>
+                  <a:xfrm>
+                    <a:off x="4330616" y="3751377"/>
+                    <a:ext cx="379335" cy="276999"/>
+                  </a:xfrm>
+                  <a:prstGeom prst="rect">
+                    <a:avLst/>
+                  </a:prstGeom>
+                  <a:noFill/>
+                </p:spPr>
+                <p:txBody>
+                  <a:bodyPr wrap="none" lIns="0" tIns="0" rIns="0" bIns="0" rtlCol="0">
+                    <a:spAutoFit/>
+                  </a:bodyPr>
+                  <a:lstStyle/>
+                  <a:p>
+                    <a:pPr/>
+                    <a14:m>
+                      <m:oMathPara xmlns:m="http://schemas.openxmlformats.org/officeDocument/2006/math">
+                        <m:oMathParaPr>
+                          <m:jc m:val="centerGroup"/>
+                        </m:oMathParaPr>
+                        <m:oMath xmlns:m="http://schemas.openxmlformats.org/officeDocument/2006/math">
+                          <m:sSub>
+                            <m:sSubPr>
+                              <m:ctrlPr>
+                                <a:rPr lang="en-US" altLang="zh-CN" b="0" i="1" smtClean="0">
+                                  <a:latin typeface="Cambria Math" panose="02040503050406030204" pitchFamily="18" charset="0"/>
+                                </a:rPr>
+                              </m:ctrlPr>
+                            </m:sSubPr>
+                            <m:e>
+                              <m:r>
+                                <a:rPr lang="en-US" altLang="zh-CN" b="0" i="1" smtClean="0">
+                                  <a:latin typeface="Cambria Math" panose="02040503050406030204" pitchFamily="18" charset="0"/>
+                                </a:rPr>
+                                <m:t>𝑆</m:t>
+                              </m:r>
+                            </m:e>
+                            <m:sub>
+                              <m:r>
+                                <a:rPr lang="en-US" altLang="zh-CN" b="0" i="1" smtClean="0">
+                                  <a:latin typeface="Cambria Math" panose="02040503050406030204" pitchFamily="18" charset="0"/>
+                                </a:rPr>
+                                <m:t>21</m:t>
+                              </m:r>
+                            </m:sub>
+                          </m:sSub>
+                        </m:oMath>
+                      </m:oMathPara>
+                    </a14:m>
+                    <a:endParaRPr lang="en-US" altLang="zh-CN" b="0" dirty="0"/>
+                  </a:p>
+                </p:txBody>
+              </p:sp>
+            </mc:Choice>
+            <mc:Fallback xmlns="">
+              <p:sp>
+                <p:nvSpPr>
+                  <p:cNvPr id="45" name="文本框 44">
+                    <a:extLst>
+                      <a:ext uri="{FF2B5EF4-FFF2-40B4-BE49-F238E27FC236}">
+                        <a16:creationId xmlns:a16="http://schemas.microsoft.com/office/drawing/2014/main" id="{52E5B4F7-4C63-6180-95C8-A85DB7C25A2D}"/>
+                      </a:ext>
+                    </a:extLst>
+                  </p:cNvPr>
+                  <p:cNvSpPr txBox="1">
+                    <a:spLocks noRot="1" noChangeAspect="1" noMove="1" noResize="1" noEditPoints="1" noAdjustHandles="1" noChangeArrowheads="1" noChangeShapeType="1" noTextEdit="1"/>
+                  </p:cNvSpPr>
+                  <p:nvPr/>
+                </p:nvSpPr>
+                <p:spPr>
+                  <a:xfrm>
+                    <a:off x="4330616" y="3751377"/>
+                    <a:ext cx="379335" cy="276999"/>
+                  </a:xfrm>
+                  <a:prstGeom prst="rect">
+                    <a:avLst/>
+                  </a:prstGeom>
+                  <a:blipFill>
+                    <a:blip r:embed="rId11"/>
+                    <a:stretch>
+                      <a:fillRect l="-14516" r="-3226" b="-15556"/>
+                    </a:stretch>
+                  </a:blipFill>
+                </p:spPr>
+                <p:txBody>
+                  <a:bodyPr/>
+                  <a:lstStyle/>
+                  <a:p>
+                    <a:r>
+                      <a:rPr lang="zh-CN" altLang="en-US">
+                        <a:noFill/>
+                      </a:rPr>
+                      <a:t> </a:t>
+                    </a:r>
+                  </a:p>
+                </p:txBody>
+              </p:sp>
+            </mc:Fallback>
+          </mc:AlternateContent>
+          <mc:AlternateContent xmlns:mc="http://schemas.openxmlformats.org/markup-compatibility/2006" xmlns:a14="http://schemas.microsoft.com/office/drawing/2010/main">
+            <mc:Choice Requires="a14">
+              <p:sp>
+                <p:nvSpPr>
+                  <p:cNvPr id="46" name="文本框 45">
+                    <a:extLst>
+                      <a:ext uri="{FF2B5EF4-FFF2-40B4-BE49-F238E27FC236}">
+                        <a16:creationId xmlns:a16="http://schemas.microsoft.com/office/drawing/2014/main" id="{92FF05D5-C6B5-7018-8A62-71D3B65C540E}"/>
+                      </a:ext>
+                    </a:extLst>
+                  </p:cNvPr>
+                  <p:cNvSpPr txBox="1"/>
+                  <p:nvPr/>
+                </p:nvSpPr>
+                <p:spPr>
+                  <a:xfrm>
+                    <a:off x="4692692" y="3751376"/>
+                    <a:ext cx="456599" cy="276999"/>
+                  </a:xfrm>
+                  <a:prstGeom prst="rect">
+                    <a:avLst/>
+                  </a:prstGeom>
+                  <a:noFill/>
+                </p:spPr>
+                <p:txBody>
+                  <a:bodyPr wrap="none" lIns="0" tIns="0" rIns="0" bIns="0" rtlCol="0">
+                    <a:spAutoFit/>
+                  </a:bodyPr>
+                  <a:lstStyle/>
+                  <a:p>
+                    <a:pPr/>
+                    <a14:m>
+                      <m:oMathPara xmlns:m="http://schemas.openxmlformats.org/officeDocument/2006/math">
+                        <m:oMathParaPr>
+                          <m:jc m:val="centerGroup"/>
+                        </m:oMathParaPr>
+                        <m:oMath xmlns:m="http://schemas.openxmlformats.org/officeDocument/2006/math">
+                          <m:sSub>
+                            <m:sSubPr>
+                              <m:ctrlPr>
+                                <a:rPr lang="en-US" altLang="zh-CN" b="0" i="1" smtClean="0">
+                                  <a:latin typeface="Cambria Math" panose="02040503050406030204" pitchFamily="18" charset="0"/>
+                                </a:rPr>
+                              </m:ctrlPr>
+                            </m:sSubPr>
+                            <m:e>
+                              <m:r>
+                                <a:rPr lang="en-US" altLang="zh-CN" b="0" i="1" smtClean="0">
+                                  <a:latin typeface="Cambria Math" panose="02040503050406030204" pitchFamily="18" charset="0"/>
+                                </a:rPr>
+                                <m:t>𝑊</m:t>
+                              </m:r>
+                            </m:e>
+                            <m:sub>
+                              <m:r>
+                                <a:rPr lang="en-US" altLang="zh-CN" b="0" i="1" smtClean="0">
+                                  <a:latin typeface="Cambria Math" panose="02040503050406030204" pitchFamily="18" charset="0"/>
+                                </a:rPr>
+                                <m:t>21</m:t>
+                              </m:r>
+                            </m:sub>
+                          </m:sSub>
+                        </m:oMath>
+                      </m:oMathPara>
+                    </a14:m>
+                    <a:endParaRPr lang="en-US" altLang="zh-CN" b="0" dirty="0"/>
+                  </a:p>
+                </p:txBody>
+              </p:sp>
+            </mc:Choice>
+            <mc:Fallback xmlns="">
+              <p:sp>
+                <p:nvSpPr>
+                  <p:cNvPr id="46" name="文本框 45">
+                    <a:extLst>
+                      <a:ext uri="{FF2B5EF4-FFF2-40B4-BE49-F238E27FC236}">
+                        <a16:creationId xmlns:a16="http://schemas.microsoft.com/office/drawing/2014/main" id="{92FF05D5-C6B5-7018-8A62-71D3B65C540E}"/>
+                      </a:ext>
+                    </a:extLst>
+                  </p:cNvPr>
+                  <p:cNvSpPr txBox="1">
+                    <a:spLocks noRot="1" noChangeAspect="1" noMove="1" noResize="1" noEditPoints="1" noAdjustHandles="1" noChangeArrowheads="1" noChangeShapeType="1" noTextEdit="1"/>
+                  </p:cNvSpPr>
+                  <p:nvPr/>
+                </p:nvSpPr>
+                <p:spPr>
+                  <a:xfrm>
+                    <a:off x="4692692" y="3751376"/>
+                    <a:ext cx="456599" cy="276999"/>
+                  </a:xfrm>
+                  <a:prstGeom prst="rect">
+                    <a:avLst/>
+                  </a:prstGeom>
+                  <a:blipFill>
+                    <a:blip r:embed="rId12"/>
+                    <a:stretch>
+                      <a:fillRect l="-12000" r="-2667" b="-15556"/>
+                    </a:stretch>
+                  </a:blipFill>
+                </p:spPr>
+                <p:txBody>
+                  <a:bodyPr/>
+                  <a:lstStyle/>
+                  <a:p>
+                    <a:r>
+                      <a:rPr lang="zh-CN" altLang="en-US">
+                        <a:noFill/>
+                      </a:rPr>
+                      <a:t> </a:t>
+                    </a:r>
+                  </a:p>
+                </p:txBody>
+              </p:sp>
+            </mc:Fallback>
+          </mc:AlternateContent>
+          <mc:AlternateContent xmlns:mc="http://schemas.openxmlformats.org/markup-compatibility/2006" xmlns:a14="http://schemas.microsoft.com/office/drawing/2010/main">
+            <mc:Choice Requires="a14">
+              <p:sp>
+                <p:nvSpPr>
+                  <p:cNvPr id="47" name="文本框 46">
+                    <a:extLst>
+                      <a:ext uri="{FF2B5EF4-FFF2-40B4-BE49-F238E27FC236}">
+                        <a16:creationId xmlns:a16="http://schemas.microsoft.com/office/drawing/2014/main" id="{0F8C811F-91F3-43AD-E083-29A81F578F53}"/>
+                      </a:ext>
+                    </a:extLst>
+                  </p:cNvPr>
+                  <p:cNvSpPr txBox="1"/>
+                  <p:nvPr/>
+                </p:nvSpPr>
+                <p:spPr>
+                  <a:xfrm>
+                    <a:off x="5121123" y="3746493"/>
+                    <a:ext cx="451277" cy="276999"/>
+                  </a:xfrm>
+                  <a:prstGeom prst="rect">
+                    <a:avLst/>
+                  </a:prstGeom>
+                  <a:noFill/>
+                </p:spPr>
+                <p:txBody>
+                  <a:bodyPr wrap="none" lIns="0" tIns="0" rIns="0" bIns="0" rtlCol="0">
+                    <a:spAutoFit/>
+                  </a:bodyPr>
+                  <a:lstStyle/>
+                  <a:p>
+                    <a:pPr/>
+                    <a14:m>
+                      <m:oMathPara xmlns:m="http://schemas.openxmlformats.org/officeDocument/2006/math">
+                        <m:oMathParaPr>
+                          <m:jc m:val="centerGroup"/>
+                        </m:oMathParaPr>
+                        <m:oMath xmlns:m="http://schemas.openxmlformats.org/officeDocument/2006/math">
+                          <m:sSub>
+                            <m:sSubPr>
+                              <m:ctrlPr>
+                                <a:rPr lang="en-US" altLang="zh-CN" b="0" i="1" smtClean="0">
+                                  <a:latin typeface="Cambria Math" panose="02040503050406030204" pitchFamily="18" charset="0"/>
+                                </a:rPr>
+                              </m:ctrlPr>
+                            </m:sSubPr>
+                            <m:e>
+                              <m:r>
+                                <a:rPr lang="en-US" altLang="zh-CN" b="0" i="1" smtClean="0">
+                                  <a:latin typeface="Cambria Math" panose="02040503050406030204" pitchFamily="18" charset="0"/>
+                                </a:rPr>
+                                <m:t>𝑊</m:t>
+                              </m:r>
+                            </m:e>
+                            <m:sub>
+                              <m:r>
+                                <a:rPr lang="en-US" altLang="zh-CN" b="0" i="1" smtClean="0">
+                                  <a:latin typeface="Cambria Math" panose="02040503050406030204" pitchFamily="18" charset="0"/>
+                                </a:rPr>
+                                <m:t>12</m:t>
+                              </m:r>
+                            </m:sub>
+                          </m:sSub>
+                        </m:oMath>
+                      </m:oMathPara>
+                    </a14:m>
+                    <a:endParaRPr lang="en-US" altLang="zh-CN" b="0" dirty="0"/>
+                  </a:p>
+                </p:txBody>
+              </p:sp>
+            </mc:Choice>
+            <mc:Fallback xmlns="">
+              <p:sp>
+                <p:nvSpPr>
+                  <p:cNvPr id="47" name="文本框 46">
+                    <a:extLst>
+                      <a:ext uri="{FF2B5EF4-FFF2-40B4-BE49-F238E27FC236}">
+                        <a16:creationId xmlns:a16="http://schemas.microsoft.com/office/drawing/2014/main" id="{0F8C811F-91F3-43AD-E083-29A81F578F53}"/>
+                      </a:ext>
+                    </a:extLst>
+                  </p:cNvPr>
+                  <p:cNvSpPr txBox="1">
+                    <a:spLocks noRot="1" noChangeAspect="1" noMove="1" noResize="1" noEditPoints="1" noAdjustHandles="1" noChangeArrowheads="1" noChangeShapeType="1" noTextEdit="1"/>
+                  </p:cNvSpPr>
+                  <p:nvPr/>
+                </p:nvSpPr>
+                <p:spPr>
+                  <a:xfrm>
+                    <a:off x="5121123" y="3746493"/>
+                    <a:ext cx="451277" cy="276999"/>
+                  </a:xfrm>
+                  <a:prstGeom prst="rect">
+                    <a:avLst/>
+                  </a:prstGeom>
+                  <a:blipFill>
+                    <a:blip r:embed="rId13"/>
+                    <a:stretch>
+                      <a:fillRect l="-10811" r="-2703" b="-13043"/>
+                    </a:stretch>
+                  </a:blipFill>
+                </p:spPr>
+                <p:txBody>
+                  <a:bodyPr/>
+                  <a:lstStyle/>
+                  <a:p>
+                    <a:r>
+                      <a:rPr lang="zh-CN" altLang="en-US">
+                        <a:noFill/>
+                      </a:rPr>
+                      <a:t> </a:t>
+                    </a:r>
+                  </a:p>
+                </p:txBody>
+              </p:sp>
+            </mc:Fallback>
+          </mc:AlternateContent>
+        </p:grpSp>
+        <mc:AlternateContent xmlns:mc="http://schemas.openxmlformats.org/markup-compatibility/2006" xmlns:a14="http://schemas.microsoft.com/office/drawing/2010/main">
+          <mc:Choice Requires="a14">
+            <p:sp>
+              <p:nvSpPr>
+                <p:cNvPr id="49" name="文本框 48">
+                  <a:extLst>
+                    <a:ext uri="{FF2B5EF4-FFF2-40B4-BE49-F238E27FC236}">
+                      <a16:creationId xmlns:a16="http://schemas.microsoft.com/office/drawing/2014/main" id="{F503B1E1-7FA3-F270-34B2-7DBCA20F0EAE}"/>
+                    </a:ext>
+                  </a:extLst>
+                </p:cNvPr>
+                <p:cNvSpPr txBox="1"/>
+                <p:nvPr/>
+              </p:nvSpPr>
+              <p:spPr>
+                <a:xfrm>
+                  <a:off x="6146525" y="4403675"/>
+                  <a:ext cx="374013" cy="276999"/>
+                </a:xfrm>
+                <a:prstGeom prst="rect">
+                  <a:avLst/>
+                </a:prstGeom>
+                <a:noFill/>
+              </p:spPr>
+              <p:txBody>
+                <a:bodyPr wrap="none" lIns="0" tIns="0" rIns="0" bIns="0" rtlCol="0">
+                  <a:spAutoFit/>
+                </a:bodyPr>
+                <a:lstStyle/>
+                <a:p>
+                  <a:pPr/>
+                  <a14:m>
+                    <m:oMathPara xmlns:m="http://schemas.openxmlformats.org/officeDocument/2006/math">
+                      <m:oMathParaPr>
+                        <m:jc m:val="centerGroup"/>
+                      </m:oMathParaPr>
+                      <m:oMath xmlns:m="http://schemas.openxmlformats.org/officeDocument/2006/math">
+                        <m:sSub>
+                          <m:sSubPr>
+                            <m:ctrlPr>
+                              <a:rPr lang="en-US" altLang="zh-CN" b="0" i="1" smtClean="0">
+                                <a:latin typeface="Cambria Math" panose="02040503050406030204" pitchFamily="18" charset="0"/>
+                              </a:rPr>
+                            </m:ctrlPr>
+                          </m:sSubPr>
+                          <m:e>
+                            <m:r>
+                              <a:rPr lang="en-US" altLang="zh-CN" b="0" i="1" smtClean="0">
+                                <a:latin typeface="Cambria Math" panose="02040503050406030204" pitchFamily="18" charset="0"/>
+                              </a:rPr>
+                              <m:t>𝑆</m:t>
+                            </m:r>
+                          </m:e>
+                          <m:sub>
+                            <m:r>
+                              <a:rPr lang="en-US" altLang="zh-CN" b="0" i="1" smtClean="0">
+                                <a:latin typeface="Cambria Math" panose="02040503050406030204" pitchFamily="18" charset="0"/>
+                              </a:rPr>
+                              <m:t>10</m:t>
+                            </m:r>
+                          </m:sub>
+                        </m:sSub>
+                      </m:oMath>
+                    </m:oMathPara>
+                  </a14:m>
+                  <a:endParaRPr lang="en-US" altLang="zh-CN" b="0" dirty="0"/>
+                </a:p>
+              </p:txBody>
+            </p:sp>
+          </mc:Choice>
+          <mc:Fallback xmlns="">
+            <p:sp>
+              <p:nvSpPr>
+                <p:cNvPr id="49" name="文本框 48">
+                  <a:extLst>
+                    <a:ext uri="{FF2B5EF4-FFF2-40B4-BE49-F238E27FC236}">
+                      <a16:creationId xmlns:a16="http://schemas.microsoft.com/office/drawing/2014/main" id="{F503B1E1-7FA3-F270-34B2-7DBCA20F0EAE}"/>
+                    </a:ext>
+                  </a:extLst>
+                </p:cNvPr>
+                <p:cNvSpPr txBox="1">
+                  <a:spLocks noRot="1" noChangeAspect="1" noMove="1" noResize="1" noEditPoints="1" noAdjustHandles="1" noChangeArrowheads="1" noChangeShapeType="1" noTextEdit="1"/>
+                </p:cNvSpPr>
+                <p:nvPr/>
+              </p:nvSpPr>
+              <p:spPr>
+                <a:xfrm>
+                  <a:off x="6146525" y="4403675"/>
+                  <a:ext cx="374013" cy="276999"/>
+                </a:xfrm>
+                <a:prstGeom prst="rect">
+                  <a:avLst/>
+                </a:prstGeom>
+                <a:blipFill>
+                  <a:blip r:embed="rId14"/>
+                  <a:stretch>
+                    <a:fillRect l="-12903" r="-1613" b="-13043"/>
+                  </a:stretch>
+                </a:blipFill>
+              </p:spPr>
+              <p:txBody>
+                <a:bodyPr/>
+                <a:lstStyle/>
+                <a:p>
+                  <a:r>
+                    <a:rPr lang="zh-CN" altLang="en-US">
+                      <a:noFill/>
+                    </a:rPr>
+                    <a:t> </a:t>
+                  </a:r>
+                </a:p>
+              </p:txBody>
+            </p:sp>
+          </mc:Fallback>
+        </mc:AlternateContent>
+      </p:grpSp>
+    </p:spTree>
+    <p:extLst>
+      <p:ext uri="{BB962C8B-B14F-4D97-AF65-F5344CB8AC3E}">
+        <p14:creationId xmlns:p14="http://schemas.microsoft.com/office/powerpoint/2010/main" val="2039107208"/>
+      </p:ext>
+    </p:extLst>
+  </p:cSld>
+  <p:clrMapOvr>
+    <a:masterClrMapping/>
+  </p:clrMapOvr>
+</p:sld>
+</file>
+
+<file path=ppt/slides/slide5.xml><?xml version="1.0" encoding="utf-8"?>
+<p:sld xmlns:a="http://schemas.openxmlformats.org/drawingml/2006/main" xmlns:r="http://schemas.openxmlformats.org/officeDocument/2006/relationships" xmlns:p="http://schemas.openxmlformats.org/presentationml/2006/main">
+  <p:cSld>
+    <p:spTree>
+      <p:nvGrpSpPr>
+        <p:cNvPr id="1" name="">
+          <a:extLst>
+            <a:ext uri="{FF2B5EF4-FFF2-40B4-BE49-F238E27FC236}">
+              <a16:creationId xmlns:a16="http://schemas.microsoft.com/office/drawing/2014/main" id="{30FAC8D3-6D61-9AED-1C55-254F81AC085D}"/>
+            </a:ext>
+          </a:extLst>
+        </p:cNvPr>
+        <p:cNvGrpSpPr/>
+        <p:nvPr/>
+      </p:nvGrpSpPr>
+      <p:grpSpPr>
+        <a:xfrm>
+          <a:off x="0" y="0"/>
+          <a:ext cx="0" cy="0"/>
+          <a:chOff x="0" y="0"/>
+          <a:chExt cx="0" cy="0"/>
+        </a:xfrm>
+      </p:grpSpPr>
+      <p:grpSp>
+        <p:nvGrpSpPr>
+          <p:cNvPr id="98" name="组合 97">
+            <a:extLst>
+              <a:ext uri="{FF2B5EF4-FFF2-40B4-BE49-F238E27FC236}">
+                <a16:creationId xmlns:a16="http://schemas.microsoft.com/office/drawing/2014/main" id="{305378B6-1314-83ED-070F-DB850CB1CC77}"/>
+              </a:ext>
+            </a:extLst>
+          </p:cNvPr>
+          <p:cNvGrpSpPr/>
+          <p:nvPr/>
+        </p:nvGrpSpPr>
+        <p:grpSpPr>
+          <a:xfrm>
+            <a:off x="4117930" y="1599082"/>
+            <a:ext cx="3992130" cy="3387670"/>
+            <a:chOff x="4117930" y="1599082"/>
+            <a:chExt cx="3992130" cy="3387670"/>
+          </a:xfrm>
+        </p:grpSpPr>
+        <p:grpSp>
+          <p:nvGrpSpPr>
+            <p:cNvPr id="62" name="组合 61">
+              <a:extLst>
+                <a:ext uri="{FF2B5EF4-FFF2-40B4-BE49-F238E27FC236}">
+                  <a16:creationId xmlns:a16="http://schemas.microsoft.com/office/drawing/2014/main" id="{BCAD5700-482F-6862-1E54-C41AFCE98DB2}"/>
+                </a:ext>
+              </a:extLst>
+            </p:cNvPr>
+            <p:cNvGrpSpPr/>
+            <p:nvPr/>
+          </p:nvGrpSpPr>
+          <p:grpSpPr>
+            <a:xfrm>
+              <a:off x="7390060" y="1915343"/>
+              <a:ext cx="720000" cy="720000"/>
+              <a:chOff x="6976722" y="1545262"/>
+              <a:chExt cx="720000" cy="720000"/>
+            </a:xfrm>
+          </p:grpSpPr>
+          <p:sp>
+            <p:nvSpPr>
+              <p:cNvPr id="26" name="矩形 25">
+                <a:extLst>
+                  <a:ext uri="{FF2B5EF4-FFF2-40B4-BE49-F238E27FC236}">
+                    <a16:creationId xmlns:a16="http://schemas.microsoft.com/office/drawing/2014/main" id="{2CEED084-ED97-945E-1269-C0F631D5FA17}"/>
+                  </a:ext>
+                </a:extLst>
+              </p:cNvPr>
+              <p:cNvSpPr/>
+              <p:nvPr/>
+            </p:nvSpPr>
+            <p:spPr>
+              <a:xfrm>
+                <a:off x="6976722" y="1545262"/>
+                <a:ext cx="720000" cy="720000"/>
+              </a:xfrm>
+              <a:prstGeom prst="rect">
+                <a:avLst/>
+              </a:prstGeom>
+              <a:noFill/>
+            </p:spPr>
+            <p:style>
+              <a:lnRef idx="2">
+                <a:schemeClr val="accent1">
+                  <a:shade val="15000"/>
+                </a:schemeClr>
+              </a:lnRef>
+              <a:fillRef idx="1">
+                <a:schemeClr val="accent1"/>
+              </a:fillRef>
+              <a:effectRef idx="0">
+                <a:schemeClr val="accent1"/>
+              </a:effectRef>
+              <a:fontRef idx="minor">
+                <a:schemeClr val="lt1"/>
+              </a:fontRef>
+            </p:style>
+            <p:txBody>
+              <a:bodyPr rtlCol="0" anchor="ctr"/>
+              <a:lstStyle/>
+              <a:p>
+                <a:pPr algn="ctr"/>
+                <a:endParaRPr lang="zh-CN" altLang="en-US"/>
+              </a:p>
+            </p:txBody>
+          </p:sp>
+          <p:cxnSp>
+            <p:nvCxnSpPr>
+              <p:cNvPr id="34" name="直接箭头连接符 33">
+                <a:extLst>
+                  <a:ext uri="{FF2B5EF4-FFF2-40B4-BE49-F238E27FC236}">
+                    <a16:creationId xmlns:a16="http://schemas.microsoft.com/office/drawing/2014/main" id="{54A03A96-4CF3-585E-7CD4-E1320CBA4716}"/>
+                  </a:ext>
+                </a:extLst>
+              </p:cNvPr>
+              <p:cNvCxnSpPr/>
+              <p:nvPr/>
+            </p:nvCxnSpPr>
+            <p:spPr>
+              <a:xfrm flipH="1">
+                <a:off x="7148627" y="1743737"/>
+                <a:ext cx="360000" cy="360000"/>
+              </a:xfrm>
+              <a:prstGeom prst="straightConnector1">
+                <a:avLst/>
+              </a:prstGeom>
+              <a:ln w="12700">
+                <a:solidFill>
+                  <a:schemeClr val="tx1"/>
+                </a:solidFill>
+                <a:headEnd type="triangle"/>
+                <a:tailEnd type="triangle"/>
+              </a:ln>
+            </p:spPr>
+            <p:style>
+              <a:lnRef idx="1">
+                <a:schemeClr val="accent1"/>
+              </a:lnRef>
+              <a:fillRef idx="0">
+                <a:schemeClr val="accent1"/>
+              </a:fillRef>
+              <a:effectRef idx="0">
+                <a:schemeClr val="accent1"/>
+              </a:effectRef>
+              <a:fontRef idx="minor">
+                <a:schemeClr val="tx1"/>
+              </a:fontRef>
+            </p:style>
+          </p:cxnSp>
+        </p:grpSp>
+        <mc:AlternateContent xmlns:mc="http://schemas.openxmlformats.org/markup-compatibility/2006">
+          <mc:Choice xmlns:a14="http://schemas.microsoft.com/office/drawing/2010/main" Requires="a14">
+            <p:sp>
+              <p:nvSpPr>
+                <p:cNvPr id="35" name="文本框 34">
+                  <a:extLst>
+                    <a:ext uri="{FF2B5EF4-FFF2-40B4-BE49-F238E27FC236}">
+                      <a16:creationId xmlns:a16="http://schemas.microsoft.com/office/drawing/2014/main" id="{89A24BC4-AFFD-7FBF-4334-11A438D454BE}"/>
+                    </a:ext>
+                  </a:extLst>
+                </p:cNvPr>
+                <p:cNvSpPr txBox="1"/>
+                <p:nvPr/>
+              </p:nvSpPr>
+              <p:spPr>
+                <a:xfrm>
+                  <a:off x="7606207" y="1599082"/>
+                  <a:ext cx="287706" cy="276999"/>
+                </a:xfrm>
+                <a:prstGeom prst="rect">
+                  <a:avLst/>
+                </a:prstGeom>
+                <a:noFill/>
+              </p:spPr>
+              <p:txBody>
+                <a:bodyPr wrap="none" lIns="0" tIns="0" rIns="0" bIns="0" rtlCol="0">
+                  <a:spAutoFit/>
+                </a:bodyPr>
+                <a:lstStyle/>
+                <a:p>
+                  <a14:m>
+                    <m:oMathPara xmlns:m="http://schemas.openxmlformats.org/officeDocument/2006/math">
+                      <m:oMathParaPr>
+                        <m:jc m:val="centerGroup"/>
+                      </m:oMathParaPr>
+                      <m:oMath xmlns:m="http://schemas.openxmlformats.org/officeDocument/2006/math">
+                        <m:sSub>
+                          <m:sSubPr>
+                            <m:ctrlPr>
+                              <a:rPr lang="en-US" altLang="zh-CN" b="0" i="1" smtClean="0">
+                                <a:latin typeface="Cambria Math" panose="02040503050406030204" pitchFamily="18" charset="0"/>
+                              </a:rPr>
+                            </m:ctrlPr>
+                          </m:sSubPr>
+                          <m:e>
+                            <m:r>
+                              <a:rPr lang="en-US" altLang="zh-CN" b="0" i="1" smtClean="0">
+                                <a:latin typeface="Cambria Math" panose="02040503050406030204" pitchFamily="18" charset="0"/>
+                              </a:rPr>
+                              <m:t>𝑃</m:t>
+                            </m:r>
+                          </m:e>
+                          <m:sub>
+                            <m:r>
+                              <a:rPr lang="en-US" altLang="zh-CN" b="0" i="1" smtClean="0">
+                                <a:latin typeface="Cambria Math" panose="02040503050406030204" pitchFamily="18" charset="0"/>
+                              </a:rPr>
+                              <m:t>2</m:t>
+                            </m:r>
+                          </m:sub>
+                        </m:sSub>
+                      </m:oMath>
+                    </m:oMathPara>
+                  </a14:m>
+                  <a:endParaRPr lang="en-US" altLang="zh-CN" b="0" dirty="0"/>
+                </a:p>
+              </p:txBody>
+            </p:sp>
+          </mc:Choice>
+          <mc:Fallback>
+            <p:sp>
+              <p:nvSpPr>
+                <p:cNvPr id="35" name="文本框 34">
+                  <a:extLst>
+                    <a:ext uri="{FF2B5EF4-FFF2-40B4-BE49-F238E27FC236}">
+                      <a16:creationId xmlns:a16="http://schemas.microsoft.com/office/drawing/2014/main" id="{89A24BC4-AFFD-7FBF-4334-11A438D454BE}"/>
+                    </a:ext>
+                  </a:extLst>
+                </p:cNvPr>
+                <p:cNvSpPr txBox="1">
+                  <a:spLocks noRot="1" noChangeAspect="1" noMove="1" noResize="1" noEditPoints="1" noAdjustHandles="1" noChangeArrowheads="1" noChangeShapeType="1" noTextEdit="1"/>
+                </p:cNvSpPr>
+                <p:nvPr/>
+              </p:nvSpPr>
+              <p:spPr>
+                <a:xfrm>
+                  <a:off x="7606207" y="1599082"/>
+                  <a:ext cx="287706" cy="276999"/>
+                </a:xfrm>
+                <a:prstGeom prst="rect">
+                  <a:avLst/>
+                </a:prstGeom>
+                <a:blipFill>
+                  <a:blip r:embed="rId3"/>
+                  <a:stretch>
+                    <a:fillRect l="-19149" r="-6383" b="-13043"/>
+                  </a:stretch>
+                </a:blipFill>
+              </p:spPr>
+              <p:txBody>
+                <a:bodyPr/>
+                <a:lstStyle/>
+                <a:p>
+                  <a:r>
+                    <a:rPr lang="zh-CN" altLang="en-US">
+                      <a:noFill/>
+                    </a:rPr>
+                    <a:t> </a:t>
+                  </a:r>
+                </a:p>
+              </p:txBody>
+            </p:sp>
+          </mc:Fallback>
+        </mc:AlternateContent>
+        <p:cxnSp>
+          <p:nvCxnSpPr>
+            <p:cNvPr id="55" name="直接箭头连接符 54">
+              <a:extLst>
+                <a:ext uri="{FF2B5EF4-FFF2-40B4-BE49-F238E27FC236}">
+                  <a16:creationId xmlns:a16="http://schemas.microsoft.com/office/drawing/2014/main" id="{C01A3AEE-A1E2-766F-FBDD-4B7C7FBDF741}"/>
+                </a:ext>
+              </a:extLst>
+            </p:cNvPr>
+            <p:cNvCxnSpPr>
+              <a:cxnSpLocks/>
+            </p:cNvCxnSpPr>
+            <p:nvPr/>
+          </p:nvCxnSpPr>
+          <p:spPr>
+            <a:xfrm flipV="1">
+              <a:off x="6852485" y="2722033"/>
+              <a:ext cx="729998" cy="421464"/>
+            </a:xfrm>
+            <a:prstGeom prst="straightConnector1">
+              <a:avLst/>
+            </a:prstGeom>
+            <a:ln w="12700">
+              <a:solidFill>
+                <a:schemeClr val="tx1"/>
+              </a:solidFill>
+              <a:tailEnd type="none"/>
+            </a:ln>
+          </p:spPr>
+          <p:style>
+            <a:lnRef idx="1">
+              <a:schemeClr val="accent1"/>
+            </a:lnRef>
+            <a:fillRef idx="0">
+              <a:schemeClr val="accent1"/>
+            </a:fillRef>
+            <a:effectRef idx="0">
+              <a:schemeClr val="accent1"/>
+            </a:effectRef>
+            <a:fontRef idx="minor">
+              <a:schemeClr val="tx1"/>
+            </a:fontRef>
+          </p:style>
+        </p:cxnSp>
+        <p:grpSp>
+          <p:nvGrpSpPr>
+            <p:cNvPr id="75" name="组合 74">
+              <a:extLst>
+                <a:ext uri="{FF2B5EF4-FFF2-40B4-BE49-F238E27FC236}">
+                  <a16:creationId xmlns:a16="http://schemas.microsoft.com/office/drawing/2014/main" id="{4B3F24F5-7EAD-F107-0735-A92A778BC12D}"/>
+                </a:ext>
+              </a:extLst>
+            </p:cNvPr>
+            <p:cNvGrpSpPr/>
+            <p:nvPr/>
+          </p:nvGrpSpPr>
+          <p:grpSpPr>
+            <a:xfrm>
+              <a:off x="6375975" y="2222950"/>
+              <a:ext cx="975656" cy="702156"/>
+              <a:chOff x="6221254" y="2215505"/>
+              <a:chExt cx="975656" cy="702156"/>
+            </a:xfrm>
+          </p:grpSpPr>
+          <p:cxnSp>
+            <p:nvCxnSpPr>
+              <p:cNvPr id="18" name="直接箭头连接符 17">
+                <a:extLst>
+                  <a:ext uri="{FF2B5EF4-FFF2-40B4-BE49-F238E27FC236}">
+                    <a16:creationId xmlns:a16="http://schemas.microsoft.com/office/drawing/2014/main" id="{5B95FE0F-A80E-F671-A540-7D8C1E93C98E}"/>
+                  </a:ext>
+                </a:extLst>
+              </p:cNvPr>
+              <p:cNvCxnSpPr>
+                <a:cxnSpLocks/>
+              </p:cNvCxnSpPr>
+              <p:nvPr/>
+            </p:nvCxnSpPr>
+            <p:spPr>
+              <a:xfrm flipV="1">
+                <a:off x="6221254" y="2354366"/>
+                <a:ext cx="975656" cy="563295"/>
+              </a:xfrm>
+              <a:prstGeom prst="straightConnector1">
+                <a:avLst/>
+              </a:prstGeom>
+              <a:ln w="12700">
+                <a:solidFill>
+                  <a:schemeClr val="tx1"/>
+                </a:solidFill>
+                <a:tailEnd type="stealth"/>
+              </a:ln>
+            </p:spPr>
+            <p:style>
+              <a:lnRef idx="1">
+                <a:schemeClr val="accent1"/>
+              </a:lnRef>
+              <a:fillRef idx="0">
+                <a:schemeClr val="accent1"/>
+              </a:fillRef>
+              <a:effectRef idx="0">
+                <a:schemeClr val="accent1"/>
+              </a:effectRef>
+              <a:fontRef idx="minor">
+                <a:schemeClr val="tx1"/>
+              </a:fontRef>
+            </p:style>
+          </p:cxnSp>
+          <p:cxnSp>
+            <p:nvCxnSpPr>
+              <p:cNvPr id="42" name="直接箭头连接符 41">
+                <a:extLst>
+                  <a:ext uri="{FF2B5EF4-FFF2-40B4-BE49-F238E27FC236}">
+                    <a16:creationId xmlns:a16="http://schemas.microsoft.com/office/drawing/2014/main" id="{D097A397-1A06-833C-CFA0-B6A218004503}"/>
+                  </a:ext>
+                </a:extLst>
+              </p:cNvPr>
+              <p:cNvCxnSpPr/>
+              <p:nvPr/>
+            </p:nvCxnSpPr>
+            <p:spPr>
+              <a:xfrm flipV="1">
+                <a:off x="6487397" y="2215505"/>
+                <a:ext cx="0" cy="540000"/>
+              </a:xfrm>
+              <a:prstGeom prst="straightConnector1">
+                <a:avLst/>
+              </a:prstGeom>
+              <a:ln w="12700">
+                <a:solidFill>
+                  <a:schemeClr val="tx1"/>
+                </a:solidFill>
+                <a:prstDash val="dash"/>
+                <a:tailEnd type="triangle"/>
+              </a:ln>
+            </p:spPr>
+            <p:style>
+              <a:lnRef idx="1">
+                <a:schemeClr val="accent1"/>
+              </a:lnRef>
+              <a:fillRef idx="0">
+                <a:schemeClr val="accent1"/>
+              </a:fillRef>
+              <a:effectRef idx="0">
+                <a:schemeClr val="accent1"/>
+              </a:effectRef>
+              <a:fontRef idx="minor">
+                <a:schemeClr val="tx1"/>
+              </a:fontRef>
+            </p:style>
+          </p:cxnSp>
+          <p:cxnSp>
+            <p:nvCxnSpPr>
+              <p:cNvPr id="53" name="直接箭头连接符 52">
+                <a:extLst>
+                  <a:ext uri="{FF2B5EF4-FFF2-40B4-BE49-F238E27FC236}">
+                    <a16:creationId xmlns:a16="http://schemas.microsoft.com/office/drawing/2014/main" id="{511A3B10-7887-BFAA-0EF5-494411BA32F4}"/>
+                  </a:ext>
+                </a:extLst>
+              </p:cNvPr>
+              <p:cNvCxnSpPr>
+                <a:cxnSpLocks/>
+              </p:cNvCxnSpPr>
+              <p:nvPr/>
+            </p:nvCxnSpPr>
+            <p:spPr>
+              <a:xfrm rot="2700000" flipV="1">
+                <a:off x="6683847" y="2290218"/>
+                <a:ext cx="0" cy="540000"/>
+              </a:xfrm>
+              <a:prstGeom prst="straightConnector1">
+                <a:avLst/>
+              </a:prstGeom>
+              <a:ln w="12700">
+                <a:solidFill>
+                  <a:schemeClr val="tx1"/>
+                </a:solidFill>
+                <a:tailEnd type="triangle"/>
+              </a:ln>
+            </p:spPr>
+            <p:style>
+              <a:lnRef idx="1">
+                <a:schemeClr val="accent1"/>
+              </a:lnRef>
+              <a:fillRef idx="0">
+                <a:schemeClr val="accent1"/>
+              </a:fillRef>
+              <a:effectRef idx="0">
+                <a:schemeClr val="accent1"/>
+              </a:effectRef>
+              <a:fontRef idx="minor">
+                <a:schemeClr val="tx1"/>
+              </a:fontRef>
+            </p:style>
+          </p:cxnSp>
+          <p:sp>
+            <p:nvSpPr>
+              <p:cNvPr id="57" name="弧形 56">
+                <a:extLst>
+                  <a:ext uri="{FF2B5EF4-FFF2-40B4-BE49-F238E27FC236}">
+                    <a16:creationId xmlns:a16="http://schemas.microsoft.com/office/drawing/2014/main" id="{16658A54-8567-860B-AAFF-B6C8FAB67B89}"/>
+                  </a:ext>
+                </a:extLst>
+              </p:cNvPr>
+              <p:cNvSpPr/>
+              <p:nvPr/>
+            </p:nvSpPr>
+            <p:spPr>
+              <a:xfrm>
+                <a:off x="6284595" y="2520953"/>
+                <a:ext cx="372533" cy="372533"/>
+              </a:xfrm>
+              <a:prstGeom prst="arc">
+                <a:avLst>
+                  <a:gd name="adj1" fmla="val 16356151"/>
+                  <a:gd name="adj2" fmla="val 19682503"/>
+                </a:avLst>
+              </a:prstGeom>
+              <a:ln w="12700">
+                <a:solidFill>
+                  <a:schemeClr val="tx1"/>
+                </a:solidFill>
+                <a:tailEnd type="stealth"/>
+              </a:ln>
+            </p:spPr>
+            <p:style>
+              <a:lnRef idx="1">
+                <a:schemeClr val="accent1"/>
+              </a:lnRef>
+              <a:fillRef idx="0">
+                <a:schemeClr val="accent1"/>
+              </a:fillRef>
+              <a:effectRef idx="0">
+                <a:schemeClr val="accent1"/>
+              </a:effectRef>
+              <a:fontRef idx="minor">
+                <a:schemeClr val="tx1"/>
+              </a:fontRef>
+            </p:style>
+            <p:txBody>
+              <a:bodyPr rtlCol="0" anchor="ctr"/>
+              <a:lstStyle/>
+              <a:p>
+                <a:pPr algn="ctr"/>
+                <a:endParaRPr lang="zh-CN" altLang="en-US"/>
+              </a:p>
+            </p:txBody>
+          </p:sp>
+          <mc:AlternateContent xmlns:mc="http://schemas.openxmlformats.org/markup-compatibility/2006">
+            <mc:Choice xmlns:a14="http://schemas.microsoft.com/office/drawing/2010/main" Requires="a14">
+              <p:sp>
+                <p:nvSpPr>
+                  <p:cNvPr id="58" name="文本框 57">
+                    <a:extLst>
+                      <a:ext uri="{FF2B5EF4-FFF2-40B4-BE49-F238E27FC236}">
+                        <a16:creationId xmlns:a16="http://schemas.microsoft.com/office/drawing/2014/main" id="{7035A0A0-C4A4-0864-DC59-E040DE90FFE4}"/>
+                      </a:ext>
+                    </a:extLst>
+                  </p:cNvPr>
+                  <p:cNvSpPr txBox="1"/>
+                  <p:nvPr/>
+                </p:nvSpPr>
+                <p:spPr>
+                  <a:xfrm>
+                    <a:off x="6519593" y="2364931"/>
+                    <a:ext cx="179536" cy="123111"/>
+                  </a:xfrm>
+                  <a:prstGeom prst="rect">
+                    <a:avLst/>
+                  </a:prstGeom>
+                  <a:noFill/>
+                </p:spPr>
+                <p:txBody>
+                  <a:bodyPr wrap="none" lIns="0" tIns="0" rIns="0" bIns="0" rtlCol="0">
+                    <a:spAutoFit/>
+                  </a:bodyPr>
+                  <a:lstStyle/>
+                  <a:p>
+                    <a14:m>
+                      <m:oMathPara xmlns:m="http://schemas.openxmlformats.org/officeDocument/2006/math">
+                        <m:oMathParaPr>
+                          <m:jc m:val="centerGroup"/>
+                        </m:oMathParaPr>
+                        <m:oMath xmlns:m="http://schemas.openxmlformats.org/officeDocument/2006/math">
+                          <m:r>
+                            <a:rPr lang="en-US" altLang="zh-CN" sz="800" b="0" i="1" smtClean="0">
+                              <a:latin typeface="Cambria Math" panose="02040503050406030204" pitchFamily="18" charset="0"/>
+                            </a:rPr>
+                            <m:t>45</m:t>
+                          </m:r>
+                          <m:r>
+                            <a:rPr lang="en-US" altLang="zh-CN" sz="800" i="1">
+                              <a:latin typeface="Cambria Math" panose="02040503050406030204" pitchFamily="18" charset="0"/>
+                            </a:rPr>
+                            <m:t>°</m:t>
+                          </m:r>
+                        </m:oMath>
+                      </m:oMathPara>
+                    </a14:m>
+                    <a:endParaRPr lang="en-US" altLang="zh-CN" sz="1100" dirty="0"/>
+                  </a:p>
+                </p:txBody>
+              </p:sp>
+            </mc:Choice>
+            <mc:Fallback>
+              <p:sp>
+                <p:nvSpPr>
+                  <p:cNvPr id="58" name="文本框 57">
+                    <a:extLst>
+                      <a:ext uri="{FF2B5EF4-FFF2-40B4-BE49-F238E27FC236}">
+                        <a16:creationId xmlns:a16="http://schemas.microsoft.com/office/drawing/2014/main" id="{7035A0A0-C4A4-0864-DC59-E040DE90FFE4}"/>
+                      </a:ext>
+                    </a:extLst>
+                  </p:cNvPr>
+                  <p:cNvSpPr txBox="1">
+                    <a:spLocks noRot="1" noChangeAspect="1" noMove="1" noResize="1" noEditPoints="1" noAdjustHandles="1" noChangeArrowheads="1" noChangeShapeType="1" noTextEdit="1"/>
+                  </p:cNvSpPr>
+                  <p:nvPr/>
+                </p:nvSpPr>
+                <p:spPr>
+                  <a:xfrm>
+                    <a:off x="6519593" y="2364931"/>
+                    <a:ext cx="179536" cy="123111"/>
+                  </a:xfrm>
+                  <a:prstGeom prst="rect">
+                    <a:avLst/>
+                  </a:prstGeom>
+                  <a:blipFill>
+                    <a:blip r:embed="rId4"/>
+                    <a:stretch>
+                      <a:fillRect l="-17241" r="-10345" b="-15000"/>
+                    </a:stretch>
+                  </a:blipFill>
+                </p:spPr>
+                <p:txBody>
+                  <a:bodyPr/>
+                  <a:lstStyle/>
+                  <a:p>
+                    <a:r>
+                      <a:rPr lang="zh-CN" altLang="en-US">
+                        <a:noFill/>
+                      </a:rPr>
+                      <a:t> </a:t>
+                    </a:r>
+                  </a:p>
+                </p:txBody>
+              </p:sp>
+            </mc:Fallback>
+          </mc:AlternateContent>
+        </p:grpSp>
+        <p:cxnSp>
+          <p:nvCxnSpPr>
+            <p:cNvPr id="60" name="直接箭头连接符 59">
+              <a:extLst>
+                <a:ext uri="{FF2B5EF4-FFF2-40B4-BE49-F238E27FC236}">
+                  <a16:creationId xmlns:a16="http://schemas.microsoft.com/office/drawing/2014/main" id="{4B39A859-AC9F-8B53-69A3-2DF5BEC88F1D}"/>
+                </a:ext>
+              </a:extLst>
+            </p:cNvPr>
+            <p:cNvCxnSpPr>
+              <a:cxnSpLocks/>
+            </p:cNvCxnSpPr>
+            <p:nvPr/>
+          </p:nvCxnSpPr>
+          <p:spPr>
+            <a:xfrm flipV="1">
+              <a:off x="7044989" y="2775079"/>
+              <a:ext cx="255500" cy="255500"/>
+            </a:xfrm>
+            <a:prstGeom prst="straightConnector1">
+              <a:avLst/>
+            </a:prstGeom>
+            <a:ln w="12700">
+              <a:solidFill>
+                <a:schemeClr val="tx1"/>
+              </a:solidFill>
+              <a:tailEnd type="triangle"/>
+            </a:ln>
+          </p:spPr>
+          <p:style>
+            <a:lnRef idx="1">
+              <a:schemeClr val="accent1"/>
+            </a:lnRef>
+            <a:fillRef idx="0">
+              <a:schemeClr val="accent1"/>
+            </a:fillRef>
+            <a:effectRef idx="0">
+              <a:schemeClr val="accent1"/>
+            </a:effectRef>
+            <a:fontRef idx="minor">
+              <a:schemeClr val="tx1"/>
+            </a:fontRef>
+          </p:style>
+        </p:cxnSp>
+        <p:grpSp>
+          <p:nvGrpSpPr>
+            <p:cNvPr id="69" name="组合 68">
+              <a:extLst>
+                <a:ext uri="{FF2B5EF4-FFF2-40B4-BE49-F238E27FC236}">
+                  <a16:creationId xmlns:a16="http://schemas.microsoft.com/office/drawing/2014/main" id="{968891C1-47FD-9981-ED94-6138538F75CA}"/>
+                </a:ext>
+              </a:extLst>
+            </p:cNvPr>
+            <p:cNvGrpSpPr/>
+            <p:nvPr/>
+          </p:nvGrpSpPr>
+          <p:grpSpPr>
+            <a:xfrm>
+              <a:off x="5083886" y="2926397"/>
+              <a:ext cx="1761068" cy="930730"/>
+              <a:chOff x="5706533" y="2917371"/>
+              <a:chExt cx="1761068" cy="930730"/>
+            </a:xfrm>
+          </p:grpSpPr>
+          <p:grpSp>
+            <p:nvGrpSpPr>
+              <p:cNvPr id="61" name="组合 60">
+                <a:extLst>
+                  <a:ext uri="{FF2B5EF4-FFF2-40B4-BE49-F238E27FC236}">
+                    <a16:creationId xmlns:a16="http://schemas.microsoft.com/office/drawing/2014/main" id="{1C478E71-9C70-D82F-CC4E-DE112495AC60}"/>
+                  </a:ext>
+                </a:extLst>
+              </p:cNvPr>
+              <p:cNvGrpSpPr/>
+              <p:nvPr/>
+            </p:nvGrpSpPr>
+            <p:grpSpPr>
+              <a:xfrm>
+                <a:off x="5706533" y="2917371"/>
+                <a:ext cx="1761068" cy="930730"/>
+                <a:chOff x="5283201" y="2917370"/>
+                <a:chExt cx="2184400" cy="1375229"/>
+              </a:xfrm>
+            </p:grpSpPr>
+            <p:sp>
+              <p:nvSpPr>
+                <p:cNvPr id="4" name="立方体 3">
+                  <a:extLst>
+                    <a:ext uri="{FF2B5EF4-FFF2-40B4-BE49-F238E27FC236}">
+                      <a16:creationId xmlns:a16="http://schemas.microsoft.com/office/drawing/2014/main" id="{8FA7180E-A56A-A82F-F7B6-A743EF5B8C19}"/>
+                    </a:ext>
+                  </a:extLst>
+                </p:cNvPr>
+                <p:cNvSpPr/>
+                <p:nvPr/>
+              </p:nvSpPr>
+              <p:spPr>
+                <a:xfrm>
+                  <a:off x="5283201" y="2917370"/>
+                  <a:ext cx="2184400" cy="1375229"/>
+                </a:xfrm>
+                <a:prstGeom prst="cube">
+                  <a:avLst/>
+                </a:prstGeom>
+                <a:noFill/>
+              </p:spPr>
+              <p:style>
+                <a:lnRef idx="2">
+                  <a:schemeClr val="accent1">
+                    <a:shade val="15000"/>
+                  </a:schemeClr>
+                </a:lnRef>
+                <a:fillRef idx="1">
+                  <a:schemeClr val="accent1"/>
+                </a:fillRef>
+                <a:effectRef idx="0">
+                  <a:schemeClr val="accent1"/>
+                </a:effectRef>
+                <a:fontRef idx="minor">
+                  <a:schemeClr val="lt1"/>
+                </a:fontRef>
+              </p:style>
+              <p:txBody>
+                <a:bodyPr rtlCol="0" anchor="ctr"/>
+                <a:lstStyle/>
+                <a:p>
+                  <a:pPr algn="ctr"/>
+                  <a:endParaRPr lang="zh-CN" altLang="en-US"/>
+                </a:p>
+              </p:txBody>
+            </p:sp>
+            <mc:AlternateContent xmlns:mc="http://schemas.openxmlformats.org/markup-compatibility/2006">
+              <mc:Choice xmlns:a14="http://schemas.microsoft.com/office/drawing/2010/main" Requires="a14">
+                <p:sp>
+                  <p:nvSpPr>
+                    <p:cNvPr id="12" name="文本框 11">
+                      <a:extLst>
+                        <a:ext uri="{FF2B5EF4-FFF2-40B4-BE49-F238E27FC236}">
+                          <a16:creationId xmlns:a16="http://schemas.microsoft.com/office/drawing/2014/main" id="{404A1976-2207-D69D-1D93-3DFE77AE00C1}"/>
+                        </a:ext>
+                      </a:extLst>
+                    </p:cNvPr>
+                    <p:cNvSpPr txBox="1"/>
+                    <p:nvPr/>
+                  </p:nvSpPr>
+                  <p:spPr>
+                    <a:xfrm>
+                      <a:off x="7225069" y="3749653"/>
+                      <a:ext cx="196448" cy="272859"/>
+                    </a:xfrm>
+                    <a:prstGeom prst="rect">
+                      <a:avLst/>
+                    </a:prstGeom>
+                    <a:noFill/>
+                  </p:spPr>
+                  <p:txBody>
+                    <a:bodyPr wrap="none" lIns="0" tIns="0" rIns="0" bIns="0" rtlCol="0">
+                      <a:spAutoFit/>
+                    </a:bodyPr>
+                    <a:lstStyle/>
+                    <a:p>
+                      <a14:m>
+                        <m:oMathPara xmlns:m="http://schemas.openxmlformats.org/officeDocument/2006/math">
+                          <m:oMathParaPr>
+                            <m:jc m:val="centerGroup"/>
+                          </m:oMathParaPr>
+                          <m:oMath xmlns:m="http://schemas.openxmlformats.org/officeDocument/2006/math">
+                            <m:r>
+                              <a:rPr lang="en-US" altLang="zh-CN" sz="1200" b="0" i="1" smtClean="0">
+                                <a:latin typeface="Cambria Math" panose="02040503050406030204" pitchFamily="18" charset="0"/>
+                              </a:rPr>
+                              <m:t>𝐻</m:t>
+                            </m:r>
+                          </m:oMath>
+                        </m:oMathPara>
+                      </a14:m>
+                      <a:endParaRPr lang="en-US" altLang="zh-CN" sz="1200" b="0" dirty="0"/>
+                    </a:p>
+                  </p:txBody>
+                </p:sp>
+              </mc:Choice>
+              <mc:Fallback>
+                <p:sp>
+                  <p:nvSpPr>
+                    <p:cNvPr id="12" name="文本框 11">
+                      <a:extLst>
+                        <a:ext uri="{FF2B5EF4-FFF2-40B4-BE49-F238E27FC236}">
+                          <a16:creationId xmlns:a16="http://schemas.microsoft.com/office/drawing/2014/main" id="{404A1976-2207-D69D-1D93-3DFE77AE00C1}"/>
+                        </a:ext>
+                      </a:extLst>
+                    </p:cNvPr>
+                    <p:cNvSpPr txBox="1">
+                      <a:spLocks noRot="1" noChangeAspect="1" noMove="1" noResize="1" noEditPoints="1" noAdjustHandles="1" noChangeArrowheads="1" noChangeShapeType="1" noTextEdit="1"/>
+                    </p:cNvSpPr>
+                    <p:nvPr/>
+                  </p:nvSpPr>
+                  <p:spPr>
+                    <a:xfrm>
+                      <a:off x="7225069" y="3749653"/>
+                      <a:ext cx="196448" cy="272859"/>
+                    </a:xfrm>
+                    <a:prstGeom prst="rect">
+                      <a:avLst/>
+                    </a:prstGeom>
+                    <a:blipFill>
+                      <a:blip r:embed="rId5"/>
+                      <a:stretch>
+                        <a:fillRect l="-23077" r="-15385" b="-3226"/>
+                      </a:stretch>
+                    </a:blipFill>
+                  </p:spPr>
+                  <p:txBody>
+                    <a:bodyPr/>
+                    <a:lstStyle/>
+                    <a:p>
+                      <a:r>
+                        <a:rPr lang="zh-CN" altLang="en-US">
+                          <a:noFill/>
+                        </a:rPr>
+                        <a:t> </a:t>
+                      </a:r>
+                    </a:p>
+                  </p:txBody>
+                </p:sp>
+              </mc:Fallback>
+            </mc:AlternateContent>
+          </p:grpSp>
+          <p:cxnSp>
+            <p:nvCxnSpPr>
+              <p:cNvPr id="68" name="直接箭头连接符 67">
+                <a:extLst>
+                  <a:ext uri="{FF2B5EF4-FFF2-40B4-BE49-F238E27FC236}">
+                    <a16:creationId xmlns:a16="http://schemas.microsoft.com/office/drawing/2014/main" id="{B4150B61-655B-AA68-E582-BA82BB5613A1}"/>
+                  </a:ext>
+                </a:extLst>
+              </p:cNvPr>
+              <p:cNvCxnSpPr>
+                <a:stCxn id="4" idx="4"/>
+                <a:endCxn id="4" idx="5"/>
+              </p:cNvCxnSpPr>
+              <p:nvPr/>
+            </p:nvCxnSpPr>
+            <p:spPr>
+              <a:xfrm flipV="1">
+                <a:off x="7234919" y="3266395"/>
+                <a:ext cx="232682" cy="232682"/>
+              </a:xfrm>
+              <a:prstGeom prst="straightConnector1">
+                <a:avLst/>
+              </a:prstGeom>
+              <a:ln w="12700">
+                <a:solidFill>
+                  <a:schemeClr val="tx1"/>
+                </a:solidFill>
+                <a:tailEnd type="triangle"/>
+              </a:ln>
+            </p:spPr>
+            <p:style>
+              <a:lnRef idx="1">
+                <a:schemeClr val="accent1"/>
+              </a:lnRef>
+              <a:fillRef idx="0">
+                <a:schemeClr val="accent1"/>
+              </a:fillRef>
+              <a:effectRef idx="0">
+                <a:schemeClr val="accent1"/>
+              </a:effectRef>
+              <a:fontRef idx="minor">
+                <a:schemeClr val="tx1"/>
+              </a:fontRef>
+            </p:style>
+          </p:cxnSp>
+        </p:grpSp>
+        <p:cxnSp>
+          <p:nvCxnSpPr>
+            <p:cNvPr id="72" name="直接箭头连接符 71">
+              <a:extLst>
+                <a:ext uri="{FF2B5EF4-FFF2-40B4-BE49-F238E27FC236}">
+                  <a16:creationId xmlns:a16="http://schemas.microsoft.com/office/drawing/2014/main" id="{14C4F786-B611-E464-DF08-DAA3D1CE99B8}"/>
+                </a:ext>
+              </a:extLst>
+            </p:cNvPr>
+            <p:cNvCxnSpPr>
+              <a:cxnSpLocks/>
+            </p:cNvCxnSpPr>
+            <p:nvPr/>
+          </p:nvCxnSpPr>
+          <p:spPr>
+            <a:xfrm flipV="1">
+              <a:off x="4809067" y="3508103"/>
+              <a:ext cx="733510" cy="423492"/>
+            </a:xfrm>
+            <a:prstGeom prst="straightConnector1">
+              <a:avLst/>
+            </a:prstGeom>
+            <a:ln w="12700">
+              <a:solidFill>
+                <a:schemeClr val="tx1"/>
+              </a:solidFill>
+              <a:tailEnd type="none"/>
+            </a:ln>
+          </p:spPr>
+          <p:style>
+            <a:lnRef idx="1">
+              <a:schemeClr val="accent1"/>
+            </a:lnRef>
+            <a:fillRef idx="0">
+              <a:schemeClr val="accent1"/>
+            </a:fillRef>
+            <a:effectRef idx="0">
+              <a:schemeClr val="accent1"/>
+            </a:effectRef>
+            <a:fontRef idx="minor">
+              <a:schemeClr val="tx1"/>
+            </a:fontRef>
+          </p:style>
+        </p:cxnSp>
+        <p:cxnSp>
+          <p:nvCxnSpPr>
+            <p:cNvPr id="74" name="直接箭头连接符 73">
+              <a:extLst>
+                <a:ext uri="{FF2B5EF4-FFF2-40B4-BE49-F238E27FC236}">
+                  <a16:creationId xmlns:a16="http://schemas.microsoft.com/office/drawing/2014/main" id="{08ECB8B1-15F5-E7F4-F440-7CA7859169CE}"/>
+                </a:ext>
+              </a:extLst>
+            </p:cNvPr>
+            <p:cNvCxnSpPr>
+              <a:cxnSpLocks/>
+            </p:cNvCxnSpPr>
+            <p:nvPr/>
+          </p:nvCxnSpPr>
+          <p:spPr>
+            <a:xfrm flipV="1">
+              <a:off x="5199312" y="3508103"/>
+              <a:ext cx="984839" cy="568597"/>
+            </a:xfrm>
+            <a:prstGeom prst="straightConnector1">
+              <a:avLst/>
+            </a:prstGeom>
+            <a:ln w="12700">
+              <a:solidFill>
+                <a:schemeClr val="tx1"/>
+              </a:solidFill>
+              <a:headEnd type="stealth"/>
+              <a:tailEnd type="none"/>
+            </a:ln>
+          </p:spPr>
+          <p:style>
+            <a:lnRef idx="1">
+              <a:schemeClr val="accent1"/>
+            </a:lnRef>
+            <a:fillRef idx="0">
+              <a:schemeClr val="accent1"/>
+            </a:fillRef>
+            <a:effectRef idx="0">
+              <a:schemeClr val="accent1"/>
+            </a:effectRef>
+            <a:fontRef idx="minor">
+              <a:schemeClr val="tx1"/>
+            </a:fontRef>
+          </p:style>
+        </p:cxnSp>
+        <p:cxnSp>
+          <p:nvCxnSpPr>
+            <p:cNvPr id="81" name="直接箭头连接符 80">
+              <a:extLst>
+                <a:ext uri="{FF2B5EF4-FFF2-40B4-BE49-F238E27FC236}">
+                  <a16:creationId xmlns:a16="http://schemas.microsoft.com/office/drawing/2014/main" id="{7642B806-A8B5-6726-5934-E2E2CE4F8797}"/>
+                </a:ext>
+              </a:extLst>
+            </p:cNvPr>
+            <p:cNvCxnSpPr>
+              <a:cxnSpLocks/>
+            </p:cNvCxnSpPr>
+            <p:nvPr/>
+          </p:nvCxnSpPr>
+          <p:spPr>
+            <a:xfrm rot="2700000" flipV="1">
+              <a:off x="5542576" y="3522402"/>
+              <a:ext cx="0" cy="540000"/>
+            </a:xfrm>
+            <a:prstGeom prst="straightConnector1">
+              <a:avLst/>
+            </a:prstGeom>
+            <a:ln w="12700">
+              <a:solidFill>
+                <a:schemeClr val="tx1"/>
+              </a:solidFill>
+              <a:prstDash val="dash"/>
+              <a:tailEnd type="triangle"/>
+            </a:ln>
+          </p:spPr>
+          <p:style>
+            <a:lnRef idx="1">
+              <a:schemeClr val="accent1"/>
+            </a:lnRef>
+            <a:fillRef idx="0">
+              <a:schemeClr val="accent1"/>
+            </a:fillRef>
+            <a:effectRef idx="0">
+              <a:schemeClr val="accent1"/>
+            </a:effectRef>
+            <a:fontRef idx="minor">
+              <a:schemeClr val="tx1"/>
+            </a:fontRef>
+          </p:style>
+        </p:cxnSp>
+        <p:cxnSp>
+          <p:nvCxnSpPr>
+            <p:cNvPr id="83" name="直接箭头连接符 82">
+              <a:extLst>
+                <a:ext uri="{FF2B5EF4-FFF2-40B4-BE49-F238E27FC236}">
+                  <a16:creationId xmlns:a16="http://schemas.microsoft.com/office/drawing/2014/main" id="{004B56D2-393D-CCA7-BFA7-EF526C06E85B}"/>
+                </a:ext>
+              </a:extLst>
+            </p:cNvPr>
+            <p:cNvCxnSpPr/>
+            <p:nvPr/>
+          </p:nvCxnSpPr>
+          <p:spPr>
+            <a:xfrm>
+              <a:off x="5351657" y="3983321"/>
+              <a:ext cx="540000" cy="0"/>
+            </a:xfrm>
+            <a:prstGeom prst="straightConnector1">
+              <a:avLst/>
+            </a:prstGeom>
+            <a:ln w="12700">
+              <a:solidFill>
+                <a:schemeClr val="tx1"/>
+              </a:solidFill>
+              <a:tailEnd type="triangle"/>
+            </a:ln>
+          </p:spPr>
+          <p:style>
+            <a:lnRef idx="1">
+              <a:schemeClr val="accent1"/>
+            </a:lnRef>
+            <a:fillRef idx="0">
+              <a:schemeClr val="accent1"/>
+            </a:fillRef>
+            <a:effectRef idx="0">
+              <a:schemeClr val="accent1"/>
+            </a:effectRef>
+            <a:fontRef idx="minor">
+              <a:schemeClr val="tx1"/>
+            </a:fontRef>
+          </p:style>
+        </p:cxnSp>
+        <p:sp>
+          <p:nvSpPr>
+            <p:cNvPr id="84" name="弧形 83">
+              <a:extLst>
+                <a:ext uri="{FF2B5EF4-FFF2-40B4-BE49-F238E27FC236}">
+                  <a16:creationId xmlns:a16="http://schemas.microsoft.com/office/drawing/2014/main" id="{2A616180-584F-182C-8DEE-8E85D94255DA}"/>
+                </a:ext>
+              </a:extLst>
+            </p:cNvPr>
+            <p:cNvSpPr/>
+            <p:nvPr/>
+          </p:nvSpPr>
+          <p:spPr>
+            <a:xfrm>
+              <a:off x="5175822" y="3745328"/>
+              <a:ext cx="372533" cy="372533"/>
+            </a:xfrm>
+            <a:prstGeom prst="arc">
+              <a:avLst>
+                <a:gd name="adj1" fmla="val 19425459"/>
+                <a:gd name="adj2" fmla="val 834292"/>
+              </a:avLst>
+            </a:prstGeom>
+            <a:ln w="12700">
+              <a:solidFill>
+                <a:schemeClr val="tx1"/>
+              </a:solidFill>
+              <a:tailEnd type="stealth"/>
+            </a:ln>
+          </p:spPr>
+          <p:style>
+            <a:lnRef idx="1">
+              <a:schemeClr val="accent1"/>
+            </a:lnRef>
+            <a:fillRef idx="0">
+              <a:schemeClr val="accent1"/>
+            </a:fillRef>
+            <a:effectRef idx="0">
+              <a:schemeClr val="accent1"/>
+            </a:effectRef>
+            <a:fontRef idx="minor">
+              <a:schemeClr val="tx1"/>
+            </a:fontRef>
+          </p:style>
+          <p:txBody>
+            <a:bodyPr rtlCol="0" anchor="ctr"/>
+            <a:lstStyle/>
+            <a:p>
+              <a:pPr algn="ctr"/>
+              <a:endParaRPr lang="zh-CN" altLang="en-US"/>
+            </a:p>
+          </p:txBody>
+        </p:sp>
+        <mc:AlternateContent xmlns:mc="http://schemas.openxmlformats.org/markup-compatibility/2006">
+          <mc:Choice xmlns:a14="http://schemas.microsoft.com/office/drawing/2010/main" Requires="a14">
+            <p:sp>
+              <p:nvSpPr>
+                <p:cNvPr id="85" name="文本框 84">
+                  <a:extLst>
+                    <a:ext uri="{FF2B5EF4-FFF2-40B4-BE49-F238E27FC236}">
+                      <a16:creationId xmlns:a16="http://schemas.microsoft.com/office/drawing/2014/main" id="{7FB2FACD-ABEE-A02C-E4F8-84465FADED31}"/>
+                    </a:ext>
+                  </a:extLst>
+                </p:cNvPr>
+                <p:cNvSpPr txBox="1"/>
+                <p:nvPr/>
+              </p:nvSpPr>
+              <p:spPr>
+                <a:xfrm>
+                  <a:off x="5577101" y="3858043"/>
+                  <a:ext cx="213200" cy="123111"/>
+                </a:xfrm>
+                <a:prstGeom prst="rect">
+                  <a:avLst/>
+                </a:prstGeom>
+                <a:noFill/>
+              </p:spPr>
+              <p:txBody>
+                <a:bodyPr wrap="none" lIns="0" tIns="0" rIns="0" bIns="0" rtlCol="0">
+                  <a:spAutoFit/>
+                </a:bodyPr>
+                <a:lstStyle/>
+                <a:p>
+                  <a14:m>
+                    <m:oMathPara xmlns:m="http://schemas.openxmlformats.org/officeDocument/2006/math">
+                      <m:oMathParaPr>
+                        <m:jc m:val="centerGroup"/>
+                      </m:oMathParaPr>
+                      <m:oMath xmlns:m="http://schemas.openxmlformats.org/officeDocument/2006/math">
+                        <m:r>
+                          <a:rPr lang="en-US" altLang="zh-CN" sz="800" b="0" i="1" smtClean="0">
+                            <a:latin typeface="Cambria Math" panose="02040503050406030204" pitchFamily="18" charset="0"/>
+                          </a:rPr>
+                          <m:t>-45</m:t>
+                        </m:r>
+                        <m:r>
+                          <a:rPr lang="en-US" altLang="zh-CN" sz="800" i="1">
+                            <a:latin typeface="Cambria Math" panose="02040503050406030204" pitchFamily="18" charset="0"/>
+                          </a:rPr>
+                          <m:t>°</m:t>
+                        </m:r>
+                      </m:oMath>
+                    </m:oMathPara>
+                  </a14:m>
+                  <a:endParaRPr lang="en-US" altLang="zh-CN" sz="1100" dirty="0"/>
+                </a:p>
+              </p:txBody>
+            </p:sp>
+          </mc:Choice>
+          <mc:Fallback>
+            <p:sp>
+              <p:nvSpPr>
+                <p:cNvPr id="85" name="文本框 84">
+                  <a:extLst>
+                    <a:ext uri="{FF2B5EF4-FFF2-40B4-BE49-F238E27FC236}">
+                      <a16:creationId xmlns:a16="http://schemas.microsoft.com/office/drawing/2014/main" id="{7FB2FACD-ABEE-A02C-E4F8-84465FADED31}"/>
+                    </a:ext>
+                  </a:extLst>
+                </p:cNvPr>
+                <p:cNvSpPr txBox="1">
+                  <a:spLocks noRot="1" noChangeAspect="1" noMove="1" noResize="1" noEditPoints="1" noAdjustHandles="1" noChangeArrowheads="1" noChangeShapeType="1" noTextEdit="1"/>
+                </p:cNvSpPr>
+                <p:nvPr/>
+              </p:nvSpPr>
+              <p:spPr>
+                <a:xfrm>
+                  <a:off x="5577101" y="3858043"/>
+                  <a:ext cx="213200" cy="123111"/>
+                </a:xfrm>
+                <a:prstGeom prst="rect">
+                  <a:avLst/>
+                </a:prstGeom>
+                <a:blipFill>
+                  <a:blip r:embed="rId6"/>
+                  <a:stretch>
+                    <a:fillRect l="-2857" r="-8571" b="-10000"/>
+                  </a:stretch>
+                </a:blipFill>
+              </p:spPr>
+              <p:txBody>
+                <a:bodyPr/>
+                <a:lstStyle/>
+                <a:p>
+                  <a:r>
+                    <a:rPr lang="zh-CN" altLang="en-US">
+                      <a:noFill/>
+                    </a:rPr>
+                    <a:t> </a:t>
+                  </a:r>
+                </a:p>
+              </p:txBody>
+            </p:sp>
+          </mc:Fallback>
+        </mc:AlternateContent>
+        <p:cxnSp>
+          <p:nvCxnSpPr>
+            <p:cNvPr id="88" name="直接箭头连接符 87">
+              <a:extLst>
+                <a:ext uri="{FF2B5EF4-FFF2-40B4-BE49-F238E27FC236}">
+                  <a16:creationId xmlns:a16="http://schemas.microsoft.com/office/drawing/2014/main" id="{98A4829E-8D1B-D8C9-361A-347C72013CC4}"/>
+                </a:ext>
+              </a:extLst>
+            </p:cNvPr>
+            <p:cNvCxnSpPr/>
+            <p:nvPr/>
+          </p:nvCxnSpPr>
+          <p:spPr>
+            <a:xfrm flipV="1">
+              <a:off x="4943493" y="3485344"/>
+              <a:ext cx="0" cy="360000"/>
+            </a:xfrm>
+            <a:prstGeom prst="straightConnector1">
+              <a:avLst/>
+            </a:prstGeom>
+            <a:ln w="12700">
+              <a:solidFill>
+                <a:schemeClr val="tx1"/>
+              </a:solidFill>
+              <a:prstDash val="solid"/>
+              <a:tailEnd type="triangle"/>
+            </a:ln>
+          </p:spPr>
+          <p:style>
+            <a:lnRef idx="1">
+              <a:schemeClr val="accent1"/>
+            </a:lnRef>
+            <a:fillRef idx="0">
+              <a:schemeClr val="accent1"/>
+            </a:fillRef>
+            <a:effectRef idx="0">
+              <a:schemeClr val="accent1"/>
+            </a:effectRef>
+            <a:fontRef idx="minor">
+              <a:schemeClr val="tx1"/>
+            </a:fontRef>
+          </p:style>
+        </p:cxnSp>
+        <p:grpSp>
+          <p:nvGrpSpPr>
+            <p:cNvPr id="89" name="组合 88">
+              <a:extLst>
+                <a:ext uri="{FF2B5EF4-FFF2-40B4-BE49-F238E27FC236}">
+                  <a16:creationId xmlns:a16="http://schemas.microsoft.com/office/drawing/2014/main" id="{1EFE10F6-3C90-7754-9DB7-029114DF2CA4}"/>
+                </a:ext>
+              </a:extLst>
+            </p:cNvPr>
+            <p:cNvGrpSpPr/>
+            <p:nvPr/>
+          </p:nvGrpSpPr>
+          <p:grpSpPr>
+            <a:xfrm>
+              <a:off x="4363886" y="3952803"/>
+              <a:ext cx="720000" cy="720000"/>
+              <a:chOff x="6976722" y="1545262"/>
+              <a:chExt cx="720000" cy="720000"/>
+            </a:xfrm>
+          </p:grpSpPr>
+          <p:sp>
+            <p:nvSpPr>
+              <p:cNvPr id="90" name="矩形 89">
+                <a:extLst>
+                  <a:ext uri="{FF2B5EF4-FFF2-40B4-BE49-F238E27FC236}">
+                    <a16:creationId xmlns:a16="http://schemas.microsoft.com/office/drawing/2014/main" id="{3140A07B-BF26-8F7F-B63F-3309D6B2B3B8}"/>
+                  </a:ext>
+                </a:extLst>
+              </p:cNvPr>
+              <p:cNvSpPr/>
+              <p:nvPr/>
+            </p:nvSpPr>
+            <p:spPr>
+              <a:xfrm>
+                <a:off x="6976722" y="1545262"/>
+                <a:ext cx="720000" cy="720000"/>
+              </a:xfrm>
+              <a:prstGeom prst="rect">
+                <a:avLst/>
+              </a:prstGeom>
+              <a:noFill/>
+            </p:spPr>
+            <p:style>
+              <a:lnRef idx="2">
+                <a:schemeClr val="accent1">
+                  <a:shade val="15000"/>
+                </a:schemeClr>
+              </a:lnRef>
+              <a:fillRef idx="1">
+                <a:schemeClr val="accent1"/>
+              </a:fillRef>
+              <a:effectRef idx="0">
+                <a:schemeClr val="accent1"/>
+              </a:effectRef>
+              <a:fontRef idx="minor">
+                <a:schemeClr val="lt1"/>
+              </a:fontRef>
+            </p:style>
+            <p:txBody>
+              <a:bodyPr rtlCol="0" anchor="ctr"/>
+              <a:lstStyle/>
+              <a:p>
+                <a:pPr algn="ctr"/>
+                <a:endParaRPr lang="zh-CN" altLang="en-US"/>
+              </a:p>
+            </p:txBody>
+          </p:sp>
+          <p:cxnSp>
+            <p:nvCxnSpPr>
+              <p:cNvPr id="91" name="直接箭头连接符 90">
+                <a:extLst>
+                  <a:ext uri="{FF2B5EF4-FFF2-40B4-BE49-F238E27FC236}">
+                    <a16:creationId xmlns:a16="http://schemas.microsoft.com/office/drawing/2014/main" id="{C33F90E9-D3B2-33B9-D0E0-06085B83AFFF}"/>
+                  </a:ext>
+                </a:extLst>
+              </p:cNvPr>
+              <p:cNvCxnSpPr>
+                <a:cxnSpLocks/>
+              </p:cNvCxnSpPr>
+              <p:nvPr/>
+            </p:nvCxnSpPr>
+            <p:spPr>
+              <a:xfrm rot="18900000" flipH="1">
+                <a:off x="7148627" y="1743737"/>
+                <a:ext cx="360000" cy="360000"/>
+              </a:xfrm>
+              <a:prstGeom prst="straightConnector1">
+                <a:avLst/>
+              </a:prstGeom>
+              <a:ln w="12700">
+                <a:solidFill>
+                  <a:schemeClr val="tx1"/>
+                </a:solidFill>
+                <a:headEnd type="triangle"/>
+                <a:tailEnd type="triangle"/>
+              </a:ln>
+            </p:spPr>
+            <p:style>
+              <a:lnRef idx="1">
+                <a:schemeClr val="accent1"/>
+              </a:lnRef>
+              <a:fillRef idx="0">
+                <a:schemeClr val="accent1"/>
+              </a:fillRef>
+              <a:effectRef idx="0">
+                <a:schemeClr val="accent1"/>
+              </a:effectRef>
+              <a:fontRef idx="minor">
+                <a:schemeClr val="tx1"/>
+              </a:fontRef>
+            </p:style>
+          </p:cxnSp>
+        </p:grpSp>
+        <mc:AlternateContent xmlns:mc="http://schemas.openxmlformats.org/markup-compatibility/2006">
+          <mc:Choice xmlns:a14="http://schemas.microsoft.com/office/drawing/2010/main" Requires="a14">
+            <p:sp>
+              <p:nvSpPr>
+                <p:cNvPr id="92" name="文本框 91">
+                  <a:extLst>
+                    <a:ext uri="{FF2B5EF4-FFF2-40B4-BE49-F238E27FC236}">
+                      <a16:creationId xmlns:a16="http://schemas.microsoft.com/office/drawing/2014/main" id="{B9340735-8892-EFD8-849D-87589F95F87F}"/>
+                    </a:ext>
+                  </a:extLst>
+                </p:cNvPr>
+                <p:cNvSpPr txBox="1"/>
+                <p:nvPr/>
+              </p:nvSpPr>
+              <p:spPr>
+                <a:xfrm>
+                  <a:off x="4580033" y="4709753"/>
+                  <a:ext cx="282385" cy="276999"/>
+                </a:xfrm>
+                <a:prstGeom prst="rect">
+                  <a:avLst/>
+                </a:prstGeom>
+                <a:noFill/>
+              </p:spPr>
+              <p:txBody>
+                <a:bodyPr wrap="none" lIns="0" tIns="0" rIns="0" bIns="0" rtlCol="0">
+                  <a:spAutoFit/>
+                </a:bodyPr>
+                <a:lstStyle/>
+                <a:p>
+                  <a14:m>
+                    <m:oMathPara xmlns:m="http://schemas.openxmlformats.org/officeDocument/2006/math">
+                      <m:oMathParaPr>
+                        <m:jc m:val="centerGroup"/>
+                      </m:oMathParaPr>
+                      <m:oMath xmlns:m="http://schemas.openxmlformats.org/officeDocument/2006/math">
+                        <m:sSub>
+                          <m:sSubPr>
+                            <m:ctrlPr>
+                              <a:rPr lang="en-US" altLang="zh-CN" b="0" i="1" smtClean="0">
+                                <a:latin typeface="Cambria Math" panose="02040503050406030204" pitchFamily="18" charset="0"/>
+                              </a:rPr>
+                            </m:ctrlPr>
+                          </m:sSubPr>
+                          <m:e>
+                            <m:r>
+                              <a:rPr lang="en-US" altLang="zh-CN" b="0" i="1" smtClean="0">
+                                <a:latin typeface="Cambria Math" panose="02040503050406030204" pitchFamily="18" charset="0"/>
+                              </a:rPr>
+                              <m:t>𝑃</m:t>
+                            </m:r>
+                          </m:e>
+                          <m:sub>
+                            <m:r>
+                              <a:rPr lang="en-US" altLang="zh-CN" b="0" i="1" smtClean="0">
+                                <a:latin typeface="Cambria Math" panose="02040503050406030204" pitchFamily="18" charset="0"/>
+                              </a:rPr>
+                              <m:t>1</m:t>
+                            </m:r>
+                          </m:sub>
+                        </m:sSub>
+                      </m:oMath>
+                    </m:oMathPara>
+                  </a14:m>
+                  <a:endParaRPr lang="en-US" altLang="zh-CN" b="0" dirty="0"/>
+                </a:p>
+              </p:txBody>
+            </p:sp>
+          </mc:Choice>
+          <mc:Fallback>
+            <p:sp>
+              <p:nvSpPr>
+                <p:cNvPr id="92" name="文本框 91">
+                  <a:extLst>
+                    <a:ext uri="{FF2B5EF4-FFF2-40B4-BE49-F238E27FC236}">
+                      <a16:creationId xmlns:a16="http://schemas.microsoft.com/office/drawing/2014/main" id="{B9340735-8892-EFD8-849D-87589F95F87F}"/>
+                    </a:ext>
+                  </a:extLst>
+                </p:cNvPr>
+                <p:cNvSpPr txBox="1">
+                  <a:spLocks noRot="1" noChangeAspect="1" noMove="1" noResize="1" noEditPoints="1" noAdjustHandles="1" noChangeArrowheads="1" noChangeShapeType="1" noTextEdit="1"/>
+                </p:cNvSpPr>
+                <p:nvPr/>
+              </p:nvSpPr>
+              <p:spPr>
+                <a:xfrm>
+                  <a:off x="4580033" y="4709753"/>
+                  <a:ext cx="282385" cy="276999"/>
+                </a:xfrm>
+                <a:prstGeom prst="rect">
+                  <a:avLst/>
+                </a:prstGeom>
+                <a:blipFill>
+                  <a:blip r:embed="rId7"/>
+                  <a:stretch>
+                    <a:fillRect l="-17021" r="-4255" b="-15556"/>
+                  </a:stretch>
+                </a:blipFill>
+              </p:spPr>
+              <p:txBody>
+                <a:bodyPr/>
+                <a:lstStyle/>
+                <a:p>
+                  <a:r>
+                    <a:rPr lang="zh-CN" altLang="en-US">
+                      <a:noFill/>
+                    </a:rPr>
+                    <a:t> </a:t>
+                  </a:r>
+                </a:p>
+              </p:txBody>
+            </p:sp>
+          </mc:Fallback>
+        </mc:AlternateContent>
+        <p:cxnSp>
+          <p:nvCxnSpPr>
+            <p:cNvPr id="93" name="直接箭头连接符 92">
+              <a:extLst>
+                <a:ext uri="{FF2B5EF4-FFF2-40B4-BE49-F238E27FC236}">
+                  <a16:creationId xmlns:a16="http://schemas.microsoft.com/office/drawing/2014/main" id="{D98F821D-A743-1264-E0A3-71E104E9F23A}"/>
+                </a:ext>
+              </a:extLst>
+            </p:cNvPr>
+            <p:cNvCxnSpPr>
+              <a:cxnSpLocks/>
+            </p:cNvCxnSpPr>
+            <p:nvPr/>
+          </p:nvCxnSpPr>
+          <p:spPr>
+            <a:xfrm flipV="1">
+              <a:off x="4117930" y="4084203"/>
+              <a:ext cx="461560" cy="266482"/>
+            </a:xfrm>
+            <a:prstGeom prst="straightConnector1">
+              <a:avLst/>
+            </a:prstGeom>
+            <a:ln w="12700">
+              <a:solidFill>
+                <a:schemeClr val="tx1"/>
+              </a:solidFill>
+              <a:tailEnd type="stealth"/>
+            </a:ln>
+          </p:spPr>
+          <p:style>
+            <a:lnRef idx="1">
+              <a:schemeClr val="accent1"/>
+            </a:lnRef>
+            <a:fillRef idx="0">
+              <a:schemeClr val="accent1"/>
+            </a:fillRef>
+            <a:effectRef idx="0">
+              <a:schemeClr val="accent1"/>
+            </a:effectRef>
+            <a:fontRef idx="minor">
+              <a:schemeClr val="tx1"/>
+            </a:fontRef>
+          </p:style>
+        </p:cxnSp>
+        <p:sp>
+          <p:nvSpPr>
+            <p:cNvPr id="96" name="文本框 95">
+              <a:extLst>
+                <a:ext uri="{FF2B5EF4-FFF2-40B4-BE49-F238E27FC236}">
+                  <a16:creationId xmlns:a16="http://schemas.microsoft.com/office/drawing/2014/main" id="{CF8662C1-BF05-2F83-6380-DE7905F6B594}"/>
+                </a:ext>
+              </a:extLst>
+            </p:cNvPr>
+            <p:cNvSpPr txBox="1"/>
+            <p:nvPr/>
+          </p:nvSpPr>
+          <p:spPr>
+            <a:xfrm>
+              <a:off x="6892279" y="2196819"/>
+              <a:ext cx="397933" cy="246221"/>
+            </a:xfrm>
+            <a:prstGeom prst="rect">
+              <a:avLst/>
+            </a:prstGeom>
+            <a:noFill/>
+          </p:spPr>
+          <p:txBody>
+            <a:bodyPr wrap="square" rtlCol="0">
+              <a:spAutoFit/>
+            </a:bodyPr>
+            <a:lstStyle/>
+            <a:p>
+              <a:pPr algn="ctr"/>
+              <a:r>
+                <a:rPr lang="zh-CN" altLang="en-US" sz="1000" b="1" dirty="0">
+                  <a:solidFill>
+                    <a:srgbClr val="92D050"/>
+                  </a:solidFill>
+                </a:rPr>
+                <a:t>√</a:t>
+              </a:r>
+            </a:p>
+          </p:txBody>
+        </p:sp>
+        <p:sp>
+          <p:nvSpPr>
+            <p:cNvPr id="97" name="文本框 96">
+              <a:extLst>
+                <a:ext uri="{FF2B5EF4-FFF2-40B4-BE49-F238E27FC236}">
+                  <a16:creationId xmlns:a16="http://schemas.microsoft.com/office/drawing/2014/main" id="{F4001A02-CCAE-8494-7906-1363CE0215DC}"/>
+                </a:ext>
+              </a:extLst>
+            </p:cNvPr>
+            <p:cNvSpPr txBox="1"/>
+            <p:nvPr/>
+          </p:nvSpPr>
+          <p:spPr>
+            <a:xfrm>
+              <a:off x="5092736" y="4015485"/>
+              <a:ext cx="397933" cy="246221"/>
+            </a:xfrm>
+            <a:prstGeom prst="rect">
+              <a:avLst/>
+            </a:prstGeom>
+            <a:noFill/>
+          </p:spPr>
+          <p:txBody>
+            <a:bodyPr wrap="square" rtlCol="0">
+              <a:spAutoFit/>
+            </a:bodyPr>
+            <a:lstStyle/>
+            <a:p>
+              <a:pPr algn="ctr"/>
+              <a:r>
+                <a:rPr lang="en-US" altLang="zh-CN" sz="1000" b="1" dirty="0">
+                  <a:solidFill>
+                    <a:srgbClr val="FF0000"/>
+                  </a:solidFill>
+                </a:rPr>
+                <a:t>×</a:t>
+              </a:r>
+              <a:endParaRPr lang="zh-CN" altLang="en-US" sz="1000" b="1" dirty="0">
+                <a:solidFill>
+                  <a:srgbClr val="FF0000"/>
+                </a:solidFill>
+              </a:endParaRPr>
+            </a:p>
+          </p:txBody>
+        </p:sp>
+      </p:grpSp>
+    </p:spTree>
+    <p:extLst>
+      <p:ext uri="{BB962C8B-B14F-4D97-AF65-F5344CB8AC3E}">
+        <p14:creationId xmlns:p14="http://schemas.microsoft.com/office/powerpoint/2010/main" val="2533724604"/>
+      </p:ext>
+    </p:extLst>
+  </p:cSld>
+  <p:clrMapOvr>
+    <a:masterClrMapping/>
+  </p:clrMapOvr>
+</p:sld>
+</file>
+
+<file path=ppt/slides/slide6.xml><?xml version="1.0" encoding="utf-8"?>
+<p:sld xmlns:a="http://schemas.openxmlformats.org/drawingml/2006/main" xmlns:r="http://schemas.openxmlformats.org/officeDocument/2006/relationships" xmlns:p="http://schemas.openxmlformats.org/presentationml/2006/main">
+  <p:cSld>
+    <p:spTree>
+      <p:nvGrpSpPr>
+        <p:cNvPr id="1" name="">
+          <a:extLst>
+            <a:ext uri="{FF2B5EF4-FFF2-40B4-BE49-F238E27FC236}">
+              <a16:creationId xmlns:a16="http://schemas.microsoft.com/office/drawing/2014/main" id="{F896990A-61CA-0E08-4F05-62BA1FF84D3E}"/>
+            </a:ext>
+          </a:extLst>
+        </p:cNvPr>
+        <p:cNvGrpSpPr/>
+        <p:nvPr/>
+      </p:nvGrpSpPr>
+      <p:grpSpPr>
+        <a:xfrm>
+          <a:off x="0" y="0"/>
+          <a:ext cx="0" cy="0"/>
+          <a:chOff x="0" y="0"/>
+          <a:chExt cx="0" cy="0"/>
+        </a:xfrm>
+      </p:grpSpPr>
+      <p:grpSp>
+        <p:nvGrpSpPr>
+          <p:cNvPr id="16" name="组合 15">
+            <a:extLst>
+              <a:ext uri="{FF2B5EF4-FFF2-40B4-BE49-F238E27FC236}">
+                <a16:creationId xmlns:a16="http://schemas.microsoft.com/office/drawing/2014/main" id="{4DF97459-B7BC-33BE-806C-342B40263BE9}"/>
+              </a:ext>
+            </a:extLst>
+          </p:cNvPr>
+          <p:cNvGrpSpPr/>
+          <p:nvPr/>
+        </p:nvGrpSpPr>
+        <p:grpSpPr>
+          <a:xfrm>
+            <a:off x="3083332" y="1885950"/>
+            <a:ext cx="7779399" cy="3117850"/>
+            <a:chOff x="3083332" y="1885950"/>
+            <a:chExt cx="7779399" cy="3117850"/>
+          </a:xfrm>
+        </p:grpSpPr>
+        <p:sp>
+          <p:nvSpPr>
+            <p:cNvPr id="3" name="矩形 2">
+              <a:extLst>
+                <a:ext uri="{FF2B5EF4-FFF2-40B4-BE49-F238E27FC236}">
+                  <a16:creationId xmlns:a16="http://schemas.microsoft.com/office/drawing/2014/main" id="{3CFF0416-91C9-3113-3F82-B8DEFB0837FF}"/>
+                </a:ext>
+              </a:extLst>
+            </p:cNvPr>
+            <p:cNvSpPr/>
+            <p:nvPr/>
+          </p:nvSpPr>
+          <p:spPr>
+            <a:xfrm>
+              <a:off x="3827039" y="3152146"/>
+              <a:ext cx="1832397" cy="646241"/>
+            </a:xfrm>
+            <a:prstGeom prst="rect">
+              <a:avLst/>
+            </a:prstGeom>
+            <a:solidFill>
+              <a:srgbClr val="E8A5F3"/>
+            </a:solidFill>
+            <a:ln>
+              <a:solidFill>
+                <a:schemeClr val="tx1"/>
+              </a:solidFill>
+            </a:ln>
+          </p:spPr>
+          <p:style>
+            <a:lnRef idx="2">
+              <a:schemeClr val="accent1">
+                <a:shade val="15000"/>
+              </a:schemeClr>
+            </a:lnRef>
+            <a:fillRef idx="1">
+              <a:schemeClr val="accent1"/>
+            </a:fillRef>
+            <a:effectRef idx="0">
+              <a:schemeClr val="accent1"/>
+            </a:effectRef>
+            <a:fontRef idx="minor">
+              <a:schemeClr val="lt1"/>
+            </a:fontRef>
+          </p:style>
+          <p:txBody>
+            <a:bodyPr rtlCol="0" anchor="ctr"/>
+            <a:lstStyle/>
+            <a:p>
+              <a:pPr algn="ctr"/>
+              <a:r>
+                <a:rPr lang="en-US" altLang="zh-CN" dirty="0">
+                  <a:solidFill>
+                    <a:schemeClr val="tx1"/>
+                  </a:solidFill>
+                  <a:latin typeface="Times New Roman" panose="02020603050405020304" pitchFamily="18" charset="0"/>
+                  <a:cs typeface="Times New Roman" panose="02020603050405020304" pitchFamily="18" charset="0"/>
+                </a:rPr>
+                <a:t>YAG</a:t>
+              </a:r>
+            </a:p>
+          </p:txBody>
+        </p:sp>
+        <p:cxnSp>
+          <p:nvCxnSpPr>
+            <p:cNvPr id="6" name="直接连接符 5">
+              <a:extLst>
+                <a:ext uri="{FF2B5EF4-FFF2-40B4-BE49-F238E27FC236}">
+                  <a16:creationId xmlns:a16="http://schemas.microsoft.com/office/drawing/2014/main" id="{4A6DC64C-689F-DB44-DD3F-6D6E07BF8671}"/>
+                </a:ext>
+              </a:extLst>
+            </p:cNvPr>
+            <p:cNvCxnSpPr/>
+            <p:nvPr/>
+          </p:nvCxnSpPr>
+          <p:spPr>
+            <a:xfrm>
+              <a:off x="6203950" y="1885950"/>
+              <a:ext cx="0" cy="1308100"/>
+            </a:xfrm>
+            <a:prstGeom prst="line">
+              <a:avLst/>
+            </a:prstGeom>
+            <a:ln w="12700">
+              <a:solidFill>
+                <a:schemeClr val="tx1"/>
+              </a:solidFill>
+              <a:tailEnd type="none"/>
+            </a:ln>
+          </p:spPr>
+          <p:style>
+            <a:lnRef idx="1">
+              <a:schemeClr val="accent1"/>
+            </a:lnRef>
+            <a:fillRef idx="0">
+              <a:schemeClr val="accent1"/>
+            </a:fillRef>
+            <a:effectRef idx="0">
+              <a:schemeClr val="accent1"/>
+            </a:effectRef>
+            <a:fontRef idx="minor">
+              <a:schemeClr val="tx1"/>
+            </a:fontRef>
+          </p:style>
+        </p:cxnSp>
+        <p:cxnSp>
+          <p:nvCxnSpPr>
+            <p:cNvPr id="7" name="直接连接符 6">
+              <a:extLst>
+                <a:ext uri="{FF2B5EF4-FFF2-40B4-BE49-F238E27FC236}">
+                  <a16:creationId xmlns:a16="http://schemas.microsoft.com/office/drawing/2014/main" id="{88960829-BE1C-2FBE-14AE-530BB35B607D}"/>
+                </a:ext>
+              </a:extLst>
+            </p:cNvPr>
+            <p:cNvCxnSpPr/>
+            <p:nvPr/>
+          </p:nvCxnSpPr>
+          <p:spPr>
+            <a:xfrm>
+              <a:off x="6203950" y="3695700"/>
+              <a:ext cx="0" cy="1308100"/>
+            </a:xfrm>
+            <a:prstGeom prst="line">
+              <a:avLst/>
+            </a:prstGeom>
+            <a:ln w="12700">
+              <a:solidFill>
+                <a:schemeClr val="tx1"/>
+              </a:solidFill>
+              <a:tailEnd type="none"/>
+            </a:ln>
+          </p:spPr>
+          <p:style>
+            <a:lnRef idx="1">
+              <a:schemeClr val="accent1"/>
+            </a:lnRef>
+            <a:fillRef idx="0">
+              <a:schemeClr val="accent1"/>
+            </a:fillRef>
+            <a:effectRef idx="0">
+              <a:schemeClr val="accent1"/>
+            </a:effectRef>
+            <a:fontRef idx="minor">
+              <a:schemeClr val="tx1"/>
+            </a:fontRef>
+          </p:style>
+        </p:cxnSp>
+        <p:sp>
+          <p:nvSpPr>
+            <p:cNvPr id="8" name="矩形 7">
+              <a:extLst>
+                <a:ext uri="{FF2B5EF4-FFF2-40B4-BE49-F238E27FC236}">
+                  <a16:creationId xmlns:a16="http://schemas.microsoft.com/office/drawing/2014/main" id="{4C4E7758-8302-42C2-9132-46E3BFFD45F2}"/>
+                </a:ext>
+              </a:extLst>
+            </p:cNvPr>
+            <p:cNvSpPr/>
+            <p:nvPr/>
+          </p:nvSpPr>
+          <p:spPr>
+            <a:xfrm>
+              <a:off x="6864350" y="4406899"/>
+              <a:ext cx="2080047" cy="541723"/>
+            </a:xfrm>
+            <a:prstGeom prst="rect">
+              <a:avLst/>
+            </a:prstGeom>
+            <a:solidFill>
+              <a:schemeClr val="bg2"/>
+            </a:solidFill>
+            <a:ln>
+              <a:solidFill>
+                <a:schemeClr val="tx1"/>
+              </a:solidFill>
+            </a:ln>
+          </p:spPr>
+          <p:style>
+            <a:lnRef idx="2">
+              <a:schemeClr val="accent1">
+                <a:shade val="15000"/>
+              </a:schemeClr>
+            </a:lnRef>
+            <a:fillRef idx="1">
+              <a:schemeClr val="accent1"/>
+            </a:fillRef>
+            <a:effectRef idx="0">
+              <a:schemeClr val="accent1"/>
+            </a:effectRef>
+            <a:fontRef idx="minor">
+              <a:schemeClr val="lt1"/>
+            </a:fontRef>
+          </p:style>
+          <p:txBody>
+            <a:bodyPr rtlCol="0" anchor="ctr"/>
+            <a:lstStyle/>
+            <a:p>
+              <a:pPr algn="ctr"/>
+              <a:r>
+                <a:rPr lang="zh-CN" altLang="en-US" dirty="0">
+                  <a:solidFill>
+                    <a:schemeClr val="tx1"/>
+                  </a:solidFill>
+                  <a:latin typeface="宋体" panose="02010600030101010101" pitchFamily="2" charset="-122"/>
+                  <a:ea typeface="宋体" panose="02010600030101010101" pitchFamily="2" charset="-122"/>
+                  <a:cs typeface="Times New Roman" panose="02020603050405020304" pitchFamily="18" charset="0"/>
+                </a:rPr>
+                <a:t>超声波发生器</a:t>
+              </a:r>
+              <a:endParaRPr lang="en-US" altLang="zh-CN" dirty="0">
+                <a:solidFill>
+                  <a:schemeClr val="tx1"/>
+                </a:solidFill>
+                <a:latin typeface="宋体" panose="02010600030101010101" pitchFamily="2" charset="-122"/>
+                <a:ea typeface="宋体" panose="02010600030101010101" pitchFamily="2" charset="-122"/>
+                <a:cs typeface="Times New Roman" panose="02020603050405020304" pitchFamily="18" charset="0"/>
+              </a:endParaRPr>
+            </a:p>
+          </p:txBody>
+        </p:sp>
+        <p:sp>
+          <p:nvSpPr>
+            <p:cNvPr id="9" name="矩形 8">
+              <a:extLst>
+                <a:ext uri="{FF2B5EF4-FFF2-40B4-BE49-F238E27FC236}">
+                  <a16:creationId xmlns:a16="http://schemas.microsoft.com/office/drawing/2014/main" id="{4B0A314E-BCC4-7898-326D-A2614A0DC5F5}"/>
+                </a:ext>
+              </a:extLst>
+            </p:cNvPr>
+            <p:cNvSpPr/>
+            <p:nvPr/>
+          </p:nvSpPr>
+          <p:spPr>
+            <a:xfrm>
+              <a:off x="7408863" y="2444133"/>
+              <a:ext cx="991020" cy="1962766"/>
+            </a:xfrm>
+            <a:prstGeom prst="rect">
+              <a:avLst/>
+            </a:prstGeom>
+            <a:solidFill>
+              <a:schemeClr val="accent6">
+                <a:lumMod val="20000"/>
+                <a:lumOff val="80000"/>
+              </a:schemeClr>
+            </a:solidFill>
+            <a:ln>
+              <a:solidFill>
+                <a:schemeClr val="tx1"/>
+              </a:solidFill>
+            </a:ln>
+          </p:spPr>
+          <p:style>
+            <a:lnRef idx="2">
+              <a:schemeClr val="accent1">
+                <a:shade val="15000"/>
+              </a:schemeClr>
+            </a:lnRef>
+            <a:fillRef idx="1">
+              <a:schemeClr val="accent1"/>
+            </a:fillRef>
+            <a:effectRef idx="0">
+              <a:schemeClr val="accent1"/>
+            </a:effectRef>
+            <a:fontRef idx="minor">
+              <a:schemeClr val="lt1"/>
+            </a:fontRef>
+          </p:style>
+          <p:txBody>
+            <a:bodyPr rtlCol="0" anchor="ctr"/>
+            <a:lstStyle/>
+            <a:p>
+              <a:pPr algn="ctr"/>
+              <a:r>
+                <a:rPr lang="zh-CN" altLang="en-US" dirty="0">
+                  <a:solidFill>
+                    <a:schemeClr val="tx1"/>
+                  </a:solidFill>
+                  <a:latin typeface="宋体" panose="02010600030101010101" pitchFamily="2" charset="-122"/>
+                  <a:ea typeface="宋体" panose="02010600030101010101" pitchFamily="2" charset="-122"/>
+                  <a:cs typeface="Times New Roman" panose="02020603050405020304" pitchFamily="18" charset="0"/>
+                </a:rPr>
+                <a:t>声</a:t>
+              </a:r>
+              <a:endParaRPr lang="en-US" altLang="zh-CN" dirty="0">
+                <a:solidFill>
+                  <a:schemeClr val="tx1"/>
+                </a:solidFill>
+                <a:latin typeface="宋体" panose="02010600030101010101" pitchFamily="2" charset="-122"/>
+                <a:ea typeface="宋体" panose="02010600030101010101" pitchFamily="2" charset="-122"/>
+                <a:cs typeface="Times New Roman" panose="02020603050405020304" pitchFamily="18" charset="0"/>
+              </a:endParaRPr>
+            </a:p>
+            <a:p>
+              <a:pPr algn="ctr"/>
+              <a:r>
+                <a:rPr lang="zh-CN" altLang="en-US" dirty="0">
+                  <a:solidFill>
+                    <a:schemeClr val="tx1"/>
+                  </a:solidFill>
+                  <a:latin typeface="宋体" panose="02010600030101010101" pitchFamily="2" charset="-122"/>
+                  <a:ea typeface="宋体" panose="02010600030101010101" pitchFamily="2" charset="-122"/>
+                  <a:cs typeface="Times New Roman" panose="02020603050405020304" pitchFamily="18" charset="0"/>
+                </a:rPr>
+                <a:t>光</a:t>
+              </a:r>
+              <a:endParaRPr lang="en-US" altLang="zh-CN" dirty="0">
+                <a:solidFill>
+                  <a:schemeClr val="tx1"/>
+                </a:solidFill>
+                <a:latin typeface="宋体" panose="02010600030101010101" pitchFamily="2" charset="-122"/>
+                <a:ea typeface="宋体" panose="02010600030101010101" pitchFamily="2" charset="-122"/>
+                <a:cs typeface="Times New Roman" panose="02020603050405020304" pitchFamily="18" charset="0"/>
+              </a:endParaRPr>
+            </a:p>
+            <a:p>
+              <a:pPr algn="ctr"/>
+              <a:r>
+                <a:rPr lang="zh-CN" altLang="en-US" dirty="0">
+                  <a:solidFill>
+                    <a:schemeClr val="tx1"/>
+                  </a:solidFill>
+                  <a:latin typeface="宋体" panose="02010600030101010101" pitchFamily="2" charset="-122"/>
+                  <a:ea typeface="宋体" panose="02010600030101010101" pitchFamily="2" charset="-122"/>
+                  <a:cs typeface="Times New Roman" panose="02020603050405020304" pitchFamily="18" charset="0"/>
+                </a:rPr>
+                <a:t>晶</a:t>
+              </a:r>
+              <a:endParaRPr lang="en-US" altLang="zh-CN" dirty="0">
+                <a:solidFill>
+                  <a:schemeClr val="tx1"/>
+                </a:solidFill>
+                <a:latin typeface="宋体" panose="02010600030101010101" pitchFamily="2" charset="-122"/>
+                <a:ea typeface="宋体" panose="02010600030101010101" pitchFamily="2" charset="-122"/>
+                <a:cs typeface="Times New Roman" panose="02020603050405020304" pitchFamily="18" charset="0"/>
+              </a:endParaRPr>
+            </a:p>
+            <a:p>
+              <a:pPr algn="ctr"/>
+              <a:r>
+                <a:rPr lang="zh-CN" altLang="en-US" dirty="0">
+                  <a:solidFill>
+                    <a:schemeClr val="tx1"/>
+                  </a:solidFill>
+                  <a:latin typeface="宋体" panose="02010600030101010101" pitchFamily="2" charset="-122"/>
+                  <a:ea typeface="宋体" panose="02010600030101010101" pitchFamily="2" charset="-122"/>
+                  <a:cs typeface="Times New Roman" panose="02020603050405020304" pitchFamily="18" charset="0"/>
+                </a:rPr>
+                <a:t>体</a:t>
+              </a:r>
+              <a:endParaRPr lang="en-US" altLang="zh-CN" dirty="0">
+                <a:solidFill>
+                  <a:schemeClr val="tx1"/>
+                </a:solidFill>
+                <a:latin typeface="宋体" panose="02010600030101010101" pitchFamily="2" charset="-122"/>
+                <a:ea typeface="宋体" panose="02010600030101010101" pitchFamily="2" charset="-122"/>
+                <a:cs typeface="Times New Roman" panose="02020603050405020304" pitchFamily="18" charset="0"/>
+              </a:endParaRPr>
+            </a:p>
+          </p:txBody>
+        </p:sp>
+        <p:sp>
+          <p:nvSpPr>
+            <p:cNvPr id="10" name="矩形 9">
+              <a:extLst>
+                <a:ext uri="{FF2B5EF4-FFF2-40B4-BE49-F238E27FC236}">
+                  <a16:creationId xmlns:a16="http://schemas.microsoft.com/office/drawing/2014/main" id="{1601849E-F553-70E6-9B4B-10604D86710A}"/>
+                </a:ext>
+              </a:extLst>
+            </p:cNvPr>
+            <p:cNvSpPr/>
+            <p:nvPr/>
+          </p:nvSpPr>
+          <p:spPr>
+            <a:xfrm>
+              <a:off x="7097923" y="2189732"/>
+              <a:ext cx="1612900" cy="254401"/>
+            </a:xfrm>
+            <a:prstGeom prst="rect">
+              <a:avLst/>
+            </a:prstGeom>
+            <a:solidFill>
+              <a:schemeClr val="accent4">
+                <a:lumMod val="40000"/>
+                <a:lumOff val="60000"/>
+              </a:schemeClr>
+            </a:solidFill>
+            <a:ln>
+              <a:solidFill>
+                <a:schemeClr val="tx1"/>
+              </a:solidFill>
+            </a:ln>
+          </p:spPr>
+          <p:style>
+            <a:lnRef idx="2">
+              <a:schemeClr val="accent1">
+                <a:shade val="15000"/>
+              </a:schemeClr>
+            </a:lnRef>
+            <a:fillRef idx="1">
+              <a:schemeClr val="accent1"/>
+            </a:fillRef>
+            <a:effectRef idx="0">
+              <a:schemeClr val="accent1"/>
+            </a:effectRef>
+            <a:fontRef idx="minor">
+              <a:schemeClr val="lt1"/>
+            </a:fontRef>
+          </p:style>
+          <p:txBody>
+            <a:bodyPr rtlCol="0" anchor="ctr"/>
+            <a:lstStyle/>
+            <a:p>
+              <a:pPr algn="ctr"/>
+              <a:endParaRPr lang="en-US" altLang="zh-CN" dirty="0">
+                <a:solidFill>
+                  <a:schemeClr val="tx1"/>
+                </a:solidFill>
+                <a:latin typeface="宋体" panose="02010600030101010101" pitchFamily="2" charset="-122"/>
+                <a:ea typeface="宋体" panose="02010600030101010101" pitchFamily="2" charset="-122"/>
+                <a:cs typeface="Times New Roman" panose="02020603050405020304" pitchFamily="18" charset="0"/>
+              </a:endParaRPr>
+            </a:p>
+          </p:txBody>
+        </p:sp>
+        <p:sp>
+          <p:nvSpPr>
+            <p:cNvPr id="13" name="任意多边形: 形状 12">
+              <a:extLst>
+                <a:ext uri="{FF2B5EF4-FFF2-40B4-BE49-F238E27FC236}">
+                  <a16:creationId xmlns:a16="http://schemas.microsoft.com/office/drawing/2014/main" id="{3DD48445-6B53-3468-8B8D-03FB64179045}"/>
+                </a:ext>
+              </a:extLst>
+            </p:cNvPr>
+            <p:cNvSpPr/>
+            <p:nvPr/>
+          </p:nvSpPr>
+          <p:spPr>
+            <a:xfrm rot="10800000">
+              <a:off x="9950117" y="2543636"/>
+              <a:ext cx="743707" cy="1863263"/>
+            </a:xfrm>
+            <a:custGeom>
+              <a:avLst/>
+              <a:gdLst>
+                <a:gd name="csX0" fmla="*/ 0 w 803935"/>
+                <a:gd name="csY0" fmla="*/ 0 h 2436355"/>
+                <a:gd name="csX1" fmla="*/ 803935 w 803935"/>
+                <a:gd name="csY1" fmla="*/ 0 h 2436355"/>
+                <a:gd name="csX2" fmla="*/ 803935 w 803935"/>
+                <a:gd name="csY2" fmla="*/ 12471 h 2436355"/>
+                <a:gd name="csX3" fmla="*/ 749556 w 803935"/>
+                <a:gd name="csY3" fmla="*/ 24749 h 2436355"/>
+                <a:gd name="csX4" fmla="*/ 315282 w 803935"/>
+                <a:gd name="csY4" fmla="*/ 1218178 h 2436355"/>
+                <a:gd name="csX5" fmla="*/ 749556 w 803935"/>
+                <a:gd name="csY5" fmla="*/ 2411607 h 2436355"/>
+                <a:gd name="csX6" fmla="*/ 803935 w 803935"/>
+                <a:gd name="csY6" fmla="*/ 2423885 h 2436355"/>
+                <a:gd name="csX7" fmla="*/ 803935 w 803935"/>
+                <a:gd name="csY7" fmla="*/ 2436355 h 2436355"/>
+                <a:gd name="csX8" fmla="*/ 0 w 803935"/>
+                <a:gd name="csY8" fmla="*/ 2436355 h 2436355"/>
+              </a:gdLst>
+              <a:ahLst/>
+              <a:cxnLst>
+                <a:cxn ang="0">
+                  <a:pos x="csX0" y="csY0"/>
+                </a:cxn>
+                <a:cxn ang="0">
+                  <a:pos x="csX1" y="csY1"/>
+                </a:cxn>
+                <a:cxn ang="0">
+                  <a:pos x="csX2" y="csY2"/>
+                </a:cxn>
+                <a:cxn ang="0">
+                  <a:pos x="csX3" y="csY3"/>
+                </a:cxn>
+                <a:cxn ang="0">
+                  <a:pos x="csX4" y="csY4"/>
+                </a:cxn>
+                <a:cxn ang="0">
+                  <a:pos x="csX5" y="csY5"/>
+                </a:cxn>
+                <a:cxn ang="0">
+                  <a:pos x="csX6" y="csY6"/>
+                </a:cxn>
+                <a:cxn ang="0">
+                  <a:pos x="csX7" y="csY7"/>
+                </a:cxn>
+                <a:cxn ang="0">
+                  <a:pos x="csX8" y="csY8"/>
+                </a:cxn>
+              </a:cxnLst>
+              <a:rect l="l" t="t" r="r" b="b"/>
+              <a:pathLst>
+                <a:path w="803935" h="2436355">
+                  <a:moveTo>
+                    <a:pt x="0" y="0"/>
+                  </a:moveTo>
+                  <a:lnTo>
+                    <a:pt x="803935" y="0"/>
+                  </a:lnTo>
+                  <a:lnTo>
+                    <a:pt x="803935" y="12471"/>
+                  </a:lnTo>
+                  <a:lnTo>
+                    <a:pt x="749556" y="24749"/>
+                  </a:lnTo>
+                  <a:cubicBezTo>
+                    <a:pt x="501716" y="138340"/>
+                    <a:pt x="315282" y="629495"/>
+                    <a:pt x="315282" y="1218178"/>
+                  </a:cubicBezTo>
+                  <a:cubicBezTo>
+                    <a:pt x="315282" y="1806862"/>
+                    <a:pt x="501716" y="2298017"/>
+                    <a:pt x="749556" y="2411607"/>
+                  </a:cubicBezTo>
+                  <a:lnTo>
+                    <a:pt x="803935" y="2423885"/>
+                  </a:lnTo>
+                  <a:lnTo>
+                    <a:pt x="803935" y="2436355"/>
+                  </a:lnTo>
+                  <a:lnTo>
+                    <a:pt x="0" y="2436355"/>
+                  </a:lnTo>
+                  <a:close/>
+                </a:path>
+              </a:pathLst>
+            </a:custGeom>
+            <a:solidFill>
+              <a:schemeClr val="accent5">
+                <a:lumMod val="20000"/>
+                <a:lumOff val="80000"/>
+              </a:schemeClr>
+            </a:solidFill>
+          </p:spPr>
+          <p:style>
+            <a:lnRef idx="2">
+              <a:schemeClr val="accent5">
+                <a:shade val="15000"/>
+              </a:schemeClr>
+            </a:lnRef>
+            <a:fillRef idx="1">
+              <a:schemeClr val="accent5"/>
+            </a:fillRef>
+            <a:effectRef idx="0">
+              <a:schemeClr val="accent5"/>
+            </a:effectRef>
+            <a:fontRef idx="minor">
+              <a:schemeClr val="lt1"/>
+            </a:fontRef>
+          </p:style>
+          <p:txBody>
+            <a:bodyPr wrap="square" rtlCol="0" anchor="ctr">
+              <a:noAutofit/>
+            </a:bodyPr>
+            <a:lstStyle/>
+            <a:p>
+              <a:pPr algn="ctr"/>
+              <a:endParaRPr lang="zh-CN" altLang="en-US" u="sng"/>
+            </a:p>
+          </p:txBody>
+        </p:sp>
+        <p:sp>
+          <p:nvSpPr>
+            <p:cNvPr id="14" name="任意多边形: 形状 13">
+              <a:extLst>
+                <a:ext uri="{FF2B5EF4-FFF2-40B4-BE49-F238E27FC236}">
+                  <a16:creationId xmlns:a16="http://schemas.microsoft.com/office/drawing/2014/main" id="{5ECD735B-AEF0-F8F1-8B62-85D2C6B4ABFA}"/>
+                </a:ext>
+              </a:extLst>
+            </p:cNvPr>
+            <p:cNvSpPr/>
+            <p:nvPr/>
+          </p:nvSpPr>
+          <p:spPr>
+            <a:xfrm>
+              <a:off x="3083332" y="2543636"/>
+              <a:ext cx="743707" cy="1863263"/>
+            </a:xfrm>
+            <a:custGeom>
+              <a:avLst/>
+              <a:gdLst>
+                <a:gd name="csX0" fmla="*/ 0 w 803935"/>
+                <a:gd name="csY0" fmla="*/ 0 h 2436355"/>
+                <a:gd name="csX1" fmla="*/ 803935 w 803935"/>
+                <a:gd name="csY1" fmla="*/ 0 h 2436355"/>
+                <a:gd name="csX2" fmla="*/ 803935 w 803935"/>
+                <a:gd name="csY2" fmla="*/ 12471 h 2436355"/>
+                <a:gd name="csX3" fmla="*/ 749556 w 803935"/>
+                <a:gd name="csY3" fmla="*/ 24749 h 2436355"/>
+                <a:gd name="csX4" fmla="*/ 315282 w 803935"/>
+                <a:gd name="csY4" fmla="*/ 1218178 h 2436355"/>
+                <a:gd name="csX5" fmla="*/ 749556 w 803935"/>
+                <a:gd name="csY5" fmla="*/ 2411607 h 2436355"/>
+                <a:gd name="csX6" fmla="*/ 803935 w 803935"/>
+                <a:gd name="csY6" fmla="*/ 2423885 h 2436355"/>
+                <a:gd name="csX7" fmla="*/ 803935 w 803935"/>
+                <a:gd name="csY7" fmla="*/ 2436355 h 2436355"/>
+                <a:gd name="csX8" fmla="*/ 0 w 803935"/>
+                <a:gd name="csY8" fmla="*/ 2436355 h 2436355"/>
+              </a:gdLst>
+              <a:ahLst/>
+              <a:cxnLst>
+                <a:cxn ang="0">
+                  <a:pos x="csX0" y="csY0"/>
+                </a:cxn>
+                <a:cxn ang="0">
+                  <a:pos x="csX1" y="csY1"/>
+                </a:cxn>
+                <a:cxn ang="0">
+                  <a:pos x="csX2" y="csY2"/>
+                </a:cxn>
+                <a:cxn ang="0">
+                  <a:pos x="csX3" y="csY3"/>
+                </a:cxn>
+                <a:cxn ang="0">
+                  <a:pos x="csX4" y="csY4"/>
+                </a:cxn>
+                <a:cxn ang="0">
+                  <a:pos x="csX5" y="csY5"/>
+                </a:cxn>
+                <a:cxn ang="0">
+                  <a:pos x="csX6" y="csY6"/>
+                </a:cxn>
+                <a:cxn ang="0">
+                  <a:pos x="csX7" y="csY7"/>
+                </a:cxn>
+                <a:cxn ang="0">
+                  <a:pos x="csX8" y="csY8"/>
+                </a:cxn>
+              </a:cxnLst>
+              <a:rect l="l" t="t" r="r" b="b"/>
+              <a:pathLst>
+                <a:path w="803935" h="2436355">
+                  <a:moveTo>
+                    <a:pt x="0" y="0"/>
+                  </a:moveTo>
+                  <a:lnTo>
+                    <a:pt x="803935" y="0"/>
+                  </a:lnTo>
+                  <a:lnTo>
+                    <a:pt x="803935" y="12471"/>
+                  </a:lnTo>
+                  <a:lnTo>
+                    <a:pt x="749556" y="24749"/>
+                  </a:lnTo>
+                  <a:cubicBezTo>
+                    <a:pt x="501716" y="138340"/>
+                    <a:pt x="315282" y="629495"/>
+                    <a:pt x="315282" y="1218178"/>
+                  </a:cubicBezTo>
+                  <a:cubicBezTo>
+                    <a:pt x="315282" y="1806862"/>
+                    <a:pt x="501716" y="2298017"/>
+                    <a:pt x="749556" y="2411607"/>
+                  </a:cubicBezTo>
+                  <a:lnTo>
+                    <a:pt x="803935" y="2423885"/>
+                  </a:lnTo>
+                  <a:lnTo>
+                    <a:pt x="803935" y="2436355"/>
+                  </a:lnTo>
+                  <a:lnTo>
+                    <a:pt x="0" y="2436355"/>
+                  </a:lnTo>
+                  <a:close/>
+                </a:path>
+              </a:pathLst>
+            </a:custGeom>
+            <a:solidFill>
+              <a:schemeClr val="accent5">
+                <a:lumMod val="20000"/>
+                <a:lumOff val="80000"/>
+              </a:schemeClr>
+            </a:solidFill>
+          </p:spPr>
+          <p:style>
+            <a:lnRef idx="2">
+              <a:schemeClr val="accent5">
+                <a:shade val="15000"/>
+              </a:schemeClr>
+            </a:lnRef>
+            <a:fillRef idx="1">
+              <a:schemeClr val="accent5"/>
+            </a:fillRef>
+            <a:effectRef idx="0">
+              <a:schemeClr val="accent5"/>
+            </a:effectRef>
+            <a:fontRef idx="minor">
+              <a:schemeClr val="lt1"/>
+            </a:fontRef>
+          </p:style>
+          <p:txBody>
+            <a:bodyPr wrap="square" rtlCol="0" anchor="ctr">
+              <a:noAutofit/>
+            </a:bodyPr>
+            <a:lstStyle/>
+            <a:p>
+              <a:pPr algn="ctr"/>
+              <a:endParaRPr lang="zh-CN" altLang="en-US" u="sng"/>
+            </a:p>
+          </p:txBody>
+        </p:sp>
+        <p:sp>
+          <p:nvSpPr>
+            <p:cNvPr id="15" name="文本框 14">
+              <a:extLst>
+                <a:ext uri="{FF2B5EF4-FFF2-40B4-BE49-F238E27FC236}">
+                  <a16:creationId xmlns:a16="http://schemas.microsoft.com/office/drawing/2014/main" id="{8719C092-4196-CAB9-5832-E0583D48FAF8}"/>
+                </a:ext>
+              </a:extLst>
+            </p:cNvPr>
+            <p:cNvSpPr txBox="1"/>
+            <p:nvPr/>
+          </p:nvSpPr>
+          <p:spPr>
+            <a:xfrm>
+              <a:off x="8881532" y="2074801"/>
+              <a:ext cx="1981199" cy="369332"/>
+            </a:xfrm>
+            <a:prstGeom prst="rect">
+              <a:avLst/>
+            </a:prstGeom>
+            <a:noFill/>
+          </p:spPr>
+          <p:txBody>
+            <a:bodyPr wrap="square" rtlCol="0">
+              <a:spAutoFit/>
+            </a:bodyPr>
+            <a:lstStyle/>
+            <a:p>
+              <a:r>
+                <a:rPr lang="zh-CN" altLang="en-US" dirty="0">
+                  <a:latin typeface="宋体" panose="02010600030101010101" pitchFamily="2" charset="-122"/>
+                  <a:ea typeface="宋体" panose="02010600030101010101" pitchFamily="2" charset="-122"/>
+                </a:rPr>
+                <a:t>声反射材料</a:t>
+              </a:r>
+            </a:p>
+          </p:txBody>
+        </p:sp>
+      </p:grpSp>
+    </p:spTree>
+    <p:extLst>
+      <p:ext uri="{BB962C8B-B14F-4D97-AF65-F5344CB8AC3E}">
+        <p14:creationId xmlns:p14="http://schemas.microsoft.com/office/powerpoint/2010/main" val="2181734245"/>
       </p:ext>
     </p:extLst>
   </p:cSld>
@@ -10114,6 +15172,358 @@
       </a:bgFillStyleLst>
     </a:fmtScheme>
   </a:themeElements>
+  <a:objectDefaults>
+    <a:spDef>
+      <a:spPr>
+        <a:ln w="12700">
+          <a:solidFill>
+            <a:schemeClr val="tx1"/>
+          </a:solidFill>
+          <a:tailEnd type="none"/>
+        </a:ln>
+      </a:spPr>
+      <a:bodyPr rtlCol="0" anchor="ctr"/>
+      <a:lstStyle>
+        <a:defPPr algn="ctr">
+          <a:defRPr/>
+        </a:defPPr>
+      </a:lstStyle>
+      <a:style>
+        <a:lnRef idx="1">
+          <a:schemeClr val="accent1"/>
+        </a:lnRef>
+        <a:fillRef idx="0">
+          <a:schemeClr val="accent1"/>
+        </a:fillRef>
+        <a:effectRef idx="0">
+          <a:schemeClr val="accent1"/>
+        </a:effectRef>
+        <a:fontRef idx="minor">
+          <a:schemeClr val="tx1"/>
+        </a:fontRef>
+      </a:style>
+    </a:spDef>
+    <a:lnDef>
+      <a:spPr>
+        <a:ln w="12700">
+          <a:solidFill>
+            <a:schemeClr val="tx1"/>
+          </a:solidFill>
+          <a:tailEnd type="none"/>
+        </a:ln>
+      </a:spPr>
+      <a:bodyPr/>
+      <a:lstStyle/>
+      <a:style>
+        <a:lnRef idx="1">
+          <a:schemeClr val="accent1"/>
+        </a:lnRef>
+        <a:fillRef idx="0">
+          <a:schemeClr val="accent1"/>
+        </a:fillRef>
+        <a:effectRef idx="0">
+          <a:schemeClr val="accent1"/>
+        </a:effectRef>
+        <a:fontRef idx="minor">
+          <a:schemeClr val="tx1"/>
+        </a:fontRef>
+      </a:style>
+    </a:lnDef>
+  </a:objectDefaults>
+  <a:extraClrSchemeLst/>
+  <a:extLst>
+    <a:ext uri="{05A4C25C-085E-4340-85A3-A5531E510DB2}">
+      <thm15:themeFamily xmlns:thm15="http://schemas.microsoft.com/office/thememl/2012/main" name="Office Theme" id="{62F939B6-93AF-4DB8-9C6B-D6C7DFDC589F}" vid="{4A3C46E8-61CC-4603-A589-7422A47A8E4A}"/>
+    </a:ext>
+  </a:extLst>
+</a:theme>
+</file>
+
+<file path=ppt/theme/theme2.xml><?xml version="1.0" encoding="utf-8"?>
+<a:theme xmlns:a="http://schemas.openxmlformats.org/drawingml/2006/main" name="Office 主题​​">
+  <a:themeElements>
+    <a:clrScheme name="Office">
+      <a:dk1>
+        <a:sysClr val="windowText" lastClr="000000"/>
+      </a:dk1>
+      <a:lt1>
+        <a:sysClr val="window" lastClr="FFFFFF"/>
+      </a:lt1>
+      <a:dk2>
+        <a:srgbClr val="44546A"/>
+      </a:dk2>
+      <a:lt2>
+        <a:srgbClr val="E7E6E6"/>
+      </a:lt2>
+      <a:accent1>
+        <a:srgbClr val="4472C4"/>
+      </a:accent1>
+      <a:accent2>
+        <a:srgbClr val="ED7D31"/>
+      </a:accent2>
+      <a:accent3>
+        <a:srgbClr val="A5A5A5"/>
+      </a:accent3>
+      <a:accent4>
+        <a:srgbClr val="FFC000"/>
+      </a:accent4>
+      <a:accent5>
+        <a:srgbClr val="5B9BD5"/>
+      </a:accent5>
+      <a:accent6>
+        <a:srgbClr val="70AD47"/>
+      </a:accent6>
+      <a:hlink>
+        <a:srgbClr val="0563C1"/>
+      </a:hlink>
+      <a:folHlink>
+        <a:srgbClr val="954F72"/>
+      </a:folHlink>
+    </a:clrScheme>
+    <a:fontScheme name="Office">
+      <a:majorFont>
+        <a:latin typeface="等线 Light" panose="020F0302020204030204"/>
+        <a:ea typeface=""/>
+        <a:cs typeface=""/>
+        <a:font script="Jpan" typeface="游ゴシック Light"/>
+        <a:font script="Hang" typeface="맑은 고딕"/>
+        <a:font script="Hans" typeface="等线 Light"/>
+        <a:font script="Hant" typeface="新細明體"/>
+        <a:font script="Arab" typeface="Times New Roman"/>
+        <a:font script="Hebr" typeface="Times New Roman"/>
+        <a:font script="Thai" typeface="Angsana New"/>
+        <a:font script="Ethi" typeface="Nyala"/>
+        <a:font script="Beng" typeface="Vrinda"/>
+        <a:font script="Gujr" typeface="Shruti"/>
+        <a:font script="Khmr" typeface="MoolBoran"/>
+        <a:font script="Knda" typeface="Tunga"/>
+        <a:font script="Guru" typeface="Raavi"/>
+        <a:font script="Cans" typeface="Euphemia"/>
+        <a:font script="Cher" typeface="Plantagenet Cherokee"/>
+        <a:font script="Yiii" typeface="Microsoft Yi Baiti"/>
+        <a:font script="Tibt" typeface="Microsoft Himalaya"/>
+        <a:font script="Thaa" typeface="MV Boli"/>
+        <a:font script="Deva" typeface="Mangal"/>
+        <a:font script="Telu" typeface="Gautami"/>
+        <a:font script="Taml" typeface="Latha"/>
+        <a:font script="Syrc" typeface="Estrangelo Edessa"/>
+        <a:font script="Orya" typeface="Kalinga"/>
+        <a:font script="Mlym" typeface="Kartika"/>
+        <a:font script="Laoo" typeface="DokChampa"/>
+        <a:font script="Sinh" typeface="Iskoola Pota"/>
+        <a:font script="Mong" typeface="Mongolian Baiti"/>
+        <a:font script="Viet" typeface="Times New Roman"/>
+        <a:font script="Uigh" typeface="Microsoft Uighur"/>
+        <a:font script="Geor" typeface="Sylfaen"/>
+        <a:font script="Armn" typeface="Arial"/>
+        <a:font script="Bugi" typeface="Leelawadee UI"/>
+        <a:font script="Bopo" typeface="Microsoft JhengHei"/>
+        <a:font script="Java" typeface="Javanese Text"/>
+        <a:font script="Lisu" typeface="Segoe UI"/>
+        <a:font script="Mymr" typeface="Myanmar Text"/>
+        <a:font script="Nkoo" typeface="Ebrima"/>
+        <a:font script="Olck" typeface="Nirmala UI"/>
+        <a:font script="Osma" typeface="Ebrima"/>
+        <a:font script="Phag" typeface="Phagspa"/>
+        <a:font script="Syrn" typeface="Estrangelo Edessa"/>
+        <a:font script="Syrj" typeface="Estrangelo Edessa"/>
+        <a:font script="Syre" typeface="Estrangelo Edessa"/>
+        <a:font script="Sora" typeface="Nirmala UI"/>
+        <a:font script="Tale" typeface="Microsoft Tai Le"/>
+        <a:font script="Talu" typeface="Microsoft New Tai Lue"/>
+        <a:font script="Tfng" typeface="Ebrima"/>
+      </a:majorFont>
+      <a:minorFont>
+        <a:latin typeface="等线" panose="020F0502020204030204"/>
+        <a:ea typeface=""/>
+        <a:cs typeface=""/>
+        <a:font script="Jpan" typeface="游ゴシック"/>
+        <a:font script="Hang" typeface="맑은 고딕"/>
+        <a:font script="Hans" typeface="等线"/>
+        <a:font script="Hant" typeface="新細明體"/>
+        <a:font script="Arab" typeface="Arial"/>
+        <a:font script="Hebr" typeface="Arial"/>
+        <a:font script="Thai" typeface="Cordia New"/>
+        <a:font script="Ethi" typeface="Nyala"/>
+        <a:font script="Beng" typeface="Vrinda"/>
+        <a:font script="Gujr" typeface="Shruti"/>
+        <a:font script="Khmr" typeface="DaunPenh"/>
+        <a:font script="Knda" typeface="Tunga"/>
+        <a:font script="Guru" typeface="Raavi"/>
+        <a:font script="Cans" typeface="Euphemia"/>
+        <a:font script="Cher" typeface="Plantagenet Cherokee"/>
+        <a:font script="Yiii" typeface="Microsoft Yi Baiti"/>
+        <a:font script="Tibt" typeface="Microsoft Himalaya"/>
+        <a:font script="Thaa" typeface="MV Boli"/>
+        <a:font script="Deva" typeface="Mangal"/>
+        <a:font script="Telu" typeface="Gautami"/>
+        <a:font script="Taml" typeface="Latha"/>
+        <a:font script="Syrc" typeface="Estrangelo Edessa"/>
+        <a:font script="Orya" typeface="Kalinga"/>
+        <a:font script="Mlym" typeface="Kartika"/>
+        <a:font script="Laoo" typeface="DokChampa"/>
+        <a:font script="Sinh" typeface="Iskoola Pota"/>
+        <a:font script="Mong" typeface="Mongolian Baiti"/>
+        <a:font script="Viet" typeface="Arial"/>
+        <a:font script="Uigh" typeface="Microsoft Uighur"/>
+        <a:font script="Geor" typeface="Sylfaen"/>
+        <a:font script="Armn" typeface="Arial"/>
+        <a:font script="Bugi" typeface="Leelawadee UI"/>
+        <a:font script="Bopo" typeface="Microsoft JhengHei"/>
+        <a:font script="Java" typeface="Javanese Text"/>
+        <a:font script="Lisu" typeface="Segoe UI"/>
+        <a:font script="Mymr" typeface="Myanmar Text"/>
+        <a:font script="Nkoo" typeface="Ebrima"/>
+        <a:font script="Olck" typeface="Nirmala UI"/>
+        <a:font script="Osma" typeface="Ebrima"/>
+        <a:font script="Phag" typeface="Phagspa"/>
+        <a:font script="Syrn" typeface="Estrangelo Edessa"/>
+        <a:font script="Syrj" typeface="Estrangelo Edessa"/>
+        <a:font script="Syre" typeface="Estrangelo Edessa"/>
+        <a:font script="Sora" typeface="Nirmala UI"/>
+        <a:font script="Tale" typeface="Microsoft Tai Le"/>
+        <a:font script="Talu" typeface="Microsoft New Tai Lue"/>
+        <a:font script="Tfng" typeface="Ebrima"/>
+      </a:minorFont>
+    </a:fontScheme>
+    <a:fmtScheme name="Office">
+      <a:fillStyleLst>
+        <a:solidFill>
+          <a:schemeClr val="phClr"/>
+        </a:solidFill>
+        <a:gradFill rotWithShape="1">
+          <a:gsLst>
+            <a:gs pos="0">
+              <a:schemeClr val="phClr">
+                <a:lumMod val="110000"/>
+                <a:satMod val="105000"/>
+                <a:tint val="67000"/>
+              </a:schemeClr>
+            </a:gs>
+            <a:gs pos="50000">
+              <a:schemeClr val="phClr">
+                <a:lumMod val="105000"/>
+                <a:satMod val="103000"/>
+                <a:tint val="73000"/>
+              </a:schemeClr>
+            </a:gs>
+            <a:gs pos="100000">
+              <a:schemeClr val="phClr">
+                <a:lumMod val="105000"/>
+                <a:satMod val="109000"/>
+                <a:tint val="81000"/>
+              </a:schemeClr>
+            </a:gs>
+          </a:gsLst>
+          <a:lin ang="5400000" scaled="0"/>
+        </a:gradFill>
+        <a:gradFill rotWithShape="1">
+          <a:gsLst>
+            <a:gs pos="0">
+              <a:schemeClr val="phClr">
+                <a:satMod val="103000"/>
+                <a:lumMod val="102000"/>
+                <a:tint val="94000"/>
+              </a:schemeClr>
+            </a:gs>
+            <a:gs pos="50000">
+              <a:schemeClr val="phClr">
+                <a:satMod val="110000"/>
+                <a:lumMod val="100000"/>
+                <a:shade val="100000"/>
+              </a:schemeClr>
+            </a:gs>
+            <a:gs pos="100000">
+              <a:schemeClr val="phClr">
+                <a:lumMod val="99000"/>
+                <a:satMod val="120000"/>
+                <a:shade val="78000"/>
+              </a:schemeClr>
+            </a:gs>
+          </a:gsLst>
+          <a:lin ang="5400000" scaled="0"/>
+        </a:gradFill>
+      </a:fillStyleLst>
+      <a:lnStyleLst>
+        <a:ln w="6350" cap="flat" cmpd="sng" algn="ctr">
+          <a:solidFill>
+            <a:schemeClr val="phClr"/>
+          </a:solidFill>
+          <a:prstDash val="solid"/>
+          <a:miter lim="800000"/>
+        </a:ln>
+        <a:ln w="12700" cap="flat" cmpd="sng" algn="ctr">
+          <a:solidFill>
+            <a:schemeClr val="phClr"/>
+          </a:solidFill>
+          <a:prstDash val="solid"/>
+          <a:miter lim="800000"/>
+        </a:ln>
+        <a:ln w="19050" cap="flat" cmpd="sng" algn="ctr">
+          <a:solidFill>
+            <a:schemeClr val="phClr"/>
+          </a:solidFill>
+          <a:prstDash val="solid"/>
+          <a:miter lim="800000"/>
+        </a:ln>
+      </a:lnStyleLst>
+      <a:effectStyleLst>
+        <a:effectStyle>
+          <a:effectLst/>
+        </a:effectStyle>
+        <a:effectStyle>
+          <a:effectLst/>
+        </a:effectStyle>
+        <a:effectStyle>
+          <a:effectLst>
+            <a:outerShdw blurRad="57150" dist="19050" dir="5400000" algn="ctr" rotWithShape="0">
+              <a:srgbClr val="000000">
+                <a:alpha val="63000"/>
+              </a:srgbClr>
+            </a:outerShdw>
+          </a:effectLst>
+        </a:effectStyle>
+      </a:effectStyleLst>
+      <a:bgFillStyleLst>
+        <a:solidFill>
+          <a:schemeClr val="phClr"/>
+        </a:solidFill>
+        <a:solidFill>
+          <a:schemeClr val="phClr">
+            <a:tint val="95000"/>
+            <a:satMod val="170000"/>
+          </a:schemeClr>
+        </a:solidFill>
+        <a:gradFill rotWithShape="1">
+          <a:gsLst>
+            <a:gs pos="0">
+              <a:schemeClr val="phClr">
+                <a:tint val="93000"/>
+                <a:satMod val="150000"/>
+                <a:shade val="98000"/>
+                <a:lumMod val="102000"/>
+              </a:schemeClr>
+            </a:gs>
+            <a:gs pos="50000">
+              <a:schemeClr val="phClr">
+                <a:tint val="98000"/>
+                <a:satMod val="130000"/>
+                <a:shade val="90000"/>
+                <a:lumMod val="103000"/>
+              </a:schemeClr>
+            </a:gs>
+            <a:gs pos="100000">
+              <a:schemeClr val="phClr">
+                <a:shade val="63000"/>
+                <a:satMod val="120000"/>
+              </a:schemeClr>
+            </a:gs>
+          </a:gsLst>
+          <a:lin ang="5400000" scaled="0"/>
+        </a:gradFill>
+      </a:bgFillStyleLst>
+    </a:fmtScheme>
+  </a:themeElements>
   <a:objectDefaults/>
   <a:extraClrSchemeLst/>
   <a:extLst>
